--- a/report/slides.pptx
+++ b/report/slides.pptx
@@ -851,7 +851,7 @@
   <p:cSld>
     <p:spTree>
       <p:nvGrpSpPr>
-        <p:cNvPr id="215" name="Shape 215"/>
+        <p:cNvPr id="227" name="Shape 227"/>
         <p:cNvGrpSpPr/>
         <p:nvPr/>
       </p:nvGrpSpPr>
@@ -865,7 +865,7 @@
       </p:grpSpPr>
       <p:sp>
         <p:nvSpPr>
-          <p:cNvPr id="216" name="Google Shape;216;g3f4c31c5764_0_17:notes"/>
+          <p:cNvPr id="228" name="Google Shape;228;g3f4c31c5764_0_17:notes"/>
           <p:cNvSpPr/>
           <p:nvPr>
             <p:ph idx="2" type="sldImg"/>
@@ -900,7 +900,7 @@
       </p:sp>
       <p:sp>
         <p:nvSpPr>
-          <p:cNvPr id="217" name="Google Shape;217;g3f4c31c5764_0_17:notes"/>
+          <p:cNvPr id="229" name="Google Shape;229;g3f4c31c5764_0_17:notes"/>
           <p:cNvSpPr txBox="1"/>
           <p:nvPr>
             <p:ph idx="1" type="body"/>
@@ -1098,7 +1098,7 @@
   <p:cSld>
     <p:spTree>
       <p:nvGrpSpPr>
-        <p:cNvPr id="232" name="Shape 232"/>
+        <p:cNvPr id="246" name="Shape 246"/>
         <p:cNvGrpSpPr/>
         <p:nvPr/>
       </p:nvGrpSpPr>
@@ -1112,7 +1112,7 @@
       </p:grpSpPr>
       <p:sp>
         <p:nvSpPr>
-          <p:cNvPr id="233" name="Google Shape;233;g3fb5d9673d8_0_31:notes"/>
+          <p:cNvPr id="247" name="Google Shape;247;g3fb5d9673d8_0_31:notes"/>
           <p:cNvSpPr/>
           <p:nvPr>
             <p:ph idx="2" type="sldImg"/>
@@ -1147,7 +1147,7 @@
       </p:sp>
       <p:sp>
         <p:nvSpPr>
-          <p:cNvPr id="234" name="Google Shape;234;g3fb5d9673d8_0_31:notes"/>
+          <p:cNvPr id="248" name="Google Shape;248;g3fb5d9673d8_0_31:notes"/>
           <p:cNvSpPr txBox="1"/>
           <p:nvPr>
             <p:ph idx="1" type="body"/>
@@ -1321,7 +1321,7 @@
   <p:cSld>
     <p:spTree>
       <p:nvGrpSpPr>
-        <p:cNvPr id="249" name="Shape 249"/>
+        <p:cNvPr id="265" name="Shape 265"/>
         <p:cNvGrpSpPr/>
         <p:nvPr/>
       </p:nvGrpSpPr>
@@ -1335,7 +1335,7 @@
       </p:grpSpPr>
       <p:sp>
         <p:nvSpPr>
-          <p:cNvPr id="250" name="Google Shape;250;g3fb5d9673d8_0_48:notes"/>
+          <p:cNvPr id="266" name="Google Shape;266;g3fb5d9673d8_0_48:notes"/>
           <p:cNvSpPr/>
           <p:nvPr>
             <p:ph idx="2" type="sldImg"/>
@@ -1370,7 +1370,7 @@
       </p:sp>
       <p:sp>
         <p:nvSpPr>
-          <p:cNvPr id="251" name="Google Shape;251;g3fb5d9673d8_0_48:notes"/>
+          <p:cNvPr id="267" name="Google Shape;267;g3fb5d9673d8_0_48:notes"/>
           <p:cNvSpPr txBox="1"/>
           <p:nvPr>
             <p:ph idx="1" type="body"/>
@@ -1572,7 +1572,7 @@
   <p:cSld>
     <p:spTree>
       <p:nvGrpSpPr>
-        <p:cNvPr id="266" name="Shape 266"/>
+        <p:cNvPr id="285" name="Shape 285"/>
         <p:cNvGrpSpPr/>
         <p:nvPr/>
       </p:nvGrpSpPr>
@@ -1586,7 +1586,7 @@
       </p:grpSpPr>
       <p:sp>
         <p:nvSpPr>
-          <p:cNvPr id="267" name="Google Shape;267;g3f4abb14d47_0_152:notes"/>
+          <p:cNvPr id="286" name="Google Shape;286;g3f4abb14d47_0_152:notes"/>
           <p:cNvSpPr/>
           <p:nvPr>
             <p:ph idx="2" type="sldImg"/>
@@ -1621,7 +1621,7 @@
       </p:sp>
       <p:sp>
         <p:nvSpPr>
-          <p:cNvPr id="268" name="Google Shape;268;g3f4abb14d47_0_152:notes"/>
+          <p:cNvPr id="287" name="Google Shape;287;g3f4abb14d47_0_152:notes"/>
           <p:cNvSpPr txBox="1"/>
           <p:nvPr>
             <p:ph idx="1" type="body"/>
@@ -1789,7 +1789,7 @@
   <p:cSld>
     <p:spTree>
       <p:nvGrpSpPr>
-        <p:cNvPr id="283" name="Shape 283"/>
+        <p:cNvPr id="305" name="Shape 305"/>
         <p:cNvGrpSpPr/>
         <p:nvPr/>
       </p:nvGrpSpPr>
@@ -1803,7 +1803,7 @@
       </p:grpSpPr>
       <p:sp>
         <p:nvSpPr>
-          <p:cNvPr id="284" name="Google Shape;284;g3fb5d9673d8_0_77:notes"/>
+          <p:cNvPr id="306" name="Google Shape;306;g3fb5d9673d8_0_77:notes"/>
           <p:cNvSpPr/>
           <p:nvPr>
             <p:ph idx="2" type="sldImg"/>
@@ -1838,7 +1838,7 @@
       </p:sp>
       <p:sp>
         <p:nvSpPr>
-          <p:cNvPr id="285" name="Google Shape;285;g3fb5d9673d8_0_77:notes"/>
+          <p:cNvPr id="307" name="Google Shape;307;g3fb5d9673d8_0_77:notes"/>
           <p:cNvSpPr txBox="1"/>
           <p:nvPr>
             <p:ph idx="1" type="body"/>
@@ -1916,7 +1916,7 @@
   <p:cSld>
     <p:spTree>
       <p:nvGrpSpPr>
-        <p:cNvPr id="300" name="Shape 300"/>
+        <p:cNvPr id="322" name="Shape 322"/>
         <p:cNvGrpSpPr/>
         <p:nvPr/>
       </p:nvGrpSpPr>
@@ -1930,7 +1930,7 @@
       </p:grpSpPr>
       <p:sp>
         <p:nvSpPr>
-          <p:cNvPr id="301" name="Google Shape;301;g3f4c31c5764_0_22:notes"/>
+          <p:cNvPr id="323" name="Google Shape;323;g3f4c31c5764_0_22:notes"/>
           <p:cNvSpPr/>
           <p:nvPr>
             <p:ph idx="2" type="sldImg"/>
@@ -1965,7 +1965,7 @@
       </p:sp>
       <p:sp>
         <p:nvSpPr>
-          <p:cNvPr id="302" name="Google Shape;302;g3f4c31c5764_0_22:notes"/>
+          <p:cNvPr id="324" name="Google Shape;324;g3f4c31c5764_0_22:notes"/>
           <p:cNvSpPr txBox="1"/>
           <p:nvPr>
             <p:ph idx="1" type="body"/>
@@ -2175,7 +2175,7 @@
   <p:cSld>
     <p:spTree>
       <p:nvGrpSpPr>
-        <p:cNvPr id="85" name="Shape 85"/>
+        <p:cNvPr id="86" name="Shape 86"/>
         <p:cNvGrpSpPr/>
         <p:nvPr/>
       </p:nvGrpSpPr>
@@ -2189,7 +2189,7 @@
       </p:grpSpPr>
       <p:sp>
         <p:nvSpPr>
-          <p:cNvPr id="86" name="Google Shape;86;g3f4abb14d47_0_11:notes"/>
+          <p:cNvPr id="87" name="Google Shape;87;g3f4abb14d47_0_11:notes"/>
           <p:cNvSpPr/>
           <p:nvPr>
             <p:ph idx="2" type="sldImg"/>
@@ -2224,7 +2224,7 @@
       </p:sp>
       <p:sp>
         <p:nvSpPr>
-          <p:cNvPr id="87" name="Google Shape;87;g3f4abb14d47_0_11:notes"/>
+          <p:cNvPr id="88" name="Google Shape;88;g3f4abb14d47_0_11:notes"/>
           <p:cNvSpPr txBox="1"/>
           <p:nvPr>
             <p:ph idx="1" type="body"/>
@@ -2326,7 +2326,7 @@
   <p:cSld>
     <p:spTree>
       <p:nvGrpSpPr>
-        <p:cNvPr id="107" name="Shape 107"/>
+        <p:cNvPr id="109" name="Shape 109"/>
         <p:cNvGrpSpPr/>
         <p:nvPr/>
       </p:nvGrpSpPr>
@@ -2340,7 +2340,7 @@
       </p:grpSpPr>
       <p:sp>
         <p:nvSpPr>
-          <p:cNvPr id="108" name="Google Shape;108;g3f4abb14d47_0_74:notes"/>
+          <p:cNvPr id="110" name="Google Shape;110;g3f4abb14d47_0_74:notes"/>
           <p:cNvSpPr/>
           <p:nvPr>
             <p:ph idx="2" type="sldImg"/>
@@ -2375,7 +2375,7 @@
       </p:sp>
       <p:sp>
         <p:nvSpPr>
-          <p:cNvPr id="109" name="Google Shape;109;g3f4abb14d47_0_74:notes"/>
+          <p:cNvPr id="111" name="Google Shape;111;g3f4abb14d47_0_74:notes"/>
           <p:cNvSpPr txBox="1"/>
           <p:nvPr>
             <p:ph idx="1" type="body"/>
@@ -2403,6 +2403,45 @@
               <a:spcAft>
                 <a:spcPts val="0"/>
               </a:spcAft>
+              <a:buNone/>
+            </a:pPr>
+            <a:r>
+              <a:rPr lang="en"/>
+              <a:t>Before I talk about the adversarial training steps, I would like to clarify that PGD, which stands for Projected Gradient Descent, means </a:t>
+            </a:r>
+            <a:r>
+              <a:rPr lang="en"/>
+              <a:t>repeatedly</a:t>
+            </a:r>
+            <a:r>
+              <a:rPr lang="en"/>
+              <a:t> updates an image to increase the model’s loss while enforcing a perturbation limit. The main difference between PGD and FGSM is that …</a:t>
+            </a:r>
+            <a:endParaRPr/>
+          </a:p>
+          <a:p>
+            <a:pPr indent="0" lvl="0" marL="0" rtl="0" algn="l">
+              <a:spcBef>
+                <a:spcPts val="0"/>
+              </a:spcBef>
+              <a:spcAft>
+                <a:spcPts val="0"/>
+              </a:spcAft>
+              <a:buNone/>
+            </a:pPr>
+            <a:r>
+              <a:t/>
+            </a:r>
+            <a:endParaRPr/>
+          </a:p>
+          <a:p>
+            <a:pPr indent="0" lvl="0" marL="0" rtl="0" algn="l">
+              <a:spcBef>
+                <a:spcPts val="0"/>
+              </a:spcBef>
+              <a:spcAft>
+                <a:spcPts val="0"/>
+              </a:spcAft>
               <a:buClr>
                 <a:schemeClr val="dk1"/>
               </a:buClr>
@@ -2412,7 +2451,7 @@
             </a:pPr>
             <a:r>
               <a:rPr lang="en"/>
-              <a:t>PGD takes several steps, recalculating the gradient as the image changes. After each step, it brings the perturbation back within the allowed limit.</a:t>
+              <a:t>First, we add a random perturbation within the allowed budget. Then we take a gradient step that increases the model’s loss and project the result back within the constraints.</a:t>
             </a:r>
             <a:endParaRPr/>
           </a:p>
@@ -2433,7 +2472,7 @@
             </a:pPr>
             <a:r>
               <a:rPr lang="en"/>
-              <a:t>That limit matters because the attack should change the input only within the rules we set.</a:t>
+              <a:t>We repeat those two steps ten times. During that attack-generation loop, the model’s weights stay fixed.</a:t>
             </a:r>
             <a:endParaRPr/>
           </a:p>
@@ -2445,53 +2484,11 @@
               <a:spcAft>
                 <a:spcPts val="0"/>
               </a:spcAft>
-              <a:buClr>
-                <a:schemeClr val="dk1"/>
-              </a:buClr>
-              <a:buSzPts val="1100"/>
-              <a:buFont typeface="Arial"/>
               <a:buNone/>
             </a:pPr>
             <a:r>
               <a:rPr lang="en"/>
-              <a:t>Once we generate the attacked image, we train the model to classify it correctly using the original label. The attack tries to increase the loss, while the model update tries to reduce it.</a:t>
-            </a:r>
-            <a:endParaRPr/>
-          </a:p>
-          <a:p>
-            <a:pPr indent="0" lvl="0" marL="0" rtl="0" algn="l">
-              <a:spcBef>
-                <a:spcPts val="0"/>
-              </a:spcBef>
-              <a:spcAft>
-                <a:spcPts val="0"/>
-              </a:spcAft>
-              <a:buClr>
-                <a:schemeClr val="dk1"/>
-              </a:buClr>
-              <a:buSzPts val="1100"/>
-              <a:buFont typeface="Arial"/>
-              <a:buNone/>
-            </a:pPr>
-            <a:r>
-              <a:rPr lang="en"/>
-              <a:t>For my experiments, each training attack uses ten steps, which is why you’ll see the name PGD-10.</a:t>
-            </a:r>
-            <a:endParaRPr/>
-          </a:p>
-          <a:p>
-            <a:pPr indent="0" lvl="0" marL="0" rtl="0" algn="l">
-              <a:spcBef>
-                <a:spcPts val="0"/>
-              </a:spcBef>
-              <a:spcAft>
-                <a:spcPts val="0"/>
-              </a:spcAft>
-              <a:buNone/>
-            </a:pPr>
-            <a:r>
-              <a:rPr lang="en"/>
-              <a:t>This gives the model practice handling adversarial inputs. But continuing that training does not always keep improving its robustness.</a:t>
+              <a:t>Once we have the attacked image, we use its original label to update the model. So the attack changes the input to increase loss, and the training update changes the model’s weights to reduce it.</a:t>
             </a:r>
             <a:endParaRPr/>
           </a:p>
@@ -2510,7 +2507,7 @@
   <p:cSld>
     <p:spTree>
       <p:nvGrpSpPr>
-        <p:cNvPr id="124" name="Shape 124"/>
+        <p:cNvPr id="128" name="Shape 128"/>
         <p:cNvGrpSpPr/>
         <p:nvPr/>
       </p:nvGrpSpPr>
@@ -2524,7 +2521,7 @@
       </p:grpSpPr>
       <p:sp>
         <p:nvSpPr>
-          <p:cNvPr id="125" name="Google Shape;125;g3f4abb14d47_0_96:notes"/>
+          <p:cNvPr id="129" name="Google Shape;129;g3f4abb14d47_0_96:notes"/>
           <p:cNvSpPr/>
           <p:nvPr>
             <p:ph idx="2" type="sldImg"/>
@@ -2559,7 +2556,7 @@
       </p:sp>
       <p:sp>
         <p:nvSpPr>
-          <p:cNvPr id="126" name="Google Shape;126;g3f4abb14d47_0_96:notes"/>
+          <p:cNvPr id="130" name="Google Shape;130;g3f4abb14d47_0_96:notes"/>
           <p:cNvSpPr txBox="1"/>
           <p:nvPr>
             <p:ph idx="1" type="body"/>
@@ -2709,7 +2706,7 @@
   <p:cSld>
     <p:spTree>
       <p:nvGrpSpPr>
-        <p:cNvPr id="144" name="Shape 144"/>
+        <p:cNvPr id="149" name="Shape 149"/>
         <p:cNvGrpSpPr/>
         <p:nvPr/>
       </p:nvGrpSpPr>
@@ -2723,7 +2720,7 @@
       </p:grpSpPr>
       <p:sp>
         <p:nvSpPr>
-          <p:cNvPr id="145" name="Google Shape;145;g3f94b6fb872_0_0:notes"/>
+          <p:cNvPr id="150" name="Google Shape;150;g3f94b6fb872_0_0:notes"/>
           <p:cNvSpPr/>
           <p:nvPr>
             <p:ph idx="2" type="sldImg"/>
@@ -2758,7 +2755,7 @@
       </p:sp>
       <p:sp>
         <p:nvSpPr>
-          <p:cNvPr id="146" name="Google Shape;146;g3f94b6fb872_0_0:notes"/>
+          <p:cNvPr id="151" name="Google Shape;151;g3f94b6fb872_0_0:notes"/>
           <p:cNvSpPr txBox="1"/>
           <p:nvPr>
             <p:ph idx="1" type="body"/>
@@ -2932,7 +2929,7 @@
   <p:cSld>
     <p:spTree>
       <p:nvGrpSpPr>
-        <p:cNvPr id="162" name="Shape 162"/>
+        <p:cNvPr id="169" name="Shape 169"/>
         <p:cNvGrpSpPr/>
         <p:nvPr/>
       </p:nvGrpSpPr>
@@ -2946,7 +2943,7 @@
       </p:grpSpPr>
       <p:sp>
         <p:nvSpPr>
-          <p:cNvPr id="163" name="Google Shape;163;g3fb94eb41cd_0_23:notes"/>
+          <p:cNvPr id="170" name="Google Shape;170;g3fb94eb41cd_0_23:notes"/>
           <p:cNvSpPr/>
           <p:nvPr>
             <p:ph idx="2" type="sldImg"/>
@@ -2981,7 +2978,7 @@
       </p:sp>
       <p:sp>
         <p:nvSpPr>
-          <p:cNvPr id="164" name="Google Shape;164;g3fb94eb41cd_0_23:notes"/>
+          <p:cNvPr id="171" name="Google Shape;171;g3fb94eb41cd_0_23:notes"/>
           <p:cNvSpPr txBox="1"/>
           <p:nvPr>
             <p:ph idx="1" type="body"/>
@@ -3155,7 +3152,7 @@
   <p:cSld>
     <p:spTree>
       <p:nvGrpSpPr>
-        <p:cNvPr id="180" name="Shape 180"/>
+        <p:cNvPr id="189" name="Shape 189"/>
         <p:cNvGrpSpPr/>
         <p:nvPr/>
       </p:nvGrpSpPr>
@@ -3169,7 +3166,7 @@
       </p:grpSpPr>
       <p:sp>
         <p:nvSpPr>
-          <p:cNvPr id="181" name="Google Shape;181;g3fb94eb41cd_0_43:notes"/>
+          <p:cNvPr id="190" name="Google Shape;190;g3fb94eb41cd_0_43:notes"/>
           <p:cNvSpPr/>
           <p:nvPr>
             <p:ph idx="2" type="sldImg"/>
@@ -3204,7 +3201,7 @@
       </p:sp>
       <p:sp>
         <p:nvSpPr>
-          <p:cNvPr id="182" name="Google Shape;182;g3fb94eb41cd_0_43:notes"/>
+          <p:cNvPr id="191" name="Google Shape;191;g3fb94eb41cd_0_43:notes"/>
           <p:cNvSpPr txBox="1"/>
           <p:nvPr>
             <p:ph idx="1" type="body"/>
@@ -3378,7 +3375,7 @@
   <p:cSld>
     <p:spTree>
       <p:nvGrpSpPr>
-        <p:cNvPr id="198" name="Shape 198"/>
+        <p:cNvPr id="208" name="Shape 208"/>
         <p:cNvGrpSpPr/>
         <p:nvPr/>
       </p:nvGrpSpPr>
@@ -3392,7 +3389,7 @@
       </p:grpSpPr>
       <p:sp>
         <p:nvSpPr>
-          <p:cNvPr id="199" name="Google Shape;199;g3fb5d9673d8_0_14:notes"/>
+          <p:cNvPr id="209" name="Google Shape;209;g3fb5d9673d8_0_14:notes"/>
           <p:cNvSpPr/>
           <p:nvPr>
             <p:ph idx="2" type="sldImg"/>
@@ -3427,7 +3424,7 @@
       </p:sp>
       <p:sp>
         <p:nvSpPr>
-          <p:cNvPr id="200" name="Google Shape;200;g3fb5d9673d8_0_14:notes"/>
+          <p:cNvPr id="210" name="Google Shape;210;g3fb5d9673d8_0_14:notes"/>
           <p:cNvSpPr txBox="1"/>
           <p:nvPr>
             <p:ph idx="1" type="body"/>
@@ -9028,7 +9025,7 @@
   <p:cSld>
     <p:spTree>
       <p:nvGrpSpPr>
-        <p:cNvPr id="218" name="Shape 218"/>
+        <p:cNvPr id="230" name="Shape 230"/>
         <p:cNvGrpSpPr/>
         <p:nvPr/>
       </p:nvGrpSpPr>
@@ -9042,7 +9039,7 @@
       </p:grpSpPr>
       <p:grpSp>
         <p:nvGrpSpPr>
-          <p:cNvPr id="219" name="Google Shape;219;p22"/>
+          <p:cNvPr id="231" name="Google Shape;231;p22"/>
           <p:cNvGrpSpPr/>
           <p:nvPr/>
         </p:nvGrpSpPr>
@@ -9056,7 +9053,7 @@
         </p:grpSpPr>
         <p:sp>
           <p:nvSpPr>
-            <p:cNvPr id="220" name="Google Shape;220;p22"/>
+            <p:cNvPr id="232" name="Google Shape;232;p22"/>
             <p:cNvSpPr/>
             <p:nvPr/>
           </p:nvSpPr>
@@ -9125,7 +9122,7 @@
         </p:sp>
         <p:sp>
           <p:nvSpPr>
-            <p:cNvPr id="221" name="Google Shape;221;p22"/>
+            <p:cNvPr id="233" name="Google Shape;233;p22"/>
             <p:cNvSpPr/>
             <p:nvPr/>
           </p:nvSpPr>
@@ -9194,7 +9191,7 @@
         </p:sp>
         <p:sp>
           <p:nvSpPr>
-            <p:cNvPr id="222" name="Google Shape;222;p22"/>
+            <p:cNvPr id="234" name="Google Shape;234;p22"/>
             <p:cNvSpPr/>
             <p:nvPr/>
           </p:nvSpPr>
@@ -9263,7 +9260,7 @@
         </p:sp>
         <p:sp>
           <p:nvSpPr>
-            <p:cNvPr id="223" name="Google Shape;223;p22"/>
+            <p:cNvPr id="235" name="Google Shape;235;p22"/>
             <p:cNvSpPr/>
             <p:nvPr/>
           </p:nvSpPr>
@@ -9333,7 +9330,7 @@
       </p:grpSp>
       <p:grpSp>
         <p:nvGrpSpPr>
-          <p:cNvPr id="224" name="Google Shape;224;p22"/>
+          <p:cNvPr id="236" name="Google Shape;236;p22"/>
           <p:cNvGrpSpPr/>
           <p:nvPr/>
         </p:nvGrpSpPr>
@@ -9347,7 +9344,7 @@
         </p:grpSpPr>
         <p:sp>
           <p:nvSpPr>
-            <p:cNvPr id="225" name="Google Shape;225;p22"/>
+            <p:cNvPr id="237" name="Google Shape;237;p22"/>
             <p:cNvSpPr/>
             <p:nvPr/>
           </p:nvSpPr>
@@ -9416,7 +9413,7 @@
         </p:sp>
         <p:sp>
           <p:nvSpPr>
-            <p:cNvPr id="226" name="Google Shape;226;p22"/>
+            <p:cNvPr id="238" name="Google Shape;238;p22"/>
             <p:cNvSpPr/>
             <p:nvPr/>
           </p:nvSpPr>
@@ -9485,7 +9482,7 @@
         </p:sp>
         <p:sp>
           <p:nvSpPr>
-            <p:cNvPr id="227" name="Google Shape;227;p22"/>
+            <p:cNvPr id="239" name="Google Shape;239;p22"/>
             <p:cNvSpPr/>
             <p:nvPr/>
           </p:nvSpPr>
@@ -9554,7 +9551,7 @@
         </p:sp>
         <p:sp>
           <p:nvSpPr>
-            <p:cNvPr id="228" name="Google Shape;228;p22"/>
+            <p:cNvPr id="240" name="Google Shape;240;p22"/>
             <p:cNvSpPr/>
             <p:nvPr/>
           </p:nvSpPr>
@@ -9624,7 +9621,7 @@
       </p:grpSp>
       <p:pic>
         <p:nvPicPr>
-          <p:cNvPr id="229" name="Google Shape;229;p22" title="Screenshot 2026-09-14 at 11.29.54 PM.png"/>
+          <p:cNvPr id="241" name="Google Shape;241;p22" title="Screenshot 2026-09-14 at 11.29.54 PM.png"/>
           <p:cNvPicPr preferRelativeResize="0"/>
           <p:nvPr/>
         </p:nvPicPr>
@@ -9637,8 +9634,8 @@
         </p:blipFill>
         <p:spPr>
           <a:xfrm>
-            <a:off x="152400" y="1017725"/>
-            <a:ext cx="8839199" cy="3334775"/>
+            <a:off x="440750" y="944275"/>
+            <a:ext cx="8262502" cy="3117202"/>
           </a:xfrm>
           <a:prstGeom prst="rect">
             <a:avLst/>
@@ -9651,7 +9648,7 @@
       </p:pic>
       <p:sp>
         <p:nvSpPr>
-          <p:cNvPr id="230" name="Google Shape;230;p22"/>
+          <p:cNvPr id="242" name="Google Shape;242;p22"/>
           <p:cNvSpPr txBox="1"/>
           <p:nvPr>
             <p:ph type="title"/>
@@ -9684,7 +9681,7 @@
             </a:pPr>
             <a:r>
               <a:rPr lang="en" sz="2220"/>
-              <a:t>Low-Frequency Training Does Not Transfer to Pixel PGD</a:t>
+              <a:t>Low-Frequency-Only Training: Evaluation Results</a:t>
             </a:r>
             <a:endParaRPr sz="2220"/>
           </a:p>
@@ -9692,7 +9689,7 @@
       </p:sp>
       <p:pic>
         <p:nvPicPr>
-          <p:cNvPr id="231" name="Google Shape;231;p22"/>
+          <p:cNvPr id="243" name="Google Shape;243;p22"/>
           <p:cNvPicPr preferRelativeResize="0"/>
           <p:nvPr/>
         </p:nvPicPr>
@@ -9717,6 +9714,93 @@
           </a:ln>
         </p:spPr>
       </p:pic>
+      <p:cxnSp>
+        <p:nvCxnSpPr>
+          <p:cNvPr id="244" name="Google Shape;244;p22"/>
+          <p:cNvCxnSpPr/>
+          <p:nvPr/>
+        </p:nvCxnSpPr>
+        <p:spPr>
+          <a:xfrm>
+            <a:off x="395850" y="4270775"/>
+            <a:ext cx="714300" cy="0"/>
+          </a:xfrm>
+          <a:prstGeom prst="straightConnector1">
+            <a:avLst/>
+          </a:prstGeom>
+          <a:noFill/>
+          <a:ln cap="flat" cmpd="sng" w="38100">
+            <a:solidFill>
+              <a:schemeClr val="dk2"/>
+            </a:solidFill>
+            <a:prstDash val="solid"/>
+            <a:round/>
+            <a:headEnd len="med" w="med" type="none"/>
+            <a:tailEnd len="med" w="med" type="none"/>
+          </a:ln>
+        </p:spPr>
+      </p:cxnSp>
+      <p:sp>
+        <p:nvSpPr>
+          <p:cNvPr id="245" name="Google Shape;245;p22"/>
+          <p:cNvSpPr txBox="1"/>
+          <p:nvPr/>
+        </p:nvSpPr>
+        <p:spPr>
+          <a:xfrm>
+            <a:off x="311700" y="4295538"/>
+            <a:ext cx="7113600" cy="384900"/>
+          </a:xfrm>
+          <a:prstGeom prst="rect">
+            <a:avLst/>
+          </a:prstGeom>
+          <a:noFill/>
+          <a:ln>
+            <a:noFill/>
+          </a:ln>
+        </p:spPr>
+        <p:txBody>
+          <a:bodyPr anchorCtr="0" anchor="t" bIns="91425" lIns="91425" spcFirstLastPara="1" rIns="91425" wrap="square" tIns="91425">
+            <a:spAutoFit/>
+          </a:bodyPr>
+          <a:lstStyle/>
+          <a:p>
+            <a:pPr indent="0" lvl="0" marL="0" rtl="0" algn="l">
+              <a:lnSpc>
+                <a:spcPct val="115000"/>
+              </a:lnSpc>
+              <a:spcBef>
+                <a:spcPts val="0"/>
+              </a:spcBef>
+              <a:spcAft>
+                <a:spcPts val="1200"/>
+              </a:spcAft>
+              <a:buNone/>
+            </a:pPr>
+            <a:r>
+              <a:rPr b="1" lang="en" sz="1300">
+                <a:solidFill>
+                  <a:schemeClr val="dk2"/>
+                </a:solidFill>
+              </a:rPr>
+              <a:t>Result: </a:t>
+            </a:r>
+            <a:r>
+              <a:rPr lang="en" sz="1300">
+                <a:solidFill>
+                  <a:schemeClr val="dk2"/>
+                </a:solidFill>
+              </a:rPr>
+              <a:t>Low-frequency training does not transfer to pixel PGD.</a:t>
+            </a:r>
+            <a:endParaRPr b="1" sz="1300">
+              <a:solidFill>
+                <a:schemeClr val="dk2"/>
+              </a:solidFill>
+            </a:endParaRPr>
+          </a:p>
+        </p:txBody>
+      </p:sp>
     </p:spTree>
   </p:cSld>
   <p:clrMapOvr>
@@ -9730,7 +9814,7 @@
   <p:cSld>
     <p:spTree>
       <p:nvGrpSpPr>
-        <p:cNvPr id="235" name="Shape 235"/>
+        <p:cNvPr id="249" name="Shape 249"/>
         <p:cNvGrpSpPr/>
         <p:nvPr/>
       </p:nvGrpSpPr>
@@ -9744,7 +9828,7 @@
       </p:grpSpPr>
       <p:grpSp>
         <p:nvGrpSpPr>
-          <p:cNvPr id="236" name="Google Shape;236;p23"/>
+          <p:cNvPr id="250" name="Google Shape;250;p23"/>
           <p:cNvGrpSpPr/>
           <p:nvPr/>
         </p:nvGrpSpPr>
@@ -9758,7 +9842,7 @@
         </p:grpSpPr>
         <p:sp>
           <p:nvSpPr>
-            <p:cNvPr id="237" name="Google Shape;237;p23"/>
+            <p:cNvPr id="251" name="Google Shape;251;p23"/>
             <p:cNvSpPr/>
             <p:nvPr/>
           </p:nvSpPr>
@@ -9827,7 +9911,7 @@
         </p:sp>
         <p:sp>
           <p:nvSpPr>
-            <p:cNvPr id="238" name="Google Shape;238;p23"/>
+            <p:cNvPr id="252" name="Google Shape;252;p23"/>
             <p:cNvSpPr/>
             <p:nvPr/>
           </p:nvSpPr>
@@ -9896,7 +9980,7 @@
         </p:sp>
         <p:sp>
           <p:nvSpPr>
-            <p:cNvPr id="239" name="Google Shape;239;p23"/>
+            <p:cNvPr id="253" name="Google Shape;253;p23"/>
             <p:cNvSpPr/>
             <p:nvPr/>
           </p:nvSpPr>
@@ -9965,7 +10049,7 @@
         </p:sp>
         <p:sp>
           <p:nvSpPr>
-            <p:cNvPr id="240" name="Google Shape;240;p23"/>
+            <p:cNvPr id="254" name="Google Shape;254;p23"/>
             <p:cNvSpPr/>
             <p:nvPr/>
           </p:nvSpPr>
@@ -10035,7 +10119,7 @@
       </p:grpSp>
       <p:grpSp>
         <p:nvGrpSpPr>
-          <p:cNvPr id="241" name="Google Shape;241;p23"/>
+          <p:cNvPr id="255" name="Google Shape;255;p23"/>
           <p:cNvGrpSpPr/>
           <p:nvPr/>
         </p:nvGrpSpPr>
@@ -10049,7 +10133,7 @@
         </p:grpSpPr>
         <p:sp>
           <p:nvSpPr>
-            <p:cNvPr id="242" name="Google Shape;242;p23"/>
+            <p:cNvPr id="256" name="Google Shape;256;p23"/>
             <p:cNvSpPr/>
             <p:nvPr/>
           </p:nvSpPr>
@@ -10118,7 +10202,7 @@
         </p:sp>
         <p:sp>
           <p:nvSpPr>
-            <p:cNvPr id="243" name="Google Shape;243;p23"/>
+            <p:cNvPr id="257" name="Google Shape;257;p23"/>
             <p:cNvSpPr/>
             <p:nvPr/>
           </p:nvSpPr>
@@ -10187,7 +10271,7 @@
         </p:sp>
         <p:sp>
           <p:nvSpPr>
-            <p:cNvPr id="244" name="Google Shape;244;p23"/>
+            <p:cNvPr id="258" name="Google Shape;258;p23"/>
             <p:cNvSpPr/>
             <p:nvPr/>
           </p:nvSpPr>
@@ -10256,7 +10340,7 @@
         </p:sp>
         <p:sp>
           <p:nvSpPr>
-            <p:cNvPr id="245" name="Google Shape;245;p23"/>
+            <p:cNvPr id="259" name="Google Shape;259;p23"/>
             <p:cNvSpPr/>
             <p:nvPr/>
           </p:nvSpPr>
@@ -10326,7 +10410,7 @@
       </p:grpSp>
       <p:pic>
         <p:nvPicPr>
-          <p:cNvPr id="246" name="Google Shape;246;p23" title="Screenshot 2026-09-14 at 11.30.13 PM.png"/>
+          <p:cNvPr id="260" name="Google Shape;260;p23" title="Screenshot 2026-09-14 at 11.30.13 PM.png"/>
           <p:cNvPicPr preferRelativeResize="0"/>
           <p:nvPr/>
         </p:nvPicPr>
@@ -10334,13 +10418,13 @@
           <a:blip r:embed="rId3">
             <a:alphaModFix/>
           </a:blip>
-          <a:srcRect b="0" l="0" r="0" t="5820"/>
+          <a:srcRect b="0" l="130" r="229" t="10023"/>
           <a:stretch/>
         </p:blipFill>
         <p:spPr>
           <a:xfrm>
-            <a:off x="152400" y="951750"/>
-            <a:ext cx="8839199" cy="3357450"/>
+            <a:off x="448775" y="968213"/>
+            <a:ext cx="8246451" cy="3003012"/>
           </a:xfrm>
           <a:prstGeom prst="rect">
             <a:avLst/>
@@ -10353,7 +10437,7 @@
       </p:pic>
       <p:sp>
         <p:nvSpPr>
-          <p:cNvPr id="247" name="Google Shape;247;p23"/>
+          <p:cNvPr id="261" name="Google Shape;261;p23"/>
           <p:cNvSpPr txBox="1"/>
           <p:nvPr>
             <p:ph type="title"/>
@@ -10386,7 +10470,7 @@
             </a:pPr>
             <a:r>
               <a:rPr lang="en" sz="2220"/>
-              <a:t>Mixed-Domain Evaluation</a:t>
+              <a:t>Mixed-Domain Training: Evaluation Results</a:t>
             </a:r>
             <a:endParaRPr sz="2220"/>
           </a:p>
@@ -10394,7 +10478,7 @@
       </p:sp>
       <p:pic>
         <p:nvPicPr>
-          <p:cNvPr id="248" name="Google Shape;248;p23"/>
+          <p:cNvPr id="262" name="Google Shape;262;p23"/>
           <p:cNvPicPr preferRelativeResize="0"/>
           <p:nvPr/>
         </p:nvPicPr>
@@ -10419,6 +10503,93 @@
           </a:ln>
         </p:spPr>
       </p:pic>
+      <p:cxnSp>
+        <p:nvCxnSpPr>
+          <p:cNvPr id="263" name="Google Shape;263;p23"/>
+          <p:cNvCxnSpPr/>
+          <p:nvPr/>
+        </p:nvCxnSpPr>
+        <p:spPr>
+          <a:xfrm>
+            <a:off x="395850" y="4087188"/>
+            <a:ext cx="714300" cy="0"/>
+          </a:xfrm>
+          <a:prstGeom prst="straightConnector1">
+            <a:avLst/>
+          </a:prstGeom>
+          <a:noFill/>
+          <a:ln cap="flat" cmpd="sng" w="38100">
+            <a:solidFill>
+              <a:schemeClr val="dk2"/>
+            </a:solidFill>
+            <a:prstDash val="solid"/>
+            <a:round/>
+            <a:headEnd len="med" w="med" type="none"/>
+            <a:tailEnd len="med" w="med" type="none"/>
+          </a:ln>
+        </p:spPr>
+      </p:cxnSp>
+      <p:sp>
+        <p:nvSpPr>
+          <p:cNvPr id="264" name="Google Shape;264;p23"/>
+          <p:cNvSpPr txBox="1"/>
+          <p:nvPr/>
+        </p:nvSpPr>
+        <p:spPr>
+          <a:xfrm>
+            <a:off x="311700" y="4111963"/>
+            <a:ext cx="7653600" cy="615000"/>
+          </a:xfrm>
+          <a:prstGeom prst="rect">
+            <a:avLst/>
+          </a:prstGeom>
+          <a:noFill/>
+          <a:ln>
+            <a:noFill/>
+          </a:ln>
+        </p:spPr>
+        <p:txBody>
+          <a:bodyPr anchorCtr="0" anchor="t" bIns="91425" lIns="91425" spcFirstLastPara="1" rIns="91425" wrap="square" tIns="91425">
+            <a:spAutoFit/>
+          </a:bodyPr>
+          <a:lstStyle/>
+          <a:p>
+            <a:pPr indent="0" lvl="0" marL="0" rtl="0" algn="l">
+              <a:lnSpc>
+                <a:spcPct val="115000"/>
+              </a:lnSpc>
+              <a:spcBef>
+                <a:spcPts val="0"/>
+              </a:spcBef>
+              <a:spcAft>
+                <a:spcPts val="1200"/>
+              </a:spcAft>
+              <a:buNone/>
+            </a:pPr>
+            <a:r>
+              <a:rPr b="1" lang="en" sz="1300">
+                <a:solidFill>
+                  <a:schemeClr val="dk2"/>
+                </a:solidFill>
+              </a:rPr>
+              <a:t>Result: </a:t>
+            </a:r>
+            <a:r>
+              <a:rPr lang="en" sz="1300">
+                <a:solidFill>
+                  <a:schemeClr val="dk2"/>
+                </a:solidFill>
+              </a:rPr>
+              <a:t>Pixel and joint accuracy fluctuate across checkpoints. The peak-to-final decline also reflects changes in the training attack.</a:t>
+            </a:r>
+            <a:endParaRPr b="1" sz="1300">
+              <a:solidFill>
+                <a:schemeClr val="dk2"/>
+              </a:solidFill>
+            </a:endParaRPr>
+          </a:p>
+        </p:txBody>
+      </p:sp>
     </p:spTree>
   </p:cSld>
   <p:clrMapOvr>
@@ -10432,7 +10603,7 @@
   <p:cSld>
     <p:spTree>
       <p:nvGrpSpPr>
-        <p:cNvPr id="252" name="Shape 252"/>
+        <p:cNvPr id="268" name="Shape 268"/>
         <p:cNvGrpSpPr/>
         <p:nvPr/>
       </p:nvGrpSpPr>
@@ -10446,7 +10617,7 @@
       </p:grpSpPr>
       <p:grpSp>
         <p:nvGrpSpPr>
-          <p:cNvPr id="253" name="Google Shape;253;p24"/>
+          <p:cNvPr id="269" name="Google Shape;269;p24"/>
           <p:cNvGrpSpPr/>
           <p:nvPr/>
         </p:nvGrpSpPr>
@@ -10460,7 +10631,7 @@
         </p:grpSpPr>
         <p:sp>
           <p:nvSpPr>
-            <p:cNvPr id="254" name="Google Shape;254;p24"/>
+            <p:cNvPr id="270" name="Google Shape;270;p24"/>
             <p:cNvSpPr/>
             <p:nvPr/>
           </p:nvSpPr>
@@ -10529,7 +10700,7 @@
         </p:sp>
         <p:sp>
           <p:nvSpPr>
-            <p:cNvPr id="255" name="Google Shape;255;p24"/>
+            <p:cNvPr id="271" name="Google Shape;271;p24"/>
             <p:cNvSpPr/>
             <p:nvPr/>
           </p:nvSpPr>
@@ -10598,7 +10769,7 @@
         </p:sp>
         <p:sp>
           <p:nvSpPr>
-            <p:cNvPr id="256" name="Google Shape;256;p24"/>
+            <p:cNvPr id="272" name="Google Shape;272;p24"/>
             <p:cNvSpPr/>
             <p:nvPr/>
           </p:nvSpPr>
@@ -10667,7 +10838,7 @@
         </p:sp>
         <p:sp>
           <p:nvSpPr>
-            <p:cNvPr id="257" name="Google Shape;257;p24"/>
+            <p:cNvPr id="273" name="Google Shape;273;p24"/>
             <p:cNvSpPr/>
             <p:nvPr/>
           </p:nvSpPr>
@@ -10737,7 +10908,7 @@
       </p:grpSp>
       <p:grpSp>
         <p:nvGrpSpPr>
-          <p:cNvPr id="258" name="Google Shape;258;p24"/>
+          <p:cNvPr id="274" name="Google Shape;274;p24"/>
           <p:cNvGrpSpPr/>
           <p:nvPr/>
         </p:nvGrpSpPr>
@@ -10751,7 +10922,7 @@
         </p:grpSpPr>
         <p:sp>
           <p:nvSpPr>
-            <p:cNvPr id="259" name="Google Shape;259;p24"/>
+            <p:cNvPr id="275" name="Google Shape;275;p24"/>
             <p:cNvSpPr/>
             <p:nvPr/>
           </p:nvSpPr>
@@ -10820,7 +10991,7 @@
         </p:sp>
         <p:sp>
           <p:nvSpPr>
-            <p:cNvPr id="260" name="Google Shape;260;p24"/>
+            <p:cNvPr id="276" name="Google Shape;276;p24"/>
             <p:cNvSpPr/>
             <p:nvPr/>
           </p:nvSpPr>
@@ -10889,7 +11060,7 @@
         </p:sp>
         <p:sp>
           <p:nvSpPr>
-            <p:cNvPr id="261" name="Google Shape;261;p24"/>
+            <p:cNvPr id="277" name="Google Shape;277;p24"/>
             <p:cNvSpPr/>
             <p:nvPr/>
           </p:nvSpPr>
@@ -10958,7 +11129,7 @@
         </p:sp>
         <p:sp>
           <p:nvSpPr>
-            <p:cNvPr id="262" name="Google Shape;262;p24"/>
+            <p:cNvPr id="278" name="Google Shape;278;p24"/>
             <p:cNvSpPr/>
             <p:nvPr/>
           </p:nvSpPr>
@@ -11028,7 +11199,7 @@
       </p:grpSp>
       <p:pic>
         <p:nvPicPr>
-          <p:cNvPr id="263" name="Google Shape;263;p24" title="Screenshot 2026-09-14 at 11.28.55 PM.png"/>
+          <p:cNvPr id="279" name="Google Shape;279;p24" title="Screenshot 2026-09-14 at 11.28.55 PM.png"/>
           <p:cNvPicPr preferRelativeResize="0"/>
           <p:nvPr/>
         </p:nvPicPr>
@@ -11036,13 +11207,13 @@
           <a:blip r:embed="rId3">
             <a:alphaModFix/>
           </a:blip>
-          <a:srcRect b="0" l="0" r="0" t="6033"/>
+          <a:srcRect b="49859" l="0" r="0" t="6034"/>
           <a:stretch/>
         </p:blipFill>
         <p:spPr>
           <a:xfrm>
-            <a:off x="1332825" y="972000"/>
-            <a:ext cx="6478351" cy="4086974"/>
+            <a:off x="292225" y="1058987"/>
+            <a:ext cx="8559549" cy="2534727"/>
           </a:xfrm>
           <a:prstGeom prst="rect">
             <a:avLst/>
@@ -11055,7 +11226,7 @@
       </p:pic>
       <p:sp>
         <p:nvSpPr>
-          <p:cNvPr id="264" name="Google Shape;264;p24"/>
+          <p:cNvPr id="280" name="Google Shape;280;p24"/>
           <p:cNvSpPr txBox="1"/>
           <p:nvPr>
             <p:ph type="title"/>
@@ -11088,7 +11259,7 @@
             </a:pPr>
             <a:r>
               <a:rPr lang="en" sz="2220"/>
-              <a:t>Robustness Tracks the Most Recent Training Attack</a:t>
+              <a:t>Mixed-Domain Training: Evaluation by Last Training Attack</a:t>
             </a:r>
             <a:endParaRPr sz="2220"/>
           </a:p>
@@ -11096,7 +11267,7 @@
       </p:sp>
       <p:pic>
         <p:nvPicPr>
-          <p:cNvPr id="265" name="Google Shape;265;p24"/>
+          <p:cNvPr id="281" name="Google Shape;281;p24"/>
           <p:cNvPicPr preferRelativeResize="0"/>
           <p:nvPr/>
         </p:nvPicPr>
@@ -11121,6 +11292,120 @@
           </a:ln>
         </p:spPr>
       </p:pic>
+      <p:pic>
+        <p:nvPicPr>
+          <p:cNvPr id="282" name="Google Shape;282;p24" title="Screenshot 2026-09-14 at 11.28.55 PM.png"/>
+          <p:cNvPicPr preferRelativeResize="0"/>
+          <p:nvPr/>
+        </p:nvPicPr>
+        <p:blipFill rotWithShape="1">
+          <a:blip r:embed="rId3">
+            <a:alphaModFix/>
+          </a:blip>
+          <a:srcRect b="707" l="32415" r="32531" t="97170"/>
+          <a:stretch/>
+        </p:blipFill>
+        <p:spPr>
+          <a:xfrm>
+            <a:off x="2891925" y="3876350"/>
+            <a:ext cx="3360148" cy="136599"/>
+          </a:xfrm>
+          <a:prstGeom prst="rect">
+            <a:avLst/>
+          </a:prstGeom>
+          <a:noFill/>
+          <a:ln>
+            <a:noFill/>
+          </a:ln>
+        </p:spPr>
+      </p:pic>
+      <p:cxnSp>
+        <p:nvCxnSpPr>
+          <p:cNvPr id="283" name="Google Shape;283;p24"/>
+          <p:cNvCxnSpPr/>
+          <p:nvPr/>
+        </p:nvCxnSpPr>
+        <p:spPr>
+          <a:xfrm>
+            <a:off x="395850" y="4087188"/>
+            <a:ext cx="714300" cy="0"/>
+          </a:xfrm>
+          <a:prstGeom prst="straightConnector1">
+            <a:avLst/>
+          </a:prstGeom>
+          <a:noFill/>
+          <a:ln cap="flat" cmpd="sng" w="38100">
+            <a:solidFill>
+              <a:schemeClr val="dk2"/>
+            </a:solidFill>
+            <a:prstDash val="solid"/>
+            <a:round/>
+            <a:headEnd len="med" w="med" type="none"/>
+            <a:tailEnd len="med" w="med" type="none"/>
+          </a:ln>
+        </p:spPr>
+      </p:cxnSp>
+      <p:sp>
+        <p:nvSpPr>
+          <p:cNvPr id="284" name="Google Shape;284;p24"/>
+          <p:cNvSpPr txBox="1"/>
+          <p:nvPr/>
+        </p:nvSpPr>
+        <p:spPr>
+          <a:xfrm>
+            <a:off x="311700" y="4111963"/>
+            <a:ext cx="7653600" cy="615000"/>
+          </a:xfrm>
+          <a:prstGeom prst="rect">
+            <a:avLst/>
+          </a:prstGeom>
+          <a:noFill/>
+          <a:ln>
+            <a:noFill/>
+          </a:ln>
+        </p:spPr>
+        <p:txBody>
+          <a:bodyPr anchorCtr="0" anchor="t" bIns="91425" lIns="91425" spcFirstLastPara="1" rIns="91425" wrap="square" tIns="91425">
+            <a:spAutoFit/>
+          </a:bodyPr>
+          <a:lstStyle/>
+          <a:p>
+            <a:pPr indent="0" lvl="0" marL="0" rtl="0" algn="l">
+              <a:lnSpc>
+                <a:spcPct val="115000"/>
+              </a:lnSpc>
+              <a:spcBef>
+                <a:spcPts val="0"/>
+              </a:spcBef>
+              <a:spcAft>
+                <a:spcPts val="1200"/>
+              </a:spcAft>
+              <a:buNone/>
+            </a:pPr>
+            <a:r>
+              <a:rPr b="1" lang="en" sz="1300">
+                <a:solidFill>
+                  <a:schemeClr val="dk2"/>
+                </a:solidFill>
+              </a:rPr>
+              <a:t>Result: </a:t>
+            </a:r>
+            <a:r>
+              <a:rPr lang="en" sz="1300">
+                <a:solidFill>
+                  <a:schemeClr val="dk2"/>
+                </a:solidFill>
+              </a:rPr>
+              <a:t>Pixel and joint accuracy fluctuate across checkpoints. The peak-to-final decline also reflects changes in the training attack.</a:t>
+            </a:r>
+            <a:endParaRPr b="1" sz="1300">
+              <a:solidFill>
+                <a:schemeClr val="dk2"/>
+              </a:solidFill>
+            </a:endParaRPr>
+          </a:p>
+        </p:txBody>
+      </p:sp>
     </p:spTree>
   </p:cSld>
   <p:clrMapOvr>
@@ -11134,7 +11419,7 @@
   <p:cSld>
     <p:spTree>
       <p:nvGrpSpPr>
-        <p:cNvPr id="269" name="Shape 269"/>
+        <p:cNvPr id="288" name="Shape 288"/>
         <p:cNvGrpSpPr/>
         <p:nvPr/>
       </p:nvGrpSpPr>
@@ -11148,7 +11433,7 @@
       </p:grpSpPr>
       <p:sp>
         <p:nvSpPr>
-          <p:cNvPr id="270" name="Google Shape;270;p25"/>
+          <p:cNvPr id="289" name="Google Shape;289;p25"/>
           <p:cNvSpPr txBox="1"/>
           <p:nvPr>
             <p:ph type="title"/>
@@ -11189,7 +11474,7 @@
       </p:sp>
       <p:sp>
         <p:nvSpPr>
-          <p:cNvPr id="271" name="Google Shape;271;p25"/>
+          <p:cNvPr id="290" name="Google Shape;290;p25"/>
           <p:cNvSpPr txBox="1"/>
           <p:nvPr>
             <p:ph idx="1" type="body"/>
@@ -11197,8 +11482,8 @@
         </p:nvSpPr>
         <p:spPr>
           <a:xfrm>
-            <a:off x="311700" y="1152475"/>
-            <a:ext cx="6305700" cy="3630900"/>
+            <a:off x="311700" y="1070050"/>
+            <a:ext cx="4593600" cy="3478200"/>
           </a:xfrm>
           <a:prstGeom prst="rect">
             <a:avLst/>
@@ -11220,10 +11505,10 @@
               <a:buNone/>
             </a:pPr>
             <a:r>
-              <a:rPr b="1" lang="en" sz="1300"/>
-              <a:t>Main findings</a:t>
+              <a:rPr b="1" lang="en" sz="1500"/>
+              <a:t>Main observations:</a:t>
             </a:r>
-            <a:endParaRPr b="1" sz="1300"/>
+            <a:endParaRPr b="1" sz="1500"/>
           </a:p>
           <a:p>
             <a:pPr indent="-311150" lvl="0" marL="457200" rtl="0" algn="l">
@@ -11272,7 +11557,15 @@
             </a:pPr>
             <a:r>
               <a:rPr lang="en" sz="1300"/>
-              <a:t>Epoch-wise mixing produced robustness strongly associated with the most recent training attack.</a:t>
+              <a:t>Mixed domain </a:t>
+            </a:r>
+            <a:r>
+              <a:rPr lang="en" sz="1300"/>
+              <a:t>training </a:t>
+            </a:r>
+            <a:r>
+              <a:rPr lang="en" sz="1300"/>
+              <a:t>produced robustness strongly associated with the most recent training attack.</a:t>
             </a:r>
             <a:endParaRPr sz="1300"/>
           </a:p>
@@ -11287,59 +11580,47 @@
               <a:buNone/>
             </a:pPr>
             <a:r>
-              <a:rPr b="1" lang="en" sz="1300"/>
-              <a:t>Scope</a:t>
-            </a:r>
-            <a:endParaRPr b="1" sz="1300"/>
-          </a:p>
-          <a:p>
-            <a:pPr indent="-311150" lvl="0" marL="457200" rtl="0" algn="l">
-              <a:spcBef>
-                <a:spcPts val="1000"/>
-              </a:spcBef>
-              <a:spcAft>
-                <a:spcPts val="0"/>
-              </a:spcAft>
-              <a:buSzPts val="1300"/>
-              <a:buAutoNum type="arabicPeriod"/>
-            </a:pPr>
-            <a:r>
-              <a:rPr lang="en" sz="1300"/>
-              <a:t>One dataset, one architecture, one frequency cutoff, and five seeds per condition. Finite-step attack results do not certify robustness or establish the underlying mechanism.</a:t>
+              <a:t/>
             </a:r>
             <a:endParaRPr sz="1300"/>
           </a:p>
           <a:p>
-            <a:pPr indent="-311150" lvl="0" marL="457200" rtl="0" algn="l">
-              <a:spcBef>
-                <a:spcPts val="0"/>
-              </a:spcBef>
-              <a:spcAft>
-                <a:spcPts val="0"/>
-              </a:spcAft>
-              <a:buSzPts val="1300"/>
-              <a:buAutoNum type="arabicPeriod"/>
+            <a:pPr indent="0" lvl="0" marL="0" rtl="0" algn="l">
+              <a:spcBef>
+                <a:spcPts val="1000"/>
+              </a:spcBef>
+              <a:spcAft>
+                <a:spcPts val="0"/>
+              </a:spcAft>
+              <a:buNone/>
+            </a:pPr>
+            <a:r>
+              <a:rPr b="1" lang="en" sz="1500"/>
+              <a:t>Scope:</a:t>
+            </a:r>
+            <a:endParaRPr b="1" sz="1500"/>
+          </a:p>
+          <a:p>
+            <a:pPr indent="0" lvl="0" marL="0" rtl="0" algn="l">
+              <a:spcBef>
+                <a:spcPts val="1000"/>
+              </a:spcBef>
+              <a:spcAft>
+                <a:spcPts val="1000"/>
+              </a:spcAft>
+              <a:buNone/>
             </a:pPr>
             <a:r>
               <a:rPr lang="en" sz="1300"/>
-              <a:t>Next steps</a:t>
+              <a:t>One dataset, one architecture, one frequency cutoff, and five seeds per condition.</a:t>
             </a:r>
-            <a:endParaRPr sz="1300"/>
-          </a:p>
-          <a:p>
-            <a:pPr indent="-311150" lvl="0" marL="457200" rtl="0" algn="l">
-              <a:spcBef>
-                <a:spcPts val="0"/>
-              </a:spcBef>
-              <a:spcAft>
-                <a:spcPts val="0"/>
-              </a:spcAft>
-              <a:buSzPts val="1300"/>
-              <a:buAutoNum type="arabicPeriod"/>
-            </a:pPr>
             <a:r>
               <a:rPr lang="en" sz="1300"/>
-              <a:t>Compare mixing within batches or individual examples, use validation-based checkpoint selection, and strengthen attack evaluation.</a:t>
+              <a:t> </a:t>
+            </a:r>
+            <a:r>
+              <a:rPr lang="en" sz="1300"/>
+              <a:t>Finite-step attack results do not certify robustness or establish the underlying mechanism.</a:t>
             </a:r>
             <a:endParaRPr sz="1300"/>
           </a:p>
@@ -11347,7 +11628,7 @@
       </p:sp>
       <p:grpSp>
         <p:nvGrpSpPr>
-          <p:cNvPr id="272" name="Google Shape;272;p25"/>
+          <p:cNvPr id="291" name="Google Shape;291;p25"/>
           <p:cNvGrpSpPr/>
           <p:nvPr/>
         </p:nvGrpSpPr>
@@ -11361,7 +11642,7 @@
         </p:grpSpPr>
         <p:sp>
           <p:nvSpPr>
-            <p:cNvPr id="273" name="Google Shape;273;p25"/>
+            <p:cNvPr id="292" name="Google Shape;292;p25"/>
             <p:cNvSpPr/>
             <p:nvPr/>
           </p:nvSpPr>
@@ -11430,7 +11711,7 @@
         </p:sp>
         <p:sp>
           <p:nvSpPr>
-            <p:cNvPr id="274" name="Google Shape;274;p25"/>
+            <p:cNvPr id="293" name="Google Shape;293;p25"/>
             <p:cNvSpPr/>
             <p:nvPr/>
           </p:nvSpPr>
@@ -11499,7 +11780,7 @@
         </p:sp>
         <p:sp>
           <p:nvSpPr>
-            <p:cNvPr id="275" name="Google Shape;275;p25"/>
+            <p:cNvPr id="294" name="Google Shape;294;p25"/>
             <p:cNvSpPr/>
             <p:nvPr/>
           </p:nvSpPr>
@@ -11568,7 +11849,7 @@
         </p:sp>
         <p:sp>
           <p:nvSpPr>
-            <p:cNvPr id="276" name="Google Shape;276;p25"/>
+            <p:cNvPr id="295" name="Google Shape;295;p25"/>
             <p:cNvSpPr/>
             <p:nvPr/>
           </p:nvSpPr>
@@ -11638,7 +11919,7 @@
       </p:grpSp>
       <p:grpSp>
         <p:nvGrpSpPr>
-          <p:cNvPr id="277" name="Google Shape;277;p25"/>
+          <p:cNvPr id="296" name="Google Shape;296;p25"/>
           <p:cNvGrpSpPr/>
           <p:nvPr/>
         </p:nvGrpSpPr>
@@ -11652,7 +11933,7 @@
         </p:grpSpPr>
         <p:sp>
           <p:nvSpPr>
-            <p:cNvPr id="278" name="Google Shape;278;p25"/>
+            <p:cNvPr id="297" name="Google Shape;297;p25"/>
             <p:cNvSpPr/>
             <p:nvPr/>
           </p:nvSpPr>
@@ -11721,7 +12002,7 @@
         </p:sp>
         <p:sp>
           <p:nvSpPr>
-            <p:cNvPr id="279" name="Google Shape;279;p25"/>
+            <p:cNvPr id="298" name="Google Shape;298;p25"/>
             <p:cNvSpPr/>
             <p:nvPr/>
           </p:nvSpPr>
@@ -11790,7 +12071,7 @@
         </p:sp>
         <p:sp>
           <p:nvSpPr>
-            <p:cNvPr id="280" name="Google Shape;280;p25"/>
+            <p:cNvPr id="299" name="Google Shape;299;p25"/>
             <p:cNvSpPr/>
             <p:nvPr/>
           </p:nvSpPr>
@@ -11859,7 +12140,7 @@
         </p:sp>
         <p:sp>
           <p:nvSpPr>
-            <p:cNvPr id="281" name="Google Shape;281;p25"/>
+            <p:cNvPr id="300" name="Google Shape;300;p25"/>
             <p:cNvSpPr/>
             <p:nvPr/>
           </p:nvSpPr>
@@ -11929,7 +12210,7 @@
       </p:grpSp>
       <p:pic>
         <p:nvPicPr>
-          <p:cNvPr id="282" name="Google Shape;282;p25"/>
+          <p:cNvPr id="301" name="Google Shape;301;p25"/>
           <p:cNvPicPr preferRelativeResize="0"/>
           <p:nvPr/>
         </p:nvPicPr>
@@ -11954,6 +12235,134 @@
           </a:ln>
         </p:spPr>
       </p:pic>
+      <p:sp>
+        <p:nvSpPr>
+          <p:cNvPr id="302" name="Google Shape;302;p25"/>
+          <p:cNvSpPr txBox="1"/>
+          <p:nvPr/>
+        </p:nvSpPr>
+        <p:spPr>
+          <a:xfrm>
+            <a:off x="5191150" y="1837350"/>
+            <a:ext cx="3393300" cy="1468800"/>
+          </a:xfrm>
+          <a:prstGeom prst="rect">
+            <a:avLst/>
+          </a:prstGeom>
+          <a:noFill/>
+          <a:ln>
+            <a:noFill/>
+          </a:ln>
+        </p:spPr>
+        <p:txBody>
+          <a:bodyPr anchorCtr="0" anchor="t" bIns="91425" lIns="91425" spcFirstLastPara="1" rIns="91425" wrap="square" tIns="91425">
+            <a:spAutoFit/>
+          </a:bodyPr>
+          <a:lstStyle/>
+          <a:p>
+            <a:pPr indent="0" lvl="0" marL="0" rtl="0" algn="l">
+              <a:lnSpc>
+                <a:spcPct val="115000"/>
+              </a:lnSpc>
+              <a:spcBef>
+                <a:spcPts val="0"/>
+              </a:spcBef>
+              <a:spcAft>
+                <a:spcPts val="0"/>
+              </a:spcAft>
+              <a:buNone/>
+            </a:pPr>
+            <a:r>
+              <a:rPr b="1" lang="en" sz="1500">
+                <a:solidFill>
+                  <a:schemeClr val="dk2"/>
+                </a:solidFill>
+              </a:rPr>
+              <a:t>Next steps:</a:t>
+            </a:r>
+            <a:endParaRPr b="1" sz="1500">
+              <a:solidFill>
+                <a:schemeClr val="dk2"/>
+              </a:solidFill>
+            </a:endParaRPr>
+          </a:p>
+          <a:p>
+            <a:pPr indent="0" lvl="0" marL="0" rtl="0" algn="l">
+              <a:lnSpc>
+                <a:spcPct val="115000"/>
+              </a:lnSpc>
+              <a:spcBef>
+                <a:spcPts val="1000"/>
+              </a:spcBef>
+              <a:spcAft>
+                <a:spcPts val="1000"/>
+              </a:spcAft>
+              <a:buNone/>
+            </a:pPr>
+            <a:r>
+              <a:rPr lang="en" sz="1300">
+                <a:solidFill>
+                  <a:schemeClr val="dk2"/>
+                </a:solidFill>
+              </a:rPr>
+              <a:t>Compare mixing within batches or individual examples, use validation-based checkpoint selection, and strengthen attack evaluation.</a:t>
+            </a:r>
+            <a:endParaRPr/>
+          </a:p>
+        </p:txBody>
+      </p:sp>
+      <p:cxnSp>
+        <p:nvCxnSpPr>
+          <p:cNvPr id="303" name="Google Shape;303;p25"/>
+          <p:cNvCxnSpPr/>
+          <p:nvPr/>
+        </p:nvCxnSpPr>
+        <p:spPr>
+          <a:xfrm>
+            <a:off x="375550" y="3128350"/>
+            <a:ext cx="705600" cy="0"/>
+          </a:xfrm>
+          <a:prstGeom prst="straightConnector1">
+            <a:avLst/>
+          </a:prstGeom>
+          <a:noFill/>
+          <a:ln cap="flat" cmpd="sng" w="38100">
+            <a:solidFill>
+              <a:schemeClr val="dk2"/>
+            </a:solidFill>
+            <a:prstDash val="solid"/>
+            <a:round/>
+            <a:headEnd len="med" w="med" type="none"/>
+            <a:tailEnd len="med" w="med" type="none"/>
+          </a:ln>
+        </p:spPr>
+      </p:cxnSp>
+      <p:cxnSp>
+        <p:nvCxnSpPr>
+          <p:cNvPr id="304" name="Google Shape;304;p25"/>
+          <p:cNvCxnSpPr/>
+          <p:nvPr/>
+        </p:nvCxnSpPr>
+        <p:spPr>
+          <a:xfrm>
+            <a:off x="4905300" y="1337050"/>
+            <a:ext cx="0" cy="2944200"/>
+          </a:xfrm>
+          <a:prstGeom prst="straightConnector1">
+            <a:avLst/>
+          </a:prstGeom>
+          <a:noFill/>
+          <a:ln cap="flat" cmpd="sng" w="38100">
+            <a:solidFill>
+              <a:schemeClr val="dk2"/>
+            </a:solidFill>
+            <a:prstDash val="solid"/>
+            <a:round/>
+            <a:headEnd len="med" w="med" type="none"/>
+            <a:tailEnd len="med" w="med" type="none"/>
+          </a:ln>
+        </p:spPr>
+      </p:cxnSp>
     </p:spTree>
   </p:cSld>
   <p:clrMapOvr>
@@ -11967,7 +12376,7 @@
   <p:cSld>
     <p:spTree>
       <p:nvGrpSpPr>
-        <p:cNvPr id="286" name="Shape 286"/>
+        <p:cNvPr id="308" name="Shape 308"/>
         <p:cNvGrpSpPr/>
         <p:nvPr/>
       </p:nvGrpSpPr>
@@ -11981,7 +12390,7 @@
       </p:grpSpPr>
       <p:sp>
         <p:nvSpPr>
-          <p:cNvPr id="287" name="Google Shape;287;p26"/>
+          <p:cNvPr id="309" name="Google Shape;309;p26"/>
           <p:cNvSpPr txBox="1"/>
           <p:nvPr>
             <p:ph type="title"/>
@@ -12014,7 +12423,11 @@
             </a:pPr>
             <a:r>
               <a:rPr lang="en" sz="2220"/>
-              <a:t>Selected References</a:t>
+              <a:t>Selected </a:t>
+            </a:r>
+            <a:r>
+              <a:rPr lang="en" sz="2220"/>
+              <a:t>References</a:t>
             </a:r>
             <a:endParaRPr sz="2220"/>
           </a:p>
@@ -12022,7 +12435,7 @@
       </p:sp>
       <p:sp>
         <p:nvSpPr>
-          <p:cNvPr id="288" name="Google Shape;288;p26"/>
+          <p:cNvPr id="310" name="Google Shape;310;p26"/>
           <p:cNvSpPr txBox="1"/>
           <p:nvPr>
             <p:ph idx="1" type="body"/>
@@ -12058,10 +12471,10 @@
               <a:buNone/>
             </a:pPr>
             <a:r>
-              <a:rPr lang="en" sz="1200"/>
+              <a:rPr lang="en" sz="1300"/>
               <a:t>Goodfellow, I. J., Shlens, J., and Szegedy, C. Explaining and Harnessing Adversarial Examples. ICLR, 2015.</a:t>
             </a:r>
-            <a:endParaRPr sz="1200"/>
+            <a:endParaRPr sz="1300"/>
           </a:p>
           <a:p>
             <a:pPr indent="0" lvl="0" marL="0" rtl="0" algn="l">
@@ -12079,10 +12492,10 @@
               <a:buNone/>
             </a:pPr>
             <a:r>
-              <a:rPr lang="en" sz="1200"/>
+              <a:rPr lang="en" sz="1300"/>
               <a:t>Madry, A., Makelov, A., Schmidt, L., Tsipras, D., and Vladu, A. Towards Deep Learning Models Resistant to Adversarial Attacks. ICLR, 2018.</a:t>
             </a:r>
-            <a:endParaRPr sz="1200"/>
+            <a:endParaRPr sz="1300"/>
           </a:p>
           <a:p>
             <a:pPr indent="0" lvl="0" marL="0" rtl="0" algn="l">
@@ -12100,10 +12513,10 @@
               <a:buNone/>
             </a:pPr>
             <a:r>
-              <a:rPr lang="en" sz="1200"/>
+              <a:rPr lang="en" sz="1300"/>
               <a:t>Rice, L., Wong, E., and Kolter, J. Z. Overfitting in Adversarially Robust Deep Learning. ICML, 2020.</a:t>
             </a:r>
-            <a:endParaRPr sz="1200"/>
+            <a:endParaRPr sz="1300"/>
           </a:p>
           <a:p>
             <a:pPr indent="0" lvl="0" marL="0" rtl="0" algn="l">
@@ -12121,10 +12534,10 @@
               <a:buNone/>
             </a:pPr>
             <a:r>
-              <a:rPr lang="en" sz="1200"/>
+              <a:rPr lang="en" sz="1300"/>
               <a:t>Guo, C., Frank, J. S., and Weinberger, K. Q. Low Frequency Adversarial Perturbation. UAI 2019, PMLR 115, 2020.</a:t>
             </a:r>
-            <a:endParaRPr sz="1200"/>
+            <a:endParaRPr sz="1300"/>
           </a:p>
           <a:p>
             <a:pPr indent="0" lvl="0" marL="0" rtl="0" algn="l">
@@ -12142,10 +12555,10 @@
               <a:buNone/>
             </a:pPr>
             <a:r>
-              <a:rPr lang="en" sz="1200"/>
+              <a:rPr lang="en" sz="1300"/>
               <a:t>He, K., Zhang, X., Ren, S., and Sun, J. Identity Mappings in Deep Residual Networks. ECCV, 2016.</a:t>
             </a:r>
-            <a:endParaRPr sz="1200"/>
+            <a:endParaRPr sz="1300"/>
           </a:p>
           <a:p>
             <a:pPr indent="0" lvl="0" marL="0" rtl="0" algn="l">
@@ -12163,10 +12576,10 @@
               <a:buNone/>
             </a:pPr>
             <a:r>
-              <a:rPr lang="en" sz="1200"/>
+              <a:rPr lang="en" sz="1300"/>
               <a:t>Krizhevsky, A. Learning Multiple Layers of Features from Tiny Images. Technical report, 2009.</a:t>
             </a:r>
-            <a:endParaRPr sz="1200"/>
+            <a:endParaRPr sz="1300"/>
           </a:p>
           <a:p>
             <a:pPr indent="0" lvl="0" marL="0" rtl="0" algn="l">
@@ -12186,7 +12599,7 @@
             <a:r>
               <a:t/>
             </a:r>
-            <a:endParaRPr sz="1200"/>
+            <a:endParaRPr sz="1300"/>
           </a:p>
           <a:p>
             <a:pPr indent="0" lvl="0" marL="0" rtl="0" algn="l">
@@ -12204,15 +12617,15 @@
               <a:buNone/>
             </a:pPr>
             <a:r>
-              <a:rPr b="1" lang="en" sz="1200"/>
-              <a:t>Full bibliography and research materials:</a:t>
+              <a:rPr b="1" lang="en" sz="1500"/>
+              <a:t>For full bibliography and research materials:</a:t>
             </a:r>
             <a:r>
-              <a:rPr lang="en" sz="1200"/>
+              <a:rPr lang="en" sz="1500"/>
               <a:t> </a:t>
             </a:r>
             <a:r>
-              <a:rPr lang="en" sz="1200" u="sng">
+              <a:rPr lang="en" sz="1500" u="sng">
                 <a:solidFill>
                   <a:schemeClr val="hlink"/>
                 </a:solidFill>
@@ -12220,13 +12633,13 @@
               </a:rPr>
               <a:t>github.com/ItsKaiwenDu/Robust-Overfitting</a:t>
             </a:r>
-            <a:endParaRPr sz="1200"/>
+            <a:endParaRPr sz="1500"/>
           </a:p>
         </p:txBody>
       </p:sp>
       <p:grpSp>
         <p:nvGrpSpPr>
-          <p:cNvPr id="289" name="Google Shape;289;p26"/>
+          <p:cNvPr id="311" name="Google Shape;311;p26"/>
           <p:cNvGrpSpPr/>
           <p:nvPr/>
         </p:nvGrpSpPr>
@@ -12240,7 +12653,7 @@
         </p:grpSpPr>
         <p:sp>
           <p:nvSpPr>
-            <p:cNvPr id="290" name="Google Shape;290;p26"/>
+            <p:cNvPr id="312" name="Google Shape;312;p26"/>
             <p:cNvSpPr/>
             <p:nvPr/>
           </p:nvSpPr>
@@ -12309,7 +12722,7 @@
         </p:sp>
         <p:sp>
           <p:nvSpPr>
-            <p:cNvPr id="291" name="Google Shape;291;p26"/>
+            <p:cNvPr id="313" name="Google Shape;313;p26"/>
             <p:cNvSpPr/>
             <p:nvPr/>
           </p:nvSpPr>
@@ -12378,7 +12791,7 @@
         </p:sp>
         <p:sp>
           <p:nvSpPr>
-            <p:cNvPr id="292" name="Google Shape;292;p26"/>
+            <p:cNvPr id="314" name="Google Shape;314;p26"/>
             <p:cNvSpPr/>
             <p:nvPr/>
           </p:nvSpPr>
@@ -12447,7 +12860,7 @@
         </p:sp>
         <p:sp>
           <p:nvSpPr>
-            <p:cNvPr id="293" name="Google Shape;293;p26"/>
+            <p:cNvPr id="315" name="Google Shape;315;p26"/>
             <p:cNvSpPr/>
             <p:nvPr/>
           </p:nvSpPr>
@@ -12517,7 +12930,7 @@
       </p:grpSp>
       <p:grpSp>
         <p:nvGrpSpPr>
-          <p:cNvPr id="294" name="Google Shape;294;p26"/>
+          <p:cNvPr id="316" name="Google Shape;316;p26"/>
           <p:cNvGrpSpPr/>
           <p:nvPr/>
         </p:nvGrpSpPr>
@@ -12531,7 +12944,7 @@
         </p:grpSpPr>
         <p:sp>
           <p:nvSpPr>
-            <p:cNvPr id="295" name="Google Shape;295;p26"/>
+            <p:cNvPr id="317" name="Google Shape;317;p26"/>
             <p:cNvSpPr/>
             <p:nvPr/>
           </p:nvSpPr>
@@ -12600,7 +13013,7 @@
         </p:sp>
         <p:sp>
           <p:nvSpPr>
-            <p:cNvPr id="296" name="Google Shape;296;p26"/>
+            <p:cNvPr id="318" name="Google Shape;318;p26"/>
             <p:cNvSpPr/>
             <p:nvPr/>
           </p:nvSpPr>
@@ -12669,7 +13082,7 @@
         </p:sp>
         <p:sp>
           <p:nvSpPr>
-            <p:cNvPr id="297" name="Google Shape;297;p26"/>
+            <p:cNvPr id="319" name="Google Shape;319;p26"/>
             <p:cNvSpPr/>
             <p:nvPr/>
           </p:nvSpPr>
@@ -12738,7 +13151,7 @@
         </p:sp>
         <p:sp>
           <p:nvSpPr>
-            <p:cNvPr id="298" name="Google Shape;298;p26"/>
+            <p:cNvPr id="320" name="Google Shape;320;p26"/>
             <p:cNvSpPr/>
             <p:nvPr/>
           </p:nvSpPr>
@@ -12808,7 +13221,7 @@
       </p:grpSp>
       <p:pic>
         <p:nvPicPr>
-          <p:cNvPr id="299" name="Google Shape;299;p26"/>
+          <p:cNvPr id="321" name="Google Shape;321;p26"/>
           <p:cNvPicPr preferRelativeResize="0"/>
           <p:nvPr/>
         </p:nvPicPr>
@@ -12846,7 +13259,7 @@
   <p:cSld>
     <p:spTree>
       <p:nvGrpSpPr>
-        <p:cNvPr id="303" name="Shape 303"/>
+        <p:cNvPr id="325" name="Shape 325"/>
         <p:cNvGrpSpPr/>
         <p:nvPr/>
       </p:nvGrpSpPr>
@@ -12860,7 +13273,7 @@
       </p:grpSpPr>
       <p:sp>
         <p:nvSpPr>
-          <p:cNvPr id="304" name="Google Shape;304;p27"/>
+          <p:cNvPr id="326" name="Google Shape;326;p27"/>
           <p:cNvSpPr txBox="1"/>
           <p:nvPr>
             <p:ph type="title"/>
@@ -12926,7 +13339,7 @@
       </p:sp>
       <p:sp>
         <p:nvSpPr>
-          <p:cNvPr id="305" name="Google Shape;305;p27"/>
+          <p:cNvPr id="327" name="Google Shape;327;p27"/>
           <p:cNvSpPr txBox="1"/>
           <p:nvPr>
             <p:ph idx="1" type="body"/>
@@ -13017,7 +13430,7 @@
       </p:sp>
       <p:grpSp>
         <p:nvGrpSpPr>
-          <p:cNvPr id="306" name="Google Shape;306;p27"/>
+          <p:cNvPr id="328" name="Google Shape;328;p27"/>
           <p:cNvGrpSpPr/>
           <p:nvPr/>
         </p:nvGrpSpPr>
@@ -13031,7 +13444,7 @@
         </p:grpSpPr>
         <p:sp>
           <p:nvSpPr>
-            <p:cNvPr id="307" name="Google Shape;307;p27"/>
+            <p:cNvPr id="329" name="Google Shape;329;p27"/>
             <p:cNvSpPr/>
             <p:nvPr/>
           </p:nvSpPr>
@@ -13100,7 +13513,7 @@
         </p:sp>
         <p:sp>
           <p:nvSpPr>
-            <p:cNvPr id="308" name="Google Shape;308;p27"/>
+            <p:cNvPr id="330" name="Google Shape;330;p27"/>
             <p:cNvSpPr/>
             <p:nvPr/>
           </p:nvSpPr>
@@ -13169,7 +13582,7 @@
         </p:sp>
         <p:sp>
           <p:nvSpPr>
-            <p:cNvPr id="309" name="Google Shape;309;p27"/>
+            <p:cNvPr id="331" name="Google Shape;331;p27"/>
             <p:cNvSpPr/>
             <p:nvPr/>
           </p:nvSpPr>
@@ -13238,7 +13651,7 @@
         </p:sp>
         <p:sp>
           <p:nvSpPr>
-            <p:cNvPr id="310" name="Google Shape;310;p27"/>
+            <p:cNvPr id="332" name="Google Shape;332;p27"/>
             <p:cNvSpPr/>
             <p:nvPr/>
           </p:nvSpPr>
@@ -13308,7 +13721,7 @@
       </p:grpSp>
       <p:grpSp>
         <p:nvGrpSpPr>
-          <p:cNvPr id="311" name="Google Shape;311;p27"/>
+          <p:cNvPr id="333" name="Google Shape;333;p27"/>
           <p:cNvGrpSpPr/>
           <p:nvPr/>
         </p:nvGrpSpPr>
@@ -13322,7 +13735,7 @@
         </p:grpSpPr>
         <p:sp>
           <p:nvSpPr>
-            <p:cNvPr id="312" name="Google Shape;312;p27"/>
+            <p:cNvPr id="334" name="Google Shape;334;p27"/>
             <p:cNvSpPr/>
             <p:nvPr/>
           </p:nvSpPr>
@@ -13391,7 +13804,7 @@
         </p:sp>
         <p:sp>
           <p:nvSpPr>
-            <p:cNvPr id="313" name="Google Shape;313;p27"/>
+            <p:cNvPr id="335" name="Google Shape;335;p27"/>
             <p:cNvSpPr/>
             <p:nvPr/>
           </p:nvSpPr>
@@ -13460,7 +13873,7 @@
         </p:sp>
         <p:sp>
           <p:nvSpPr>
-            <p:cNvPr id="314" name="Google Shape;314;p27"/>
+            <p:cNvPr id="336" name="Google Shape;336;p27"/>
             <p:cNvSpPr/>
             <p:nvPr/>
           </p:nvSpPr>
@@ -13529,7 +13942,7 @@
         </p:sp>
         <p:sp>
           <p:nvSpPr>
-            <p:cNvPr id="315" name="Google Shape;315;p27"/>
+            <p:cNvPr id="337" name="Google Shape;337;p27"/>
             <p:cNvSpPr/>
             <p:nvPr/>
           </p:nvSpPr>
@@ -13599,7 +14012,7 @@
       </p:grpSp>
       <p:pic>
         <p:nvPicPr>
-          <p:cNvPr id="316" name="Google Shape;316;p27" title="2.png"/>
+          <p:cNvPr id="338" name="Google Shape;338;p27" title="2.png"/>
           <p:cNvPicPr preferRelativeResize="0"/>
           <p:nvPr/>
         </p:nvPicPr>
@@ -13626,7 +14039,7 @@
       </p:pic>
       <p:pic>
         <p:nvPicPr>
-          <p:cNvPr id="317" name="Google Shape;317;p27"/>
+          <p:cNvPr id="339" name="Google Shape;339;p27"/>
           <p:cNvPicPr preferRelativeResize="0"/>
           <p:nvPr/>
         </p:nvPicPr>
@@ -13653,7 +14066,7 @@
       </p:pic>
       <p:sp>
         <p:nvSpPr>
-          <p:cNvPr id="318" name="Google Shape;318;p27"/>
+          <p:cNvPr id="340" name="Google Shape;340;p27"/>
           <p:cNvSpPr txBox="1"/>
           <p:nvPr/>
         </p:nvSpPr>
@@ -13711,7 +14124,7 @@
       </p:sp>
       <p:sp>
         <p:nvSpPr>
-          <p:cNvPr id="319" name="Google Shape;319;p27"/>
+          <p:cNvPr id="341" name="Google Shape;341;p27"/>
           <p:cNvSpPr txBox="1"/>
           <p:nvPr/>
         </p:nvSpPr>
@@ -13749,7 +14162,15 @@
                   <a:schemeClr val="dk2"/>
                 </a:solidFill>
               </a:rPr>
-              <a:t>Project repository:</a:t>
+              <a:t>R</a:t>
+            </a:r>
+            <a:r>
+              <a:rPr b="1" lang="en" sz="1300">
+                <a:solidFill>
+                  <a:schemeClr val="dk2"/>
+                </a:solidFill>
+              </a:rPr>
+              <a:t>epository:</a:t>
             </a:r>
             <a:r>
               <a:rPr lang="en" sz="1300">
@@ -13838,11 +14259,7 @@
             </a:pPr>
             <a:r>
               <a:rPr lang="en" sz="2220"/>
-              <a:t>Adversarial Example: Panda to Gibbon </a:t>
-            </a:r>
-            <a:r>
-              <a:rPr lang="en" sz="1520"/>
-              <a:t>(Goodfellow et al., 3)</a:t>
+              <a:t>Adversarial Example: Panda to Gibbon</a:t>
             </a:r>
             <a:endParaRPr sz="1520"/>
           </a:p>
@@ -13932,12 +14349,8 @@
               <a:buAutoNum type="arabicPeriod"/>
             </a:pPr>
             <a:r>
-              <a:rPr b="1" lang="en" sz="1300"/>
-              <a:t>Original image:</a:t>
-            </a:r>
-            <a:r>
               <a:rPr lang="en" sz="1300"/>
-              <a:t> Panda, 57.7% confidence</a:t>
+              <a:t>Original image: Panda, 57.7% confidence</a:t>
             </a:r>
             <a:endParaRPr sz="1300"/>
           </a:p>
@@ -13956,12 +14369,8 @@
               <a:buAutoNum type="arabicPeriod"/>
             </a:pPr>
             <a:r>
-              <a:rPr b="1" lang="en" sz="1300"/>
-              <a:t>Perturbed image:</a:t>
-            </a:r>
-            <a:r>
               <a:rPr lang="en" sz="1300"/>
-              <a:t> Gibbon, 99.3% confidence</a:t>
+              <a:t>Perturbed image: Gibbon, 99.3% confidence</a:t>
             </a:r>
             <a:endParaRPr sz="1300"/>
           </a:p>
@@ -14595,6 +15004,49 @@
           </p:txBody>
         </p:sp>
       </p:grpSp>
+      <p:sp>
+        <p:nvSpPr>
+          <p:cNvPr id="85" name="Google Shape;85;p14"/>
+          <p:cNvSpPr txBox="1"/>
+          <p:nvPr>
+            <p:ph idx="4294967295" type="body"/>
+          </p:nvPr>
+        </p:nvSpPr>
+        <p:spPr>
+          <a:xfrm>
+            <a:off x="743350" y="4717600"/>
+            <a:ext cx="3465000" cy="387300"/>
+          </a:xfrm>
+          <a:prstGeom prst="rect">
+            <a:avLst/>
+          </a:prstGeom>
+        </p:spPr>
+        <p:txBody>
+          <a:bodyPr anchorCtr="0" anchor="t" bIns="91425" lIns="91425" spcFirstLastPara="1" rIns="91425" wrap="square" tIns="91425">
+            <a:noAutofit/>
+          </a:bodyPr>
+          <a:lstStyle/>
+          <a:p>
+            <a:pPr indent="0" lvl="0" marL="0" rtl="0" algn="l">
+              <a:lnSpc>
+                <a:spcPct val="150000"/>
+              </a:lnSpc>
+              <a:spcBef>
+                <a:spcPts val="0"/>
+              </a:spcBef>
+              <a:spcAft>
+                <a:spcPts val="0"/>
+              </a:spcAft>
+              <a:buNone/>
+            </a:pPr>
+            <a:r>
+              <a:rPr i="1" lang="en" sz="1300"/>
+              <a:t>(Goodfellow et al., 2015, p. 3)</a:t>
+            </a:r>
+            <a:endParaRPr i="1" sz="1300"/>
+          </a:p>
+        </p:txBody>
+      </p:sp>
     </p:spTree>
   </p:cSld>
   <p:clrMapOvr>
@@ -14608,7 +15060,7 @@
   <p:cSld>
     <p:spTree>
       <p:nvGrpSpPr>
-        <p:cNvPr id="88" name="Shape 88"/>
+        <p:cNvPr id="89" name="Shape 89"/>
         <p:cNvGrpSpPr/>
         <p:nvPr/>
       </p:nvGrpSpPr>
@@ -14622,7 +15074,7 @@
       </p:grpSpPr>
       <p:sp>
         <p:nvSpPr>
-          <p:cNvPr id="89" name="Google Shape;89;p15"/>
+          <p:cNvPr id="90" name="Google Shape;90;p15"/>
           <p:cNvSpPr txBox="1"/>
           <p:nvPr>
             <p:ph type="title"/>
@@ -14663,7 +15115,7 @@
       </p:sp>
       <p:sp>
         <p:nvSpPr>
-          <p:cNvPr id="90" name="Google Shape;90;p15"/>
+          <p:cNvPr id="91" name="Google Shape;91;p15"/>
           <p:cNvSpPr txBox="1"/>
           <p:nvPr>
             <p:ph idx="1" type="body"/>
@@ -14695,15 +15147,7 @@
             </a:pPr>
             <a:r>
               <a:rPr lang="en" sz="1300"/>
-              <a:t>where </a:t>
-            </a:r>
-            <a:r>
-              <a:rPr b="1" lang="en" sz="1300"/>
-              <a:t>x</a:t>
-            </a:r>
-            <a:r>
-              <a:rPr lang="en" sz="1300"/>
-              <a:t>: clean image input,</a:t>
+              <a:t>where x: clean image input,</a:t>
             </a:r>
             <a:endParaRPr sz="1300"/>
           </a:p>
@@ -14718,12 +15162,12 @@
               <a:buNone/>
             </a:pPr>
             <a:r>
-              <a:rPr b="1" lang="en" sz="1300"/>
-              <a:t>ε</a:t>
+              <a:rPr lang="en" sz="1300"/>
+              <a:t> </a:t>
             </a:r>
             <a:r>
               <a:rPr lang="en" sz="1300"/>
-              <a:t>: size of allowed change,</a:t>
+              <a:t>ε: size of allowed change,</a:t>
             </a:r>
             <a:endParaRPr sz="1300"/>
           </a:p>
@@ -14743,12 +15187,8 @@
               <a:buNone/>
             </a:pPr>
             <a:r>
-              <a:rPr b="1" lang="en" sz="1300"/>
-              <a:t>η</a:t>
-            </a:r>
-            <a:r>
               <a:rPr lang="en" sz="1300"/>
-              <a:t>: the perturbation,</a:t>
+              <a:t> η: the perturbation,</a:t>
             </a:r>
             <a:endParaRPr sz="1300"/>
           </a:p>
@@ -14768,16 +15208,16 @@
               <a:buNone/>
             </a:pPr>
             <a:r>
-              <a:rPr b="1" lang="en" sz="1300"/>
+              <a:rPr lang="en" sz="1300"/>
+              <a:t> </a:t>
+            </a:r>
+            <a:r>
+              <a:rPr lang="en" sz="1300"/>
               <a:t>x</a:t>
             </a:r>
             <a:r>
-              <a:rPr b="1" lang="en" sz="1300"/>
-              <a:t>̃</a:t>
-            </a:r>
-            <a:r>
               <a:rPr lang="en" sz="1300"/>
-              <a:t>: adversarial image output.</a:t>
+              <a:t>̃: adversarial image output.</a:t>
             </a:r>
             <a:endParaRPr sz="1300"/>
           </a:p>
@@ -14785,7 +15225,7 @@
       </p:sp>
       <p:pic>
         <p:nvPicPr>
-          <p:cNvPr id="91" name="Google Shape;91;p15" title="equation.png"/>
+          <p:cNvPr id="92" name="Google Shape;92;p15" title="equation.png"/>
           <p:cNvPicPr preferRelativeResize="0"/>
           <p:nvPr/>
         </p:nvPicPr>
@@ -14813,7 +15253,7 @@
       </p:pic>
       <p:sp>
         <p:nvSpPr>
-          <p:cNvPr id="92" name="Google Shape;92;p15"/>
+          <p:cNvPr id="93" name="Google Shape;93;p15"/>
           <p:cNvSpPr/>
           <p:nvPr/>
         </p:nvSpPr>
@@ -14860,7 +15300,7 @@
       </p:sp>
       <p:grpSp>
         <p:nvGrpSpPr>
-          <p:cNvPr id="93" name="Google Shape;93;p15"/>
+          <p:cNvPr id="94" name="Google Shape;94;p15"/>
           <p:cNvGrpSpPr/>
           <p:nvPr/>
         </p:nvGrpSpPr>
@@ -14874,7 +15314,7 @@
         </p:grpSpPr>
         <p:sp>
           <p:nvSpPr>
-            <p:cNvPr id="94" name="Google Shape;94;p15"/>
+            <p:cNvPr id="95" name="Google Shape;95;p15"/>
             <p:cNvSpPr/>
             <p:nvPr/>
           </p:nvSpPr>
@@ -14943,7 +15383,7 @@
         </p:sp>
         <p:sp>
           <p:nvSpPr>
-            <p:cNvPr id="95" name="Google Shape;95;p15"/>
+            <p:cNvPr id="96" name="Google Shape;96;p15"/>
             <p:cNvSpPr/>
             <p:nvPr/>
           </p:nvSpPr>
@@ -15012,7 +15452,7 @@
         </p:sp>
         <p:sp>
           <p:nvSpPr>
-            <p:cNvPr id="96" name="Google Shape;96;p15"/>
+            <p:cNvPr id="97" name="Google Shape;97;p15"/>
             <p:cNvSpPr/>
             <p:nvPr/>
           </p:nvSpPr>
@@ -15081,7 +15521,7 @@
         </p:sp>
         <p:sp>
           <p:nvSpPr>
-            <p:cNvPr id="97" name="Google Shape;97;p15"/>
+            <p:cNvPr id="98" name="Google Shape;98;p15"/>
             <p:cNvSpPr/>
             <p:nvPr/>
           </p:nvSpPr>
@@ -15151,7 +15591,7 @@
       </p:grpSp>
       <p:grpSp>
         <p:nvGrpSpPr>
-          <p:cNvPr id="98" name="Google Shape;98;p15"/>
+          <p:cNvPr id="99" name="Google Shape;99;p15"/>
           <p:cNvGrpSpPr/>
           <p:nvPr/>
         </p:nvGrpSpPr>
@@ -15165,7 +15605,7 @@
         </p:grpSpPr>
         <p:sp>
           <p:nvSpPr>
-            <p:cNvPr id="99" name="Google Shape;99;p15"/>
+            <p:cNvPr id="100" name="Google Shape;100;p15"/>
             <p:cNvSpPr/>
             <p:nvPr/>
           </p:nvSpPr>
@@ -15234,7 +15674,7 @@
         </p:sp>
         <p:sp>
           <p:nvSpPr>
-            <p:cNvPr id="100" name="Google Shape;100;p15"/>
+            <p:cNvPr id="101" name="Google Shape;101;p15"/>
             <p:cNvSpPr/>
             <p:nvPr/>
           </p:nvSpPr>
@@ -15303,7 +15743,7 @@
         </p:sp>
         <p:sp>
           <p:nvSpPr>
-            <p:cNvPr id="101" name="Google Shape;101;p15"/>
+            <p:cNvPr id="102" name="Google Shape;102;p15"/>
             <p:cNvSpPr/>
             <p:nvPr/>
           </p:nvSpPr>
@@ -15372,7 +15812,7 @@
         </p:sp>
         <p:sp>
           <p:nvSpPr>
-            <p:cNvPr id="102" name="Google Shape;102;p15"/>
+            <p:cNvPr id="103" name="Google Shape;103;p15"/>
             <p:cNvSpPr/>
             <p:nvPr/>
           </p:nvSpPr>
@@ -15442,7 +15882,7 @@
       </p:grpSp>
       <p:cxnSp>
         <p:nvCxnSpPr>
-          <p:cNvPr id="103" name="Google Shape;103;p15"/>
+          <p:cNvPr id="104" name="Google Shape;104;p15"/>
           <p:cNvCxnSpPr/>
           <p:nvPr/>
         </p:nvCxnSpPr>
@@ -15468,7 +15908,7 @@
       </p:cxnSp>
       <p:sp>
         <p:nvSpPr>
-          <p:cNvPr id="104" name="Google Shape;104;p15"/>
+          <p:cNvPr id="105" name="Google Shape;105;p15"/>
           <p:cNvSpPr txBox="1"/>
           <p:nvPr/>
         </p:nvSpPr>
@@ -15614,7 +16054,7 @@
       </p:sp>
       <p:pic>
         <p:nvPicPr>
-          <p:cNvPr id="105" name="Google Shape;105;p15"/>
+          <p:cNvPr id="106" name="Google Shape;106;p15"/>
           <p:cNvPicPr preferRelativeResize="0"/>
           <p:nvPr/>
         </p:nvPicPr>
@@ -15641,14 +16081,14 @@
       </p:pic>
       <p:sp>
         <p:nvSpPr>
-          <p:cNvPr id="106" name="Google Shape;106;p15"/>
+          <p:cNvPr id="107" name="Google Shape;107;p15"/>
           <p:cNvSpPr txBox="1"/>
           <p:nvPr/>
         </p:nvSpPr>
         <p:spPr>
           <a:xfrm>
             <a:off x="4572000" y="3183575"/>
-            <a:ext cx="3975000" cy="1075200"/>
+            <a:ext cx="3975000" cy="973200"/>
           </a:xfrm>
           <a:prstGeom prst="rect">
             <a:avLst/>
@@ -15684,28 +16124,6 @@
               </a:rPr>
               <a:t>Reason Why It Works:</a:t>
             </a:r>
-            <a:endParaRPr b="1" sz="1300">
-              <a:solidFill>
-                <a:schemeClr val="dk2"/>
-              </a:solidFill>
-            </a:endParaRPr>
-          </a:p>
-          <a:p>
-            <a:pPr indent="0" lvl="0" marL="0" rtl="0" algn="l">
-              <a:lnSpc>
-                <a:spcPct val="115000"/>
-              </a:lnSpc>
-              <a:spcBef>
-                <a:spcPts val="0"/>
-              </a:spcBef>
-              <a:spcAft>
-                <a:spcPts val="0"/>
-              </a:spcAft>
-              <a:buNone/>
-            </a:pPr>
-            <a:r>
-              <a:t/>
-            </a:r>
             <a:endParaRPr sz="1300">
               <a:solidFill>
                 <a:schemeClr val="dk2"/>
@@ -15718,10 +16136,10 @@
                 <a:spcPct val="115000"/>
               </a:lnSpc>
               <a:spcBef>
-                <a:spcPts val="0"/>
-              </a:spcBef>
-              <a:spcAft>
-                <a:spcPts val="0"/>
+                <a:spcPts val="1000"/>
+              </a:spcBef>
+              <a:spcAft>
+                <a:spcPts val="1000"/>
               </a:spcAft>
               <a:buNone/>
             </a:pPr>
@@ -15741,6 +16159,49 @@
           </a:p>
         </p:txBody>
       </p:sp>
+      <p:sp>
+        <p:nvSpPr>
+          <p:cNvPr id="108" name="Google Shape;108;p15"/>
+          <p:cNvSpPr txBox="1"/>
+          <p:nvPr>
+            <p:ph idx="1" type="body"/>
+          </p:nvPr>
+        </p:nvSpPr>
+        <p:spPr>
+          <a:xfrm>
+            <a:off x="743350" y="4717600"/>
+            <a:ext cx="3465000" cy="387300"/>
+          </a:xfrm>
+          <a:prstGeom prst="rect">
+            <a:avLst/>
+          </a:prstGeom>
+        </p:spPr>
+        <p:txBody>
+          <a:bodyPr anchorCtr="0" anchor="t" bIns="91425" lIns="91425" spcFirstLastPara="1" rIns="91425" wrap="square" tIns="91425">
+            <a:noAutofit/>
+          </a:bodyPr>
+          <a:lstStyle/>
+          <a:p>
+            <a:pPr indent="0" lvl="0" marL="0" rtl="0" algn="l">
+              <a:lnSpc>
+                <a:spcPct val="150000"/>
+              </a:lnSpc>
+              <a:spcBef>
+                <a:spcPts val="0"/>
+              </a:spcBef>
+              <a:spcAft>
+                <a:spcPts val="0"/>
+              </a:spcAft>
+              <a:buNone/>
+            </a:pPr>
+            <a:r>
+              <a:rPr i="1" lang="en" sz="1300"/>
+              <a:t>(Goodfellow et al., 2015, pp. 2–3)</a:t>
+            </a:r>
+            <a:endParaRPr i="1" sz="1300"/>
+          </a:p>
+        </p:txBody>
+      </p:sp>
     </p:spTree>
   </p:cSld>
   <p:clrMapOvr>
@@ -15754,7 +16215,7 @@
   <p:cSld>
     <p:spTree>
       <p:nvGrpSpPr>
-        <p:cNvPr id="110" name="Shape 110"/>
+        <p:cNvPr id="112" name="Shape 112"/>
         <p:cNvGrpSpPr/>
         <p:nvPr/>
       </p:nvGrpSpPr>
@@ -15766,9 +16227,37 @@
           <a:chExt cx="0" cy="0"/>
         </a:xfrm>
       </p:grpSpPr>
+      <p:pic>
+        <p:nvPicPr>
+          <p:cNvPr id="113" name="Google Shape;113;p16"/>
+          <p:cNvPicPr preferRelativeResize="0"/>
+          <p:nvPr/>
+        </p:nvPicPr>
+        <p:blipFill>
+          <a:blip r:embed="rId3">
+            <a:alphaModFix/>
+          </a:blip>
+          <a:stretch>
+            <a:fillRect/>
+          </a:stretch>
+        </p:blipFill>
+        <p:spPr>
+          <a:xfrm>
+            <a:off x="4913275" y="567975"/>
+            <a:ext cx="3799976" cy="4274973"/>
+          </a:xfrm>
+          <a:prstGeom prst="rect">
+            <a:avLst/>
+          </a:prstGeom>
+          <a:noFill/>
+          <a:ln>
+            <a:noFill/>
+          </a:ln>
+        </p:spPr>
+      </p:pic>
       <p:sp>
         <p:nvSpPr>
-          <p:cNvPr id="111" name="Google Shape;111;p16"/>
+          <p:cNvPr id="114" name="Google Shape;114;p16"/>
           <p:cNvSpPr txBox="1"/>
           <p:nvPr>
             <p:ph type="title"/>
@@ -15809,7 +16298,7 @@
       </p:sp>
       <p:grpSp>
         <p:nvGrpSpPr>
-          <p:cNvPr id="112" name="Google Shape;112;p16"/>
+          <p:cNvPr id="115" name="Google Shape;115;p16"/>
           <p:cNvGrpSpPr/>
           <p:nvPr/>
         </p:nvGrpSpPr>
@@ -15823,7 +16312,7 @@
         </p:grpSpPr>
         <p:sp>
           <p:nvSpPr>
-            <p:cNvPr id="113" name="Google Shape;113;p16"/>
+            <p:cNvPr id="116" name="Google Shape;116;p16"/>
             <p:cNvSpPr/>
             <p:nvPr/>
           </p:nvSpPr>
@@ -15892,7 +16381,7 @@
         </p:sp>
         <p:sp>
           <p:nvSpPr>
-            <p:cNvPr id="114" name="Google Shape;114;p16"/>
+            <p:cNvPr id="117" name="Google Shape;117;p16"/>
             <p:cNvSpPr/>
             <p:nvPr/>
           </p:nvSpPr>
@@ -15961,7 +16450,7 @@
         </p:sp>
         <p:sp>
           <p:nvSpPr>
-            <p:cNvPr id="115" name="Google Shape;115;p16"/>
+            <p:cNvPr id="118" name="Google Shape;118;p16"/>
             <p:cNvSpPr/>
             <p:nvPr/>
           </p:nvSpPr>
@@ -16030,7 +16519,7 @@
         </p:sp>
         <p:sp>
           <p:nvSpPr>
-            <p:cNvPr id="116" name="Google Shape;116;p16"/>
+            <p:cNvPr id="119" name="Google Shape;119;p16"/>
             <p:cNvSpPr/>
             <p:nvPr/>
           </p:nvSpPr>
@@ -16100,7 +16589,7 @@
       </p:grpSp>
       <p:grpSp>
         <p:nvGrpSpPr>
-          <p:cNvPr id="117" name="Google Shape;117;p16"/>
+          <p:cNvPr id="120" name="Google Shape;120;p16"/>
           <p:cNvGrpSpPr/>
           <p:nvPr/>
         </p:nvGrpSpPr>
@@ -16114,7 +16603,7 @@
         </p:grpSpPr>
         <p:sp>
           <p:nvSpPr>
-            <p:cNvPr id="118" name="Google Shape;118;p16"/>
+            <p:cNvPr id="121" name="Google Shape;121;p16"/>
             <p:cNvSpPr/>
             <p:nvPr/>
           </p:nvSpPr>
@@ -16183,7 +16672,7 @@
         </p:sp>
         <p:sp>
           <p:nvSpPr>
-            <p:cNvPr id="119" name="Google Shape;119;p16"/>
+            <p:cNvPr id="122" name="Google Shape;122;p16"/>
             <p:cNvSpPr/>
             <p:nvPr/>
           </p:nvSpPr>
@@ -16252,7 +16741,7 @@
         </p:sp>
         <p:sp>
           <p:nvSpPr>
-            <p:cNvPr id="120" name="Google Shape;120;p16"/>
+            <p:cNvPr id="123" name="Google Shape;123;p16"/>
             <p:cNvSpPr/>
             <p:nvPr/>
           </p:nvSpPr>
@@ -16321,7 +16810,7 @@
         </p:sp>
         <p:sp>
           <p:nvSpPr>
-            <p:cNvPr id="121" name="Google Shape;121;p16"/>
+            <p:cNvPr id="124" name="Google Shape;124;p16"/>
             <p:cNvSpPr/>
             <p:nvPr/>
           </p:nvSpPr>
@@ -16391,12 +16880,12 @@
       </p:grpSp>
       <p:pic>
         <p:nvPicPr>
-          <p:cNvPr id="122" name="Google Shape;122;p16"/>
+          <p:cNvPr id="125" name="Google Shape;125;p16"/>
           <p:cNvPicPr preferRelativeResize="0"/>
           <p:nvPr/>
         </p:nvPicPr>
         <p:blipFill rotWithShape="1">
-          <a:blip r:embed="rId3">
+          <a:blip r:embed="rId4">
             <a:alphaModFix/>
           </a:blip>
           <a:srcRect b="10657" l="15714" r="18039" t="7930"/>
@@ -16418,7 +16907,7 @@
       </p:pic>
       <p:sp>
         <p:nvSpPr>
-          <p:cNvPr id="123" name="Google Shape;123;p16"/>
+          <p:cNvPr id="126" name="Google Shape;126;p16"/>
           <p:cNvSpPr txBox="1"/>
           <p:nvPr>
             <p:ph idx="1" type="body"/>
@@ -16427,7 +16916,7 @@
         <p:spPr>
           <a:xfrm>
             <a:off x="311700" y="1106075"/>
-            <a:ext cx="6286800" cy="3348300"/>
+            <a:ext cx="3929700" cy="2802900"/>
           </a:xfrm>
           <a:prstGeom prst="rect">
             <a:avLst/>
@@ -16452,14 +16941,14 @@
               <a:buNone/>
             </a:pPr>
             <a:r>
-              <a:rPr b="1" lang="en" sz="1500"/>
+              <a:rPr b="1" lang="en" sz="1300"/>
               <a:t>PGD:</a:t>
             </a:r>
             <a:r>
-              <a:rPr lang="en" sz="1500"/>
+              <a:rPr lang="en" sz="1300"/>
               <a:t> Projected Gradient Descent</a:t>
             </a:r>
-            <a:endParaRPr sz="1500"/>
+            <a:endParaRPr sz="1300"/>
           </a:p>
           <a:p>
             <a:pPr indent="0" lvl="0" marL="0" rtl="0" algn="l">
@@ -16475,10 +16964,10 @@
               <a:buNone/>
             </a:pPr>
             <a:r>
-              <a:rPr lang="en" sz="1500"/>
+              <a:rPr lang="en" sz="1300"/>
               <a:t>PGD repeatedly updates an image to increase the model’s loss while enforcing a perturbation limit.</a:t>
             </a:r>
-            <a:endParaRPr sz="1500"/>
+            <a:endParaRPr sz="1300"/>
           </a:p>
           <a:p>
             <a:pPr indent="0" lvl="0" marL="0" rtl="0" algn="l">
@@ -16491,18 +16980,12 @@
               <a:spcAft>
                 <a:spcPts val="0"/>
               </a:spcAft>
-              <a:buClr>
-                <a:schemeClr val="dk1"/>
-              </a:buClr>
-              <a:buSzPts val="1100"/>
-              <a:buFont typeface="Arial"/>
               <a:buNone/>
             </a:pPr>
             <a:r>
-              <a:rPr b="1" lang="en" sz="1500"/>
-              <a:t>Training procedure</a:t>
+              <a:t/>
             </a:r>
-            <a:endParaRPr b="1" sz="1500"/>
+            <a:endParaRPr sz="1300"/>
           </a:p>
           <a:p>
             <a:pPr indent="0" lvl="0" marL="0" rtl="0" algn="l">
@@ -16515,18 +16998,13 @@
               <a:spcAft>
                 <a:spcPts val="0"/>
               </a:spcAft>
-              <a:buClr>
-                <a:schemeClr val="dk1"/>
-              </a:buClr>
-              <a:buSzPts val="1100"/>
-              <a:buFont typeface="Arial"/>
               <a:buNone/>
             </a:pPr>
             <a:r>
-              <a:rPr lang="en" sz="1500"/>
-              <a:t>1. Start with a randomly perturbed training image.</a:t>
+              <a:rPr b="1" lang="en" sz="1300"/>
+              <a:t>Difference between PGD and FGSM:</a:t>
             </a:r>
-            <a:endParaRPr sz="1500"/>
+            <a:endParaRPr b="1" sz="1300"/>
           </a:p>
           <a:p>
             <a:pPr indent="0" lvl="0" marL="0" rtl="0" algn="l">
@@ -16537,87 +17015,58 @@
                 <a:spcPts val="1000"/>
               </a:spcBef>
               <a:spcAft>
-                <a:spcPts val="0"/>
-              </a:spcAft>
-              <a:buClr>
-                <a:schemeClr val="dk1"/>
-              </a:buClr>
-              <a:buSzPts val="1100"/>
-              <a:buFont typeface="Arial"/>
+                <a:spcPts val="1000"/>
+              </a:spcAft>
               <a:buNone/>
             </a:pPr>
             <a:r>
-              <a:rPr lang="en" sz="1500"/>
-              <a:t>2. Take a gradient step that increases loss.</a:t>
+              <a:rPr lang="en" sz="1300"/>
+              <a:t>FGSM takes one gradient step. PGD takes multiple smaller steps, recalculating the gradient and enforcing the perturbation constraints after each step.</a:t>
             </a:r>
-            <a:endParaRPr sz="1500"/>
+            <a:endParaRPr sz="1300"/>
           </a:p>
+        </p:txBody>
+      </p:sp>
+      <p:sp>
+        <p:nvSpPr>
+          <p:cNvPr id="127" name="Google Shape;127;p16"/>
+          <p:cNvSpPr txBox="1"/>
+          <p:nvPr>
+            <p:ph idx="1" type="body"/>
+          </p:nvPr>
+        </p:nvSpPr>
+        <p:spPr>
+          <a:xfrm>
+            <a:off x="743350" y="4717600"/>
+            <a:ext cx="3465000" cy="387300"/>
+          </a:xfrm>
+          <a:prstGeom prst="rect">
+            <a:avLst/>
+          </a:prstGeom>
+        </p:spPr>
+        <p:txBody>
+          <a:bodyPr anchorCtr="0" anchor="t" bIns="91425" lIns="91425" spcFirstLastPara="1" rIns="91425" wrap="square" tIns="91425">
+            <a:noAutofit/>
+          </a:bodyPr>
+          <a:lstStyle/>
           <a:p>
             <a:pPr indent="0" lvl="0" marL="0" rtl="0" algn="l">
               <a:lnSpc>
-                <a:spcPct val="115000"/>
+                <a:spcPct val="150000"/>
               </a:lnSpc>
               <a:spcBef>
-                <a:spcPts val="1000"/>
-              </a:spcBef>
-              <a:spcAft>
-                <a:spcPts val="0"/>
-              </a:spcAft>
-              <a:buClr>
-                <a:schemeClr val="dk1"/>
-              </a:buClr>
-              <a:buSzPts val="1100"/>
-              <a:buFont typeface="Arial"/>
+                <a:spcPts val="0"/>
+              </a:spcBef>
+              <a:spcAft>
+                <a:spcPts val="0"/>
+              </a:spcAft>
               <a:buNone/>
             </a:pPr>
             <a:r>
-              <a:rPr lang="en" sz="1500"/>
-              <a:t>3. Project back into the allowed perturbation region.</a:t>
+              <a:rPr i="1" lang="en" sz="1300"/>
+              <a:t>(Madry et al., 2018, pp. 3–4)</a:t>
             </a:r>
-            <a:endParaRPr sz="1500"/>
-          </a:p>
-          <a:p>
-            <a:pPr indent="0" lvl="0" marL="0" rtl="0" algn="l">
-              <a:lnSpc>
-                <a:spcPct val="115000"/>
-              </a:lnSpc>
-              <a:spcBef>
-                <a:spcPts val="1000"/>
-              </a:spcBef>
-              <a:spcAft>
-                <a:spcPts val="0"/>
-              </a:spcAft>
-              <a:buClr>
-                <a:schemeClr val="dk1"/>
-              </a:buClr>
-              <a:buSzPts val="1100"/>
-              <a:buFont typeface="Arial"/>
-              <a:buNone/>
-            </a:pPr>
-            <a:r>
-              <a:rPr lang="en" sz="1500"/>
-              <a:t>4. Repeat for the chosen number of attack steps.</a:t>
-            </a:r>
-            <a:endParaRPr sz="1500"/>
-          </a:p>
-          <a:p>
-            <a:pPr indent="0" lvl="0" marL="0" rtl="0" algn="l">
-              <a:lnSpc>
-                <a:spcPct val="115000"/>
-              </a:lnSpc>
-              <a:spcBef>
-                <a:spcPts val="1000"/>
-              </a:spcBef>
-              <a:spcAft>
-                <a:spcPts val="1000"/>
-              </a:spcAft>
-              <a:buNone/>
-            </a:pPr>
-            <a:r>
-              <a:rPr lang="en" sz="1500"/>
-              <a:t>5. Update the model using the attacked image and its correct label.</a:t>
-            </a:r>
-            <a:endParaRPr sz="1500"/>
+            <a:endParaRPr i="1" sz="1300"/>
           </a:p>
         </p:txBody>
       </p:sp>
@@ -16634,7 +17083,7 @@
   <p:cSld>
     <p:spTree>
       <p:nvGrpSpPr>
-        <p:cNvPr id="127" name="Shape 127"/>
+        <p:cNvPr id="131" name="Shape 131"/>
         <p:cNvGrpSpPr/>
         <p:nvPr/>
       </p:nvGrpSpPr>
@@ -16648,7 +17097,7 @@
       </p:grpSpPr>
       <p:pic>
         <p:nvPicPr>
-          <p:cNvPr id="128" name="Google Shape;128;p17"/>
+          <p:cNvPr id="132" name="Google Shape;132;p17"/>
           <p:cNvPicPr preferRelativeResize="0"/>
           <p:nvPr/>
         </p:nvPicPr>
@@ -16675,7 +17124,7 @@
       </p:pic>
       <p:sp>
         <p:nvSpPr>
-          <p:cNvPr id="129" name="Google Shape;129;p17"/>
+          <p:cNvPr id="133" name="Google Shape;133;p17"/>
           <p:cNvSpPr txBox="1"/>
           <p:nvPr>
             <p:ph type="title"/>
@@ -16716,7 +17165,7 @@
       </p:sp>
       <p:grpSp>
         <p:nvGrpSpPr>
-          <p:cNvPr id="130" name="Google Shape;130;p17"/>
+          <p:cNvPr id="134" name="Google Shape;134;p17"/>
           <p:cNvGrpSpPr/>
           <p:nvPr/>
         </p:nvGrpSpPr>
@@ -16730,7 +17179,7 @@
         </p:grpSpPr>
         <p:sp>
           <p:nvSpPr>
-            <p:cNvPr id="131" name="Google Shape;131;p17"/>
+            <p:cNvPr id="135" name="Google Shape;135;p17"/>
             <p:cNvSpPr/>
             <p:nvPr/>
           </p:nvSpPr>
@@ -16799,7 +17248,7 @@
         </p:sp>
         <p:sp>
           <p:nvSpPr>
-            <p:cNvPr id="132" name="Google Shape;132;p17"/>
+            <p:cNvPr id="136" name="Google Shape;136;p17"/>
             <p:cNvSpPr/>
             <p:nvPr/>
           </p:nvSpPr>
@@ -16868,7 +17317,7 @@
         </p:sp>
         <p:sp>
           <p:nvSpPr>
-            <p:cNvPr id="133" name="Google Shape;133;p17"/>
+            <p:cNvPr id="137" name="Google Shape;137;p17"/>
             <p:cNvSpPr/>
             <p:nvPr/>
           </p:nvSpPr>
@@ -16937,7 +17386,7 @@
         </p:sp>
         <p:sp>
           <p:nvSpPr>
-            <p:cNvPr id="134" name="Google Shape;134;p17"/>
+            <p:cNvPr id="138" name="Google Shape;138;p17"/>
             <p:cNvSpPr/>
             <p:nvPr/>
           </p:nvSpPr>
@@ -17007,7 +17456,7 @@
       </p:grpSp>
       <p:grpSp>
         <p:nvGrpSpPr>
-          <p:cNvPr id="135" name="Google Shape;135;p17"/>
+          <p:cNvPr id="139" name="Google Shape;139;p17"/>
           <p:cNvGrpSpPr/>
           <p:nvPr/>
         </p:nvGrpSpPr>
@@ -17021,7 +17470,7 @@
         </p:grpSpPr>
         <p:sp>
           <p:nvSpPr>
-            <p:cNvPr id="136" name="Google Shape;136;p17"/>
+            <p:cNvPr id="140" name="Google Shape;140;p17"/>
             <p:cNvSpPr/>
             <p:nvPr/>
           </p:nvSpPr>
@@ -17090,7 +17539,7 @@
         </p:sp>
         <p:sp>
           <p:nvSpPr>
-            <p:cNvPr id="137" name="Google Shape;137;p17"/>
+            <p:cNvPr id="141" name="Google Shape;141;p17"/>
             <p:cNvSpPr/>
             <p:nvPr/>
           </p:nvSpPr>
@@ -17159,7 +17608,7 @@
         </p:sp>
         <p:sp>
           <p:nvSpPr>
-            <p:cNvPr id="138" name="Google Shape;138;p17"/>
+            <p:cNvPr id="142" name="Google Shape;142;p17"/>
             <p:cNvSpPr/>
             <p:nvPr/>
           </p:nvSpPr>
@@ -17228,7 +17677,7 @@
         </p:sp>
         <p:sp>
           <p:nvSpPr>
-            <p:cNvPr id="139" name="Google Shape;139;p17"/>
+            <p:cNvPr id="143" name="Google Shape;143;p17"/>
             <p:cNvSpPr/>
             <p:nvPr/>
           </p:nvSpPr>
@@ -17298,7 +17747,7 @@
       </p:grpSp>
       <p:pic>
         <p:nvPicPr>
-          <p:cNvPr id="140" name="Google Shape;140;p17"/>
+          <p:cNvPr id="144" name="Google Shape;144;p17"/>
           <p:cNvPicPr preferRelativeResize="0"/>
           <p:nvPr/>
         </p:nvPicPr>
@@ -17325,7 +17774,7 @@
       </p:pic>
       <p:sp>
         <p:nvSpPr>
-          <p:cNvPr id="141" name="Google Shape;141;p17"/>
+          <p:cNvPr id="145" name="Google Shape;145;p17"/>
           <p:cNvSpPr txBox="1"/>
           <p:nvPr>
             <p:ph idx="1" type="body"/>
@@ -17334,7 +17783,7 @@
         <p:spPr>
           <a:xfrm>
             <a:off x="311700" y="1106075"/>
-            <a:ext cx="4511100" cy="3348300"/>
+            <a:ext cx="4511100" cy="3537300"/>
           </a:xfrm>
           <a:prstGeom prst="rect">
             <a:avLst/>
@@ -17359,9 +17808,37 @@
               <a:rPr b="1" lang="en" sz="1500"/>
               <a:t>Robust overfitting:</a:t>
             </a:r>
+            <a:endParaRPr sz="1500"/>
+          </a:p>
+          <a:p>
+            <a:pPr indent="0" lvl="0" marL="0" rtl="0" algn="l">
+              <a:spcBef>
+                <a:spcPts val="1000"/>
+              </a:spcBef>
+              <a:spcAft>
+                <a:spcPts val="0"/>
+              </a:spcAft>
+              <a:buNone/>
+            </a:pPr>
             <a:r>
-              <a:rPr lang="en" sz="1500"/>
-              <a:t> Robust test performance deteriorates after reaching its best point, even as training performance continues to improve.</a:t>
+              <a:rPr lang="en" sz="1300"/>
+              <a:t>Robust test performance deteriorates after reaching its best point, even as training performance continues to improve.</a:t>
+            </a:r>
+            <a:endParaRPr sz="1300"/>
+          </a:p>
+          <a:p>
+            <a:pPr indent="0" lvl="0" marL="0" rtl="0" algn="l">
+              <a:spcBef>
+                <a:spcPts val="1000"/>
+              </a:spcBef>
+              <a:spcAft>
+                <a:spcPts val="0"/>
+              </a:spcAft>
+              <a:buNone/>
+            </a:pPr>
+            <a:r>
+              <a:rPr b="1" lang="en" sz="1500"/>
+              <a:t>Robust test error:</a:t>
             </a:r>
             <a:endParaRPr sz="1500"/>
           </a:p>
@@ -17376,12 +17853,24 @@
               <a:buNone/>
             </a:pPr>
             <a:r>
+              <a:rPr lang="en" sz="1300"/>
+              <a:t>Percentage of attacked test images the model misclassified.</a:t>
+            </a:r>
+            <a:endParaRPr sz="1300"/>
+          </a:p>
+          <a:p>
+            <a:pPr indent="0" lvl="0" marL="0" rtl="0" algn="l">
+              <a:spcBef>
+                <a:spcPts val="1000"/>
+              </a:spcBef>
+              <a:spcAft>
+                <a:spcPts val="0"/>
+              </a:spcAft>
+              <a:buNone/>
+            </a:pPr>
+            <a:r>
               <a:rPr b="1" lang="en" sz="1500"/>
-              <a:t>Robust test error:</a:t>
-            </a:r>
-            <a:r>
-              <a:rPr lang="en" sz="1500"/>
-              <a:t> Percentage of attacked test images the model misclassifies.</a:t>
+              <a:t>Early stopping:</a:t>
             </a:r>
             <a:endParaRPr sz="1500"/>
           </a:p>
@@ -17396,14 +17885,10 @@
               <a:buNone/>
             </a:pPr>
             <a:r>
-              <a:rPr b="1" lang="en" sz="1500"/>
-              <a:t>Early stopping:</a:t>
+              <a:rPr lang="en" sz="1300"/>
+              <a:t>Select the checkpoint with the best adversarial accuracy on a held-out validation set.</a:t>
             </a:r>
-            <a:r>
-              <a:rPr lang="en" sz="1500"/>
-              <a:t> Select the checkpoint with the best adversarial accuracy on a held-out validation set.</a:t>
-            </a:r>
-            <a:endParaRPr sz="1500"/>
+            <a:endParaRPr sz="1300"/>
           </a:p>
           <a:p>
             <a:pPr indent="0" lvl="0" marL="0" rtl="0" algn="l">
@@ -17416,10 +17901,10 @@
               <a:buNone/>
             </a:pPr>
             <a:r>
-              <a:rPr lang="en" sz="1500"/>
+              <a:rPr lang="en" sz="1300"/>
               <a:t>The best checkpoint may occur before the end of training.</a:t>
             </a:r>
-            <a:endParaRPr sz="1500"/>
+            <a:endParaRPr sz="1300"/>
           </a:p>
           <a:p>
             <a:pPr indent="0" lvl="0" marL="0" rtl="0" algn="l">
@@ -17437,13 +17922,13 @@
             <a:r>
               <a:t/>
             </a:r>
-            <a:endParaRPr b="1" sz="1500"/>
+            <a:endParaRPr b="1" sz="1300"/>
           </a:p>
         </p:txBody>
       </p:sp>
       <p:pic>
         <p:nvPicPr>
-          <p:cNvPr id="142" name="Google Shape;142;p17"/>
+          <p:cNvPr id="146" name="Google Shape;146;p17"/>
           <p:cNvPicPr preferRelativeResize="0"/>
           <p:nvPr/>
         </p:nvPicPr>
@@ -17470,7 +17955,7 @@
       </p:pic>
       <p:pic>
         <p:nvPicPr>
-          <p:cNvPr id="143" name="Google Shape;143;p17"/>
+          <p:cNvPr id="147" name="Google Shape;147;p17"/>
           <p:cNvPicPr preferRelativeResize="0"/>
           <p:nvPr/>
         </p:nvPicPr>
@@ -17495,6 +17980,49 @@
           </a:ln>
         </p:spPr>
       </p:pic>
+      <p:sp>
+        <p:nvSpPr>
+          <p:cNvPr id="148" name="Google Shape;148;p17"/>
+          <p:cNvSpPr txBox="1"/>
+          <p:nvPr>
+            <p:ph idx="1" type="body"/>
+          </p:nvPr>
+        </p:nvSpPr>
+        <p:spPr>
+          <a:xfrm>
+            <a:off x="743350" y="4717600"/>
+            <a:ext cx="3465000" cy="387300"/>
+          </a:xfrm>
+          <a:prstGeom prst="rect">
+            <a:avLst/>
+          </a:prstGeom>
+        </p:spPr>
+        <p:txBody>
+          <a:bodyPr anchorCtr="0" anchor="t" bIns="91425" lIns="91425" spcFirstLastPara="1" rIns="91425" wrap="square" tIns="91425">
+            <a:noAutofit/>
+          </a:bodyPr>
+          <a:lstStyle/>
+          <a:p>
+            <a:pPr indent="0" lvl="0" marL="0" rtl="0" algn="l">
+              <a:lnSpc>
+                <a:spcPct val="150000"/>
+              </a:lnSpc>
+              <a:spcBef>
+                <a:spcPts val="0"/>
+              </a:spcBef>
+              <a:spcAft>
+                <a:spcPts val="0"/>
+              </a:spcAft>
+              <a:buNone/>
+            </a:pPr>
+            <a:r>
+              <a:rPr i="1" lang="en" sz="1300"/>
+              <a:t>(Rice et al., 2020, pp. 4, 6)</a:t>
+            </a:r>
+            <a:endParaRPr i="1" sz="1300"/>
+          </a:p>
+        </p:txBody>
+      </p:sp>
     </p:spTree>
   </p:cSld>
   <p:clrMapOvr>
@@ -17508,7 +18036,7 @@
   <p:cSld>
     <p:spTree>
       <p:nvGrpSpPr>
-        <p:cNvPr id="147" name="Shape 147"/>
+        <p:cNvPr id="152" name="Shape 152"/>
         <p:cNvGrpSpPr/>
         <p:nvPr/>
       </p:nvGrpSpPr>
@@ -17522,7 +18050,7 @@
       </p:grpSpPr>
       <p:sp>
         <p:nvSpPr>
-          <p:cNvPr id="148" name="Google Shape;148;p18"/>
+          <p:cNvPr id="153" name="Google Shape;153;p18"/>
           <p:cNvSpPr txBox="1"/>
           <p:nvPr>
             <p:ph type="title"/>
@@ -17563,304 +18091,13 @@
       </p:sp>
       <p:grpSp>
         <p:nvGrpSpPr>
-          <p:cNvPr id="149" name="Google Shape;149;p18"/>
+          <p:cNvPr id="154" name="Google Shape;154;p18"/>
           <p:cNvGrpSpPr/>
           <p:nvPr/>
         </p:nvGrpSpPr>
         <p:grpSpPr>
           <a:xfrm rot="10800000">
             <a:off x="205788" y="4842962"/>
-            <a:ext cx="537556" cy="136576"/>
-            <a:chOff x="2641350" y="846250"/>
-            <a:chExt cx="413600" cy="105075"/>
-          </a:xfrm>
-        </p:grpSpPr>
-        <p:sp>
-          <p:nvSpPr>
-            <p:cNvPr id="150" name="Google Shape;150;p18"/>
-            <p:cNvSpPr/>
-            <p:nvPr/>
-          </p:nvSpPr>
-          <p:spPr>
-            <a:xfrm>
-              <a:off x="2991475" y="846250"/>
-              <a:ext cx="63475" cy="105075"/>
-            </a:xfrm>
-            <a:custGeom>
-              <a:rect b="b" l="l" r="r" t="t"/>
-              <a:pathLst>
-                <a:path extrusionOk="0" h="4203" w="2539">
-                  <a:moveTo>
-                    <a:pt x="2092" y="1"/>
-                  </a:moveTo>
-                  <a:lnTo>
-                    <a:pt x="1" y="2111"/>
-                  </a:lnTo>
-                  <a:lnTo>
-                    <a:pt x="2092" y="4202"/>
-                  </a:lnTo>
-                  <a:lnTo>
-                    <a:pt x="2538" y="3756"/>
-                  </a:lnTo>
-                  <a:lnTo>
-                    <a:pt x="874" y="2111"/>
-                  </a:lnTo>
-                  <a:lnTo>
-                    <a:pt x="2538" y="447"/>
-                  </a:lnTo>
-                  <a:lnTo>
-                    <a:pt x="2092" y="1"/>
-                  </a:lnTo>
-                  <a:close/>
-                </a:path>
-              </a:pathLst>
-            </a:custGeom>
-            <a:solidFill>
-              <a:srgbClr val="191919"/>
-            </a:solidFill>
-            <a:ln>
-              <a:noFill/>
-            </a:ln>
-          </p:spPr>
-          <p:txBody>
-            <a:bodyPr anchorCtr="0" anchor="ctr" bIns="91425" lIns="91425" spcFirstLastPara="1" rIns="91425" wrap="square" tIns="91425">
-              <a:noAutofit/>
-            </a:bodyPr>
-            <a:lstStyle/>
-            <a:p>
-              <a:pPr indent="0" lvl="0" marL="0" rtl="0" algn="l">
-                <a:spcBef>
-                  <a:spcPts val="0"/>
-                </a:spcBef>
-                <a:spcAft>
-                  <a:spcPts val="0"/>
-                </a:spcAft>
-                <a:buNone/>
-              </a:pPr>
-              <a:r>
-                <a:t/>
-              </a:r>
-              <a:endParaRPr/>
-            </a:p>
-          </p:txBody>
-        </p:sp>
-        <p:sp>
-          <p:nvSpPr>
-            <p:cNvPr id="151" name="Google Shape;151;p18"/>
-            <p:cNvSpPr/>
-            <p:nvPr/>
-          </p:nvSpPr>
-          <p:spPr>
-            <a:xfrm>
-              <a:off x="2874775" y="846250"/>
-              <a:ext cx="63450" cy="105075"/>
-            </a:xfrm>
-            <a:custGeom>
-              <a:rect b="b" l="l" r="r" t="t"/>
-              <a:pathLst>
-                <a:path extrusionOk="0" h="4203" w="2538">
-                  <a:moveTo>
-                    <a:pt x="2091" y="1"/>
-                  </a:moveTo>
-                  <a:lnTo>
-                    <a:pt x="0" y="2111"/>
-                  </a:lnTo>
-                  <a:lnTo>
-                    <a:pt x="2091" y="4202"/>
-                  </a:lnTo>
-                  <a:lnTo>
-                    <a:pt x="2538" y="3756"/>
-                  </a:lnTo>
-                  <a:lnTo>
-                    <a:pt x="894" y="2111"/>
-                  </a:lnTo>
-                  <a:lnTo>
-                    <a:pt x="2538" y="447"/>
-                  </a:lnTo>
-                  <a:lnTo>
-                    <a:pt x="2091" y="1"/>
-                  </a:lnTo>
-                  <a:close/>
-                </a:path>
-              </a:pathLst>
-            </a:custGeom>
-            <a:solidFill>
-              <a:srgbClr val="191919"/>
-            </a:solidFill>
-            <a:ln>
-              <a:noFill/>
-            </a:ln>
-          </p:spPr>
-          <p:txBody>
-            <a:bodyPr anchorCtr="0" anchor="ctr" bIns="91425" lIns="91425" spcFirstLastPara="1" rIns="91425" wrap="square" tIns="91425">
-              <a:noAutofit/>
-            </a:bodyPr>
-            <a:lstStyle/>
-            <a:p>
-              <a:pPr indent="0" lvl="0" marL="0" rtl="0" algn="l">
-                <a:spcBef>
-                  <a:spcPts val="0"/>
-                </a:spcBef>
-                <a:spcAft>
-                  <a:spcPts val="0"/>
-                </a:spcAft>
-                <a:buNone/>
-              </a:pPr>
-              <a:r>
-                <a:t/>
-              </a:r>
-              <a:endParaRPr/>
-            </a:p>
-          </p:txBody>
-        </p:sp>
-        <p:sp>
-          <p:nvSpPr>
-            <p:cNvPr id="152" name="Google Shape;152;p18"/>
-            <p:cNvSpPr/>
-            <p:nvPr/>
-          </p:nvSpPr>
-          <p:spPr>
-            <a:xfrm>
-              <a:off x="2758075" y="846250"/>
-              <a:ext cx="63450" cy="105075"/>
-            </a:xfrm>
-            <a:custGeom>
-              <a:rect b="b" l="l" r="r" t="t"/>
-              <a:pathLst>
-                <a:path extrusionOk="0" h="4203" w="2538">
-                  <a:moveTo>
-                    <a:pt x="2111" y="1"/>
-                  </a:moveTo>
-                  <a:lnTo>
-                    <a:pt x="0" y="2111"/>
-                  </a:lnTo>
-                  <a:lnTo>
-                    <a:pt x="2111" y="4202"/>
-                  </a:lnTo>
-                  <a:lnTo>
-                    <a:pt x="2537" y="3756"/>
-                  </a:lnTo>
-                  <a:lnTo>
-                    <a:pt x="893" y="2111"/>
-                  </a:lnTo>
-                  <a:lnTo>
-                    <a:pt x="2537" y="447"/>
-                  </a:lnTo>
-                  <a:lnTo>
-                    <a:pt x="2111" y="1"/>
-                  </a:lnTo>
-                  <a:close/>
-                </a:path>
-              </a:pathLst>
-            </a:custGeom>
-            <a:solidFill>
-              <a:srgbClr val="191919"/>
-            </a:solidFill>
-            <a:ln>
-              <a:noFill/>
-            </a:ln>
-          </p:spPr>
-          <p:txBody>
-            <a:bodyPr anchorCtr="0" anchor="ctr" bIns="91425" lIns="91425" spcFirstLastPara="1" rIns="91425" wrap="square" tIns="91425">
-              <a:noAutofit/>
-            </a:bodyPr>
-            <a:lstStyle/>
-            <a:p>
-              <a:pPr indent="0" lvl="0" marL="0" rtl="0" algn="l">
-                <a:spcBef>
-                  <a:spcPts val="0"/>
-                </a:spcBef>
-                <a:spcAft>
-                  <a:spcPts val="0"/>
-                </a:spcAft>
-                <a:buNone/>
-              </a:pPr>
-              <a:r>
-                <a:t/>
-              </a:r>
-              <a:endParaRPr/>
-            </a:p>
-          </p:txBody>
-        </p:sp>
-        <p:sp>
-          <p:nvSpPr>
-            <p:cNvPr id="153" name="Google Shape;153;p18"/>
-            <p:cNvSpPr/>
-            <p:nvPr/>
-          </p:nvSpPr>
-          <p:spPr>
-            <a:xfrm>
-              <a:off x="2641350" y="846250"/>
-              <a:ext cx="63975" cy="105075"/>
-            </a:xfrm>
-            <a:custGeom>
-              <a:rect b="b" l="l" r="r" t="t"/>
-              <a:pathLst>
-                <a:path extrusionOk="0" h="4203" w="2559">
-                  <a:moveTo>
-                    <a:pt x="2112" y="1"/>
-                  </a:moveTo>
-                  <a:lnTo>
-                    <a:pt x="1" y="2111"/>
-                  </a:lnTo>
-                  <a:lnTo>
-                    <a:pt x="2112" y="4202"/>
-                  </a:lnTo>
-                  <a:lnTo>
-                    <a:pt x="2558" y="3756"/>
-                  </a:lnTo>
-                  <a:lnTo>
-                    <a:pt x="894" y="2111"/>
-                  </a:lnTo>
-                  <a:lnTo>
-                    <a:pt x="2558" y="447"/>
-                  </a:lnTo>
-                  <a:lnTo>
-                    <a:pt x="2112" y="1"/>
-                  </a:lnTo>
-                  <a:close/>
-                </a:path>
-              </a:pathLst>
-            </a:custGeom>
-            <a:solidFill>
-              <a:srgbClr val="191919"/>
-            </a:solidFill>
-            <a:ln>
-              <a:noFill/>
-            </a:ln>
-          </p:spPr>
-          <p:txBody>
-            <a:bodyPr anchorCtr="0" anchor="ctr" bIns="91425" lIns="91425" spcFirstLastPara="1" rIns="91425" wrap="square" tIns="91425">
-              <a:noAutofit/>
-            </a:bodyPr>
-            <a:lstStyle/>
-            <a:p>
-              <a:pPr indent="0" lvl="0" marL="0" rtl="0" algn="l">
-                <a:spcBef>
-                  <a:spcPts val="0"/>
-                </a:spcBef>
-                <a:spcAft>
-                  <a:spcPts val="0"/>
-                </a:spcAft>
-                <a:buNone/>
-              </a:pPr>
-              <a:r>
-                <a:t/>
-              </a:r>
-              <a:endParaRPr/>
-            </a:p>
-          </p:txBody>
-        </p:sp>
-      </p:grpSp>
-      <p:grpSp>
-        <p:nvGrpSpPr>
-          <p:cNvPr id="154" name="Google Shape;154;p18"/>
-          <p:cNvGrpSpPr/>
-          <p:nvPr/>
-        </p:nvGrpSpPr>
-        <p:grpSpPr>
-          <a:xfrm>
-            <a:off x="8414888" y="169062"/>
             <a:ext cx="537556" cy="136576"/>
             <a:chOff x="2641350" y="846250"/>
             <a:chExt cx="413600" cy="105075"/>
@@ -18143,9 +18380,300 @@
           </p:txBody>
         </p:sp>
       </p:grpSp>
+      <p:grpSp>
+        <p:nvGrpSpPr>
+          <p:cNvPr id="159" name="Google Shape;159;p18"/>
+          <p:cNvGrpSpPr/>
+          <p:nvPr/>
+        </p:nvGrpSpPr>
+        <p:grpSpPr>
+          <a:xfrm>
+            <a:off x="8414888" y="169062"/>
+            <a:ext cx="537556" cy="136576"/>
+            <a:chOff x="2641350" y="846250"/>
+            <a:chExt cx="413600" cy="105075"/>
+          </a:xfrm>
+        </p:grpSpPr>
+        <p:sp>
+          <p:nvSpPr>
+            <p:cNvPr id="160" name="Google Shape;160;p18"/>
+            <p:cNvSpPr/>
+            <p:nvPr/>
+          </p:nvSpPr>
+          <p:spPr>
+            <a:xfrm>
+              <a:off x="2991475" y="846250"/>
+              <a:ext cx="63475" cy="105075"/>
+            </a:xfrm>
+            <a:custGeom>
+              <a:rect b="b" l="l" r="r" t="t"/>
+              <a:pathLst>
+                <a:path extrusionOk="0" h="4203" w="2539">
+                  <a:moveTo>
+                    <a:pt x="2092" y="1"/>
+                  </a:moveTo>
+                  <a:lnTo>
+                    <a:pt x="1" y="2111"/>
+                  </a:lnTo>
+                  <a:lnTo>
+                    <a:pt x="2092" y="4202"/>
+                  </a:lnTo>
+                  <a:lnTo>
+                    <a:pt x="2538" y="3756"/>
+                  </a:lnTo>
+                  <a:lnTo>
+                    <a:pt x="874" y="2111"/>
+                  </a:lnTo>
+                  <a:lnTo>
+                    <a:pt x="2538" y="447"/>
+                  </a:lnTo>
+                  <a:lnTo>
+                    <a:pt x="2092" y="1"/>
+                  </a:lnTo>
+                  <a:close/>
+                </a:path>
+              </a:pathLst>
+            </a:custGeom>
+            <a:solidFill>
+              <a:srgbClr val="191919"/>
+            </a:solidFill>
+            <a:ln>
+              <a:noFill/>
+            </a:ln>
+          </p:spPr>
+          <p:txBody>
+            <a:bodyPr anchorCtr="0" anchor="ctr" bIns="91425" lIns="91425" spcFirstLastPara="1" rIns="91425" wrap="square" tIns="91425">
+              <a:noAutofit/>
+            </a:bodyPr>
+            <a:lstStyle/>
+            <a:p>
+              <a:pPr indent="0" lvl="0" marL="0" rtl="0" algn="l">
+                <a:spcBef>
+                  <a:spcPts val="0"/>
+                </a:spcBef>
+                <a:spcAft>
+                  <a:spcPts val="0"/>
+                </a:spcAft>
+                <a:buNone/>
+              </a:pPr>
+              <a:r>
+                <a:t/>
+              </a:r>
+              <a:endParaRPr/>
+            </a:p>
+          </p:txBody>
+        </p:sp>
+        <p:sp>
+          <p:nvSpPr>
+            <p:cNvPr id="161" name="Google Shape;161;p18"/>
+            <p:cNvSpPr/>
+            <p:nvPr/>
+          </p:nvSpPr>
+          <p:spPr>
+            <a:xfrm>
+              <a:off x="2874775" y="846250"/>
+              <a:ext cx="63450" cy="105075"/>
+            </a:xfrm>
+            <a:custGeom>
+              <a:rect b="b" l="l" r="r" t="t"/>
+              <a:pathLst>
+                <a:path extrusionOk="0" h="4203" w="2538">
+                  <a:moveTo>
+                    <a:pt x="2091" y="1"/>
+                  </a:moveTo>
+                  <a:lnTo>
+                    <a:pt x="0" y="2111"/>
+                  </a:lnTo>
+                  <a:lnTo>
+                    <a:pt x="2091" y="4202"/>
+                  </a:lnTo>
+                  <a:lnTo>
+                    <a:pt x="2538" y="3756"/>
+                  </a:lnTo>
+                  <a:lnTo>
+                    <a:pt x="894" y="2111"/>
+                  </a:lnTo>
+                  <a:lnTo>
+                    <a:pt x="2538" y="447"/>
+                  </a:lnTo>
+                  <a:lnTo>
+                    <a:pt x="2091" y="1"/>
+                  </a:lnTo>
+                  <a:close/>
+                </a:path>
+              </a:pathLst>
+            </a:custGeom>
+            <a:solidFill>
+              <a:srgbClr val="191919"/>
+            </a:solidFill>
+            <a:ln>
+              <a:noFill/>
+            </a:ln>
+          </p:spPr>
+          <p:txBody>
+            <a:bodyPr anchorCtr="0" anchor="ctr" bIns="91425" lIns="91425" spcFirstLastPara="1" rIns="91425" wrap="square" tIns="91425">
+              <a:noAutofit/>
+            </a:bodyPr>
+            <a:lstStyle/>
+            <a:p>
+              <a:pPr indent="0" lvl="0" marL="0" rtl="0" algn="l">
+                <a:spcBef>
+                  <a:spcPts val="0"/>
+                </a:spcBef>
+                <a:spcAft>
+                  <a:spcPts val="0"/>
+                </a:spcAft>
+                <a:buNone/>
+              </a:pPr>
+              <a:r>
+                <a:t/>
+              </a:r>
+              <a:endParaRPr/>
+            </a:p>
+          </p:txBody>
+        </p:sp>
+        <p:sp>
+          <p:nvSpPr>
+            <p:cNvPr id="162" name="Google Shape;162;p18"/>
+            <p:cNvSpPr/>
+            <p:nvPr/>
+          </p:nvSpPr>
+          <p:spPr>
+            <a:xfrm>
+              <a:off x="2758075" y="846250"/>
+              <a:ext cx="63450" cy="105075"/>
+            </a:xfrm>
+            <a:custGeom>
+              <a:rect b="b" l="l" r="r" t="t"/>
+              <a:pathLst>
+                <a:path extrusionOk="0" h="4203" w="2538">
+                  <a:moveTo>
+                    <a:pt x="2111" y="1"/>
+                  </a:moveTo>
+                  <a:lnTo>
+                    <a:pt x="0" y="2111"/>
+                  </a:lnTo>
+                  <a:lnTo>
+                    <a:pt x="2111" y="4202"/>
+                  </a:lnTo>
+                  <a:lnTo>
+                    <a:pt x="2537" y="3756"/>
+                  </a:lnTo>
+                  <a:lnTo>
+                    <a:pt x="893" y="2111"/>
+                  </a:lnTo>
+                  <a:lnTo>
+                    <a:pt x="2537" y="447"/>
+                  </a:lnTo>
+                  <a:lnTo>
+                    <a:pt x="2111" y="1"/>
+                  </a:lnTo>
+                  <a:close/>
+                </a:path>
+              </a:pathLst>
+            </a:custGeom>
+            <a:solidFill>
+              <a:srgbClr val="191919"/>
+            </a:solidFill>
+            <a:ln>
+              <a:noFill/>
+            </a:ln>
+          </p:spPr>
+          <p:txBody>
+            <a:bodyPr anchorCtr="0" anchor="ctr" bIns="91425" lIns="91425" spcFirstLastPara="1" rIns="91425" wrap="square" tIns="91425">
+              <a:noAutofit/>
+            </a:bodyPr>
+            <a:lstStyle/>
+            <a:p>
+              <a:pPr indent="0" lvl="0" marL="0" rtl="0" algn="l">
+                <a:spcBef>
+                  <a:spcPts val="0"/>
+                </a:spcBef>
+                <a:spcAft>
+                  <a:spcPts val="0"/>
+                </a:spcAft>
+                <a:buNone/>
+              </a:pPr>
+              <a:r>
+                <a:t/>
+              </a:r>
+              <a:endParaRPr/>
+            </a:p>
+          </p:txBody>
+        </p:sp>
+        <p:sp>
+          <p:nvSpPr>
+            <p:cNvPr id="163" name="Google Shape;163;p18"/>
+            <p:cNvSpPr/>
+            <p:nvPr/>
+          </p:nvSpPr>
+          <p:spPr>
+            <a:xfrm>
+              <a:off x="2641350" y="846250"/>
+              <a:ext cx="63975" cy="105075"/>
+            </a:xfrm>
+            <a:custGeom>
+              <a:rect b="b" l="l" r="r" t="t"/>
+              <a:pathLst>
+                <a:path extrusionOk="0" h="4203" w="2559">
+                  <a:moveTo>
+                    <a:pt x="2112" y="1"/>
+                  </a:moveTo>
+                  <a:lnTo>
+                    <a:pt x="1" y="2111"/>
+                  </a:lnTo>
+                  <a:lnTo>
+                    <a:pt x="2112" y="4202"/>
+                  </a:lnTo>
+                  <a:lnTo>
+                    <a:pt x="2558" y="3756"/>
+                  </a:lnTo>
+                  <a:lnTo>
+                    <a:pt x="894" y="2111"/>
+                  </a:lnTo>
+                  <a:lnTo>
+                    <a:pt x="2558" y="447"/>
+                  </a:lnTo>
+                  <a:lnTo>
+                    <a:pt x="2112" y="1"/>
+                  </a:lnTo>
+                  <a:close/>
+                </a:path>
+              </a:pathLst>
+            </a:custGeom>
+            <a:solidFill>
+              <a:srgbClr val="191919"/>
+            </a:solidFill>
+            <a:ln>
+              <a:noFill/>
+            </a:ln>
+          </p:spPr>
+          <p:txBody>
+            <a:bodyPr anchorCtr="0" anchor="ctr" bIns="91425" lIns="91425" spcFirstLastPara="1" rIns="91425" wrap="square" tIns="91425">
+              <a:noAutofit/>
+            </a:bodyPr>
+            <a:lstStyle/>
+            <a:p>
+              <a:pPr indent="0" lvl="0" marL="0" rtl="0" algn="l">
+                <a:spcBef>
+                  <a:spcPts val="0"/>
+                </a:spcBef>
+                <a:spcAft>
+                  <a:spcPts val="0"/>
+                </a:spcAft>
+                <a:buNone/>
+              </a:pPr>
+              <a:r>
+                <a:t/>
+              </a:r>
+              <a:endParaRPr/>
+            </a:p>
+          </p:txBody>
+        </p:sp>
+      </p:grpSp>
       <p:sp>
         <p:nvSpPr>
-          <p:cNvPr id="159" name="Google Shape;159;p18"/>
+          <p:cNvPr id="164" name="Google Shape;164;p18"/>
           <p:cNvSpPr txBox="1"/>
           <p:nvPr>
             <p:ph idx="1" type="body"/>
@@ -18154,7 +18682,7 @@
         <p:spPr>
           <a:xfrm>
             <a:off x="311700" y="1017725"/>
-            <a:ext cx="4260300" cy="3676800"/>
+            <a:ext cx="3974700" cy="3329400"/>
           </a:xfrm>
           <a:prstGeom prst="rect">
             <a:avLst/>
@@ -18181,12 +18709,29 @@
               <a:buNone/>
             </a:pPr>
             <a:r>
-              <a:rPr b="1" lang="en" sz="1300"/>
-              <a:t>Question: </a:t>
+              <a:rPr b="1" lang="en" sz="1500"/>
+              <a:t>Question:</a:t>
             </a:r>
+            <a:endParaRPr b="1" sz="1500"/>
+          </a:p>
+          <a:p>
+            <a:pPr indent="0" lvl="0" marL="0" rtl="0" algn="l">
+              <a:spcBef>
+                <a:spcPts val="1200"/>
+              </a:spcBef>
+              <a:spcAft>
+                <a:spcPts val="0"/>
+              </a:spcAft>
+              <a:buClr>
+                <a:schemeClr val="dk1"/>
+              </a:buClr>
+              <a:buSzPts val="1100"/>
+              <a:buFont typeface="Arial"/>
+              <a:buNone/>
+            </a:pPr>
             <a:r>
               <a:rPr lang="en" sz="1300"/>
-              <a:t>During adversarial training of PreActResNet-18 on CIFAR-10, how does independently selecting pixel-space or low-frequency DCT-masked PGD with equal probability at the start of each epoch affect the timing and severity of robust overfitting, compared with training exclusively against either attack?</a:t>
+              <a:t>How does randomly choosing pixel-space or low-frequency PGD each epoch affect when robust accuracy peaks and how far it declines, compared with training on either attack alone?</a:t>
             </a:r>
             <a:endParaRPr sz="1300"/>
           </a:p>
@@ -18206,12 +18751,7 @@
               <a:buNone/>
             </a:pPr>
             <a:r>
-              <a:rPr b="1" lang="en" sz="1300"/>
-              <a:t>Hypothesis: </a:t>
-            </a:r>
-            <a:r>
-              <a:rPr lang="en" sz="1300"/>
-              <a:t>With architecture, dataset, optimization schedule, perturbation budget, and checkpoint-evaluation schedule held fixed, mixed-domain training will produce robust-accuracy curves that differ from those of the single-domain conditions. In particular, the peak epoch, peak shape, or post-peak decline may change under pixel-space and/or low-frequency evaluation.</a:t>
+              <a:t/>
             </a:r>
             <a:endParaRPr sz="1300"/>
           </a:p>
@@ -18221,12 +18761,39 @@
                 <a:spcPts val="1200"/>
               </a:spcBef>
               <a:spcAft>
-                <a:spcPts val="1200"/>
-              </a:spcAft>
+                <a:spcPts val="0"/>
+              </a:spcAft>
+              <a:buClr>
+                <a:schemeClr val="dk1"/>
+              </a:buClr>
+              <a:buSzPts val="1100"/>
+              <a:buFont typeface="Arial"/>
               <a:buNone/>
             </a:pPr>
             <a:r>
-              <a:t/>
+              <a:rPr b="1" lang="en" sz="1500"/>
+              <a:t>Hypothesis:</a:t>
+            </a:r>
+            <a:endParaRPr b="1" sz="1500"/>
+          </a:p>
+          <a:p>
+            <a:pPr indent="0" lvl="0" marL="0" rtl="0" algn="l">
+              <a:spcBef>
+                <a:spcPts val="1200"/>
+              </a:spcBef>
+              <a:spcAft>
+                <a:spcPts val="1200"/>
+              </a:spcAft>
+              <a:buClr>
+                <a:schemeClr val="dk1"/>
+              </a:buClr>
+              <a:buSzPts val="1100"/>
+              <a:buFont typeface="Arial"/>
+              <a:buNone/>
+            </a:pPr>
+            <a:r>
+              <a:rPr lang="en" sz="1300"/>
+              <a:t>With other settings held fixed, mixed-domain training will change the peak timing, peak shape, or post-peak decline of robust accuracy under one or both evaluation attacks.</a:t>
             </a:r>
             <a:endParaRPr sz="1300"/>
           </a:p>
@@ -18234,7 +18801,7 @@
       </p:sp>
       <p:pic>
         <p:nvPicPr>
-          <p:cNvPr id="160" name="Google Shape;160;p18"/>
+          <p:cNvPr id="165" name="Google Shape;165;p18"/>
           <p:cNvPicPr preferRelativeResize="0"/>
           <p:nvPr/>
         </p:nvPicPr>
@@ -18261,14 +18828,14 @@
       </p:pic>
       <p:sp>
         <p:nvSpPr>
-          <p:cNvPr id="161" name="Google Shape;161;p18"/>
+          <p:cNvPr id="166" name="Google Shape;166;p18"/>
           <p:cNvSpPr txBox="1"/>
           <p:nvPr/>
         </p:nvSpPr>
         <p:spPr>
           <a:xfrm>
-            <a:off x="4822800" y="1957200"/>
-            <a:ext cx="3880200" cy="1229100"/>
+            <a:off x="4763425" y="2123500"/>
+            <a:ext cx="3880200" cy="1264500"/>
           </a:xfrm>
           <a:prstGeom prst="rect">
             <a:avLst/>
@@ -18297,14 +18864,14 @@
               <a:buNone/>
             </a:pPr>
             <a:r>
-              <a:rPr b="1" lang="en" sz="1300">
+              <a:rPr b="1" lang="en" sz="1500">
                 <a:solidFill>
                   <a:schemeClr val="dk2"/>
                 </a:solidFill>
               </a:rPr>
               <a:t>Why This Matters:</a:t>
             </a:r>
-            <a:endParaRPr b="1" sz="1300">
+            <a:endParaRPr b="1" sz="1500">
               <a:solidFill>
                 <a:schemeClr val="dk2"/>
               </a:solidFill>
@@ -18335,6 +18902,58 @@
           </a:p>
         </p:txBody>
       </p:sp>
+      <p:cxnSp>
+        <p:nvCxnSpPr>
+          <p:cNvPr id="167" name="Google Shape;167;p18"/>
+          <p:cNvCxnSpPr/>
+          <p:nvPr/>
+        </p:nvCxnSpPr>
+        <p:spPr>
+          <a:xfrm>
+            <a:off x="387475" y="2682425"/>
+            <a:ext cx="705600" cy="0"/>
+          </a:xfrm>
+          <a:prstGeom prst="straightConnector1">
+            <a:avLst/>
+          </a:prstGeom>
+          <a:noFill/>
+          <a:ln cap="flat" cmpd="sng" w="38100">
+            <a:solidFill>
+              <a:schemeClr val="dk2"/>
+            </a:solidFill>
+            <a:prstDash val="solid"/>
+            <a:round/>
+            <a:headEnd len="med" w="med" type="none"/>
+            <a:tailEnd len="med" w="med" type="none"/>
+          </a:ln>
+        </p:spPr>
+      </p:cxnSp>
+      <p:cxnSp>
+        <p:nvCxnSpPr>
+          <p:cNvPr id="168" name="Google Shape;168;p18"/>
+          <p:cNvCxnSpPr/>
+          <p:nvPr/>
+        </p:nvCxnSpPr>
+        <p:spPr>
+          <a:xfrm>
+            <a:off x="4535200" y="1298875"/>
+            <a:ext cx="0" cy="2944200"/>
+          </a:xfrm>
+          <a:prstGeom prst="straightConnector1">
+            <a:avLst/>
+          </a:prstGeom>
+          <a:noFill/>
+          <a:ln cap="flat" cmpd="sng" w="38100">
+            <a:solidFill>
+              <a:schemeClr val="dk2"/>
+            </a:solidFill>
+            <a:prstDash val="solid"/>
+            <a:round/>
+            <a:headEnd len="med" w="med" type="none"/>
+            <a:tailEnd len="med" w="med" type="none"/>
+          </a:ln>
+        </p:spPr>
+      </p:cxnSp>
     </p:spTree>
   </p:cSld>
   <p:clrMapOvr>
@@ -18348,7 +18967,7 @@
   <p:cSld>
     <p:spTree>
       <p:nvGrpSpPr>
-        <p:cNvPr id="165" name="Shape 165"/>
+        <p:cNvPr id="172" name="Shape 172"/>
         <p:cNvGrpSpPr/>
         <p:nvPr/>
       </p:nvGrpSpPr>
@@ -18362,7 +18981,7 @@
       </p:grpSpPr>
       <p:sp>
         <p:nvSpPr>
-          <p:cNvPr id="166" name="Google Shape;166;p19"/>
+          <p:cNvPr id="173" name="Google Shape;173;p19"/>
           <p:cNvSpPr txBox="1"/>
           <p:nvPr>
             <p:ph type="title"/>
@@ -18403,7 +19022,7 @@
       </p:sp>
       <p:grpSp>
         <p:nvGrpSpPr>
-          <p:cNvPr id="167" name="Google Shape;167;p19"/>
+          <p:cNvPr id="174" name="Google Shape;174;p19"/>
           <p:cNvGrpSpPr/>
           <p:nvPr/>
         </p:nvGrpSpPr>
@@ -18417,7 +19036,7 @@
         </p:grpSpPr>
         <p:sp>
           <p:nvSpPr>
-            <p:cNvPr id="168" name="Google Shape;168;p19"/>
+            <p:cNvPr id="175" name="Google Shape;175;p19"/>
             <p:cNvSpPr/>
             <p:nvPr/>
           </p:nvSpPr>
@@ -18486,7 +19105,7 @@
         </p:sp>
         <p:sp>
           <p:nvSpPr>
-            <p:cNvPr id="169" name="Google Shape;169;p19"/>
+            <p:cNvPr id="176" name="Google Shape;176;p19"/>
             <p:cNvSpPr/>
             <p:nvPr/>
           </p:nvSpPr>
@@ -18555,7 +19174,7 @@
         </p:sp>
         <p:sp>
           <p:nvSpPr>
-            <p:cNvPr id="170" name="Google Shape;170;p19"/>
+            <p:cNvPr id="177" name="Google Shape;177;p19"/>
             <p:cNvSpPr/>
             <p:nvPr/>
           </p:nvSpPr>
@@ -18624,7 +19243,7 @@
         </p:sp>
         <p:sp>
           <p:nvSpPr>
-            <p:cNvPr id="171" name="Google Shape;171;p19"/>
+            <p:cNvPr id="178" name="Google Shape;178;p19"/>
             <p:cNvSpPr/>
             <p:nvPr/>
           </p:nvSpPr>
@@ -18694,7 +19313,7 @@
       </p:grpSp>
       <p:grpSp>
         <p:nvGrpSpPr>
-          <p:cNvPr id="172" name="Google Shape;172;p19"/>
+          <p:cNvPr id="179" name="Google Shape;179;p19"/>
           <p:cNvGrpSpPr/>
           <p:nvPr/>
         </p:nvGrpSpPr>
@@ -18708,7 +19327,7 @@
         </p:grpSpPr>
         <p:sp>
           <p:nvSpPr>
-            <p:cNvPr id="173" name="Google Shape;173;p19"/>
+            <p:cNvPr id="180" name="Google Shape;180;p19"/>
             <p:cNvSpPr/>
             <p:nvPr/>
           </p:nvSpPr>
@@ -18777,7 +19396,7 @@
         </p:sp>
         <p:sp>
           <p:nvSpPr>
-            <p:cNvPr id="174" name="Google Shape;174;p19"/>
+            <p:cNvPr id="181" name="Google Shape;181;p19"/>
             <p:cNvSpPr/>
             <p:nvPr/>
           </p:nvSpPr>
@@ -18846,7 +19465,7 @@
         </p:sp>
         <p:sp>
           <p:nvSpPr>
-            <p:cNvPr id="175" name="Google Shape;175;p19"/>
+            <p:cNvPr id="182" name="Google Shape;182;p19"/>
             <p:cNvSpPr/>
             <p:nvPr/>
           </p:nvSpPr>
@@ -18915,7 +19534,7 @@
         </p:sp>
         <p:sp>
           <p:nvSpPr>
-            <p:cNvPr id="176" name="Google Shape;176;p19"/>
+            <p:cNvPr id="183" name="Google Shape;183;p19"/>
             <p:cNvSpPr/>
             <p:nvPr/>
           </p:nvSpPr>
@@ -18985,7 +19604,7 @@
       </p:grpSp>
       <p:sp>
         <p:nvSpPr>
-          <p:cNvPr id="177" name="Google Shape;177;p19"/>
+          <p:cNvPr id="184" name="Google Shape;184;p19"/>
           <p:cNvSpPr txBox="1"/>
           <p:nvPr>
             <p:ph idx="1" type="body"/>
@@ -19021,10 +19640,10 @@
               <a:buNone/>
             </a:pPr>
             <a:r>
-              <a:rPr b="1" lang="en" sz="1400"/>
-              <a:t>Pixel-space PGD</a:t>
+              <a:rPr b="1" lang="en" sz="1500"/>
+              <a:t>Pixel-space PGD:</a:t>
             </a:r>
-            <a:endParaRPr b="1" sz="1400"/>
+            <a:endParaRPr b="1" sz="1500"/>
           </a:p>
           <a:p>
             <a:pPr indent="0" lvl="0" marL="0" rtl="0" algn="l">
@@ -19042,10 +19661,10 @@
               <a:buNone/>
             </a:pPr>
             <a:r>
-              <a:rPr lang="en" sz="1400"/>
+              <a:rPr lang="en" sz="1300"/>
               <a:t>Changes pixel values within the allowed perturbation budget, without a frequency restriction.</a:t>
             </a:r>
-            <a:endParaRPr sz="1400"/>
+            <a:endParaRPr sz="1300"/>
           </a:p>
           <a:p>
             <a:pPr indent="0" lvl="0" marL="0" rtl="0" algn="l">
@@ -19063,10 +19682,9 @@
               <a:buNone/>
             </a:pPr>
             <a:r>
-              <a:rPr b="1" lang="en" sz="1400"/>
-              <a:t>Low-frequency DCT-masked PGD</a:t>
+              <a:t/>
             </a:r>
-            <a:endParaRPr b="1" sz="1400"/>
+            <a:endParaRPr sz="1300"/>
           </a:p>
           <a:p>
             <a:pPr indent="0" lvl="0" marL="0" rtl="0" algn="l">
@@ -19084,10 +19702,10 @@
               <a:buNone/>
             </a:pPr>
             <a:r>
-              <a:rPr lang="en" sz="1400"/>
-              <a:t>Uses the discrete cosine transform to retain an 8 × 8 block of low-frequency coefficients per color channel.</a:t>
+              <a:rPr b="1" lang="en" sz="1500"/>
+              <a:t>Low-frequency DCT-masked PGD:</a:t>
             </a:r>
-            <a:endParaRPr sz="1400"/>
+            <a:endParaRPr b="1" sz="1500"/>
           </a:p>
           <a:p>
             <a:pPr indent="0" lvl="0" marL="0" rtl="0" algn="l">
@@ -19095,21 +19713,57 @@
                 <a:spcPts val="1200"/>
               </a:spcBef>
               <a:spcAft>
-                <a:spcPts val="1200"/>
-              </a:spcAft>
+                <a:spcPts val="0"/>
+              </a:spcAft>
+              <a:buClr>
+                <a:schemeClr val="dk1"/>
+              </a:buClr>
+              <a:buSzPts val="1100"/>
+              <a:buFont typeface="Arial"/>
               <a:buNone/>
             </a:pPr>
             <a:r>
-              <a:rPr lang="en" sz="1400"/>
+              <a:rPr lang="en" sz="1300"/>
+              <a:t>Uses the discrete cosine transform to retain an 8 × 8 block of low-frequency coefficients per color channel.</a:t>
+            </a:r>
+            <a:endParaRPr sz="1300"/>
+          </a:p>
+          <a:p>
+            <a:pPr indent="0" lvl="0" marL="0" rtl="0" algn="l">
+              <a:spcBef>
+                <a:spcPts val="1200"/>
+              </a:spcBef>
+              <a:spcAft>
+                <a:spcPts val="0"/>
+              </a:spcAft>
+              <a:buNone/>
+            </a:pPr>
+            <a:r>
+              <a:t/>
+            </a:r>
+            <a:endParaRPr sz="1300"/>
+          </a:p>
+          <a:p>
+            <a:pPr indent="0" lvl="0" marL="0" rtl="0" algn="l">
+              <a:spcBef>
+                <a:spcPts val="1200"/>
+              </a:spcBef>
+              <a:spcAft>
+                <a:spcPts val="1200"/>
+              </a:spcAft>
+              <a:buNone/>
+            </a:pPr>
+            <a:r>
+              <a:rPr lang="en" sz="1300"/>
               <a:t>Both attacks use the same maximum pixel-change budget: ε = 8/255.</a:t>
             </a:r>
-            <a:endParaRPr sz="1400"/>
+            <a:endParaRPr sz="1300"/>
           </a:p>
         </p:txBody>
       </p:sp>
       <p:pic>
         <p:nvPicPr>
-          <p:cNvPr id="178" name="Google Shape;178;p19"/>
+          <p:cNvPr id="185" name="Google Shape;185;p19"/>
           <p:cNvPicPr preferRelativeResize="0"/>
           <p:nvPr/>
         </p:nvPicPr>
@@ -19136,12 +19790,12 @@
       </p:pic>
       <p:graphicFrame>
         <p:nvGraphicFramePr>
-          <p:cNvPr id="179" name="Google Shape;179;p19"/>
+          <p:cNvPr id="186" name="Google Shape;186;p19"/>
           <p:cNvGraphicFramePr/>
           <p:nvPr/>
         </p:nvGraphicFramePr>
         <p:xfrm>
-          <a:off x="4992200" y="1244838"/>
+          <a:off x="4873150" y="1244838"/>
           <a:ext cx="3000000" cy="3000000"/>
         </p:xfrm>
         <a:graphic>
@@ -19149,11 +19803,11 @@
             <a:tbl>
               <a:tblPr>
                 <a:noFill/>
-                <a:tableStyleId>{59B39CD7-D1CC-4C7E-91B1-2210CECFB6A5}</a:tableStyleId>
+                <a:tableStyleId>{A8ACAB11-ADF1-4D30-A053-DA9569484F10}</a:tableStyleId>
               </a:tblPr>
               <a:tblGrid>
-                <a:gridCol w="1338525"/>
-                <a:gridCol w="2501575"/>
+                <a:gridCol w="1380025"/>
+                <a:gridCol w="2579125"/>
               </a:tblGrid>
               <a:tr h="579150">
                 <a:tc>
@@ -19647,6 +20301,75 @@
           </a:graphicData>
         </a:graphic>
       </p:graphicFrame>
+      <p:cxnSp>
+        <p:nvCxnSpPr>
+          <p:cNvPr id="187" name="Google Shape;187;p19"/>
+          <p:cNvCxnSpPr/>
+          <p:nvPr/>
+        </p:nvCxnSpPr>
+        <p:spPr>
+          <a:xfrm>
+            <a:off x="387475" y="2271100"/>
+            <a:ext cx="705600" cy="0"/>
+          </a:xfrm>
+          <a:prstGeom prst="straightConnector1">
+            <a:avLst/>
+          </a:prstGeom>
+          <a:noFill/>
+          <a:ln cap="flat" cmpd="sng" w="38100">
+            <a:solidFill>
+              <a:schemeClr val="dk2"/>
+            </a:solidFill>
+            <a:prstDash val="solid"/>
+            <a:round/>
+            <a:headEnd len="med" w="med" type="none"/>
+            <a:tailEnd len="med" w="med" type="none"/>
+          </a:ln>
+        </p:spPr>
+      </p:cxnSp>
+      <p:sp>
+        <p:nvSpPr>
+          <p:cNvPr id="188" name="Google Shape;188;p19"/>
+          <p:cNvSpPr txBox="1"/>
+          <p:nvPr>
+            <p:ph idx="1" type="body"/>
+          </p:nvPr>
+        </p:nvSpPr>
+        <p:spPr>
+          <a:xfrm>
+            <a:off x="743350" y="4717600"/>
+            <a:ext cx="5436000" cy="333600"/>
+          </a:xfrm>
+          <a:prstGeom prst="rect">
+            <a:avLst/>
+          </a:prstGeom>
+        </p:spPr>
+        <p:txBody>
+          <a:bodyPr anchorCtr="0" anchor="t" bIns="91425" lIns="91425" spcFirstLastPara="1" rIns="91425" wrap="square" tIns="91425">
+            <a:noAutofit/>
+          </a:bodyPr>
+          <a:lstStyle/>
+          <a:p>
+            <a:pPr indent="0" lvl="0" marL="0" rtl="0" algn="l">
+              <a:lnSpc>
+                <a:spcPct val="150000"/>
+              </a:lnSpc>
+              <a:spcBef>
+                <a:spcPts val="0"/>
+              </a:spcBef>
+              <a:spcAft>
+                <a:spcPts val="0"/>
+              </a:spcAft>
+              <a:buNone/>
+            </a:pPr>
+            <a:r>
+              <a:rPr i="1" lang="en" sz="1300"/>
+              <a:t>(Low-frequency DCT approach: Guo et al. (2020), PDF p. 3.)</a:t>
+            </a:r>
+            <a:endParaRPr i="1" sz="1300"/>
+          </a:p>
+        </p:txBody>
+      </p:sp>
     </p:spTree>
   </p:cSld>
   <p:clrMapOvr>
@@ -19660,7 +20383,7 @@
   <p:cSld>
     <p:spTree>
       <p:nvGrpSpPr>
-        <p:cNvPr id="183" name="Shape 183"/>
+        <p:cNvPr id="192" name="Shape 192"/>
         <p:cNvGrpSpPr/>
         <p:nvPr/>
       </p:nvGrpSpPr>
@@ -19674,7 +20397,7 @@
       </p:grpSpPr>
       <p:sp>
         <p:nvSpPr>
-          <p:cNvPr id="184" name="Google Shape;184;p20"/>
+          <p:cNvPr id="193" name="Google Shape;193;p20"/>
           <p:cNvSpPr txBox="1"/>
           <p:nvPr>
             <p:ph type="title"/>
@@ -19715,7 +20438,7 @@
       </p:sp>
       <p:grpSp>
         <p:nvGrpSpPr>
-          <p:cNvPr id="185" name="Google Shape;185;p20"/>
+          <p:cNvPr id="194" name="Google Shape;194;p20"/>
           <p:cNvGrpSpPr/>
           <p:nvPr/>
         </p:nvGrpSpPr>
@@ -19729,7 +20452,7 @@
         </p:grpSpPr>
         <p:sp>
           <p:nvSpPr>
-            <p:cNvPr id="186" name="Google Shape;186;p20"/>
+            <p:cNvPr id="195" name="Google Shape;195;p20"/>
             <p:cNvSpPr/>
             <p:nvPr/>
           </p:nvSpPr>
@@ -19798,7 +20521,7 @@
         </p:sp>
         <p:sp>
           <p:nvSpPr>
-            <p:cNvPr id="187" name="Google Shape;187;p20"/>
+            <p:cNvPr id="196" name="Google Shape;196;p20"/>
             <p:cNvSpPr/>
             <p:nvPr/>
           </p:nvSpPr>
@@ -19867,7 +20590,7 @@
         </p:sp>
         <p:sp>
           <p:nvSpPr>
-            <p:cNvPr id="188" name="Google Shape;188;p20"/>
+            <p:cNvPr id="197" name="Google Shape;197;p20"/>
             <p:cNvSpPr/>
             <p:nvPr/>
           </p:nvSpPr>
@@ -19936,7 +20659,7 @@
         </p:sp>
         <p:sp>
           <p:nvSpPr>
-            <p:cNvPr id="189" name="Google Shape;189;p20"/>
+            <p:cNvPr id="198" name="Google Shape;198;p20"/>
             <p:cNvSpPr/>
             <p:nvPr/>
           </p:nvSpPr>
@@ -20006,7 +20729,7 @@
       </p:grpSp>
       <p:grpSp>
         <p:nvGrpSpPr>
-          <p:cNvPr id="190" name="Google Shape;190;p20"/>
+          <p:cNvPr id="199" name="Google Shape;199;p20"/>
           <p:cNvGrpSpPr/>
           <p:nvPr/>
         </p:nvGrpSpPr>
@@ -20020,7 +20743,7 @@
         </p:grpSpPr>
         <p:sp>
           <p:nvSpPr>
-            <p:cNvPr id="191" name="Google Shape;191;p20"/>
+            <p:cNvPr id="200" name="Google Shape;200;p20"/>
             <p:cNvSpPr/>
             <p:nvPr/>
           </p:nvSpPr>
@@ -20089,7 +20812,7 @@
         </p:sp>
         <p:sp>
           <p:nvSpPr>
-            <p:cNvPr id="192" name="Google Shape;192;p20"/>
+            <p:cNvPr id="201" name="Google Shape;201;p20"/>
             <p:cNvSpPr/>
             <p:nvPr/>
           </p:nvSpPr>
@@ -20158,7 +20881,7 @@
         </p:sp>
         <p:sp>
           <p:nvSpPr>
-            <p:cNvPr id="193" name="Google Shape;193;p20"/>
+            <p:cNvPr id="202" name="Google Shape;202;p20"/>
             <p:cNvSpPr/>
             <p:nvPr/>
           </p:nvSpPr>
@@ -20227,7 +20950,7 @@
         </p:sp>
         <p:sp>
           <p:nvSpPr>
-            <p:cNvPr id="194" name="Google Shape;194;p20"/>
+            <p:cNvPr id="203" name="Google Shape;203;p20"/>
             <p:cNvSpPr/>
             <p:nvPr/>
           </p:nvSpPr>
@@ -20297,7 +21020,7 @@
       </p:grpSp>
       <p:pic>
         <p:nvPicPr>
-          <p:cNvPr id="195" name="Google Shape;195;p20"/>
+          <p:cNvPr id="204" name="Google Shape;204;p20"/>
           <p:cNvPicPr preferRelativeResize="0"/>
           <p:nvPr/>
         </p:nvPicPr>
@@ -20324,7 +21047,7 @@
       </p:pic>
       <p:graphicFrame>
         <p:nvGraphicFramePr>
-          <p:cNvPr id="196" name="Google Shape;196;p20"/>
+          <p:cNvPr id="205" name="Google Shape;205;p20"/>
           <p:cNvGraphicFramePr/>
           <p:nvPr/>
         </p:nvGraphicFramePr>
@@ -20337,7 +21060,7 @@
             <a:tbl>
               <a:tblPr>
                 <a:noFill/>
-                <a:tableStyleId>{59B39CD7-D1CC-4C7E-91B1-2210CECFB6A5}</a:tableStyleId>
+                <a:tableStyleId>{A8ACAB11-ADF1-4D30-A053-DA9569484F10}</a:tableStyleId>
               </a:tblPr>
               <a:tblGrid>
                 <a:gridCol w="4115850"/>
@@ -20365,7 +21088,44 @@
                       <a:endParaRPr b="1"/>
                     </a:p>
                   </a:txBody>
-                  <a:tcPr marT="91425" marB="91425" marR="91425" marL="91425"/>
+                  <a:tcPr marT="91425" marB="91425" marR="91425" marL="91425">
+                    <a:lnL cap="flat" cmpd="sng" w="19050">
+                      <a:solidFill>
+                        <a:schemeClr val="dk1"/>
+                      </a:solidFill>
+                      <a:prstDash val="solid"/>
+                      <a:round/>
+                      <a:headEnd len="sm" w="sm" type="none"/>
+                      <a:tailEnd len="sm" w="sm" type="none"/>
+                    </a:lnL>
+                    <a:lnR cap="flat" cmpd="sng" w="19050">
+                      <a:solidFill>
+                        <a:schemeClr val="dk1"/>
+                      </a:solidFill>
+                      <a:prstDash val="solid"/>
+                      <a:round/>
+                      <a:headEnd len="sm" w="sm" type="none"/>
+                      <a:tailEnd len="sm" w="sm" type="none"/>
+                    </a:lnR>
+                    <a:lnT cap="flat" cmpd="sng" w="19050">
+                      <a:solidFill>
+                        <a:schemeClr val="dk1"/>
+                      </a:solidFill>
+                      <a:prstDash val="solid"/>
+                      <a:round/>
+                      <a:headEnd len="sm" w="sm" type="none"/>
+                      <a:tailEnd len="sm" w="sm" type="none"/>
+                    </a:lnT>
+                    <a:lnB cap="flat" cmpd="sng" w="19050">
+                      <a:solidFill>
+                        <a:schemeClr val="dk1"/>
+                      </a:solidFill>
+                      <a:prstDash val="solid"/>
+                      <a:round/>
+                      <a:headEnd len="sm" w="sm" type="none"/>
+                      <a:tailEnd len="sm" w="sm" type="none"/>
+                    </a:lnB>
+                  </a:tcPr>
                 </a:tc>
                 <a:tc>
                   <a:txBody>
@@ -20388,7 +21148,44 @@
                       <a:endParaRPr b="1"/>
                     </a:p>
                   </a:txBody>
-                  <a:tcPr marT="91425" marB="91425" marR="91425" marL="91425"/>
+                  <a:tcPr marT="91425" marB="91425" marR="91425" marL="91425">
+                    <a:lnL cap="flat" cmpd="sng" w="19050">
+                      <a:solidFill>
+                        <a:schemeClr val="dk1"/>
+                      </a:solidFill>
+                      <a:prstDash val="solid"/>
+                      <a:round/>
+                      <a:headEnd len="sm" w="sm" type="none"/>
+                      <a:tailEnd len="sm" w="sm" type="none"/>
+                    </a:lnL>
+                    <a:lnR cap="flat" cmpd="sng" w="19050">
+                      <a:solidFill>
+                        <a:schemeClr val="dk1"/>
+                      </a:solidFill>
+                      <a:prstDash val="solid"/>
+                      <a:round/>
+                      <a:headEnd len="sm" w="sm" type="none"/>
+                      <a:tailEnd len="sm" w="sm" type="none"/>
+                    </a:lnR>
+                    <a:lnT cap="flat" cmpd="sng" w="19050">
+                      <a:solidFill>
+                        <a:schemeClr val="dk1"/>
+                      </a:solidFill>
+                      <a:prstDash val="solid"/>
+                      <a:round/>
+                      <a:headEnd len="sm" w="sm" type="none"/>
+                      <a:tailEnd len="sm" w="sm" type="none"/>
+                    </a:lnT>
+                    <a:lnB cap="flat" cmpd="sng" w="19050">
+                      <a:solidFill>
+                        <a:schemeClr val="dk1"/>
+                      </a:solidFill>
+                      <a:prstDash val="solid"/>
+                      <a:round/>
+                      <a:headEnd len="sm" w="sm" type="none"/>
+                      <a:tailEnd len="sm" w="sm" type="none"/>
+                    </a:lnB>
+                  </a:tcPr>
                 </a:tc>
               </a:tr>
               <a:tr h="2534600">
@@ -20499,7 +21296,44 @@
                       <a:endParaRPr/>
                     </a:p>
                   </a:txBody>
-                  <a:tcPr marT="91425" marB="91425" marR="91425" marL="91425"/>
+                  <a:tcPr marT="91425" marB="91425" marR="91425" marL="91425">
+                    <a:lnL cap="flat" cmpd="sng" w="19050">
+                      <a:solidFill>
+                        <a:schemeClr val="dk1"/>
+                      </a:solidFill>
+                      <a:prstDash val="solid"/>
+                      <a:round/>
+                      <a:headEnd len="sm" w="sm" type="none"/>
+                      <a:tailEnd len="sm" w="sm" type="none"/>
+                    </a:lnL>
+                    <a:lnR cap="flat" cmpd="sng" w="19050">
+                      <a:solidFill>
+                        <a:schemeClr val="dk1"/>
+                      </a:solidFill>
+                      <a:prstDash val="solid"/>
+                      <a:round/>
+                      <a:headEnd len="sm" w="sm" type="none"/>
+                      <a:tailEnd len="sm" w="sm" type="none"/>
+                    </a:lnR>
+                    <a:lnT cap="flat" cmpd="sng" w="19050">
+                      <a:solidFill>
+                        <a:schemeClr val="dk1"/>
+                      </a:solidFill>
+                      <a:prstDash val="solid"/>
+                      <a:round/>
+                      <a:headEnd len="sm" w="sm" type="none"/>
+                      <a:tailEnd len="sm" w="sm" type="none"/>
+                    </a:lnT>
+                    <a:lnB cap="flat" cmpd="sng" w="19050">
+                      <a:solidFill>
+                        <a:schemeClr val="dk1"/>
+                      </a:solidFill>
+                      <a:prstDash val="solid"/>
+                      <a:round/>
+                      <a:headEnd len="sm" w="sm" type="none"/>
+                      <a:tailEnd len="sm" w="sm" type="none"/>
+                    </a:lnB>
+                  </a:tcPr>
                 </a:tc>
                 <a:tc>
                   <a:txBody>
@@ -20591,7 +21425,44 @@
                       <a:endParaRPr/>
                     </a:p>
                   </a:txBody>
-                  <a:tcPr marT="91425" marB="91425" marR="91425" marL="91425"/>
+                  <a:tcPr marT="91425" marB="91425" marR="91425" marL="91425">
+                    <a:lnL cap="flat" cmpd="sng" w="19050">
+                      <a:solidFill>
+                        <a:schemeClr val="dk1"/>
+                      </a:solidFill>
+                      <a:prstDash val="solid"/>
+                      <a:round/>
+                      <a:headEnd len="sm" w="sm" type="none"/>
+                      <a:tailEnd len="sm" w="sm" type="none"/>
+                    </a:lnL>
+                    <a:lnR cap="flat" cmpd="sng" w="19050">
+                      <a:solidFill>
+                        <a:schemeClr val="dk1"/>
+                      </a:solidFill>
+                      <a:prstDash val="solid"/>
+                      <a:round/>
+                      <a:headEnd len="sm" w="sm" type="none"/>
+                      <a:tailEnd len="sm" w="sm" type="none"/>
+                    </a:lnR>
+                    <a:lnT cap="flat" cmpd="sng" w="19050">
+                      <a:solidFill>
+                        <a:schemeClr val="dk1"/>
+                      </a:solidFill>
+                      <a:prstDash val="solid"/>
+                      <a:round/>
+                      <a:headEnd len="sm" w="sm" type="none"/>
+                      <a:tailEnd len="sm" w="sm" type="none"/>
+                    </a:lnT>
+                    <a:lnB cap="flat" cmpd="sng" w="19050">
+                      <a:solidFill>
+                        <a:schemeClr val="dk1"/>
+                      </a:solidFill>
+                      <a:prstDash val="solid"/>
+                      <a:round/>
+                      <a:headEnd len="sm" w="sm" type="none"/>
+                      <a:tailEnd len="sm" w="sm" type="none"/>
+                    </a:lnB>
+                  </a:tcPr>
                 </a:tc>
               </a:tr>
             </a:tbl>
@@ -20600,7 +21471,7 @@
       </p:graphicFrame>
       <p:sp>
         <p:nvSpPr>
-          <p:cNvPr id="197" name="Google Shape;197;p20"/>
+          <p:cNvPr id="206" name="Google Shape;206;p20"/>
           <p:cNvSpPr txBox="1"/>
           <p:nvPr>
             <p:ph idx="1" type="body"/>
@@ -20658,6 +21529,49 @@
           </a:p>
         </p:txBody>
       </p:sp>
+      <p:sp>
+        <p:nvSpPr>
+          <p:cNvPr id="207" name="Google Shape;207;p20"/>
+          <p:cNvSpPr txBox="1"/>
+          <p:nvPr>
+            <p:ph idx="1" type="body"/>
+          </p:nvPr>
+        </p:nvSpPr>
+        <p:spPr>
+          <a:xfrm>
+            <a:off x="743350" y="4717600"/>
+            <a:ext cx="7841100" cy="333600"/>
+          </a:xfrm>
+          <a:prstGeom prst="rect">
+            <a:avLst/>
+          </a:prstGeom>
+        </p:spPr>
+        <p:txBody>
+          <a:bodyPr anchorCtr="0" anchor="t" bIns="91425" lIns="91425" spcFirstLastPara="1" rIns="91425" wrap="square" tIns="91425">
+            <a:noAutofit/>
+          </a:bodyPr>
+          <a:lstStyle/>
+          <a:p>
+            <a:pPr indent="0" lvl="0" marL="0" rtl="0" algn="l">
+              <a:lnSpc>
+                <a:spcPct val="150000"/>
+              </a:lnSpc>
+              <a:spcBef>
+                <a:spcPts val="0"/>
+              </a:spcBef>
+              <a:spcAft>
+                <a:spcPts val="0"/>
+              </a:spcAft>
+              <a:buNone/>
+            </a:pPr>
+            <a:r>
+              <a:rPr i="1" lang="en" sz="1300"/>
+              <a:t>Architecture: He et al. (2016). Dataset: Krizhevsky (2009). Baseline implementation: Rice et al. (2020).</a:t>
+            </a:r>
+            <a:endParaRPr i="1" sz="1300"/>
+          </a:p>
+        </p:txBody>
+      </p:sp>
     </p:spTree>
   </p:cSld>
   <p:clrMapOvr>
@@ -20671,7 +21585,7 @@
   <p:cSld>
     <p:spTree>
       <p:nvGrpSpPr>
-        <p:cNvPr id="201" name="Shape 201"/>
+        <p:cNvPr id="211" name="Shape 211"/>
         <p:cNvGrpSpPr/>
         <p:nvPr/>
       </p:nvGrpSpPr>
@@ -20685,7 +21599,7 @@
       </p:grpSpPr>
       <p:grpSp>
         <p:nvGrpSpPr>
-          <p:cNvPr id="202" name="Google Shape;202;p21"/>
+          <p:cNvPr id="212" name="Google Shape;212;p21"/>
           <p:cNvGrpSpPr/>
           <p:nvPr/>
         </p:nvGrpSpPr>
@@ -20699,7 +21613,7 @@
         </p:grpSpPr>
         <p:sp>
           <p:nvSpPr>
-            <p:cNvPr id="203" name="Google Shape;203;p21"/>
+            <p:cNvPr id="213" name="Google Shape;213;p21"/>
             <p:cNvSpPr/>
             <p:nvPr/>
           </p:nvSpPr>
@@ -20768,7 +21682,7 @@
         </p:sp>
         <p:sp>
           <p:nvSpPr>
-            <p:cNvPr id="204" name="Google Shape;204;p21"/>
+            <p:cNvPr id="214" name="Google Shape;214;p21"/>
             <p:cNvSpPr/>
             <p:nvPr/>
           </p:nvSpPr>
@@ -20837,7 +21751,7 @@
         </p:sp>
         <p:sp>
           <p:nvSpPr>
-            <p:cNvPr id="205" name="Google Shape;205;p21"/>
+            <p:cNvPr id="215" name="Google Shape;215;p21"/>
             <p:cNvSpPr/>
             <p:nvPr/>
           </p:nvSpPr>
@@ -20906,7 +21820,7 @@
         </p:sp>
         <p:sp>
           <p:nvSpPr>
-            <p:cNvPr id="206" name="Google Shape;206;p21"/>
+            <p:cNvPr id="216" name="Google Shape;216;p21"/>
             <p:cNvSpPr/>
             <p:nvPr/>
           </p:nvSpPr>
@@ -20976,7 +21890,7 @@
       </p:grpSp>
       <p:grpSp>
         <p:nvGrpSpPr>
-          <p:cNvPr id="207" name="Google Shape;207;p21"/>
+          <p:cNvPr id="217" name="Google Shape;217;p21"/>
           <p:cNvGrpSpPr/>
           <p:nvPr/>
         </p:nvGrpSpPr>
@@ -20990,7 +21904,7 @@
         </p:grpSpPr>
         <p:sp>
           <p:nvSpPr>
-            <p:cNvPr id="208" name="Google Shape;208;p21"/>
+            <p:cNvPr id="218" name="Google Shape;218;p21"/>
             <p:cNvSpPr/>
             <p:nvPr/>
           </p:nvSpPr>
@@ -21059,7 +21973,7 @@
         </p:sp>
         <p:sp>
           <p:nvSpPr>
-            <p:cNvPr id="209" name="Google Shape;209;p21"/>
+            <p:cNvPr id="219" name="Google Shape;219;p21"/>
             <p:cNvSpPr/>
             <p:nvPr/>
           </p:nvSpPr>
@@ -21128,7 +22042,7 @@
         </p:sp>
         <p:sp>
           <p:nvSpPr>
-            <p:cNvPr id="210" name="Google Shape;210;p21"/>
+            <p:cNvPr id="220" name="Google Shape;220;p21"/>
             <p:cNvSpPr/>
             <p:nvPr/>
           </p:nvSpPr>
@@ -21197,7 +22111,7 @@
         </p:sp>
         <p:sp>
           <p:nvSpPr>
-            <p:cNvPr id="211" name="Google Shape;211;p21"/>
+            <p:cNvPr id="221" name="Google Shape;221;p21"/>
             <p:cNvSpPr/>
             <p:nvPr/>
           </p:nvSpPr>
@@ -21267,7 +22181,7 @@
       </p:grpSp>
       <p:pic>
         <p:nvPicPr>
-          <p:cNvPr id="212" name="Google Shape;212;p21" title="Screenshot 2026-09-14 at 11.29.33 PM.png"/>
+          <p:cNvPr id="222" name="Google Shape;222;p21" title="Screenshot 2026-09-14 at 11.29.33 PM.png"/>
           <p:cNvPicPr preferRelativeResize="0"/>
           <p:nvPr/>
         </p:nvPicPr>
@@ -21280,8 +22194,8 @@
         </p:blipFill>
         <p:spPr>
           <a:xfrm>
-            <a:off x="152400" y="1017725"/>
-            <a:ext cx="8839199" cy="3330450"/>
+            <a:off x="435013" y="1015562"/>
+            <a:ext cx="8273987" cy="3117474"/>
           </a:xfrm>
           <a:prstGeom prst="rect">
             <a:avLst/>
@@ -21294,7 +22208,7 @@
       </p:pic>
       <p:sp>
         <p:nvSpPr>
-          <p:cNvPr id="213" name="Google Shape;213;p21"/>
+          <p:cNvPr id="223" name="Google Shape;223;p21"/>
           <p:cNvSpPr txBox="1"/>
           <p:nvPr>
             <p:ph type="title"/>
@@ -21327,7 +22241,7 @@
             </a:pPr>
             <a:r>
               <a:rPr lang="en" sz="2220"/>
-              <a:t>Pixel-Only Training Reproduces Robust Overfitting</a:t>
+              <a:t>Pixel-Only Training: Evaluation Results</a:t>
             </a:r>
             <a:endParaRPr sz="2220"/>
           </a:p>
@@ -21335,7 +22249,7 @@
       </p:sp>
       <p:pic>
         <p:nvPicPr>
-          <p:cNvPr id="214" name="Google Shape;214;p21"/>
+          <p:cNvPr id="224" name="Google Shape;224;p21"/>
           <p:cNvPicPr preferRelativeResize="0"/>
           <p:nvPr/>
         </p:nvPicPr>
@@ -21360,6 +22274,89 @@
           </a:ln>
         </p:spPr>
       </p:pic>
+      <p:sp>
+        <p:nvSpPr>
+          <p:cNvPr id="225" name="Google Shape;225;p21"/>
+          <p:cNvSpPr txBox="1"/>
+          <p:nvPr/>
+        </p:nvSpPr>
+        <p:spPr>
+          <a:xfrm>
+            <a:off x="311700" y="4295538"/>
+            <a:ext cx="7113600" cy="384900"/>
+          </a:xfrm>
+          <a:prstGeom prst="rect">
+            <a:avLst/>
+          </a:prstGeom>
+          <a:noFill/>
+          <a:ln>
+            <a:noFill/>
+          </a:ln>
+        </p:spPr>
+        <p:txBody>
+          <a:bodyPr anchorCtr="0" anchor="t" bIns="91425" lIns="91425" spcFirstLastPara="1" rIns="91425" wrap="square" tIns="91425">
+            <a:spAutoFit/>
+          </a:bodyPr>
+          <a:lstStyle/>
+          <a:p>
+            <a:pPr indent="0" lvl="0" marL="0" rtl="0" algn="l">
+              <a:lnSpc>
+                <a:spcPct val="115000"/>
+              </a:lnSpc>
+              <a:spcBef>
+                <a:spcPts val="0"/>
+              </a:spcBef>
+              <a:spcAft>
+                <a:spcPts val="1200"/>
+              </a:spcAft>
+              <a:buNone/>
+            </a:pPr>
+            <a:r>
+              <a:rPr b="1" lang="en" sz="1300">
+                <a:solidFill>
+                  <a:schemeClr val="dk2"/>
+                </a:solidFill>
+              </a:rPr>
+              <a:t>Result: </a:t>
+            </a:r>
+            <a:r>
+              <a:rPr lang="en" sz="1300">
+                <a:solidFill>
+                  <a:schemeClr val="dk2"/>
+                </a:solidFill>
+              </a:rPr>
+              <a:t>Pixel-only training reproduces robust overfitting across all five seeds.</a:t>
+            </a:r>
+            <a:endParaRPr/>
+          </a:p>
+        </p:txBody>
+      </p:sp>
+      <p:cxnSp>
+        <p:nvCxnSpPr>
+          <p:cNvPr id="226" name="Google Shape;226;p21"/>
+          <p:cNvCxnSpPr/>
+          <p:nvPr/>
+        </p:nvCxnSpPr>
+        <p:spPr>
+          <a:xfrm>
+            <a:off x="395850" y="4270775"/>
+            <a:ext cx="714300" cy="0"/>
+          </a:xfrm>
+          <a:prstGeom prst="straightConnector1">
+            <a:avLst/>
+          </a:prstGeom>
+          <a:noFill/>
+          <a:ln cap="flat" cmpd="sng" w="38100">
+            <a:solidFill>
+              <a:schemeClr val="dk2"/>
+            </a:solidFill>
+            <a:prstDash val="solid"/>
+            <a:round/>
+            <a:headEnd len="med" w="med" type="none"/>
+            <a:tailEnd len="med" w="med" type="none"/>
+          </a:ln>
+        </p:spPr>
+      </p:cxnSp>
     </p:spTree>
   </p:cSld>
   <p:clrMapOvr>
@@ -21369,6 +22366,285 @@
 </file>
 
 <file path=ppt/theme/theme1.xml><?xml version="1.0" encoding="utf-8"?>
+<a:theme xmlns:a="http://schemas.openxmlformats.org/drawingml/2006/main" xmlns:r="http://schemas.openxmlformats.org/officeDocument/2006/relationships" name="Simple Light">
+  <a:themeElements>
+    <a:clrScheme name="Simple Light">
+      <a:dk1>
+        <a:srgbClr val="000000"/>
+      </a:dk1>
+      <a:lt1>
+        <a:srgbClr val="FFFFFF"/>
+      </a:lt1>
+      <a:dk2>
+        <a:srgbClr val="595959"/>
+      </a:dk2>
+      <a:lt2>
+        <a:srgbClr val="EEEEEE"/>
+      </a:lt2>
+      <a:accent1>
+        <a:srgbClr val="4285F4"/>
+      </a:accent1>
+      <a:accent2>
+        <a:srgbClr val="212121"/>
+      </a:accent2>
+      <a:accent3>
+        <a:srgbClr val="78909C"/>
+      </a:accent3>
+      <a:accent4>
+        <a:srgbClr val="FFAB40"/>
+      </a:accent4>
+      <a:accent5>
+        <a:srgbClr val="0097A7"/>
+      </a:accent5>
+      <a:accent6>
+        <a:srgbClr val="EEFF41"/>
+      </a:accent6>
+      <a:hlink>
+        <a:srgbClr val="0097A7"/>
+      </a:hlink>
+      <a:folHlink>
+        <a:srgbClr val="0097A7"/>
+      </a:folHlink>
+    </a:clrScheme>
+    <a:fontScheme name="Office">
+      <a:majorFont>
+        <a:latin typeface="Arial"/>
+        <a:ea typeface=""/>
+        <a:cs typeface=""/>
+        <a:font script="Jpan" typeface="ＭＳ Ｐゴシック"/>
+        <a:font script="Hang" typeface="맑은 고딕"/>
+        <a:font script="Hans" typeface="宋体"/>
+        <a:font script="Hant" typeface="新細明體"/>
+        <a:font script="Arab" typeface="Times New Roman"/>
+        <a:font script="Hebr" typeface="Times New Roman"/>
+        <a:font script="Thai" typeface="Angsana New"/>
+        <a:font script="Ethi" typeface="Nyala"/>
+        <a:font script="Beng" typeface="Vrinda"/>
+        <a:font script="Gujr" typeface="Shruti"/>
+        <a:font script="Khmr" typeface="MoolBoran"/>
+        <a:font script="Knda" typeface="Tunga"/>
+        <a:font script="Guru" typeface="Raavi"/>
+        <a:font script="Cans" typeface="Euphemia"/>
+        <a:font script="Cher" typeface="Plantagenet Cherokee"/>
+        <a:font script="Yiii" typeface="Microsoft Yi Baiti"/>
+        <a:font script="Tibt" typeface="Microsoft Himalaya"/>
+        <a:font script="Thaa" typeface="MV Boli"/>
+        <a:font script="Deva" typeface="Mangal"/>
+        <a:font script="Telu" typeface="Gautami"/>
+        <a:font script="Taml" typeface="Latha"/>
+        <a:font script="Syrc" typeface="Estrangelo Edessa"/>
+        <a:font script="Orya" typeface="Kalinga"/>
+        <a:font script="Mlym" typeface="Kartika"/>
+        <a:font script="Laoo" typeface="DokChampa"/>
+        <a:font script="Sinh" typeface="Iskoola Pota"/>
+        <a:font script="Mong" typeface="Mongolian Baiti"/>
+        <a:font script="Viet" typeface="Times New Roman"/>
+        <a:font script="Uigh" typeface="Microsoft Uighur"/>
+        <a:font script="Geor" typeface="Sylfaen"/>
+      </a:majorFont>
+      <a:minorFont>
+        <a:latin typeface="Arial"/>
+        <a:ea typeface=""/>
+        <a:cs typeface=""/>
+        <a:font script="Jpan" typeface="ＭＳ Ｐゴシック"/>
+        <a:font script="Hang" typeface="맑은 고딕"/>
+        <a:font script="Hans" typeface="宋体"/>
+        <a:font script="Hant" typeface="新細明體"/>
+        <a:font script="Arab" typeface="Arial"/>
+        <a:font script="Hebr" typeface="Arial"/>
+        <a:font script="Thai" typeface="Cordia New"/>
+        <a:font script="Ethi" typeface="Nyala"/>
+        <a:font script="Beng" typeface="Vrinda"/>
+        <a:font script="Gujr" typeface="Shruti"/>
+        <a:font script="Khmr" typeface="DaunPenh"/>
+        <a:font script="Knda" typeface="Tunga"/>
+        <a:font script="Guru" typeface="Raavi"/>
+        <a:font script="Cans" typeface="Euphemia"/>
+        <a:font script="Cher" typeface="Plantagenet Cherokee"/>
+        <a:font script="Yiii" typeface="Microsoft Yi Baiti"/>
+        <a:font script="Tibt" typeface="Microsoft Himalaya"/>
+        <a:font script="Thaa" typeface="MV Boli"/>
+        <a:font script="Deva" typeface="Mangal"/>
+        <a:font script="Telu" typeface="Gautami"/>
+        <a:font script="Taml" typeface="Latha"/>
+        <a:font script="Syrc" typeface="Estrangelo Edessa"/>
+        <a:font script="Orya" typeface="Kalinga"/>
+        <a:font script="Mlym" typeface="Kartika"/>
+        <a:font script="Laoo" typeface="DokChampa"/>
+        <a:font script="Sinh" typeface="Iskoola Pota"/>
+        <a:font script="Mong" typeface="Mongolian Baiti"/>
+        <a:font script="Viet" typeface="Arial"/>
+        <a:font script="Uigh" typeface="Microsoft Uighur"/>
+        <a:font script="Geor" typeface="Sylfaen"/>
+      </a:minorFont>
+    </a:fontScheme>
+    <a:fmtScheme name="Office">
+      <a:fillStyleLst>
+        <a:solidFill>
+          <a:schemeClr val="phClr"/>
+        </a:solidFill>
+        <a:gradFill rotWithShape="1">
+          <a:gsLst>
+            <a:gs pos="0">
+              <a:schemeClr val="phClr">
+                <a:tint val="50000"/>
+                <a:satMod val="300000"/>
+              </a:schemeClr>
+            </a:gs>
+            <a:gs pos="35000">
+              <a:schemeClr val="phClr">
+                <a:tint val="37000"/>
+                <a:satMod val="300000"/>
+              </a:schemeClr>
+            </a:gs>
+            <a:gs pos="100000">
+              <a:schemeClr val="phClr">
+                <a:tint val="15000"/>
+                <a:satMod val="350000"/>
+              </a:schemeClr>
+            </a:gs>
+          </a:gsLst>
+          <a:lin ang="16200000" scaled="1"/>
+        </a:gradFill>
+        <a:gradFill rotWithShape="1">
+          <a:gsLst>
+            <a:gs pos="0">
+              <a:schemeClr val="phClr">
+                <a:tint val="100000"/>
+                <a:shade val="100000"/>
+                <a:satMod val="130000"/>
+              </a:schemeClr>
+            </a:gs>
+            <a:gs pos="100000">
+              <a:schemeClr val="phClr">
+                <a:tint val="50000"/>
+                <a:shade val="100000"/>
+                <a:satMod val="350000"/>
+              </a:schemeClr>
+            </a:gs>
+          </a:gsLst>
+          <a:lin ang="16200000" scaled="0"/>
+        </a:gradFill>
+      </a:fillStyleLst>
+      <a:lnStyleLst>
+        <a:ln w="9525" cap="flat" cmpd="sng" algn="ctr">
+          <a:solidFill>
+            <a:schemeClr val="phClr">
+              <a:shade val="95000"/>
+              <a:satMod val="105000"/>
+            </a:schemeClr>
+          </a:solidFill>
+          <a:prstDash val="solid"/>
+        </a:ln>
+        <a:ln w="25400" cap="flat" cmpd="sng" algn="ctr">
+          <a:solidFill>
+            <a:schemeClr val="phClr"/>
+          </a:solidFill>
+          <a:prstDash val="solid"/>
+        </a:ln>
+        <a:ln w="38100" cap="flat" cmpd="sng" algn="ctr">
+          <a:solidFill>
+            <a:schemeClr val="phClr"/>
+          </a:solidFill>
+          <a:prstDash val="solid"/>
+        </a:ln>
+      </a:lnStyleLst>
+      <a:effectStyleLst>
+        <a:effectStyle>
+          <a:effectLst>
+            <a:outerShdw blurRad="40000" dist="20000" dir="5400000" rotWithShape="0">
+              <a:srgbClr val="000000">
+                <a:alpha val="38000"/>
+              </a:srgbClr>
+            </a:outerShdw>
+          </a:effectLst>
+        </a:effectStyle>
+        <a:effectStyle>
+          <a:effectLst>
+            <a:outerShdw blurRad="40000" dist="23000" dir="5400000" rotWithShape="0">
+              <a:srgbClr val="000000">
+                <a:alpha val="35000"/>
+              </a:srgbClr>
+            </a:outerShdw>
+          </a:effectLst>
+        </a:effectStyle>
+        <a:effectStyle>
+          <a:effectLst>
+            <a:outerShdw blurRad="40000" dist="23000" dir="5400000" rotWithShape="0">
+              <a:srgbClr val="000000">
+                <a:alpha val="35000"/>
+              </a:srgbClr>
+            </a:outerShdw>
+          </a:effectLst>
+          <a:scene3d>
+            <a:camera prst="orthographicFront">
+              <a:rot lat="0" lon="0" rev="0"/>
+            </a:camera>
+            <a:lightRig rig="threePt" dir="t">
+              <a:rot lat="0" lon="0" rev="1200000"/>
+            </a:lightRig>
+          </a:scene3d>
+          <a:sp3d>
+            <a:bevelT w="63500" h="25400"/>
+          </a:sp3d>
+        </a:effectStyle>
+      </a:effectStyleLst>
+      <a:bgFillStyleLst>
+        <a:solidFill>
+          <a:schemeClr val="phClr"/>
+        </a:solidFill>
+        <a:gradFill rotWithShape="1">
+          <a:gsLst>
+            <a:gs pos="0">
+              <a:schemeClr val="phClr">
+                <a:tint val="40000"/>
+                <a:satMod val="350000"/>
+              </a:schemeClr>
+            </a:gs>
+            <a:gs pos="40000">
+              <a:schemeClr val="phClr">
+                <a:tint val="45000"/>
+                <a:shade val="99000"/>
+                <a:satMod val="350000"/>
+              </a:schemeClr>
+            </a:gs>
+            <a:gs pos="100000">
+              <a:schemeClr val="phClr">
+                <a:shade val="20000"/>
+                <a:satMod val="255000"/>
+              </a:schemeClr>
+            </a:gs>
+          </a:gsLst>
+          <a:path path="circle">
+            <a:fillToRect l="50000" t="-80000" r="50000" b="180000"/>
+          </a:path>
+        </a:gradFill>
+        <a:gradFill rotWithShape="1">
+          <a:gsLst>
+            <a:gs pos="0">
+              <a:schemeClr val="phClr">
+                <a:tint val="80000"/>
+                <a:satMod val="300000"/>
+              </a:schemeClr>
+            </a:gs>
+            <a:gs pos="100000">
+              <a:schemeClr val="phClr">
+                <a:shade val="30000"/>
+                <a:satMod val="200000"/>
+              </a:schemeClr>
+            </a:gs>
+          </a:gsLst>
+          <a:path path="circle">
+            <a:fillToRect l="50000" t="50000" r="50000" b="50000"/>
+          </a:path>
+        </a:gradFill>
+      </a:bgFillStyleLst>
+    </a:fmtScheme>
+  </a:themeElements>
+</a:theme>
+</file>
+
+<file path=ppt/theme/theme2.xml><?xml version="1.0" encoding="utf-8"?>
 <a:theme xmlns:a="http://schemas.openxmlformats.org/drawingml/2006/main" xmlns:r="http://schemas.openxmlformats.org/officeDocument/2006/relationships">
   <a:themeElements>
     <a:clrScheme name="Default">
@@ -21645,283 +22921,4 @@
     </a:fmtScheme>
   </a:themeElements>
 </a:theme>
-</file>
-
-<file path=ppt/theme/theme2.xml><?xml version="1.0" encoding="utf-8"?>
-<a:theme xmlns:a="http://schemas.openxmlformats.org/drawingml/2006/main" xmlns:r="http://schemas.openxmlformats.org/officeDocument/2006/relationships" name="Simple Light">
-  <a:themeElements>
-    <a:clrScheme name="Simple Light">
-      <a:dk1>
-        <a:srgbClr val="000000"/>
-      </a:dk1>
-      <a:lt1>
-        <a:srgbClr val="FFFFFF"/>
-      </a:lt1>
-      <a:dk2>
-        <a:srgbClr val="595959"/>
-      </a:dk2>
-      <a:lt2>
-        <a:srgbClr val="EEEEEE"/>
-      </a:lt2>
-      <a:accent1>
-        <a:srgbClr val="4285F4"/>
-      </a:accent1>
-      <a:accent2>
-        <a:srgbClr val="212121"/>
-      </a:accent2>
-      <a:accent3>
-        <a:srgbClr val="78909C"/>
-      </a:accent3>
-      <a:accent4>
-        <a:srgbClr val="FFAB40"/>
-      </a:accent4>
-      <a:accent5>
-        <a:srgbClr val="0097A7"/>
-      </a:accent5>
-      <a:accent6>
-        <a:srgbClr val="EEFF41"/>
-      </a:accent6>
-      <a:hlink>
-        <a:srgbClr val="0097A7"/>
-      </a:hlink>
-      <a:folHlink>
-        <a:srgbClr val="0097A7"/>
-      </a:folHlink>
-    </a:clrScheme>
-    <a:fontScheme name="Office">
-      <a:majorFont>
-        <a:latin typeface="Arial"/>
-        <a:ea typeface=""/>
-        <a:cs typeface=""/>
-        <a:font script="Jpan" typeface="ＭＳ Ｐゴシック"/>
-        <a:font script="Hang" typeface="맑은 고딕"/>
-        <a:font script="Hans" typeface="宋体"/>
-        <a:font script="Hant" typeface="新細明體"/>
-        <a:font script="Arab" typeface="Times New Roman"/>
-        <a:font script="Hebr" typeface="Times New Roman"/>
-        <a:font script="Thai" typeface="Angsana New"/>
-        <a:font script="Ethi" typeface="Nyala"/>
-        <a:font script="Beng" typeface="Vrinda"/>
-        <a:font script="Gujr" typeface="Shruti"/>
-        <a:font script="Khmr" typeface="MoolBoran"/>
-        <a:font script="Knda" typeface="Tunga"/>
-        <a:font script="Guru" typeface="Raavi"/>
-        <a:font script="Cans" typeface="Euphemia"/>
-        <a:font script="Cher" typeface="Plantagenet Cherokee"/>
-        <a:font script="Yiii" typeface="Microsoft Yi Baiti"/>
-        <a:font script="Tibt" typeface="Microsoft Himalaya"/>
-        <a:font script="Thaa" typeface="MV Boli"/>
-        <a:font script="Deva" typeface="Mangal"/>
-        <a:font script="Telu" typeface="Gautami"/>
-        <a:font script="Taml" typeface="Latha"/>
-        <a:font script="Syrc" typeface="Estrangelo Edessa"/>
-        <a:font script="Orya" typeface="Kalinga"/>
-        <a:font script="Mlym" typeface="Kartika"/>
-        <a:font script="Laoo" typeface="DokChampa"/>
-        <a:font script="Sinh" typeface="Iskoola Pota"/>
-        <a:font script="Mong" typeface="Mongolian Baiti"/>
-        <a:font script="Viet" typeface="Times New Roman"/>
-        <a:font script="Uigh" typeface="Microsoft Uighur"/>
-        <a:font script="Geor" typeface="Sylfaen"/>
-      </a:majorFont>
-      <a:minorFont>
-        <a:latin typeface="Arial"/>
-        <a:ea typeface=""/>
-        <a:cs typeface=""/>
-        <a:font script="Jpan" typeface="ＭＳ Ｐゴシック"/>
-        <a:font script="Hang" typeface="맑은 고딕"/>
-        <a:font script="Hans" typeface="宋体"/>
-        <a:font script="Hant" typeface="新細明體"/>
-        <a:font script="Arab" typeface="Arial"/>
-        <a:font script="Hebr" typeface="Arial"/>
-        <a:font script="Thai" typeface="Cordia New"/>
-        <a:font script="Ethi" typeface="Nyala"/>
-        <a:font script="Beng" typeface="Vrinda"/>
-        <a:font script="Gujr" typeface="Shruti"/>
-        <a:font script="Khmr" typeface="DaunPenh"/>
-        <a:font script="Knda" typeface="Tunga"/>
-        <a:font script="Guru" typeface="Raavi"/>
-        <a:font script="Cans" typeface="Euphemia"/>
-        <a:font script="Cher" typeface="Plantagenet Cherokee"/>
-        <a:font script="Yiii" typeface="Microsoft Yi Baiti"/>
-        <a:font script="Tibt" typeface="Microsoft Himalaya"/>
-        <a:font script="Thaa" typeface="MV Boli"/>
-        <a:font script="Deva" typeface="Mangal"/>
-        <a:font script="Telu" typeface="Gautami"/>
-        <a:font script="Taml" typeface="Latha"/>
-        <a:font script="Syrc" typeface="Estrangelo Edessa"/>
-        <a:font script="Orya" typeface="Kalinga"/>
-        <a:font script="Mlym" typeface="Kartika"/>
-        <a:font script="Laoo" typeface="DokChampa"/>
-        <a:font script="Sinh" typeface="Iskoola Pota"/>
-        <a:font script="Mong" typeface="Mongolian Baiti"/>
-        <a:font script="Viet" typeface="Arial"/>
-        <a:font script="Uigh" typeface="Microsoft Uighur"/>
-        <a:font script="Geor" typeface="Sylfaen"/>
-      </a:minorFont>
-    </a:fontScheme>
-    <a:fmtScheme name="Office">
-      <a:fillStyleLst>
-        <a:solidFill>
-          <a:schemeClr val="phClr"/>
-        </a:solidFill>
-        <a:gradFill rotWithShape="1">
-          <a:gsLst>
-            <a:gs pos="0">
-              <a:schemeClr val="phClr">
-                <a:tint val="50000"/>
-                <a:satMod val="300000"/>
-              </a:schemeClr>
-            </a:gs>
-            <a:gs pos="35000">
-              <a:schemeClr val="phClr">
-                <a:tint val="37000"/>
-                <a:satMod val="300000"/>
-              </a:schemeClr>
-            </a:gs>
-            <a:gs pos="100000">
-              <a:schemeClr val="phClr">
-                <a:tint val="15000"/>
-                <a:satMod val="350000"/>
-              </a:schemeClr>
-            </a:gs>
-          </a:gsLst>
-          <a:lin ang="16200000" scaled="1"/>
-        </a:gradFill>
-        <a:gradFill rotWithShape="1">
-          <a:gsLst>
-            <a:gs pos="0">
-              <a:schemeClr val="phClr">
-                <a:tint val="100000"/>
-                <a:shade val="100000"/>
-                <a:satMod val="130000"/>
-              </a:schemeClr>
-            </a:gs>
-            <a:gs pos="100000">
-              <a:schemeClr val="phClr">
-                <a:tint val="50000"/>
-                <a:shade val="100000"/>
-                <a:satMod val="350000"/>
-              </a:schemeClr>
-            </a:gs>
-          </a:gsLst>
-          <a:lin ang="16200000" scaled="0"/>
-        </a:gradFill>
-      </a:fillStyleLst>
-      <a:lnStyleLst>
-        <a:ln w="9525" cap="flat" cmpd="sng" algn="ctr">
-          <a:solidFill>
-            <a:schemeClr val="phClr">
-              <a:shade val="95000"/>
-              <a:satMod val="105000"/>
-            </a:schemeClr>
-          </a:solidFill>
-          <a:prstDash val="solid"/>
-        </a:ln>
-        <a:ln w="25400" cap="flat" cmpd="sng" algn="ctr">
-          <a:solidFill>
-            <a:schemeClr val="phClr"/>
-          </a:solidFill>
-          <a:prstDash val="solid"/>
-        </a:ln>
-        <a:ln w="38100" cap="flat" cmpd="sng" algn="ctr">
-          <a:solidFill>
-            <a:schemeClr val="phClr"/>
-          </a:solidFill>
-          <a:prstDash val="solid"/>
-        </a:ln>
-      </a:lnStyleLst>
-      <a:effectStyleLst>
-        <a:effectStyle>
-          <a:effectLst>
-            <a:outerShdw blurRad="40000" dist="20000" dir="5400000" rotWithShape="0">
-              <a:srgbClr val="000000">
-                <a:alpha val="38000"/>
-              </a:srgbClr>
-            </a:outerShdw>
-          </a:effectLst>
-        </a:effectStyle>
-        <a:effectStyle>
-          <a:effectLst>
-            <a:outerShdw blurRad="40000" dist="23000" dir="5400000" rotWithShape="0">
-              <a:srgbClr val="000000">
-                <a:alpha val="35000"/>
-              </a:srgbClr>
-            </a:outerShdw>
-          </a:effectLst>
-        </a:effectStyle>
-        <a:effectStyle>
-          <a:effectLst>
-            <a:outerShdw blurRad="40000" dist="23000" dir="5400000" rotWithShape="0">
-              <a:srgbClr val="000000">
-                <a:alpha val="35000"/>
-              </a:srgbClr>
-            </a:outerShdw>
-          </a:effectLst>
-          <a:scene3d>
-            <a:camera prst="orthographicFront">
-              <a:rot lat="0" lon="0" rev="0"/>
-            </a:camera>
-            <a:lightRig rig="threePt" dir="t">
-              <a:rot lat="0" lon="0" rev="1200000"/>
-            </a:lightRig>
-          </a:scene3d>
-          <a:sp3d>
-            <a:bevelT w="63500" h="25400"/>
-          </a:sp3d>
-        </a:effectStyle>
-      </a:effectStyleLst>
-      <a:bgFillStyleLst>
-        <a:solidFill>
-          <a:schemeClr val="phClr"/>
-        </a:solidFill>
-        <a:gradFill rotWithShape="1">
-          <a:gsLst>
-            <a:gs pos="0">
-              <a:schemeClr val="phClr">
-                <a:tint val="40000"/>
-                <a:satMod val="350000"/>
-              </a:schemeClr>
-            </a:gs>
-            <a:gs pos="40000">
-              <a:schemeClr val="phClr">
-                <a:tint val="45000"/>
-                <a:shade val="99000"/>
-                <a:satMod val="350000"/>
-              </a:schemeClr>
-            </a:gs>
-            <a:gs pos="100000">
-              <a:schemeClr val="phClr">
-                <a:shade val="20000"/>
-                <a:satMod val="255000"/>
-              </a:schemeClr>
-            </a:gs>
-          </a:gsLst>
-          <a:path path="circle">
-            <a:fillToRect l="50000" t="-80000" r="50000" b="180000"/>
-          </a:path>
-        </a:gradFill>
-        <a:gradFill rotWithShape="1">
-          <a:gsLst>
-            <a:gs pos="0">
-              <a:schemeClr val="phClr">
-                <a:tint val="80000"/>
-                <a:satMod val="300000"/>
-              </a:schemeClr>
-            </a:gs>
-            <a:gs pos="100000">
-              <a:schemeClr val="phClr">
-                <a:shade val="30000"/>
-                <a:satMod val="200000"/>
-              </a:schemeClr>
-            </a:gs>
-          </a:gsLst>
-          <a:path path="circle">
-            <a:fillToRect l="50000" t="50000" r="50000" b="50000"/>
-          </a:path>
-        </a:gradFill>
-      </a:bgFillStyleLst>
-    </a:fmtScheme>
-  </a:themeElements>
-</a:theme>
 </file>
--- a/report/slides.pptx
+++ b/report/slides.pptx
@@ -789,50 +789,7 @@
             </a:pPr>
             <a:r>
               <a:rPr lang="en"/>
-              <a:t>Hello everyone! My name is Kaiwen Du, and today I’ll be presenting my summer research on robust overfitting in adversarial training.</a:t>
-            </a:r>
-            <a:endParaRPr/>
-          </a:p>
-          <a:p>
-            <a:pPr indent="0" lvl="0" marL="0" rtl="0" algn="l">
-              <a:lnSpc>
-                <a:spcPct val="115000"/>
-              </a:lnSpc>
-              <a:spcBef>
-                <a:spcPts val="0"/>
-              </a:spcBef>
-              <a:spcAft>
-                <a:spcPts val="0"/>
-              </a:spcAft>
-              <a:buClr>
-                <a:schemeClr val="dk1"/>
-              </a:buClr>
-              <a:buSzPts val="1100"/>
-              <a:buFont typeface="Arial"/>
-              <a:buNone/>
-            </a:pPr>
-            <a:r>
-              <a:rPr lang="en"/>
-              <a:t>The main question is how the attacks we use during training affect a model’s robustness as training continues.</a:t>
-            </a:r>
-            <a:endParaRPr/>
-          </a:p>
-          <a:p>
-            <a:pPr indent="0" lvl="0" marL="0" rtl="0" algn="l">
-              <a:lnSpc>
-                <a:spcPct val="115000"/>
-              </a:lnSpc>
-              <a:spcBef>
-                <a:spcPts val="0"/>
-              </a:spcBef>
-              <a:spcAft>
-                <a:spcPts val="0"/>
-              </a:spcAft>
-              <a:buNone/>
-            </a:pPr>
-            <a:r>
-              <a:rPr lang="en"/>
-              <a:t>I’ll start with some background on adversarial attacks and adversarial training, then walk through the experiments I ran and what I found.</a:t>
+              <a:t>Hi everyone! I’m Kaiwen Du, and today I’ll share my summer research on adversarial training, where we train image classifiers using deliberately altered images that try to fool them. The question is whether changing the kind of attack used during training changes how robustness develops, including whether it eventually gets worse. I’ll start with background with example, the approach, and then walk through what I found.</a:t>
             </a:r>
             <a:endParaRPr/>
           </a:p>
@@ -851,7 +808,7 @@
   <p:cSld>
     <p:spTree>
       <p:nvGrpSpPr>
-        <p:cNvPr id="227" name="Shape 227"/>
+        <p:cNvPr id="226" name="Shape 226"/>
         <p:cNvGrpSpPr/>
         <p:nvPr/>
       </p:nvGrpSpPr>
@@ -865,7 +822,7 @@
       </p:grpSpPr>
       <p:sp>
         <p:nvSpPr>
-          <p:cNvPr id="228" name="Google Shape;228;g3f4c31c5764_0_17:notes"/>
+          <p:cNvPr id="227" name="Google Shape;227;g3f4c31c5764_0_17:notes"/>
           <p:cNvSpPr/>
           <p:nvPr>
             <p:ph idx="2" type="sldImg"/>
@@ -900,7 +857,7 @@
       </p:sp>
       <p:sp>
         <p:nvSpPr>
-          <p:cNvPr id="229" name="Google Shape;229;g3f4c31c5764_0_17:notes"/>
+          <p:cNvPr id="228" name="Google Shape;228;g3f4c31c5764_0_17:notes"/>
           <p:cNvSpPr txBox="1"/>
           <p:nvPr>
             <p:ph idx="1" type="body"/>
@@ -929,157 +886,13 @@
                 <a:spcPts val="0"/>
               </a:spcBef>
               <a:spcAft>
-                <a:spcPts val="0"/>
-              </a:spcAft>
-              <a:buClr>
-                <a:schemeClr val="dk1"/>
-              </a:buClr>
-              <a:buSzPts val="1100"/>
-              <a:buFont typeface="Arial"/>
+                <a:spcPts val="1200"/>
+              </a:spcAft>
               <a:buNone/>
             </a:pPr>
             <a:r>
               <a:rPr lang="en"/>
-              <a:t>The low-frequency-only condition gives a very different result.</a:t>
-            </a:r>
-            <a:endParaRPr/>
-          </a:p>
-          <a:p>
-            <a:pPr indent="0" lvl="0" marL="0" rtl="0" algn="l">
-              <a:lnSpc>
-                <a:spcPct val="115000"/>
-              </a:lnSpc>
-              <a:spcBef>
-                <a:spcPts val="1200"/>
-              </a:spcBef>
-              <a:spcAft>
-                <a:spcPts val="0"/>
-              </a:spcAft>
-              <a:buClr>
-                <a:schemeClr val="dk1"/>
-              </a:buClr>
-              <a:buSzPts val="1100"/>
-              <a:buFont typeface="Arial"/>
-              <a:buNone/>
-            </a:pPr>
-            <a:r>
-              <a:rPr lang="en"/>
-              <a:t>Final clean accuracy is 94.28 percent, and accuracy against the low-frequency attack is 92.70 percent. Its low-frequency accuracy barely changes between the peak and final checkpoint.</a:t>
-            </a:r>
-            <a:endParaRPr/>
-          </a:p>
-          <a:p>
-            <a:pPr indent="0" lvl="0" marL="0" rtl="0" algn="l">
-              <a:lnSpc>
-                <a:spcPct val="115000"/>
-              </a:lnSpc>
-              <a:spcBef>
-                <a:spcPts val="1200"/>
-              </a:spcBef>
-              <a:spcAft>
-                <a:spcPts val="0"/>
-              </a:spcAft>
-              <a:buClr>
-                <a:schemeClr val="dk1"/>
-              </a:buClr>
-              <a:buSzPts val="1100"/>
-              <a:buFont typeface="Arial"/>
-              <a:buNone/>
-            </a:pPr>
-            <a:r>
-              <a:rPr lang="en"/>
-              <a:t>But look at the pixel and joint curves along the bottom. Both are zero at every evaluated checkpoint, for every seed.</a:t>
-            </a:r>
-            <a:endParaRPr/>
-          </a:p>
-          <a:p>
-            <a:pPr indent="0" lvl="0" marL="0" rtl="0" algn="l">
-              <a:lnSpc>
-                <a:spcPct val="115000"/>
-              </a:lnSpc>
-              <a:spcBef>
-                <a:spcPts val="1200"/>
-              </a:spcBef>
-              <a:spcAft>
-                <a:spcPts val="0"/>
-              </a:spcAft>
-              <a:buClr>
-                <a:schemeClr val="dk1"/>
-              </a:buClr>
-              <a:buSzPts val="1100"/>
-              <a:buFont typeface="Arial"/>
-              <a:buNone/>
-            </a:pPr>
-            <a:r>
-              <a:rPr lang="en"/>
-              <a:t>So the model performs well against the restricted attack it trained on, while remaining vulnerable to the pixel attack.</a:t>
-            </a:r>
-            <a:endParaRPr/>
-          </a:p>
-          <a:p>
-            <a:pPr indent="0" lvl="0" marL="0" rtl="0" algn="l">
-              <a:lnSpc>
-                <a:spcPct val="115000"/>
-              </a:lnSpc>
-              <a:spcBef>
-                <a:spcPts val="1200"/>
-              </a:spcBef>
-              <a:spcAft>
-                <a:spcPts val="0"/>
-              </a:spcAft>
-              <a:buClr>
-                <a:schemeClr val="dk1"/>
-              </a:buClr>
-              <a:buSzPts val="1100"/>
-              <a:buFont typeface="Arial"/>
-              <a:buNone/>
-            </a:pPr>
-            <a:r>
-              <a:rPr lang="en"/>
-              <a:t>This does not establish that low-frequency training solves robust overfitting. It shows that the measured outcome depends strongly on which attack we use for evaluation.</a:t>
-            </a:r>
-            <a:endParaRPr/>
-          </a:p>
-          <a:p>
-            <a:pPr indent="0" lvl="0" marL="0" rtl="0" algn="l">
-              <a:lnSpc>
-                <a:spcPct val="115000"/>
-              </a:lnSpc>
-              <a:spcBef>
-                <a:spcPts val="1200"/>
-              </a:spcBef>
-              <a:spcAft>
-                <a:spcPts val="0"/>
-              </a:spcAft>
-              <a:buClr>
-                <a:schemeClr val="dk1"/>
-              </a:buClr>
-              <a:buSzPts val="1100"/>
-              <a:buFont typeface="Arial"/>
-              <a:buNone/>
-            </a:pPr>
-            <a:r>
-              <a:rPr lang="en"/>
-              <a:t>Also, stable accuracy does not mean every measurement stays stable. Low-frequency test loss rises after its minimum, and the high accuracy still needs stronger low-frequency attack checks.</a:t>
-            </a:r>
-            <a:endParaRPr/>
-          </a:p>
-          <a:p>
-            <a:pPr indent="0" lvl="0" marL="0" rtl="0" algn="l">
-              <a:lnSpc>
-                <a:spcPct val="115000"/>
-              </a:lnSpc>
-              <a:spcBef>
-                <a:spcPts val="1200"/>
-              </a:spcBef>
-              <a:spcAft>
-                <a:spcPts val="1200"/>
-              </a:spcAft>
-              <a:buNone/>
-            </a:pPr>
-            <a:r>
-              <a:rPr lang="en"/>
-              <a:t>That leads to the next question: what happens if training uses both attacks?</a:t>
+              <a:t>This condition looks quite different. Over here on the left, the blue clean-accuracy curve and the orange low-frequency-accuracy curve both stay high toward the end of training. Final clean accuracy is 94.28 percent, and final low-frequency accuracy is 92.70 percent, very close to its peak. But look at the two curves along the bottom: pixel and joint accuracy are both zero at every checkpoint we evaluated, across all five runs. In other words, these models handle the low-frequency attack well under our evaluation, but the pixel attack still fools them on every test image. On the right, the large red loss curve also reflects their poor performance against pixel PGD. So the high orange curve does not mean the model is broadly robust. It means the model performs well against that particular attack procedure. Even there, stable accuracy does not mean the loss stays flat, and stronger low-frequency attacks could change the measured accuracy. This contrast is what makes the mixed condition interesting: we can now see what happens when training includes both attacks.</a:t>
             </a:r>
             <a:endParaRPr/>
           </a:p>
@@ -1098,7 +911,7 @@
   <p:cSld>
     <p:spTree>
       <p:nvGrpSpPr>
-        <p:cNvPr id="246" name="Shape 246"/>
+        <p:cNvPr id="245" name="Shape 245"/>
         <p:cNvGrpSpPr/>
         <p:nvPr/>
       </p:nvGrpSpPr>
@@ -1112,7 +925,7 @@
       </p:grpSpPr>
       <p:sp>
         <p:nvSpPr>
-          <p:cNvPr id="247" name="Google Shape;247;g3fb5d9673d8_0_31:notes"/>
+          <p:cNvPr id="246" name="Google Shape;246;g3fb5d9673d8_0_31:notes"/>
           <p:cNvSpPr/>
           <p:nvPr>
             <p:ph idx="2" type="sldImg"/>
@@ -1147,7 +960,7 @@
       </p:sp>
       <p:sp>
         <p:nvSpPr>
-          <p:cNvPr id="248" name="Google Shape;248;g3fb5d9673d8_0_31:notes"/>
+          <p:cNvPr id="247" name="Google Shape;247;g3fb5d9673d8_0_31:notes"/>
           <p:cNvSpPr txBox="1"/>
           <p:nvPr>
             <p:ph idx="1" type="body"/>
@@ -1176,133 +989,21 @@
                 <a:spcPts val="0"/>
               </a:spcBef>
               <a:spcAft>
-                <a:spcPts val="0"/>
-              </a:spcAft>
-              <a:buClr>
-                <a:schemeClr val="dk1"/>
-              </a:buClr>
-              <a:buSzPts val="1100"/>
-              <a:buFont typeface="Arial"/>
+                <a:spcPts val="1200"/>
+              </a:spcAft>
               <a:buNone/>
             </a:pPr>
             <a:r>
               <a:rPr lang="en"/>
-              <a:t>Here are the overall results when the training attack is randomly selected each epoch.</a:t>
+              <a:t>Here we’re looking at the mixed-domain runs, where each epoch independently chooses one of the two training attacks. The plots still average all five seeds at each checkpoint. On the left, the pixel and joint accuracy curves now move up and down quite sharply. Mean joint accuracy reaches 40.79</a:t>
             </a:r>
-            <a:endParaRPr/>
-          </a:p>
-          <a:p>
-            <a:pPr indent="0" lvl="0" marL="0" rtl="0" algn="l">
-              <a:lnSpc>
-                <a:spcPct val="115000"/>
-              </a:lnSpc>
-              <a:spcBef>
-                <a:spcPts val="1200"/>
-              </a:spcBef>
-              <a:spcAft>
-                <a:spcPts val="0"/>
-              </a:spcAft>
-              <a:buClr>
-                <a:schemeClr val="dk1"/>
-              </a:buClr>
-              <a:buSzPts val="1100"/>
-              <a:buFont typeface="Arial"/>
-              <a:buNone/>
-            </a:pPr>
             <a:r>
               <a:rPr lang="en"/>
-              <a:t>Pixel and joint accuracy fluctuate considerably. The mean joint accuracy peaks at 40.79 percent at epoch 85 and ends at 19.33 percent.</a:t>
+              <a:t>% </a:t>
             </a:r>
-            <a:endParaRPr/>
-          </a:p>
-          <a:p>
-            <a:pPr indent="0" lvl="0" marL="0" rtl="0" algn="l">
-              <a:lnSpc>
-                <a:spcPct val="115000"/>
-              </a:lnSpc>
-              <a:spcBef>
-                <a:spcPts val="1200"/>
-              </a:spcBef>
-              <a:spcAft>
-                <a:spcPts val="0"/>
-              </a:spcAft>
-              <a:buClr>
-                <a:schemeClr val="dk1"/>
-              </a:buClr>
-              <a:buSzPts val="1100"/>
-              <a:buFont typeface="Arial"/>
-              <a:buNone/>
-            </a:pPr>
             <a:r>
               <a:rPr lang="en"/>
-              <a:t>At first, we might interpret that difference as a large robust-overfitting gap. But there is another factor: the most recent training attack changes across checkpoints and across seeds.</a:t>
-            </a:r>
-            <a:endParaRPr/>
-          </a:p>
-          <a:p>
-            <a:pPr indent="0" lvl="0" marL="0" rtl="0" algn="l">
-              <a:lnSpc>
-                <a:spcPct val="115000"/>
-              </a:lnSpc>
-              <a:spcBef>
-                <a:spcPts val="1200"/>
-              </a:spcBef>
-              <a:spcAft>
-                <a:spcPts val="0"/>
-              </a:spcAft>
-              <a:buClr>
-                <a:schemeClr val="dk1"/>
-              </a:buClr>
-              <a:buSzPts val="1100"/>
-              <a:buFont typeface="Arial"/>
-              <a:buNone/>
-            </a:pPr>
-            <a:r>
-              <a:rPr lang="en"/>
-              <a:t>At epoch 85, all five seeds happened to use pixel training. At epoch two hundred, only one did.</a:t>
-            </a:r>
-            <a:endParaRPr/>
-          </a:p>
-          <a:p>
-            <a:pPr indent="0" lvl="0" marL="0" rtl="0" algn="l">
-              <a:lnSpc>
-                <a:spcPct val="115000"/>
-              </a:lnSpc>
-              <a:spcBef>
-                <a:spcPts val="1200"/>
-              </a:spcBef>
-              <a:spcAft>
-                <a:spcPts val="0"/>
-              </a:spcAft>
-              <a:buClr>
-                <a:schemeClr val="dk1"/>
-              </a:buClr>
-              <a:buSzPts val="1100"/>
-              <a:buFont typeface="Arial"/>
-              <a:buNone/>
-            </a:pPr>
-            <a:r>
-              <a:rPr lang="en"/>
-              <a:t>That means the comparison mixes together checkpoints reached under different recent training conditions. We cannot attribute the entire decline to robust overfitting.</a:t>
-            </a:r>
-            <a:endParaRPr/>
-          </a:p>
-          <a:p>
-            <a:pPr indent="0" lvl="0" marL="0" rtl="0" algn="l">
-              <a:lnSpc>
-                <a:spcPct val="115000"/>
-              </a:lnSpc>
-              <a:spcBef>
-                <a:spcPts val="1200"/>
-              </a:spcBef>
-              <a:spcAft>
-                <a:spcPts val="1200"/>
-              </a:spcAft>
-              <a:buNone/>
-            </a:pPr>
-            <a:r>
-              <a:rPr lang="en"/>
-              <a:t>To understand that pattern better, I grouped the checkpoints by the attack used in their last training epoch.</a:t>
+              <a:t>at epoch 85 and ends at 19.33 percent. Over on the right, the pixel-attack loss also fluctuates, and the broad shaded regions show that the runs often differ substantially. It would be tempting to call that whole peak-to-final drop robust overfitting, but there’s something else mixed into this average. At any particular checkpoint, some runs have just trained with pixel PGD, while others have just trained with low-frequency PGD. At epoch 85, all five happened to use pixel training, but at epoch two hundred, only one did. So those two averages combine different recent training conditions. To see what’s underneath the fluctuations, I separated the results according to the attack used in each checkpoint’s most recent training epoch.</a:t>
             </a:r>
             <a:endParaRPr/>
           </a:p>
@@ -1321,7 +1022,7 @@
   <p:cSld>
     <p:spTree>
       <p:nvGrpSpPr>
-        <p:cNvPr id="265" name="Shape 265"/>
+        <p:cNvPr id="264" name="Shape 264"/>
         <p:cNvGrpSpPr/>
         <p:nvPr/>
       </p:nvGrpSpPr>
@@ -1335,7 +1036,7 @@
       </p:grpSpPr>
       <p:sp>
         <p:nvSpPr>
-          <p:cNvPr id="266" name="Google Shape;266;g3fb5d9673d8_0_48:notes"/>
+          <p:cNvPr id="265" name="Google Shape;265;g3fb5d9673d8_0_48:notes"/>
           <p:cNvSpPr/>
           <p:nvPr>
             <p:ph idx="2" type="sldImg"/>
@@ -1370,7 +1071,7 @@
       </p:sp>
       <p:sp>
         <p:nvSpPr>
-          <p:cNvPr id="267" name="Google Shape;267;g3fb5d9673d8_0_48:notes"/>
+          <p:cNvPr id="266" name="Google Shape;266;g3fb5d9673d8_0_48:notes"/>
           <p:cNvSpPr txBox="1"/>
           <p:nvPr>
             <p:ph idx="1" type="body"/>
@@ -1399,161 +1100,29 @@
                 <a:spcPts val="0"/>
               </a:spcBef>
               <a:spcAft>
-                <a:spcPts val="0"/>
-              </a:spcAft>
-              <a:buClr>
-                <a:schemeClr val="dk1"/>
-              </a:buClr>
-              <a:buSzPts val="1100"/>
-              <a:buFont typeface="Arial"/>
+                <a:spcPts val="1200"/>
+              </a:spcAft>
               <a:buNone/>
             </a:pPr>
             <a:r>
               <a:rPr lang="en"/>
-              <a:t>As we can see,</a:t>
+              <a:t>This slide uses the same models and the same evaluation results, but now we separate them before taking the averages. Blue means the model just completed a pixel-training epoch, and orange means it just completed a low-frequency-training epoch. Both groups still get evaluated against both attacks. So, for example, if three runs used pixel training at a particular checkpoint epoch and two used low-frequency training, we would average those three separately from those two. At the next checkpoint, the membership can change, so these lines don’t represent two fixed groups of models. Now look over here on the left: pixel accuracy is much higher after pixel training. Across all saved checkpoints from the five runs, it averages 42.36</a:t>
             </a:r>
             <a:r>
               <a:rPr lang="en"/>
-              <a:t> the pattern is much clearer.</a:t>
+              <a:t>% </a:t>
             </a:r>
-            <a:endParaRPr/>
-          </a:p>
-          <a:p>
-            <a:pPr indent="0" lvl="0" marL="0" rtl="0" algn="l">
-              <a:lnSpc>
-                <a:spcPct val="115000"/>
-              </a:lnSpc>
-              <a:spcBef>
-                <a:spcPts val="1200"/>
-              </a:spcBef>
-              <a:spcAft>
-                <a:spcPts val="0"/>
-              </a:spcAft>
-              <a:buClr>
-                <a:schemeClr val="dk1"/>
-              </a:buClr>
-              <a:buSzPts val="1100"/>
-              <a:buFont typeface="Arial"/>
-              <a:buNone/>
-            </a:pPr>
             <a:r>
               <a:rPr lang="en"/>
-              <a:t>The colors here identify the last training attack. Blue means the checkpoint follows a pixel-training epoch, and orange means it follows a low-frequency-training epoch.</a:t>
+              <a:t>after pixel epochs and 3.53</a:t>
             </a:r>
-            <a:endParaRPr/>
-          </a:p>
-          <a:p>
-            <a:pPr indent="0" lvl="0" marL="0" rtl="0" algn="l">
-              <a:lnSpc>
-                <a:spcPct val="115000"/>
-              </a:lnSpc>
-              <a:spcBef>
-                <a:spcPts val="1200"/>
-              </a:spcBef>
-              <a:spcAft>
-                <a:spcPts val="0"/>
-              </a:spcAft>
-              <a:buClr>
-                <a:schemeClr val="dk1"/>
-              </a:buClr>
-              <a:buSzPts val="1100"/>
-              <a:buFont typeface="Arial"/>
-              <a:buNone/>
-            </a:pPr>
             <a:r>
               <a:rPr lang="en"/>
-              <a:t>On the left, pixel accuracy is much higher after pixel training. Across all saved seed-checkpoint observations, it averages 42.36 percent after pixel epochs and 3.53 percent after low-frequency epochs.</a:t>
+              <a:t>% </a:t>
             </a:r>
-            <a:endParaRPr/>
-          </a:p>
-          <a:p>
-            <a:pPr indent="0" lvl="0" marL="0" rtl="0" algn="l">
-              <a:lnSpc>
-                <a:spcPct val="115000"/>
-              </a:lnSpc>
-              <a:spcBef>
-                <a:spcPts val="1200"/>
-              </a:spcBef>
-              <a:spcAft>
-                <a:spcPts val="0"/>
-              </a:spcAft>
-              <a:buClr>
-                <a:schemeClr val="dk1"/>
-              </a:buClr>
-              <a:buSzPts val="1100"/>
-              <a:buFont typeface="Arial"/>
-              <a:buNone/>
-            </a:pPr>
             <a:r>
               <a:rPr lang="en"/>
-              <a:t>On the right, low-frequency accuracy shows the opposite ordering: it is higher after low-frequency training.</a:t>
-            </a:r>
-            <a:endParaRPr/>
-          </a:p>
-          <a:p>
-            <a:pPr indent="0" lvl="0" marL="0" rtl="0" algn="l">
-              <a:lnSpc>
-                <a:spcPct val="115000"/>
-              </a:lnSpc>
-              <a:spcBef>
-                <a:spcPts val="1200"/>
-              </a:spcBef>
-              <a:spcAft>
-                <a:spcPts val="0"/>
-              </a:spcAft>
-              <a:buClr>
-                <a:schemeClr val="dk1"/>
-              </a:buClr>
-              <a:buSzPts val="1100"/>
-              <a:buFont typeface="Arial"/>
-              <a:buNone/>
-            </a:pPr>
-            <a:r>
-              <a:rPr lang="en"/>
-              <a:t>The difference is asymmetric. Pixel accuracy changes much more dramatically than low-frequency accuracy.</a:t>
-            </a:r>
-            <a:endParaRPr/>
-          </a:p>
-          <a:p>
-            <a:pPr indent="0" lvl="0" marL="0" rtl="0" algn="l">
-              <a:lnSpc>
-                <a:spcPct val="115000"/>
-              </a:lnSpc>
-              <a:spcBef>
-                <a:spcPts val="1200"/>
-              </a:spcBef>
-              <a:spcAft>
-                <a:spcPts val="0"/>
-              </a:spcAft>
-              <a:buClr>
-                <a:schemeClr val="dk1"/>
-              </a:buClr>
-              <a:buSzPts val="1100"/>
-              <a:buFont typeface="Arial"/>
-              <a:buNone/>
-            </a:pPr>
-            <a:r>
-              <a:rPr lang="en"/>
-              <a:t>Each point averages whichever seeds belong to that group at that epoch, so these lines do not follow two fixed groups of models.</a:t>
-            </a:r>
-            <a:endParaRPr/>
-          </a:p>
-          <a:p>
-            <a:pPr indent="0" lvl="0" marL="0" rtl="0" algn="l">
-              <a:lnSpc>
-                <a:spcPct val="115000"/>
-              </a:lnSpc>
-              <a:spcBef>
-                <a:spcPts val="1200"/>
-              </a:spcBef>
-              <a:spcAft>
-                <a:spcPts val="1200"/>
-              </a:spcAft>
-              <a:buNone/>
-            </a:pPr>
-            <a:r>
-              <a:rPr lang="en"/>
-              <a:t>The results show a strong association with the most recent training attack. This epoch-wise mixing method did not maintain stable robustness against both evaluated attacks.</a:t>
+              <a:t>after low-frequency epochs. On the right, the ordering reverses: low-frequency accuracy is higher after low-frequency training, although the separation is smaller. This helps us see what the overall average was hiding. Measured robustness is strongly associated with the most recent training attack. It doesn’t establish a forgetting mechanism, but it shows that this way of mixing attacks did not maintain stable robustness against both.</a:t>
             </a:r>
             <a:endParaRPr/>
           </a:p>
@@ -1572,7 +1141,7 @@
   <p:cSld>
     <p:spTree>
       <p:nvGrpSpPr>
-        <p:cNvPr id="285" name="Shape 285"/>
+        <p:cNvPr id="284" name="Shape 284"/>
         <p:cNvGrpSpPr/>
         <p:nvPr/>
       </p:nvGrpSpPr>
@@ -1586,7 +1155,7 @@
       </p:grpSpPr>
       <p:sp>
         <p:nvSpPr>
-          <p:cNvPr id="286" name="Google Shape;286;g3f4abb14d47_0_152:notes"/>
+          <p:cNvPr id="285" name="Google Shape;285;g3f4abb14d47_0_152:notes"/>
           <p:cNvSpPr/>
           <p:nvPr>
             <p:ph idx="2" type="sldImg"/>
@@ -1621,7 +1190,7 @@
       </p:sp>
       <p:sp>
         <p:nvSpPr>
-          <p:cNvPr id="287" name="Google Shape;287;g3f4abb14d47_0_152:notes"/>
+          <p:cNvPr id="286" name="Google Shape;286;g3f4abb14d47_0_152:notes"/>
           <p:cNvSpPr txBox="1"/>
           <p:nvPr>
             <p:ph idx="1" type="body"/>
@@ -1647,130 +1216,16 @@
                 <a:spcPct val="115000"/>
               </a:lnSpc>
               <a:spcBef>
-                <a:spcPts val="0"/>
-              </a:spcBef>
-              <a:spcAft>
-                <a:spcPts val="0"/>
+                <a:spcPts val="1200"/>
+              </a:spcBef>
+              <a:spcAft>
+                <a:spcPts val="1200"/>
               </a:spcAft>
               <a:buNone/>
             </a:pPr>
             <a:r>
               <a:rPr lang="en"/>
-              <a:t>So, what did we learn?</a:t>
-            </a:r>
-            <a:endParaRPr/>
-          </a:p>
-          <a:p>
-            <a:pPr indent="0" lvl="0" marL="0" rtl="0" algn="l">
-              <a:lnSpc>
-                <a:spcPct val="115000"/>
-              </a:lnSpc>
-              <a:spcBef>
-                <a:spcPts val="1200"/>
-              </a:spcBef>
-              <a:spcAft>
-                <a:spcPts val="0"/>
-              </a:spcAft>
-              <a:buNone/>
-            </a:pPr>
-            <a:r>
-              <a:rPr lang="en"/>
-              <a:t>First, the pixel-only control reproduced robust overfitting across all five seeds.</a:t>
-            </a:r>
-            <a:endParaRPr/>
-          </a:p>
-          <a:p>
-            <a:pPr indent="0" lvl="0" marL="0" rtl="0" algn="l">
-              <a:lnSpc>
-                <a:spcPct val="115000"/>
-              </a:lnSpc>
-              <a:spcBef>
-                <a:spcPts val="1200"/>
-              </a:spcBef>
-              <a:spcAft>
-                <a:spcPts val="0"/>
-              </a:spcAft>
-              <a:buNone/>
-            </a:pPr>
-            <a:r>
-              <a:rPr lang="en"/>
-              <a:t>Second, low-frequency-only training gave high accuracy against its matched attack, but that did not transfer to pixel PGD.</a:t>
-            </a:r>
-            <a:endParaRPr/>
-          </a:p>
-          <a:p>
-            <a:pPr indent="0" lvl="0" marL="0" rtl="0" algn="l">
-              <a:lnSpc>
-                <a:spcPct val="115000"/>
-              </a:lnSpc>
-              <a:spcBef>
-                <a:spcPts val="1200"/>
-              </a:spcBef>
-              <a:spcAft>
-                <a:spcPts val="0"/>
-              </a:spcAft>
-              <a:buNone/>
-            </a:pPr>
-            <a:r>
-              <a:rPr lang="en"/>
-              <a:t>Third, randomly choosing the training attack each epoch produced robustness that was strongly associated with the latest training domain.</a:t>
-            </a:r>
-            <a:endParaRPr/>
-          </a:p>
-          <a:p>
-            <a:pPr indent="0" lvl="0" marL="0" rtl="0" algn="l">
-              <a:lnSpc>
-                <a:spcPct val="115000"/>
-              </a:lnSpc>
-              <a:spcBef>
-                <a:spcPts val="1200"/>
-              </a:spcBef>
-              <a:spcAft>
-                <a:spcPts val="0"/>
-              </a:spcAft>
-              <a:buNone/>
-            </a:pPr>
-            <a:r>
-              <a:rPr lang="en"/>
-              <a:t>These findings support the descriptive hypothesis that the training attack changes the robustness trajectory. They do not show that epoch-wise mixing reduces robust overfitting, and they do not establish a memorization or forgetting mechanism.</a:t>
-            </a:r>
-            <a:endParaRPr/>
-          </a:p>
-          <a:p>
-            <a:pPr indent="0" lvl="0" marL="0" rtl="0" algn="l">
-              <a:lnSpc>
-                <a:spcPct val="115000"/>
-              </a:lnSpc>
-              <a:spcBef>
-                <a:spcPts val="1200"/>
-              </a:spcBef>
-              <a:spcAft>
-                <a:spcPts val="0"/>
-              </a:spcAft>
-              <a:buNone/>
-            </a:pPr>
-            <a:r>
-              <a:rPr lang="en"/>
-              <a:t>There are also limits to the evaluation. The main results use single-start PGD-20. A stronger pixel-attack diagnostic covered only two control checkpoints on a small subset, so it does not validate all three conditions.</a:t>
-            </a:r>
-            <a:endParaRPr/>
-          </a:p>
-          <a:p>
-            <a:pPr indent="0" lvl="0" marL="0" rtl="0" algn="l">
-              <a:lnSpc>
-                <a:spcPct val="115000"/>
-              </a:lnSpc>
-              <a:spcBef>
-                <a:spcPts val="1200"/>
-              </a:spcBef>
-              <a:spcAft>
-                <a:spcPts val="1200"/>
-              </a:spcAft>
-              <a:buNone/>
-            </a:pPr>
-            <a:r>
-              <a:rPr lang="en"/>
-              <a:t>The next experiment would compare finer-grained mixing within batches or individual examples, combined with validation-based checkpoint selection and stronger attack evaluation.</a:t>
+              <a:t>Putting these results together, the training attack makes a substantial difference to the robustness pattern we observe. Pixel-only training reproduced robust overfitting across all five runs. Low-frequency-only training kept high accuracy against its own attack, but that did not transfer to pixel PGD. And mixed-domain training produced results that were strongly associated with whichever attack the model had just trained on. These observations are consistent with the hypothesis that changing the training attack changes the robustness curves, but they do not show that mixing once per epoch improves robustness. There are also limits to how broadly we can apply the findings: I tested one dataset, one architecture, and one frequency cutoff, and the attacks search for damaging perturbations using a limited number of steps. Passing those attacks is not a guarantee against every allowed perturbation. Over on the right are the next steps. One useful comparison would mix attacks within a batch, which is the small group of examples used for a training update, or choose attacks separately for individual images. I’d also use validation-based checkpoint selection and more extensive attack testing to see whether any improvement holds up.</a:t>
             </a:r>
             <a:endParaRPr/>
           </a:p>
@@ -1789,7 +1244,7 @@
   <p:cSld>
     <p:spTree>
       <p:nvGrpSpPr>
-        <p:cNvPr id="305" name="Shape 305"/>
+        <p:cNvPr id="304" name="Shape 304"/>
         <p:cNvGrpSpPr/>
         <p:nvPr/>
       </p:nvGrpSpPr>
@@ -1803,7 +1258,7 @@
       </p:grpSpPr>
       <p:sp>
         <p:nvSpPr>
-          <p:cNvPr id="306" name="Google Shape;306;g3fb5d9673d8_0_77:notes"/>
+          <p:cNvPr id="305" name="Google Shape;305;g3fb5d9673d8_0_77:notes"/>
           <p:cNvSpPr/>
           <p:nvPr>
             <p:ph idx="2" type="sldImg"/>
@@ -1838,7 +1293,7 @@
       </p:sp>
       <p:sp>
         <p:nvSpPr>
-          <p:cNvPr id="307" name="Google Shape;307;g3fb5d9673d8_0_77:notes"/>
+          <p:cNvPr id="306" name="Google Shape;306;g3fb5d9673d8_0_77:notes"/>
           <p:cNvSpPr txBox="1"/>
           <p:nvPr>
             <p:ph idx="1" type="body"/>
@@ -1867,37 +1322,13 @@
                 <a:spcPts val="0"/>
               </a:spcBef>
               <a:spcAft>
-                <a:spcPts val="0"/>
-              </a:spcAft>
-              <a:buClr>
-                <a:schemeClr val="dk1"/>
-              </a:buClr>
-              <a:buSzPts val="1100"/>
-              <a:buFont typeface="Arial"/>
+                <a:spcPts val="1200"/>
+              </a:spcAft>
               <a:buNone/>
             </a:pPr>
             <a:r>
               <a:rPr lang="en"/>
-              <a:t>These are the main references behind the attack methods, robust-overfitting background, model, and dataset.</a:t>
-            </a:r>
-            <a:endParaRPr/>
-          </a:p>
-          <a:p>
-            <a:pPr indent="0" lvl="0" marL="0" rtl="0" algn="l">
-              <a:lnSpc>
-                <a:spcPct val="115000"/>
-              </a:lnSpc>
-              <a:spcBef>
-                <a:spcPts val="1200"/>
-              </a:spcBef>
-              <a:spcAft>
-                <a:spcPts val="1200"/>
-              </a:spcAft>
-              <a:buNone/>
-            </a:pPr>
-            <a:r>
-              <a:rPr lang="en"/>
-              <a:t>The full bibliography, report, source code, and evaluation results are available in the project repository.</a:t>
+              <a:t>These are the main papers behind the background and methods. The GitHub repository contains the experiment scripts, results, and full report, and the model checkpoints are available on Hugging Face.</a:t>
             </a:r>
             <a:endParaRPr/>
           </a:p>
@@ -1916,7 +1347,7 @@
   <p:cSld>
     <p:spTree>
       <p:nvGrpSpPr>
-        <p:cNvPr id="322" name="Shape 322"/>
+        <p:cNvPr id="321" name="Shape 321"/>
         <p:cNvGrpSpPr/>
         <p:nvPr/>
       </p:nvGrpSpPr>
@@ -1930,7 +1361,7 @@
       </p:grpSpPr>
       <p:sp>
         <p:nvSpPr>
-          <p:cNvPr id="323" name="Google Shape;323;g3f4c31c5764_0_22:notes"/>
+          <p:cNvPr id="322" name="Google Shape;322;g3f4c31c5764_0_22:notes"/>
           <p:cNvSpPr/>
           <p:nvPr>
             <p:ph idx="2" type="sldImg"/>
@@ -1965,7 +1396,7 @@
       </p:sp>
       <p:sp>
         <p:nvSpPr>
-          <p:cNvPr id="324" name="Google Shape;324;g3f4c31c5764_0_22:notes"/>
+          <p:cNvPr id="323" name="Google Shape;323;g3f4c31c5764_0_22:notes"/>
           <p:cNvSpPr txBox="1"/>
           <p:nvPr>
             <p:ph idx="1" type="body"/>
@@ -1994,37 +1425,13 @@
                 <a:spcPts val="0"/>
               </a:spcBef>
               <a:spcAft>
-                <a:spcPts val="0"/>
-              </a:spcAft>
-              <a:buClr>
-                <a:schemeClr val="dk1"/>
-              </a:buClr>
-              <a:buSzPts val="1100"/>
-              <a:buFont typeface="Arial"/>
+                <a:spcPts val="1200"/>
+              </a:spcAft>
               <a:buNone/>
             </a:pPr>
             <a:r>
               <a:rPr lang="en"/>
-              <a:t>Before I finish, I’d like to thank Dr. Nicholas Tran for mentoring me throughout this project and helping me think through the research design, analysis, and presentation.</a:t>
-            </a:r>
-            <a:endParaRPr/>
-          </a:p>
-          <a:p>
-            <a:pPr indent="0" lvl="0" marL="0" rtl="0" algn="l">
-              <a:lnSpc>
-                <a:spcPct val="115000"/>
-              </a:lnSpc>
-              <a:spcBef>
-                <a:spcPts val="1200"/>
-              </a:spcBef>
-              <a:spcAft>
-                <a:spcPts val="1200"/>
-              </a:spcAft>
-              <a:buNone/>
-            </a:pPr>
-            <a:r>
-              <a:rPr lang="en"/>
-              <a:t>Thank you for listening! I’m happy to take questions.</a:t>
+              <a:t>Before I finish, I’d like to thank Dr. Nicholas Tran for his mentorship throughout this project and for helping me think through the research design, analysis, and presentation. Thank you for listening!</a:t>
             </a:r>
             <a:endParaRPr/>
           </a:p>
@@ -2124,39 +1531,23 @@
             </a:pPr>
             <a:r>
               <a:rPr lang="en"/>
-              <a:t>Here is an example from Goodfellow and colleagues. The model initially identifies a panda with 57.7 percent confidence.</a:t>
+              <a:t>Let’s start with this example from Goodfellow and colleagues. Over here on the left, we have a panda, and the model correctly identifies it as a panda with 57.7</a:t>
             </a:r>
-            <a:endParaRPr/>
-          </a:p>
-          <a:p>
-            <a:pPr indent="0" lvl="0" marL="0" rtl="0" algn="l">
-              <a:spcBef>
-                <a:spcPts val="0"/>
-              </a:spcBef>
-              <a:spcAft>
-                <a:spcPts val="0"/>
-              </a:spcAft>
-              <a:buNone/>
-            </a:pPr>
             <a:r>
               <a:rPr lang="en"/>
-              <a:t>The middle image shows the perturbation pattern. After scaling it down and adding it to the original, the model predicts gibbon with 99.3 percent confidence.</a:t>
+              <a:t>% </a:t>
             </a:r>
-            <a:endParaRPr/>
-          </a:p>
-          <a:p>
-            <a:pPr indent="0" lvl="0" marL="0" rtl="0" algn="l">
-              <a:spcBef>
-                <a:spcPts val="0"/>
-              </a:spcBef>
-              <a:spcAft>
-                <a:spcPts val="0"/>
-              </a:spcAft>
-              <a:buNone/>
-            </a:pPr>
             <a:r>
               <a:rPr lang="en"/>
-              <a:t>To us, the images look nearly identical. The changes were deliberately chosen to mislead the model. So how do we calculate them?</a:t>
+              <a:t>confidence. Confidence here means the score the model assigns to its prediction, so a high number does not necessarily mean the answer is correct. In the middle is a perturbation, which simply means a change added to the original image. This pattern is scaled down before being added, so the actual change is much smaller than the colorful image makes it look. Now look at the result on the right. It still looks like a panda to us, but the model predicts gibbon with 99.3</a:t>
+            </a:r>
+            <a:r>
+              <a:rPr lang="en"/>
+              <a:t>% </a:t>
+            </a:r>
+            <a:r>
+              <a:rPr lang="en"/>
+              <a:t>confidence. The important part is that these changes are specifically calculated in order to mislead the model. That gives us a concrete example of an adversarial attack, and the next slide explains one way to calculate it.</a:t>
             </a:r>
             <a:endParaRPr/>
           </a:p>
@@ -2253,61 +1644,13 @@
                 <a:spcPts val="0"/>
               </a:spcBef>
               <a:spcAft>
-                <a:spcPts val="0"/>
-              </a:spcAft>
-              <a:buClr>
-                <a:schemeClr val="dk1"/>
-              </a:buClr>
-              <a:buSzPts val="1100"/>
-              <a:buFont typeface="Arial"/>
+                <a:spcPts val="1200"/>
+              </a:spcAft>
               <a:buNone/>
             </a:pPr>
             <a:r>
               <a:rPr lang="en"/>
-              <a:t>FGSM uses the loss gradient to find directions that increase the model’s error. It keeps the sign of each component, scales by epsilon, and adds the result to the image. Clipping keeps pixel values valid.</a:t>
-            </a:r>
-            <a:endParaRPr/>
-          </a:p>
-          <a:p>
-            <a:pPr indent="0" lvl="0" marL="0" rtl="0" algn="l">
-              <a:lnSpc>
-                <a:spcPct val="115000"/>
-              </a:lnSpc>
-              <a:spcBef>
-                <a:spcPts val="1200"/>
-              </a:spcBef>
-              <a:spcAft>
-                <a:spcPts val="0"/>
-              </a:spcAft>
-              <a:buClr>
-                <a:schemeClr val="dk1"/>
-              </a:buClr>
-              <a:buSzPts val="1100"/>
-              <a:buFont typeface="Arial"/>
-              <a:buNone/>
-            </a:pPr>
-            <a:r>
-              <a:rPr lang="en"/>
-              <a:t>Epsilon controls the allowed change. The intuition is that small changes across many pixels can add together and substantially affect the prediction.</a:t>
-            </a:r>
-            <a:endParaRPr/>
-          </a:p>
-          <a:p>
-            <a:pPr indent="0" lvl="0" marL="0" rtl="0" algn="l">
-              <a:lnSpc>
-                <a:spcPct val="115000"/>
-              </a:lnSpc>
-              <a:spcBef>
-                <a:spcPts val="1200"/>
-              </a:spcBef>
-              <a:spcAft>
-                <a:spcPts val="1200"/>
-              </a:spcAft>
-              <a:buNone/>
-            </a:pPr>
-            <a:r>
-              <a:rPr lang="en"/>
-              <a:t>FGSM takes one step. Our experiments use an iterative attack called PGD.</a:t>
+              <a:t>One way to generate that change is FGSM, which stands for Fast Gradient Sign Method. Under the hood, the model has a loss function, which gives a numerical penalty for its predictions, with larger penalties for worse predictions. The gradient tells us how small changes to the input would affect that loss. So for example, it can tell us whether slightly increasing or decreasing a particular pixel value would make the prediction worse. FGSM keeps the sign of that gradient, meaning the direction of the change, and scales it by epsilon, the allowed size of the change. In the equation, x is the original image, eta is the perturbation we calculate, and x-tilde is the resulting attacked image. We also keep the resulting pixel values within the valid image range. The intuition at the bottom is that a small change to one pixel may do very little, but if we just do these for every single pixel in an image, it can accumulate and substantially affect the prediction. FGSM does this in one step. The method used in my experiments takes several.</a:t>
             </a:r>
             <a:endParaRPr/>
           </a:p>
@@ -2407,88 +1750,15 @@
             </a:pPr>
             <a:r>
               <a:rPr lang="en"/>
-              <a:t>Before I talk about the adversarial training steps, I would like to clarify that PGD, which stands for Projected Gradient Descent, means </a:t>
+              <a:t>That method is called PGD, </a:t>
             </a:r>
             <a:r>
               <a:rPr lang="en"/>
-              <a:t>repeatedly</a:t>
+              <a:t>short for </a:t>
             </a:r>
             <a:r>
               <a:rPr lang="en"/>
-              <a:t> updates an image to increase the model’s loss while enforcing a perturbation limit. The main difference between PGD and FGSM is that …</a:t>
-            </a:r>
-            <a:endParaRPr/>
-          </a:p>
-          <a:p>
-            <a:pPr indent="0" lvl="0" marL="0" rtl="0" algn="l">
-              <a:spcBef>
-                <a:spcPts val="0"/>
-              </a:spcBef>
-              <a:spcAft>
-                <a:spcPts val="0"/>
-              </a:spcAft>
-              <a:buNone/>
-            </a:pPr>
-            <a:r>
-              <a:t/>
-            </a:r>
-            <a:endParaRPr/>
-          </a:p>
-          <a:p>
-            <a:pPr indent="0" lvl="0" marL="0" rtl="0" algn="l">
-              <a:spcBef>
-                <a:spcPts val="0"/>
-              </a:spcBef>
-              <a:spcAft>
-                <a:spcPts val="0"/>
-              </a:spcAft>
-              <a:buClr>
-                <a:schemeClr val="dk1"/>
-              </a:buClr>
-              <a:buSzPts val="1100"/>
-              <a:buFont typeface="Arial"/>
-              <a:buNone/>
-            </a:pPr>
-            <a:r>
-              <a:rPr lang="en"/>
-              <a:t>First, we add a random perturbation within the allowed budget. Then we take a gradient step that increases the model’s loss and project the result back within the constraints.</a:t>
-            </a:r>
-            <a:endParaRPr/>
-          </a:p>
-          <a:p>
-            <a:pPr indent="0" lvl="0" marL="0" rtl="0" algn="l">
-              <a:spcBef>
-                <a:spcPts val="0"/>
-              </a:spcBef>
-              <a:spcAft>
-                <a:spcPts val="0"/>
-              </a:spcAft>
-              <a:buClr>
-                <a:schemeClr val="dk1"/>
-              </a:buClr>
-              <a:buSzPts val="1100"/>
-              <a:buFont typeface="Arial"/>
-              <a:buNone/>
-            </a:pPr>
-            <a:r>
-              <a:rPr lang="en"/>
-              <a:t>We repeat those two steps ten times. During that attack-generation loop, the model’s weights stay fixed.</a:t>
-            </a:r>
-            <a:endParaRPr/>
-          </a:p>
-          <a:p>
-            <a:pPr indent="0" lvl="0" marL="0" rtl="0" algn="l">
-              <a:spcBef>
-                <a:spcPts val="0"/>
-              </a:spcBef>
-              <a:spcAft>
-                <a:spcPts val="0"/>
-              </a:spcAft>
-              <a:buNone/>
-            </a:pPr>
-            <a:r>
-              <a:rPr lang="en"/>
-              <a:t>Once we have the attacked image, we use its original label to update the model. So the attack changes the input to increase loss, and the training update changes the model’s weights to reduce it.</a:t>
+              <a:t>Projected Gradient Descent. Compared with FGSM’s single step, PGD takes several smaller steps and recalculates the gradient as the image changes. Over here on the right, the flowchart shows how we use it during training. We start by adding a random perturbation within the allowed budget, which is our limit on how much the image can change. Then we take a step that increases the loss and project the result back into the allowed region. Projecting here means correcting any changes that violate the perturbation limit or the valid pixel range. We repeat those two steps ten times, which is what PGD-10 means. Throughout that loop, the model’s weights, the numerical parameters it learns during training, stay fixed. Once we have the attacked image, we keep its original label, meaning the correct category, and update the model’s weights to reduce the loss. So the first part changes the image to make classification harder, and the final part teaches the model to handle that image. That whole process is adversarial training.</a:t>
             </a:r>
             <a:endParaRPr/>
           </a:p>
@@ -2585,109 +1855,13 @@
                 <a:spcPts val="0"/>
               </a:spcBef>
               <a:spcAft>
-                <a:spcPts val="0"/>
-              </a:spcAft>
-              <a:buClr>
-                <a:schemeClr val="dk1"/>
-              </a:buClr>
-              <a:buSzPts val="1100"/>
-              <a:buFont typeface="Arial"/>
+                <a:spcPts val="1200"/>
+              </a:spcAft>
               <a:buNone/>
             </a:pPr>
             <a:r>
               <a:rPr lang="en"/>
-              <a:t>This is the problem called robust overfitting.</a:t>
-            </a:r>
-            <a:endParaRPr/>
-          </a:p>
-          <a:p>
-            <a:pPr indent="0" lvl="0" marL="0" rtl="0" algn="l">
-              <a:lnSpc>
-                <a:spcPct val="115000"/>
-              </a:lnSpc>
-              <a:spcBef>
-                <a:spcPts val="1200"/>
-              </a:spcBef>
-              <a:spcAft>
-                <a:spcPts val="0"/>
-              </a:spcAft>
-              <a:buClr>
-                <a:schemeClr val="dk1"/>
-              </a:buClr>
-              <a:buSzPts val="1100"/>
-              <a:buFont typeface="Arial"/>
-              <a:buNone/>
-            </a:pPr>
-            <a:r>
-              <a:rPr lang="en"/>
-              <a:t>A model can continue improving on its training examples while becoming less accurate on attacked test examples.</a:t>
-            </a:r>
-            <a:endParaRPr/>
-          </a:p>
-          <a:p>
-            <a:pPr indent="0" lvl="0" marL="0" rtl="0" algn="l">
-              <a:lnSpc>
-                <a:spcPct val="115000"/>
-              </a:lnSpc>
-              <a:spcBef>
-                <a:spcPts val="1200"/>
-              </a:spcBef>
-              <a:spcAft>
-                <a:spcPts val="0"/>
-              </a:spcAft>
-              <a:buClr>
-                <a:schemeClr val="dk1"/>
-              </a:buClr>
-              <a:buSzPts val="1100"/>
-              <a:buFont typeface="Arial"/>
-              <a:buNone/>
-            </a:pPr>
-            <a:r>
-              <a:rPr lang="en"/>
-              <a:t>In this figure, the blue bars show the best robust test error during training, and the red bars show the final error. Lower is better. The gap illustrates the performance lost by continuing to the final checkpoint.</a:t>
-            </a:r>
-            <a:endParaRPr/>
-          </a:p>
-          <a:p>
-            <a:pPr indent="0" lvl="0" marL="0" rtl="0" algn="l">
-              <a:lnSpc>
-                <a:spcPct val="115000"/>
-              </a:lnSpc>
-              <a:spcBef>
-                <a:spcPts val="1200"/>
-              </a:spcBef>
-              <a:spcAft>
-                <a:spcPts val="0"/>
-              </a:spcAft>
-              <a:buClr>
-                <a:schemeClr val="dk1"/>
-              </a:buClr>
-              <a:buSzPts val="1100"/>
-              <a:buFont typeface="Arial"/>
-              <a:buNone/>
-            </a:pPr>
-            <a:r>
-              <a:rPr lang="en"/>
-              <a:t>One established response is early stopping: use a separate validation set to choose which checkpoint to keep.</a:t>
-            </a:r>
-            <a:endParaRPr/>
-          </a:p>
-          <a:p>
-            <a:pPr indent="0" lvl="0" marL="0" rtl="0" algn="l">
-              <a:lnSpc>
-                <a:spcPct val="115000"/>
-              </a:lnSpc>
-              <a:spcBef>
-                <a:spcPts val="1200"/>
-              </a:spcBef>
-              <a:spcAft>
-                <a:spcPts val="1200"/>
-              </a:spcAft>
-              <a:buNone/>
-            </a:pPr>
-            <a:r>
-              <a:rPr lang="en"/>
-              <a:t>That helps with checkpoint selection. My research asks how changing the attack used during training affects the robustness trajectory itself.</a:t>
+              <a:t>You might expect that giving the model more adversarial training would keep making it more robust, but that does not always happen. Over here on the right top graph, the robust training error keeps falling, while the robust test error reaches its lowest point and then starts rising. Error means the percentage of images classified incorrectly, so lower is better. Basically, the model is getting better on the attacked images it trains on, but worse on attacked test images. That’s what we mean by robust overfitting. Now, the bar chart below shows that Rice and colleagues observed this across several datasets. Those names along the bottom are different image datasets. For example, SVHN stands for Street View House Numbers and contains images of digits, while CIFAR and ImageNet contain different categories of images. The blue bars show the lowest robust test error reached during training, and the red bars show the error near the end. These results use an L-infinity limit, which caps how much each individual pixel value can change. In every case, the red bar is higher, meaning some robustness was lost as training continued. One established response is early stopping: save checkpoints, which are snapshots of the model during training, and use a separate validation set to choose which one to keep. That set helps us select the model without using the test results to make that decision.</a:t>
             </a:r>
             <a:endParaRPr/>
           </a:p>
@@ -2706,7 +1880,7 @@
   <p:cSld>
     <p:spTree>
       <p:nvGrpSpPr>
-        <p:cNvPr id="149" name="Shape 149"/>
+        <p:cNvPr id="148" name="Shape 148"/>
         <p:cNvGrpSpPr/>
         <p:nvPr/>
       </p:nvGrpSpPr>
@@ -2720,7 +1894,7 @@
       </p:grpSpPr>
       <p:sp>
         <p:nvSpPr>
-          <p:cNvPr id="150" name="Google Shape;150;g3f94b6fb872_0_0:notes"/>
+          <p:cNvPr id="149" name="Google Shape;149;g3fb94eb41cd_0_23:notes"/>
           <p:cNvSpPr/>
           <p:nvPr>
             <p:ph idx="2" type="sldImg"/>
@@ -2755,7 +1929,7 @@
       </p:sp>
       <p:sp>
         <p:nvSpPr>
-          <p:cNvPr id="151" name="Google Shape;151;g3f94b6fb872_0_0:notes"/>
+          <p:cNvPr id="150" name="Google Shape;150;g3fb94eb41cd_0_23:notes"/>
           <p:cNvSpPr txBox="1"/>
           <p:nvPr>
             <p:ph idx="1" type="body"/>
@@ -2784,133 +1958,13 @@
                 <a:spcPts val="0"/>
               </a:spcBef>
               <a:spcAft>
-                <a:spcPts val="0"/>
-              </a:spcAft>
-              <a:buClr>
-                <a:schemeClr val="dk1"/>
-              </a:buClr>
-              <a:buSzPts val="1100"/>
-              <a:buFont typeface="Arial"/>
+                <a:spcPts val="1200"/>
+              </a:spcAft>
               <a:buNone/>
             </a:pPr>
             <a:r>
               <a:rPr lang="en"/>
-              <a:t>That brings us to my research question.</a:t>
-            </a:r>
-            <a:endParaRPr/>
-          </a:p>
-          <a:p>
-            <a:pPr indent="0" lvl="0" marL="0" rtl="0" algn="l">
-              <a:lnSpc>
-                <a:spcPct val="115000"/>
-              </a:lnSpc>
-              <a:spcBef>
-                <a:spcPts val="1200"/>
-              </a:spcBef>
-              <a:spcAft>
-                <a:spcPts val="0"/>
-              </a:spcAft>
-              <a:buClr>
-                <a:schemeClr val="dk1"/>
-              </a:buClr>
-              <a:buSzPts val="1100"/>
-              <a:buFont typeface="Arial"/>
-              <a:buNone/>
-            </a:pPr>
-            <a:r>
-              <a:rPr lang="en"/>
-              <a:t>I compared training with pixel-space attacks, training with low-frequency attacks, and randomly choosing between the two at the start of each epoch.</a:t>
-            </a:r>
-            <a:endParaRPr/>
-          </a:p>
-          <a:p>
-            <a:pPr indent="0" lvl="0" marL="0" rtl="0" algn="l">
-              <a:lnSpc>
-                <a:spcPct val="115000"/>
-              </a:lnSpc>
-              <a:spcBef>
-                <a:spcPts val="1200"/>
-              </a:spcBef>
-              <a:spcAft>
-                <a:spcPts val="0"/>
-              </a:spcAft>
-              <a:buClr>
-                <a:schemeClr val="dk1"/>
-              </a:buClr>
-              <a:buSzPts val="1100"/>
-              <a:buFont typeface="Arial"/>
-              <a:buNone/>
-            </a:pPr>
-            <a:r>
-              <a:rPr lang="en"/>
-              <a:t>An epoch means one pass through the training dataset. In the mixed condition, every batch in that epoch uses the selected attack.</a:t>
-            </a:r>
-            <a:endParaRPr/>
-          </a:p>
-          <a:p>
-            <a:pPr indent="0" lvl="0" marL="0" rtl="0" algn="l">
-              <a:lnSpc>
-                <a:spcPct val="115000"/>
-              </a:lnSpc>
-              <a:spcBef>
-                <a:spcPts val="1200"/>
-              </a:spcBef>
-              <a:spcAft>
-                <a:spcPts val="0"/>
-              </a:spcAft>
-              <a:buClr>
-                <a:schemeClr val="dk1"/>
-              </a:buClr>
-              <a:buSzPts val="1100"/>
-              <a:buFont typeface="Arial"/>
-              <a:buNone/>
-            </a:pPr>
-            <a:r>
-              <a:rPr lang="en"/>
-              <a:t>The hypothesis was that changing the training attack would change the robustness curves. The peak might move, the curve might flatten, or the decline might change. It did not assume that mixing would necessarily improve the results.</a:t>
-            </a:r>
-            <a:endParaRPr/>
-          </a:p>
-          <a:p>
-            <a:pPr indent="0" lvl="0" marL="0" rtl="0" algn="l">
-              <a:lnSpc>
-                <a:spcPct val="115000"/>
-              </a:lnSpc>
-              <a:spcBef>
-                <a:spcPts val="1200"/>
-              </a:spcBef>
-              <a:spcAft>
-                <a:spcPts val="0"/>
-              </a:spcAft>
-              <a:buClr>
-                <a:schemeClr val="dk1"/>
-              </a:buClr>
-              <a:buSzPts val="1100"/>
-              <a:buFont typeface="Arial"/>
-              <a:buNone/>
-            </a:pPr>
-            <a:r>
-              <a:rPr lang="en"/>
-              <a:t>This matters because it tests whether varying the training attack is a useful direction for maintaining robustness over time.</a:t>
-            </a:r>
-            <a:endParaRPr/>
-          </a:p>
-          <a:p>
-            <a:pPr indent="0" lvl="0" marL="0" rtl="0" algn="l">
-              <a:lnSpc>
-                <a:spcPct val="115000"/>
-              </a:lnSpc>
-              <a:spcBef>
-                <a:spcPts val="1200"/>
-              </a:spcBef>
-              <a:spcAft>
-                <a:spcPts val="1200"/>
-              </a:spcAft>
-              <a:buNone/>
-            </a:pPr>
-            <a:r>
-              <a:rPr lang="en"/>
-              <a:t>Before showing the results, let me explain the difference between these attacks.</a:t>
+              <a:t>So far, we’ve mainly talked about attacks that work directly in pixel space. Before introducing my research question, let me explain the two attack domains I compare. By domain, I mean the kind of perturbation, or change to the image, that the attack can construct. Pixel-space PGD can adjust pixel values without a frequency restriction, as long as it stays within the allowed budget. For the low-frequency attack, I use the discrete cosine transform, or DCT, which represents a pattern as a combination of waves that vary at different spatial scales. So, for example, a broad, gradual change across an image is low frequency, while a pattern that changes rapidly from pixel to pixel is high frequency. The coefficients tell us how much of each wave pattern to include. My implementation keeps an eight-by-eight block of low-frequency coefficients for each color channel, red, green, and blue, then transforms the perturbation back into pixel space. Both attacks allow a maximum change of eight over two hundred and fifty-five per pixel value, with values scaled between zero and one. Over here on the right, the table shows the three training conditions: pixel-only, low-frequency-only, and mixed-domain. In mixed-domain training, we make an independent fifty-fifty choice at the start of each epoch, which is one pass through the training dataset, and use that attack throughout the epoch. That means the same attack can be selected several epochs in a row. One detail to keep in mind is that the attack update rules also differ, so this comparison captures both the frequency restriction and differences in how the attacks are constructed. With those three conditions in place, we can now ask how choosing between the two domains affects robust overfitting.</a:t>
             </a:r>
             <a:endParaRPr/>
           </a:p>
@@ -2929,7 +1983,7 @@
   <p:cSld>
     <p:spTree>
       <p:nvGrpSpPr>
-        <p:cNvPr id="169" name="Shape 169"/>
+        <p:cNvPr id="168" name="Shape 168"/>
         <p:cNvGrpSpPr/>
         <p:nvPr/>
       </p:nvGrpSpPr>
@@ -2943,7 +1997,7 @@
       </p:grpSpPr>
       <p:sp>
         <p:nvSpPr>
-          <p:cNvPr id="170" name="Google Shape;170;g3fb94eb41cd_0_23:notes"/>
+          <p:cNvPr id="169" name="Google Shape;169;g3f94b6fb872_0_0:notes"/>
           <p:cNvSpPr/>
           <p:nvPr>
             <p:ph idx="2" type="sldImg"/>
@@ -2978,7 +2032,7 @@
       </p:sp>
       <p:sp>
         <p:nvSpPr>
-          <p:cNvPr id="171" name="Google Shape;171;g3fb94eb41cd_0_23:notes"/>
+          <p:cNvPr id="170" name="Google Shape;170;g3f94b6fb872_0_0:notes"/>
           <p:cNvSpPr txBox="1"/>
           <p:nvPr>
             <p:ph idx="1" type="body"/>
@@ -3007,133 +2061,13 @@
                 <a:spcPts val="0"/>
               </a:spcBef>
               <a:spcAft>
-                <a:spcPts val="0"/>
-              </a:spcAft>
-              <a:buClr>
-                <a:schemeClr val="dk1"/>
-              </a:buClr>
-              <a:buSzPts val="1100"/>
-              <a:buFont typeface="Arial"/>
+                <a:spcPts val="1200"/>
+              </a:spcAft>
               <a:buNone/>
             </a:pPr>
             <a:r>
               <a:rPr lang="en"/>
-              <a:t>Pixel-space PGD can change individual pixel values within the allowed budget.</a:t>
-            </a:r>
-            <a:endParaRPr/>
-          </a:p>
-          <a:p>
-            <a:pPr indent="0" lvl="0" marL="0" rtl="0" algn="l">
-              <a:lnSpc>
-                <a:spcPct val="115000"/>
-              </a:lnSpc>
-              <a:spcBef>
-                <a:spcPts val="1200"/>
-              </a:spcBef>
-              <a:spcAft>
-                <a:spcPts val="0"/>
-              </a:spcAft>
-              <a:buClr>
-                <a:schemeClr val="dk1"/>
-              </a:buClr>
-              <a:buSzPts val="1100"/>
-              <a:buFont typeface="Arial"/>
-              <a:buNone/>
-            </a:pPr>
-            <a:r>
-              <a:rPr lang="en"/>
-              <a:t>The low-frequency attack uses the discrete cosine transform, or DCT. This represents a perturbation using patterns that vary at different spatial scales. Low-frequency patterns describe smooth, broad changes.</a:t>
-            </a:r>
-            <a:endParaRPr/>
-          </a:p>
-          <a:p>
-            <a:pPr indent="0" lvl="0" marL="0" rtl="0" algn="l">
-              <a:lnSpc>
-                <a:spcPct val="115000"/>
-              </a:lnSpc>
-              <a:spcBef>
-                <a:spcPts val="1200"/>
-              </a:spcBef>
-              <a:spcAft>
-                <a:spcPts val="0"/>
-              </a:spcAft>
-              <a:buClr>
-                <a:schemeClr val="dk1"/>
-              </a:buClr>
-              <a:buSzPts val="1100"/>
-              <a:buFont typeface="Arial"/>
-              <a:buNone/>
-            </a:pPr>
-            <a:r>
-              <a:rPr lang="en"/>
-              <a:t>I retain an eight-by-eight block of coefficients in each color channel and transform the perturbation back into image space. The projection keeps 64 of the 1,024 coefficients per channel.</a:t>
-            </a:r>
-            <a:endParaRPr/>
-          </a:p>
-          <a:p>
-            <a:pPr indent="0" lvl="0" marL="0" rtl="0" algn="l">
-              <a:lnSpc>
-                <a:spcPct val="115000"/>
-              </a:lnSpc>
-              <a:spcBef>
-                <a:spcPts val="1200"/>
-              </a:spcBef>
-              <a:spcAft>
-                <a:spcPts val="0"/>
-              </a:spcAft>
-              <a:buClr>
-                <a:schemeClr val="dk1"/>
-              </a:buClr>
-              <a:buSzPts val="1100"/>
-              <a:buFont typeface="Arial"/>
-              <a:buNone/>
-            </a:pPr>
-            <a:r>
-              <a:rPr lang="en"/>
-              <a:t>Both attacks obey the same maximum pixel-change budget. The frequency mask restricts the patterns available to the low-frequency attack.</a:t>
-            </a:r>
-            <a:endParaRPr/>
-          </a:p>
-          <a:p>
-            <a:pPr indent="0" lvl="0" marL="0" rtl="0" algn="l">
-              <a:lnSpc>
-                <a:spcPct val="115000"/>
-              </a:lnSpc>
-              <a:spcBef>
-                <a:spcPts val="1200"/>
-              </a:spcBef>
-              <a:spcAft>
-                <a:spcPts val="0"/>
-              </a:spcAft>
-              <a:buClr>
-                <a:schemeClr val="dk1"/>
-              </a:buClr>
-              <a:buSzPts val="1100"/>
-              <a:buFont typeface="Arial"/>
-              <a:buNone/>
-            </a:pPr>
-            <a:r>
-              <a:rPr lang="en"/>
-              <a:t>The table shows the three training conditions. Mixed-domain training makes a fresh random choice each epoch, so it does not strictly alternate or guarantee exactly equal totals.</a:t>
-            </a:r>
-            <a:endParaRPr/>
-          </a:p>
-          <a:p>
-            <a:pPr indent="0" lvl="0" marL="0" rtl="0" algn="l">
-              <a:lnSpc>
-                <a:spcPct val="115000"/>
-              </a:lnSpc>
-              <a:spcBef>
-                <a:spcPts val="1200"/>
-              </a:spcBef>
-              <a:spcAft>
-                <a:spcPts val="1200"/>
-              </a:spcAft>
-              <a:buNone/>
-            </a:pPr>
-            <a:r>
-              <a:rPr lang="en"/>
-              <a:t>One implementation detail is that clipping the final image can introduce some higher-frequency content. Also, the attacks use different update rules, so this comparison does not isolate frequency restriction alone.</a:t>
+              <a:t>With those three training conditions in mind, here’s the question I wanted to investigate. What happens when we randomly choose between pixel-space and low-frequency attacks each epoch, compared with training on either attack alone? Specifically, I’m looking at when robust accuracy peaks and how much it declines afterward. Robust accuracy means the percentage of attacked test images the model still classifies correctly. My hypothesis was that mixing the attacks would change the timing or shape of those accuracy curves, with the other experimental settings held fixed. I wasn’t assuming that mixing would necessarily improve them. We want to understand whether this approach helps maintain robustness against both attacks over time, or whether performance mainly follows whichever attack the model encountered most recently.</a:t>
             </a:r>
             <a:endParaRPr/>
           </a:p>
@@ -3152,7 +2086,7 @@
   <p:cSld>
     <p:spTree>
       <p:nvGrpSpPr>
-        <p:cNvPr id="189" name="Shape 189"/>
+        <p:cNvPr id="188" name="Shape 188"/>
         <p:cNvGrpSpPr/>
         <p:nvPr/>
       </p:nvGrpSpPr>
@@ -3166,7 +2100,7 @@
       </p:grpSpPr>
       <p:sp>
         <p:nvSpPr>
-          <p:cNvPr id="190" name="Google Shape;190;g3fb94eb41cd_0_43:notes"/>
+          <p:cNvPr id="189" name="Google Shape;189;g3fb94eb41cd_0_43:notes"/>
           <p:cNvSpPr/>
           <p:nvPr>
             <p:ph idx="2" type="sldImg"/>
@@ -3201,7 +2135,7 @@
       </p:sp>
       <p:sp>
         <p:nvSpPr>
-          <p:cNvPr id="191" name="Google Shape;191;g3fb94eb41cd_0_43:notes"/>
+          <p:cNvPr id="190" name="Google Shape;190;g3fb94eb41cd_0_43:notes"/>
           <p:cNvSpPr txBox="1"/>
           <p:nvPr>
             <p:ph idx="1" type="body"/>
@@ -3230,133 +2164,13 @@
                 <a:spcPts val="0"/>
               </a:spcBef>
               <a:spcAft>
-                <a:spcPts val="0"/>
-              </a:spcAft>
-              <a:buClr>
-                <a:schemeClr val="dk1"/>
-              </a:buClr>
-              <a:buSzPts val="1100"/>
-              <a:buFont typeface="Arial"/>
+                <a:spcPts val="1200"/>
+              </a:spcAft>
               <a:buNone/>
             </a:pPr>
             <a:r>
               <a:rPr lang="en"/>
-              <a:t>All three conditions use the same model, dataset, optimizer, training schedule, and perturbation budget.</a:t>
-            </a:r>
-            <a:endParaRPr/>
-          </a:p>
-          <a:p>
-            <a:pPr indent="0" lvl="0" marL="0" rtl="0" algn="l">
-              <a:lnSpc>
-                <a:spcPct val="115000"/>
-              </a:lnSpc>
-              <a:spcBef>
-                <a:spcPts val="1200"/>
-              </a:spcBef>
-              <a:spcAft>
-                <a:spcPts val="0"/>
-              </a:spcAft>
-              <a:buClr>
-                <a:schemeClr val="dk1"/>
-              </a:buClr>
-              <a:buSzPts val="1100"/>
-              <a:buFont typeface="Arial"/>
-              <a:buNone/>
-            </a:pPr>
-            <a:r>
-              <a:rPr lang="en"/>
-              <a:t>I ran five seeds per condition, giving fifteen full training runs. Each run lasted two hundred epochs, with a checkpoint saved every five epochs.</a:t>
-            </a:r>
-            <a:endParaRPr/>
-          </a:p>
-          <a:p>
-            <a:pPr indent="0" lvl="0" marL="0" rtl="0" algn="l">
-              <a:lnSpc>
-                <a:spcPct val="115000"/>
-              </a:lnSpc>
-              <a:spcBef>
-                <a:spcPts val="1200"/>
-              </a:spcBef>
-              <a:spcAft>
-                <a:spcPts val="0"/>
-              </a:spcAft>
-              <a:buClr>
-                <a:schemeClr val="dk1"/>
-              </a:buClr>
-              <a:buSzPts val="1100"/>
-              <a:buFont typeface="Arial"/>
-              <a:buNone/>
-            </a:pPr>
-            <a:r>
-              <a:rPr lang="en"/>
-              <a:t>I evaluated every checkpoint on all ten thousand test images using twenty-step attacks.</a:t>
-            </a:r>
-            <a:endParaRPr/>
-          </a:p>
-          <a:p>
-            <a:pPr indent="0" lvl="0" marL="0" rtl="0" algn="l">
-              <a:lnSpc>
-                <a:spcPct val="115000"/>
-              </a:lnSpc>
-              <a:spcBef>
-                <a:spcPts val="1200"/>
-              </a:spcBef>
-              <a:spcAft>
-                <a:spcPts val="0"/>
-              </a:spcAft>
-              <a:buClr>
-                <a:schemeClr val="dk1"/>
-              </a:buClr>
-              <a:buSzPts val="1100"/>
-              <a:buFont typeface="Arial"/>
-              <a:buNone/>
-            </a:pPr>
-            <a:r>
-              <a:rPr lang="en"/>
-              <a:t>There are four accuracy measurements. Clean accuracy uses the original images. Pixel and low-frequency accuracy use their respective attacks. Joint accuracy counts an image as correct only when the model correctly classifies both separately attacked versions.</a:t>
-            </a:r>
-            <a:endParaRPr/>
-          </a:p>
-          <a:p>
-            <a:pPr indent="0" lvl="0" marL="0" rtl="0" algn="l">
-              <a:lnSpc>
-                <a:spcPct val="115000"/>
-              </a:lnSpc>
-              <a:spcBef>
-                <a:spcPts val="1200"/>
-              </a:spcBef>
-              <a:spcAft>
-                <a:spcPts val="0"/>
-              </a:spcAft>
-              <a:buClr>
-                <a:schemeClr val="dk1"/>
-              </a:buClr>
-              <a:buSzPts val="1100"/>
-              <a:buFont typeface="Arial"/>
-              <a:buNone/>
-            </a:pPr>
-            <a:r>
-              <a:rPr lang="en"/>
-              <a:t>For example, if it handles the low-frequency version but fails on the pixel version, that image fails the joint metric.</a:t>
-            </a:r>
-            <a:endParaRPr/>
-          </a:p>
-          <a:p>
-            <a:pPr indent="0" lvl="0" marL="0" rtl="0" algn="l">
-              <a:lnSpc>
-                <a:spcPct val="115000"/>
-              </a:lnSpc>
-              <a:spcBef>
-                <a:spcPts val="1200"/>
-              </a:spcBef>
-              <a:spcAft>
-                <a:spcPts val="1200"/>
-              </a:spcAft>
-              <a:buNone/>
-            </a:pPr>
-            <a:r>
-              <a:rPr lang="en"/>
-              <a:t>The plots report averages across five seeds, with shaded bands showing standard deviation. I compare when accuracy peaks and how far it falls by epoch two hundred. Those peaks are descriptive test-set results, rather than checkpoints selected through validation.</a:t>
+              <a:t>Over here on the left is the shared setup. I used PreActResNet-18, an image-classification neural network, on CIFAR-10, a dataset of small images divided into ten categories. There are fifty thousand training images and ten thousand test images. I repeated each condition with five random seeds, which control things such as the initial model weights and the order of the training data, giving fifteen runs in total. Each run lasted two hundred epochs, and I saved a checkpoint every five epochs. The learning rate, which controls how much the weights change in each training update, drops after epochs one hundred and one hundred and fifty. On the right are the evaluation measurements. Training uses ten attack steps, while checkpoint evaluation uses twenty, with one random starting perturbation per image for each attack. Clean accuracy uses the unchanged images, and the other two component accuracies use pixel and low-frequency attacks. Joint accuracy checks both attacked versions of the same image. So, for example, if the model gets the low-frequency version right but the pixel version wrong, that image fails the joint metric. The plots show the average across five seeds, and their shaded bands show standard deviation, a measure of how much the runs differ. Finally, the peaks I report describe what happened on the test set. They are not results from choosing a checkpoint using a validation set.</a:t>
             </a:r>
             <a:endParaRPr/>
           </a:p>
@@ -3375,7 +2189,7 @@
   <p:cSld>
     <p:spTree>
       <p:nvGrpSpPr>
-        <p:cNvPr id="208" name="Shape 208"/>
+        <p:cNvPr id="207" name="Shape 207"/>
         <p:cNvGrpSpPr/>
         <p:nvPr/>
       </p:nvGrpSpPr>
@@ -3389,7 +2203,7 @@
       </p:grpSpPr>
       <p:sp>
         <p:nvSpPr>
-          <p:cNvPr id="209" name="Google Shape;209;g3fb5d9673d8_0_14:notes"/>
+          <p:cNvPr id="208" name="Google Shape;208;g3fb5d9673d8_0_14:notes"/>
           <p:cNvSpPr/>
           <p:nvPr>
             <p:ph idx="2" type="sldImg"/>
@@ -3424,7 +2238,7 @@
       </p:sp>
       <p:sp>
         <p:nvSpPr>
-          <p:cNvPr id="210" name="Google Shape;210;g3fb5d9673d8_0_14:notes"/>
+          <p:cNvPr id="209" name="Google Shape;209;g3fb5d9673d8_0_14:notes"/>
           <p:cNvSpPr txBox="1"/>
           <p:nvPr>
             <p:ph idx="1" type="body"/>
@@ -3453,133 +2267,29 @@
                 <a:spcPts val="0"/>
               </a:spcBef>
               <a:spcAft>
-                <a:spcPts val="0"/>
-              </a:spcAft>
-              <a:buClr>
-                <a:schemeClr val="dk1"/>
-              </a:buClr>
-              <a:buSzPts val="1100"/>
-              <a:buFont typeface="Arial"/>
+                <a:spcPts val="1200"/>
+              </a:spcAft>
               <a:buNone/>
             </a:pPr>
             <a:r>
               <a:rPr lang="en"/>
-              <a:t>First, the pixel-only control reproduces the robust-overfitting pattern.</a:t>
+              <a:t>Let’s start with the pixel-only condition, which serves as the control, or reference experiment, for the comparison. On the left, we can see how test accuracy changes across the saved checkpoints. The pixel-attack accuracy reaches around 51</a:t>
             </a:r>
-            <a:endParaRPr/>
-          </a:p>
-          <a:p>
-            <a:pPr indent="0" lvl="0" marL="0" rtl="0" algn="l">
-              <a:lnSpc>
-                <a:spcPct val="115000"/>
-              </a:lnSpc>
-              <a:spcBef>
-                <a:spcPts val="1200"/>
-              </a:spcBef>
-              <a:spcAft>
-                <a:spcPts val="0"/>
-              </a:spcAft>
-              <a:buClr>
-                <a:schemeClr val="dk1"/>
-              </a:buClr>
-              <a:buSzPts val="1100"/>
-              <a:buFont typeface="Arial"/>
-              <a:buNone/>
-            </a:pPr>
             <a:r>
               <a:rPr lang="en"/>
-              <a:t>On the left, pixel-PGD-20 accuracy reaches 51.22 percent at epoch 105, then falls to 42.66 percent by epoch two hundred. That is a decline of 8.56 percentage points.</a:t>
+              <a:t>% </a:t>
             </a:r>
-            <a:endParaRPr/>
-          </a:p>
-          <a:p>
-            <a:pPr indent="0" lvl="0" marL="0" rtl="0" algn="l">
-              <a:lnSpc>
-                <a:spcPct val="115000"/>
-              </a:lnSpc>
-              <a:spcBef>
-                <a:spcPts val="1200"/>
-              </a:spcBef>
-              <a:spcAft>
-                <a:spcPts val="0"/>
-              </a:spcAft>
-              <a:buClr>
-                <a:schemeClr val="dk1"/>
-              </a:buClr>
-              <a:buSzPts val="1100"/>
-              <a:buFont typeface="Arial"/>
-              <a:buNone/>
-            </a:pPr>
             <a:r>
               <a:rPr lang="en"/>
-              <a:t>This timing is consistent across the runs: all five seeds reach their individual pixel-accuracy peak at epoch 105.</a:t>
+              <a:t>at epoch 105, marked by the green line, and then falls to around 43</a:t>
             </a:r>
-            <a:endParaRPr/>
-          </a:p>
-          <a:p>
-            <a:pPr indent="0" lvl="0" marL="0" rtl="0" algn="l">
-              <a:lnSpc>
-                <a:spcPct val="115000"/>
-              </a:lnSpc>
-              <a:spcBef>
-                <a:spcPts val="1200"/>
-              </a:spcBef>
-              <a:spcAft>
-                <a:spcPts val="0"/>
-              </a:spcAft>
-              <a:buClr>
-                <a:schemeClr val="dk1"/>
-              </a:buClr>
-              <a:buSzPts val="1100"/>
-              <a:buFont typeface="Arial"/>
-              <a:buNone/>
-            </a:pPr>
             <a:r>
               <a:rPr lang="en"/>
-              <a:t>The loss plot on the right supports the same picture. Pixel robust loss increases from about 1.29 at epoch 105 to 3.22 at the final checkpoint.</a:t>
+              <a:t>% </a:t>
             </a:r>
-            <a:endParaRPr/>
-          </a:p>
-          <a:p>
-            <a:pPr indent="0" lvl="0" marL="0" rtl="0" algn="l">
-              <a:lnSpc>
-                <a:spcPct val="115000"/>
-              </a:lnSpc>
-              <a:spcBef>
-                <a:spcPts val="1200"/>
-              </a:spcBef>
-              <a:spcAft>
-                <a:spcPts val="0"/>
-              </a:spcAft>
-              <a:buClr>
-                <a:schemeClr val="dk1"/>
-              </a:buClr>
-              <a:buSzPts val="1100"/>
-              <a:buFont typeface="Arial"/>
-              <a:buNone/>
-            </a:pPr>
             <a:r>
               <a:rPr lang="en"/>
-              <a:t>You may notice that the pixel and joint accuracy curves almost completely overlap. Under this evaluation, the pixel attack accounts for essentially all the failures captured by the joint metric.</a:t>
-            </a:r>
-            <a:endParaRPr/>
-          </a:p>
-          <a:p>
-            <a:pPr indent="0" lvl="0" marL="0" rtl="0" algn="l">
-              <a:lnSpc>
-                <a:spcPct val="115000"/>
-              </a:lnSpc>
-              <a:spcBef>
-                <a:spcPts val="1200"/>
-              </a:spcBef>
-              <a:spcAft>
-                <a:spcPts val="1200"/>
-              </a:spcAft>
-              <a:buNone/>
-            </a:pPr>
-            <a:r>
-              <a:rPr lang="en"/>
-              <a:t>So the control establishes the expected pattern. Next, what changes when training uses only the low-frequency attack?</a:t>
+              <a:t>by the end. That is a drop of about 8 percentage points. This timing was consistent across all five runs: each one reached its individual pixel-accuracy peak at epoch 105. Over here on the right, the loss under the pixel attack rises from about 1.29 at that checkpoint to 3.22 at the end, so that measurement also shows the deterioration. You may notice that the pixel and joint accuracy lines nearly overlap on the left. That means the pixel attack captures essentially all the failures that the joint metric detects in this condition. So this first experiment reproduces the robust-overfitting pattern we expected. We can now compare that with what happens when the model trains only against low-frequency attacks.</a:t>
             </a:r>
             <a:endParaRPr/>
           </a:p>
@@ -9025,7 +7735,7 @@
   <p:cSld>
     <p:spTree>
       <p:nvGrpSpPr>
-        <p:cNvPr id="230" name="Shape 230"/>
+        <p:cNvPr id="229" name="Shape 229"/>
         <p:cNvGrpSpPr/>
         <p:nvPr/>
       </p:nvGrpSpPr>
@@ -9039,7 +7749,7 @@
       </p:grpSpPr>
       <p:grpSp>
         <p:nvGrpSpPr>
-          <p:cNvPr id="231" name="Google Shape;231;p22"/>
+          <p:cNvPr id="230" name="Google Shape;230;p22"/>
           <p:cNvGrpSpPr/>
           <p:nvPr/>
         </p:nvGrpSpPr>
@@ -9053,7 +7763,7 @@
         </p:grpSpPr>
         <p:sp>
           <p:nvSpPr>
-            <p:cNvPr id="232" name="Google Shape;232;p22"/>
+            <p:cNvPr id="231" name="Google Shape;231;p22"/>
             <p:cNvSpPr/>
             <p:nvPr/>
           </p:nvSpPr>
@@ -9122,7 +7832,7 @@
         </p:sp>
         <p:sp>
           <p:nvSpPr>
-            <p:cNvPr id="233" name="Google Shape;233;p22"/>
+            <p:cNvPr id="232" name="Google Shape;232;p22"/>
             <p:cNvSpPr/>
             <p:nvPr/>
           </p:nvSpPr>
@@ -9191,7 +7901,7 @@
         </p:sp>
         <p:sp>
           <p:nvSpPr>
-            <p:cNvPr id="234" name="Google Shape;234;p22"/>
+            <p:cNvPr id="233" name="Google Shape;233;p22"/>
             <p:cNvSpPr/>
             <p:nvPr/>
           </p:nvSpPr>
@@ -9260,7 +7970,7 @@
         </p:sp>
         <p:sp>
           <p:nvSpPr>
-            <p:cNvPr id="235" name="Google Shape;235;p22"/>
+            <p:cNvPr id="234" name="Google Shape;234;p22"/>
             <p:cNvSpPr/>
             <p:nvPr/>
           </p:nvSpPr>
@@ -9330,7 +8040,7 @@
       </p:grpSp>
       <p:grpSp>
         <p:nvGrpSpPr>
-          <p:cNvPr id="236" name="Google Shape;236;p22"/>
+          <p:cNvPr id="235" name="Google Shape;235;p22"/>
           <p:cNvGrpSpPr/>
           <p:nvPr/>
         </p:nvGrpSpPr>
@@ -9344,7 +8054,7 @@
         </p:grpSpPr>
         <p:sp>
           <p:nvSpPr>
-            <p:cNvPr id="237" name="Google Shape;237;p22"/>
+            <p:cNvPr id="236" name="Google Shape;236;p22"/>
             <p:cNvSpPr/>
             <p:nvPr/>
           </p:nvSpPr>
@@ -9413,7 +8123,7 @@
         </p:sp>
         <p:sp>
           <p:nvSpPr>
-            <p:cNvPr id="238" name="Google Shape;238;p22"/>
+            <p:cNvPr id="237" name="Google Shape;237;p22"/>
             <p:cNvSpPr/>
             <p:nvPr/>
           </p:nvSpPr>
@@ -9482,7 +8192,7 @@
         </p:sp>
         <p:sp>
           <p:nvSpPr>
-            <p:cNvPr id="239" name="Google Shape;239;p22"/>
+            <p:cNvPr id="238" name="Google Shape;238;p22"/>
             <p:cNvSpPr/>
             <p:nvPr/>
           </p:nvSpPr>
@@ -9551,7 +8261,7 @@
         </p:sp>
         <p:sp>
           <p:nvSpPr>
-            <p:cNvPr id="240" name="Google Shape;240;p22"/>
+            <p:cNvPr id="239" name="Google Shape;239;p22"/>
             <p:cNvSpPr/>
             <p:nvPr/>
           </p:nvSpPr>
@@ -9621,7 +8331,7 @@
       </p:grpSp>
       <p:pic>
         <p:nvPicPr>
-          <p:cNvPr id="241" name="Google Shape;241;p22" title="Screenshot 2026-09-14 at 11.29.54 PM.png"/>
+          <p:cNvPr id="240" name="Google Shape;240;p22" title="Screenshot 2026-09-14 at 11.29.54 PM.png"/>
           <p:cNvPicPr preferRelativeResize="0"/>
           <p:nvPr/>
         </p:nvPicPr>
@@ -9648,7 +8358,7 @@
       </p:pic>
       <p:sp>
         <p:nvSpPr>
-          <p:cNvPr id="242" name="Google Shape;242;p22"/>
+          <p:cNvPr id="241" name="Google Shape;241;p22"/>
           <p:cNvSpPr txBox="1"/>
           <p:nvPr>
             <p:ph type="title"/>
@@ -9689,7 +8399,7 @@
       </p:sp>
       <p:pic>
         <p:nvPicPr>
-          <p:cNvPr id="243" name="Google Shape;243;p22"/>
+          <p:cNvPr id="242" name="Google Shape;242;p22"/>
           <p:cNvPicPr preferRelativeResize="0"/>
           <p:nvPr/>
         </p:nvPicPr>
@@ -9716,7 +8426,7 @@
       </p:pic>
       <p:cxnSp>
         <p:nvCxnSpPr>
-          <p:cNvPr id="244" name="Google Shape;244;p22"/>
+          <p:cNvPr id="243" name="Google Shape;243;p22"/>
           <p:cNvCxnSpPr/>
           <p:nvPr/>
         </p:nvCxnSpPr>
@@ -9742,7 +8452,7 @@
       </p:cxnSp>
       <p:sp>
         <p:nvSpPr>
-          <p:cNvPr id="245" name="Google Shape;245;p22"/>
+          <p:cNvPr id="244" name="Google Shape;244;p22"/>
           <p:cNvSpPr txBox="1"/>
           <p:nvPr/>
         </p:nvSpPr>
@@ -9814,7 +8524,7 @@
   <p:cSld>
     <p:spTree>
       <p:nvGrpSpPr>
-        <p:cNvPr id="249" name="Shape 249"/>
+        <p:cNvPr id="248" name="Shape 248"/>
         <p:cNvGrpSpPr/>
         <p:nvPr/>
       </p:nvGrpSpPr>
@@ -9828,7 +8538,7 @@
       </p:grpSpPr>
       <p:grpSp>
         <p:nvGrpSpPr>
-          <p:cNvPr id="250" name="Google Shape;250;p23"/>
+          <p:cNvPr id="249" name="Google Shape;249;p23"/>
           <p:cNvGrpSpPr/>
           <p:nvPr/>
         </p:nvGrpSpPr>
@@ -9842,7 +8552,7 @@
         </p:grpSpPr>
         <p:sp>
           <p:nvSpPr>
-            <p:cNvPr id="251" name="Google Shape;251;p23"/>
+            <p:cNvPr id="250" name="Google Shape;250;p23"/>
             <p:cNvSpPr/>
             <p:nvPr/>
           </p:nvSpPr>
@@ -9911,7 +8621,7 @@
         </p:sp>
         <p:sp>
           <p:nvSpPr>
-            <p:cNvPr id="252" name="Google Shape;252;p23"/>
+            <p:cNvPr id="251" name="Google Shape;251;p23"/>
             <p:cNvSpPr/>
             <p:nvPr/>
           </p:nvSpPr>
@@ -9980,7 +8690,7 @@
         </p:sp>
         <p:sp>
           <p:nvSpPr>
-            <p:cNvPr id="253" name="Google Shape;253;p23"/>
+            <p:cNvPr id="252" name="Google Shape;252;p23"/>
             <p:cNvSpPr/>
             <p:nvPr/>
           </p:nvSpPr>
@@ -10049,7 +8759,7 @@
         </p:sp>
         <p:sp>
           <p:nvSpPr>
-            <p:cNvPr id="254" name="Google Shape;254;p23"/>
+            <p:cNvPr id="253" name="Google Shape;253;p23"/>
             <p:cNvSpPr/>
             <p:nvPr/>
           </p:nvSpPr>
@@ -10119,7 +8829,7 @@
       </p:grpSp>
       <p:grpSp>
         <p:nvGrpSpPr>
-          <p:cNvPr id="255" name="Google Shape;255;p23"/>
+          <p:cNvPr id="254" name="Google Shape;254;p23"/>
           <p:cNvGrpSpPr/>
           <p:nvPr/>
         </p:nvGrpSpPr>
@@ -10133,7 +8843,7 @@
         </p:grpSpPr>
         <p:sp>
           <p:nvSpPr>
-            <p:cNvPr id="256" name="Google Shape;256;p23"/>
+            <p:cNvPr id="255" name="Google Shape;255;p23"/>
             <p:cNvSpPr/>
             <p:nvPr/>
           </p:nvSpPr>
@@ -10202,7 +8912,7 @@
         </p:sp>
         <p:sp>
           <p:nvSpPr>
-            <p:cNvPr id="257" name="Google Shape;257;p23"/>
+            <p:cNvPr id="256" name="Google Shape;256;p23"/>
             <p:cNvSpPr/>
             <p:nvPr/>
           </p:nvSpPr>
@@ -10271,7 +8981,7 @@
         </p:sp>
         <p:sp>
           <p:nvSpPr>
-            <p:cNvPr id="258" name="Google Shape;258;p23"/>
+            <p:cNvPr id="257" name="Google Shape;257;p23"/>
             <p:cNvSpPr/>
             <p:nvPr/>
           </p:nvSpPr>
@@ -10340,7 +9050,7 @@
         </p:sp>
         <p:sp>
           <p:nvSpPr>
-            <p:cNvPr id="259" name="Google Shape;259;p23"/>
+            <p:cNvPr id="258" name="Google Shape;258;p23"/>
             <p:cNvSpPr/>
             <p:nvPr/>
           </p:nvSpPr>
@@ -10410,7 +9120,7 @@
       </p:grpSp>
       <p:pic>
         <p:nvPicPr>
-          <p:cNvPr id="260" name="Google Shape;260;p23" title="Screenshot 2026-09-14 at 11.30.13 PM.png"/>
+          <p:cNvPr id="259" name="Google Shape;259;p23" title="Screenshot 2026-09-14 at 11.30.13 PM.png"/>
           <p:cNvPicPr preferRelativeResize="0"/>
           <p:nvPr/>
         </p:nvPicPr>
@@ -10437,7 +9147,7 @@
       </p:pic>
       <p:sp>
         <p:nvSpPr>
-          <p:cNvPr id="261" name="Google Shape;261;p23"/>
+          <p:cNvPr id="260" name="Google Shape;260;p23"/>
           <p:cNvSpPr txBox="1"/>
           <p:nvPr>
             <p:ph type="title"/>
@@ -10478,7 +9188,7 @@
       </p:sp>
       <p:pic>
         <p:nvPicPr>
-          <p:cNvPr id="262" name="Google Shape;262;p23"/>
+          <p:cNvPr id="261" name="Google Shape;261;p23"/>
           <p:cNvPicPr preferRelativeResize="0"/>
           <p:nvPr/>
         </p:nvPicPr>
@@ -10505,7 +9215,7 @@
       </p:pic>
       <p:cxnSp>
         <p:nvCxnSpPr>
-          <p:cNvPr id="263" name="Google Shape;263;p23"/>
+          <p:cNvPr id="262" name="Google Shape;262;p23"/>
           <p:cNvCxnSpPr/>
           <p:nvPr/>
         </p:nvCxnSpPr>
@@ -10531,7 +9241,7 @@
       </p:cxnSp>
       <p:sp>
         <p:nvSpPr>
-          <p:cNvPr id="264" name="Google Shape;264;p23"/>
+          <p:cNvPr id="263" name="Google Shape;263;p23"/>
           <p:cNvSpPr txBox="1"/>
           <p:nvPr/>
         </p:nvSpPr>
@@ -10603,7 +9313,7 @@
   <p:cSld>
     <p:spTree>
       <p:nvGrpSpPr>
-        <p:cNvPr id="268" name="Shape 268"/>
+        <p:cNvPr id="267" name="Shape 267"/>
         <p:cNvGrpSpPr/>
         <p:nvPr/>
       </p:nvGrpSpPr>
@@ -10617,7 +9327,7 @@
       </p:grpSpPr>
       <p:grpSp>
         <p:nvGrpSpPr>
-          <p:cNvPr id="269" name="Google Shape;269;p24"/>
+          <p:cNvPr id="268" name="Google Shape;268;p24"/>
           <p:cNvGrpSpPr/>
           <p:nvPr/>
         </p:nvGrpSpPr>
@@ -10631,7 +9341,7 @@
         </p:grpSpPr>
         <p:sp>
           <p:nvSpPr>
-            <p:cNvPr id="270" name="Google Shape;270;p24"/>
+            <p:cNvPr id="269" name="Google Shape;269;p24"/>
             <p:cNvSpPr/>
             <p:nvPr/>
           </p:nvSpPr>
@@ -10700,7 +9410,7 @@
         </p:sp>
         <p:sp>
           <p:nvSpPr>
-            <p:cNvPr id="271" name="Google Shape;271;p24"/>
+            <p:cNvPr id="270" name="Google Shape;270;p24"/>
             <p:cNvSpPr/>
             <p:nvPr/>
           </p:nvSpPr>
@@ -10769,7 +9479,7 @@
         </p:sp>
         <p:sp>
           <p:nvSpPr>
-            <p:cNvPr id="272" name="Google Shape;272;p24"/>
+            <p:cNvPr id="271" name="Google Shape;271;p24"/>
             <p:cNvSpPr/>
             <p:nvPr/>
           </p:nvSpPr>
@@ -10838,7 +9548,7 @@
         </p:sp>
         <p:sp>
           <p:nvSpPr>
-            <p:cNvPr id="273" name="Google Shape;273;p24"/>
+            <p:cNvPr id="272" name="Google Shape;272;p24"/>
             <p:cNvSpPr/>
             <p:nvPr/>
           </p:nvSpPr>
@@ -10908,7 +9618,7 @@
       </p:grpSp>
       <p:grpSp>
         <p:nvGrpSpPr>
-          <p:cNvPr id="274" name="Google Shape;274;p24"/>
+          <p:cNvPr id="273" name="Google Shape;273;p24"/>
           <p:cNvGrpSpPr/>
           <p:nvPr/>
         </p:nvGrpSpPr>
@@ -10922,7 +9632,7 @@
         </p:grpSpPr>
         <p:sp>
           <p:nvSpPr>
-            <p:cNvPr id="275" name="Google Shape;275;p24"/>
+            <p:cNvPr id="274" name="Google Shape;274;p24"/>
             <p:cNvSpPr/>
             <p:nvPr/>
           </p:nvSpPr>
@@ -10991,7 +9701,7 @@
         </p:sp>
         <p:sp>
           <p:nvSpPr>
-            <p:cNvPr id="276" name="Google Shape;276;p24"/>
+            <p:cNvPr id="275" name="Google Shape;275;p24"/>
             <p:cNvSpPr/>
             <p:nvPr/>
           </p:nvSpPr>
@@ -11060,7 +9770,7 @@
         </p:sp>
         <p:sp>
           <p:nvSpPr>
-            <p:cNvPr id="277" name="Google Shape;277;p24"/>
+            <p:cNvPr id="276" name="Google Shape;276;p24"/>
             <p:cNvSpPr/>
             <p:nvPr/>
           </p:nvSpPr>
@@ -11129,7 +9839,7 @@
         </p:sp>
         <p:sp>
           <p:nvSpPr>
-            <p:cNvPr id="278" name="Google Shape;278;p24"/>
+            <p:cNvPr id="277" name="Google Shape;277;p24"/>
             <p:cNvSpPr/>
             <p:nvPr/>
           </p:nvSpPr>
@@ -11197,36 +9907,9 @@
           </p:txBody>
         </p:sp>
       </p:grpSp>
-      <p:pic>
-        <p:nvPicPr>
-          <p:cNvPr id="279" name="Google Shape;279;p24" title="Screenshot 2026-09-14 at 11.28.55 PM.png"/>
-          <p:cNvPicPr preferRelativeResize="0"/>
-          <p:nvPr/>
-        </p:nvPicPr>
-        <p:blipFill rotWithShape="1">
-          <a:blip r:embed="rId3">
-            <a:alphaModFix/>
-          </a:blip>
-          <a:srcRect b="49859" l="0" r="0" t="6034"/>
-          <a:stretch/>
-        </p:blipFill>
-        <p:spPr>
-          <a:xfrm>
-            <a:off x="292225" y="1058987"/>
-            <a:ext cx="8559549" cy="2534727"/>
-          </a:xfrm>
-          <a:prstGeom prst="rect">
-            <a:avLst/>
-          </a:prstGeom>
-          <a:noFill/>
-          <a:ln>
-            <a:noFill/>
-          </a:ln>
-        </p:spPr>
-      </p:pic>
       <p:sp>
         <p:nvSpPr>
-          <p:cNvPr id="280" name="Google Shape;280;p24"/>
+          <p:cNvPr id="278" name="Google Shape;278;p24"/>
           <p:cNvSpPr txBox="1"/>
           <p:nvPr>
             <p:ph type="title"/>
@@ -11267,12 +9950,12 @@
       </p:sp>
       <p:pic>
         <p:nvPicPr>
-          <p:cNvPr id="281" name="Google Shape;281;p24"/>
+          <p:cNvPr id="279" name="Google Shape;279;p24"/>
           <p:cNvPicPr preferRelativeResize="0"/>
           <p:nvPr/>
         </p:nvPicPr>
         <p:blipFill rotWithShape="1">
-          <a:blip r:embed="rId4">
+          <a:blip r:embed="rId3">
             <a:alphaModFix/>
           </a:blip>
           <a:srcRect b="10657" l="15714" r="18039" t="7930"/>
@@ -11292,36 +9975,9 @@
           </a:ln>
         </p:spPr>
       </p:pic>
-      <p:pic>
-        <p:nvPicPr>
-          <p:cNvPr id="282" name="Google Shape;282;p24" title="Screenshot 2026-09-14 at 11.28.55 PM.png"/>
-          <p:cNvPicPr preferRelativeResize="0"/>
-          <p:nvPr/>
-        </p:nvPicPr>
-        <p:blipFill rotWithShape="1">
-          <a:blip r:embed="rId3">
-            <a:alphaModFix/>
-          </a:blip>
-          <a:srcRect b="707" l="32415" r="32531" t="97170"/>
-          <a:stretch/>
-        </p:blipFill>
-        <p:spPr>
-          <a:xfrm>
-            <a:off x="2891925" y="3876350"/>
-            <a:ext cx="3360148" cy="136599"/>
-          </a:xfrm>
-          <a:prstGeom prst="rect">
-            <a:avLst/>
-          </a:prstGeom>
-          <a:noFill/>
-          <a:ln>
-            <a:noFill/>
-          </a:ln>
-        </p:spPr>
-      </p:pic>
       <p:cxnSp>
         <p:nvCxnSpPr>
-          <p:cNvPr id="283" name="Google Shape;283;p24"/>
+          <p:cNvPr id="280" name="Google Shape;280;p24"/>
           <p:cNvCxnSpPr/>
           <p:nvPr/>
         </p:nvCxnSpPr>
@@ -11347,7 +10003,7 @@
       </p:cxnSp>
       <p:sp>
         <p:nvSpPr>
-          <p:cNvPr id="284" name="Google Shape;284;p24"/>
+          <p:cNvPr id="281" name="Google Shape;281;p24"/>
           <p:cNvSpPr txBox="1"/>
           <p:nvPr/>
         </p:nvSpPr>
@@ -11388,7 +10044,7 @@
                   <a:schemeClr val="dk2"/>
                 </a:solidFill>
               </a:rPr>
-              <a:t>Result: </a:t>
+              <a:t>Result:</a:t>
             </a:r>
             <a:r>
               <a:rPr lang="en" sz="1300">
@@ -11396,9 +10052,9 @@
                   <a:schemeClr val="dk2"/>
                 </a:solidFill>
               </a:rPr>
-              <a:t>Pixel and joint accuracy fluctuate across checkpoints. The peak-to-final decline also reflects changes in the training attack.</a:t>
+              <a:t> Pixel accuracy is higher after pixel-training epochs, while low-frequency accuracy is higher after low-frequency-training epochs.</a:t>
             </a:r>
-            <a:endParaRPr b="1" sz="1300">
+            <a:endParaRPr sz="1300">
               <a:solidFill>
                 <a:schemeClr val="dk2"/>
               </a:solidFill>
@@ -11406,6 +10062,62 @@
           </a:p>
         </p:txBody>
       </p:sp>
+      <p:pic>
+        <p:nvPicPr>
+          <p:cNvPr id="282" name="Google Shape;282;p24" title="Screenshot 2026-09-18 at 9.45.57 AM.png"/>
+          <p:cNvPicPr preferRelativeResize="0"/>
+          <p:nvPr/>
+        </p:nvPicPr>
+        <p:blipFill>
+          <a:blip r:embed="rId4">
+            <a:alphaModFix/>
+          </a:blip>
+          <a:stretch>
+            <a:fillRect/>
+          </a:stretch>
+        </p:blipFill>
+        <p:spPr>
+          <a:xfrm>
+            <a:off x="2680525" y="3636237"/>
+            <a:ext cx="3782950" cy="164475"/>
+          </a:xfrm>
+          <a:prstGeom prst="rect">
+            <a:avLst/>
+          </a:prstGeom>
+          <a:noFill/>
+          <a:ln>
+            <a:noFill/>
+          </a:ln>
+        </p:spPr>
+      </p:pic>
+      <p:pic>
+        <p:nvPicPr>
+          <p:cNvPr id="283" name="Google Shape;283;p24" title="Screenshot 2026-09-18 at 9.50.25 AM.png"/>
+          <p:cNvPicPr preferRelativeResize="0"/>
+          <p:nvPr/>
+        </p:nvPicPr>
+        <p:blipFill>
+          <a:blip r:embed="rId5">
+            <a:alphaModFix/>
+          </a:blip>
+          <a:stretch>
+            <a:fillRect/>
+          </a:stretch>
+        </p:blipFill>
+        <p:spPr>
+          <a:xfrm>
+            <a:off x="152400" y="1304225"/>
+            <a:ext cx="8839204" cy="2179589"/>
+          </a:xfrm>
+          <a:prstGeom prst="rect">
+            <a:avLst/>
+          </a:prstGeom>
+          <a:noFill/>
+          <a:ln>
+            <a:noFill/>
+          </a:ln>
+        </p:spPr>
+      </p:pic>
     </p:spTree>
   </p:cSld>
   <p:clrMapOvr>
@@ -11419,7 +10131,7 @@
   <p:cSld>
     <p:spTree>
       <p:nvGrpSpPr>
-        <p:cNvPr id="288" name="Shape 288"/>
+        <p:cNvPr id="287" name="Shape 287"/>
         <p:cNvGrpSpPr/>
         <p:nvPr/>
       </p:nvGrpSpPr>
@@ -11433,7 +10145,7 @@
       </p:grpSpPr>
       <p:sp>
         <p:nvSpPr>
-          <p:cNvPr id="289" name="Google Shape;289;p25"/>
+          <p:cNvPr id="288" name="Google Shape;288;p25"/>
           <p:cNvSpPr txBox="1"/>
           <p:nvPr>
             <p:ph type="title"/>
@@ -11474,7 +10186,7 @@
       </p:sp>
       <p:sp>
         <p:nvSpPr>
-          <p:cNvPr id="290" name="Google Shape;290;p25"/>
+          <p:cNvPr id="289" name="Google Shape;289;p25"/>
           <p:cNvSpPr txBox="1"/>
           <p:nvPr>
             <p:ph idx="1" type="body"/>
@@ -11628,7 +10340,7 @@
       </p:sp>
       <p:grpSp>
         <p:nvGrpSpPr>
-          <p:cNvPr id="291" name="Google Shape;291;p25"/>
+          <p:cNvPr id="290" name="Google Shape;290;p25"/>
           <p:cNvGrpSpPr/>
           <p:nvPr/>
         </p:nvGrpSpPr>
@@ -11642,7 +10354,7 @@
         </p:grpSpPr>
         <p:sp>
           <p:nvSpPr>
-            <p:cNvPr id="292" name="Google Shape;292;p25"/>
+            <p:cNvPr id="291" name="Google Shape;291;p25"/>
             <p:cNvSpPr/>
             <p:nvPr/>
           </p:nvSpPr>
@@ -11711,7 +10423,7 @@
         </p:sp>
         <p:sp>
           <p:nvSpPr>
-            <p:cNvPr id="293" name="Google Shape;293;p25"/>
+            <p:cNvPr id="292" name="Google Shape;292;p25"/>
             <p:cNvSpPr/>
             <p:nvPr/>
           </p:nvSpPr>
@@ -11780,7 +10492,7 @@
         </p:sp>
         <p:sp>
           <p:nvSpPr>
-            <p:cNvPr id="294" name="Google Shape;294;p25"/>
+            <p:cNvPr id="293" name="Google Shape;293;p25"/>
             <p:cNvSpPr/>
             <p:nvPr/>
           </p:nvSpPr>
@@ -11849,7 +10561,7 @@
         </p:sp>
         <p:sp>
           <p:nvSpPr>
-            <p:cNvPr id="295" name="Google Shape;295;p25"/>
+            <p:cNvPr id="294" name="Google Shape;294;p25"/>
             <p:cNvSpPr/>
             <p:nvPr/>
           </p:nvSpPr>
@@ -11919,7 +10631,7 @@
       </p:grpSp>
       <p:grpSp>
         <p:nvGrpSpPr>
-          <p:cNvPr id="296" name="Google Shape;296;p25"/>
+          <p:cNvPr id="295" name="Google Shape;295;p25"/>
           <p:cNvGrpSpPr/>
           <p:nvPr/>
         </p:nvGrpSpPr>
@@ -11933,7 +10645,7 @@
         </p:grpSpPr>
         <p:sp>
           <p:nvSpPr>
-            <p:cNvPr id="297" name="Google Shape;297;p25"/>
+            <p:cNvPr id="296" name="Google Shape;296;p25"/>
             <p:cNvSpPr/>
             <p:nvPr/>
           </p:nvSpPr>
@@ -12002,7 +10714,7 @@
         </p:sp>
         <p:sp>
           <p:nvSpPr>
-            <p:cNvPr id="298" name="Google Shape;298;p25"/>
+            <p:cNvPr id="297" name="Google Shape;297;p25"/>
             <p:cNvSpPr/>
             <p:nvPr/>
           </p:nvSpPr>
@@ -12071,7 +10783,7 @@
         </p:sp>
         <p:sp>
           <p:nvSpPr>
-            <p:cNvPr id="299" name="Google Shape;299;p25"/>
+            <p:cNvPr id="298" name="Google Shape;298;p25"/>
             <p:cNvSpPr/>
             <p:nvPr/>
           </p:nvSpPr>
@@ -12140,7 +10852,7 @@
         </p:sp>
         <p:sp>
           <p:nvSpPr>
-            <p:cNvPr id="300" name="Google Shape;300;p25"/>
+            <p:cNvPr id="299" name="Google Shape;299;p25"/>
             <p:cNvSpPr/>
             <p:nvPr/>
           </p:nvSpPr>
@@ -12210,7 +10922,7 @@
       </p:grpSp>
       <p:pic>
         <p:nvPicPr>
-          <p:cNvPr id="301" name="Google Shape;301;p25"/>
+          <p:cNvPr id="300" name="Google Shape;300;p25"/>
           <p:cNvPicPr preferRelativeResize="0"/>
           <p:nvPr/>
         </p:nvPicPr>
@@ -12237,7 +10949,7 @@
       </p:pic>
       <p:sp>
         <p:nvSpPr>
-          <p:cNvPr id="302" name="Google Shape;302;p25"/>
+          <p:cNvPr id="301" name="Google Shape;301;p25"/>
           <p:cNvSpPr txBox="1"/>
           <p:nvPr/>
         </p:nvSpPr>
@@ -12278,7 +10990,15 @@
                   <a:schemeClr val="dk2"/>
                 </a:solidFill>
               </a:rPr>
-              <a:t>Next steps:</a:t>
+              <a:t>Potential n</a:t>
+            </a:r>
+            <a:r>
+              <a:rPr b="1" lang="en" sz="1500">
+                <a:solidFill>
+                  <a:schemeClr val="dk2"/>
+                </a:solidFill>
+              </a:rPr>
+              <a:t>ext steps:</a:t>
             </a:r>
             <a:endParaRPr b="1" sz="1500">
               <a:solidFill>
@@ -12313,7 +11033,7 @@
       </p:sp>
       <p:cxnSp>
         <p:nvCxnSpPr>
-          <p:cNvPr id="303" name="Google Shape;303;p25"/>
+          <p:cNvPr id="302" name="Google Shape;302;p25"/>
           <p:cNvCxnSpPr/>
           <p:nvPr/>
         </p:nvCxnSpPr>
@@ -12339,7 +11059,7 @@
       </p:cxnSp>
       <p:cxnSp>
         <p:nvCxnSpPr>
-          <p:cNvPr id="304" name="Google Shape;304;p25"/>
+          <p:cNvPr id="303" name="Google Shape;303;p25"/>
           <p:cNvCxnSpPr/>
           <p:nvPr/>
         </p:nvCxnSpPr>
@@ -12376,7 +11096,7 @@
   <p:cSld>
     <p:spTree>
       <p:nvGrpSpPr>
-        <p:cNvPr id="308" name="Shape 308"/>
+        <p:cNvPr id="307" name="Shape 307"/>
         <p:cNvGrpSpPr/>
         <p:nvPr/>
       </p:nvGrpSpPr>
@@ -12390,7 +11110,7 @@
       </p:grpSpPr>
       <p:sp>
         <p:nvSpPr>
-          <p:cNvPr id="309" name="Google Shape;309;p26"/>
+          <p:cNvPr id="308" name="Google Shape;308;p26"/>
           <p:cNvSpPr txBox="1"/>
           <p:nvPr>
             <p:ph type="title"/>
@@ -12435,7 +11155,7 @@
       </p:sp>
       <p:sp>
         <p:nvSpPr>
-          <p:cNvPr id="310" name="Google Shape;310;p26"/>
+          <p:cNvPr id="309" name="Google Shape;309;p26"/>
           <p:cNvSpPr txBox="1"/>
           <p:nvPr>
             <p:ph idx="1" type="body"/>
@@ -12444,7 +11164,7 @@
         <p:spPr>
           <a:xfrm>
             <a:off x="311700" y="1017725"/>
-            <a:ext cx="8520600" cy="3393900"/>
+            <a:ext cx="8520600" cy="3825300"/>
           </a:xfrm>
           <a:prstGeom prst="rect">
             <a:avLst/>
@@ -12607,7 +11327,7 @@
                 <a:spcPts val="1000"/>
               </a:spcBef>
               <a:spcAft>
-                <a:spcPts val="1000"/>
+                <a:spcPts val="0"/>
               </a:spcAft>
               <a:buClr>
                 <a:schemeClr val="dk1"/>
@@ -12617,7 +11337,7 @@
               <a:buNone/>
             </a:pPr>
             <a:r>
-              <a:rPr b="1" lang="en" sz="1500"/>
+              <a:rPr lang="en" sz="1500"/>
               <a:t>For full bibliography and research materials:</a:t>
             </a:r>
             <a:r>
@@ -12635,11 +11355,41 @@
             </a:r>
             <a:endParaRPr sz="1500"/>
           </a:p>
+          <a:p>
+            <a:pPr indent="0" lvl="0" marL="0" rtl="0" algn="l">
+              <a:spcBef>
+                <a:spcPts val="1000"/>
+              </a:spcBef>
+              <a:spcAft>
+                <a:spcPts val="1000"/>
+              </a:spcAft>
+              <a:buClr>
+                <a:schemeClr val="dk1"/>
+              </a:buClr>
+              <a:buSzPts val="1100"/>
+              <a:buFont typeface="Arial"/>
+              <a:buNone/>
+            </a:pPr>
+            <a:r>
+              <a:rPr lang="en" sz="1500"/>
+              <a:t>For full model checkpoints: </a:t>
+            </a:r>
+            <a:r>
+              <a:rPr lang="en" sz="1500" u="sng">
+                <a:solidFill>
+                  <a:schemeClr val="hlink"/>
+                </a:solidFill>
+                <a:hlinkClick r:id="rId4"/>
+              </a:rPr>
+              <a:t>huggingface.co/KaiwenDu/robust-overfitting-checkpoints</a:t>
+            </a:r>
+            <a:endParaRPr sz="1500"/>
+          </a:p>
         </p:txBody>
       </p:sp>
       <p:grpSp>
         <p:nvGrpSpPr>
-          <p:cNvPr id="311" name="Google Shape;311;p26"/>
+          <p:cNvPr id="310" name="Google Shape;310;p26"/>
           <p:cNvGrpSpPr/>
           <p:nvPr/>
         </p:nvGrpSpPr>
@@ -12653,7 +11403,7 @@
         </p:grpSpPr>
         <p:sp>
           <p:nvSpPr>
-            <p:cNvPr id="312" name="Google Shape;312;p26"/>
+            <p:cNvPr id="311" name="Google Shape;311;p26"/>
             <p:cNvSpPr/>
             <p:nvPr/>
           </p:nvSpPr>
@@ -12722,7 +11472,7 @@
         </p:sp>
         <p:sp>
           <p:nvSpPr>
-            <p:cNvPr id="313" name="Google Shape;313;p26"/>
+            <p:cNvPr id="312" name="Google Shape;312;p26"/>
             <p:cNvSpPr/>
             <p:nvPr/>
           </p:nvSpPr>
@@ -12791,7 +11541,7 @@
         </p:sp>
         <p:sp>
           <p:nvSpPr>
-            <p:cNvPr id="314" name="Google Shape;314;p26"/>
+            <p:cNvPr id="313" name="Google Shape;313;p26"/>
             <p:cNvSpPr/>
             <p:nvPr/>
           </p:nvSpPr>
@@ -12860,7 +11610,7 @@
         </p:sp>
         <p:sp>
           <p:nvSpPr>
-            <p:cNvPr id="315" name="Google Shape;315;p26"/>
+            <p:cNvPr id="314" name="Google Shape;314;p26"/>
             <p:cNvSpPr/>
             <p:nvPr/>
           </p:nvSpPr>
@@ -12930,7 +11680,7 @@
       </p:grpSp>
       <p:grpSp>
         <p:nvGrpSpPr>
-          <p:cNvPr id="316" name="Google Shape;316;p26"/>
+          <p:cNvPr id="315" name="Google Shape;315;p26"/>
           <p:cNvGrpSpPr/>
           <p:nvPr/>
         </p:nvGrpSpPr>
@@ -12944,7 +11694,7 @@
         </p:grpSpPr>
         <p:sp>
           <p:nvSpPr>
-            <p:cNvPr id="317" name="Google Shape;317;p26"/>
+            <p:cNvPr id="316" name="Google Shape;316;p26"/>
             <p:cNvSpPr/>
             <p:nvPr/>
           </p:nvSpPr>
@@ -13013,7 +11763,7 @@
         </p:sp>
         <p:sp>
           <p:nvSpPr>
-            <p:cNvPr id="318" name="Google Shape;318;p26"/>
+            <p:cNvPr id="317" name="Google Shape;317;p26"/>
             <p:cNvSpPr/>
             <p:nvPr/>
           </p:nvSpPr>
@@ -13082,7 +11832,7 @@
         </p:sp>
         <p:sp>
           <p:nvSpPr>
-            <p:cNvPr id="319" name="Google Shape;319;p26"/>
+            <p:cNvPr id="318" name="Google Shape;318;p26"/>
             <p:cNvSpPr/>
             <p:nvPr/>
           </p:nvSpPr>
@@ -13151,7 +11901,7 @@
         </p:sp>
         <p:sp>
           <p:nvSpPr>
-            <p:cNvPr id="320" name="Google Shape;320;p26"/>
+            <p:cNvPr id="319" name="Google Shape;319;p26"/>
             <p:cNvSpPr/>
             <p:nvPr/>
           </p:nvSpPr>
@@ -13221,12 +11971,12 @@
       </p:grpSp>
       <p:pic>
         <p:nvPicPr>
-          <p:cNvPr id="321" name="Google Shape;321;p26"/>
+          <p:cNvPr id="320" name="Google Shape;320;p26"/>
           <p:cNvPicPr preferRelativeResize="0"/>
           <p:nvPr/>
         </p:nvPicPr>
         <p:blipFill rotWithShape="1">
-          <a:blip r:embed="rId4">
+          <a:blip r:embed="rId5">
             <a:alphaModFix/>
           </a:blip>
           <a:srcRect b="10657" l="15714" r="18039" t="7930"/>
@@ -13259,7 +12009,7 @@
   <p:cSld>
     <p:spTree>
       <p:nvGrpSpPr>
-        <p:cNvPr id="325" name="Shape 325"/>
+        <p:cNvPr id="324" name="Shape 324"/>
         <p:cNvGrpSpPr/>
         <p:nvPr/>
       </p:nvGrpSpPr>
@@ -13273,7 +12023,7 @@
       </p:grpSpPr>
       <p:sp>
         <p:nvSpPr>
-          <p:cNvPr id="326" name="Google Shape;326;p27"/>
+          <p:cNvPr id="325" name="Google Shape;325;p27"/>
           <p:cNvSpPr txBox="1"/>
           <p:nvPr>
             <p:ph type="title"/>
@@ -13339,7 +12089,7 @@
       </p:sp>
       <p:sp>
         <p:nvSpPr>
-          <p:cNvPr id="327" name="Google Shape;327;p27"/>
+          <p:cNvPr id="326" name="Google Shape;326;p27"/>
           <p:cNvSpPr txBox="1"/>
           <p:nvPr>
             <p:ph idx="1" type="body"/>
@@ -13430,7 +12180,7 @@
       </p:sp>
       <p:grpSp>
         <p:nvGrpSpPr>
-          <p:cNvPr id="328" name="Google Shape;328;p27"/>
+          <p:cNvPr id="327" name="Google Shape;327;p27"/>
           <p:cNvGrpSpPr/>
           <p:nvPr/>
         </p:nvGrpSpPr>
@@ -13444,7 +12194,7 @@
         </p:grpSpPr>
         <p:sp>
           <p:nvSpPr>
-            <p:cNvPr id="329" name="Google Shape;329;p27"/>
+            <p:cNvPr id="328" name="Google Shape;328;p27"/>
             <p:cNvSpPr/>
             <p:nvPr/>
           </p:nvSpPr>
@@ -13513,7 +12263,7 @@
         </p:sp>
         <p:sp>
           <p:nvSpPr>
-            <p:cNvPr id="330" name="Google Shape;330;p27"/>
+            <p:cNvPr id="329" name="Google Shape;329;p27"/>
             <p:cNvSpPr/>
             <p:nvPr/>
           </p:nvSpPr>
@@ -13582,7 +12332,7 @@
         </p:sp>
         <p:sp>
           <p:nvSpPr>
-            <p:cNvPr id="331" name="Google Shape;331;p27"/>
+            <p:cNvPr id="330" name="Google Shape;330;p27"/>
             <p:cNvSpPr/>
             <p:nvPr/>
           </p:nvSpPr>
@@ -13651,7 +12401,7 @@
         </p:sp>
         <p:sp>
           <p:nvSpPr>
-            <p:cNvPr id="332" name="Google Shape;332;p27"/>
+            <p:cNvPr id="331" name="Google Shape;331;p27"/>
             <p:cNvSpPr/>
             <p:nvPr/>
           </p:nvSpPr>
@@ -13721,7 +12471,7 @@
       </p:grpSp>
       <p:grpSp>
         <p:nvGrpSpPr>
-          <p:cNvPr id="333" name="Google Shape;333;p27"/>
+          <p:cNvPr id="332" name="Google Shape;332;p27"/>
           <p:cNvGrpSpPr/>
           <p:nvPr/>
         </p:nvGrpSpPr>
@@ -13735,7 +12485,7 @@
         </p:grpSpPr>
         <p:sp>
           <p:nvSpPr>
-            <p:cNvPr id="334" name="Google Shape;334;p27"/>
+            <p:cNvPr id="333" name="Google Shape;333;p27"/>
             <p:cNvSpPr/>
             <p:nvPr/>
           </p:nvSpPr>
@@ -13804,7 +12554,7 @@
         </p:sp>
         <p:sp>
           <p:nvSpPr>
-            <p:cNvPr id="335" name="Google Shape;335;p27"/>
+            <p:cNvPr id="334" name="Google Shape;334;p27"/>
             <p:cNvSpPr/>
             <p:nvPr/>
           </p:nvSpPr>
@@ -13873,7 +12623,7 @@
         </p:sp>
         <p:sp>
           <p:nvSpPr>
-            <p:cNvPr id="336" name="Google Shape;336;p27"/>
+            <p:cNvPr id="335" name="Google Shape;335;p27"/>
             <p:cNvSpPr/>
             <p:nvPr/>
           </p:nvSpPr>
@@ -13942,7 +12692,7 @@
         </p:sp>
         <p:sp>
           <p:nvSpPr>
-            <p:cNvPr id="337" name="Google Shape;337;p27"/>
+            <p:cNvPr id="336" name="Google Shape;336;p27"/>
             <p:cNvSpPr/>
             <p:nvPr/>
           </p:nvSpPr>
@@ -14012,7 +12762,7 @@
       </p:grpSp>
       <p:pic>
         <p:nvPicPr>
-          <p:cNvPr id="338" name="Google Shape;338;p27" title="2.png"/>
+          <p:cNvPr id="337" name="Google Shape;337;p27" title="2.png"/>
           <p:cNvPicPr preferRelativeResize="0"/>
           <p:nvPr/>
         </p:nvPicPr>
@@ -14039,7 +12789,7 @@
       </p:pic>
       <p:pic>
         <p:nvPicPr>
-          <p:cNvPr id="339" name="Google Shape;339;p27"/>
+          <p:cNvPr id="338" name="Google Shape;338;p27"/>
           <p:cNvPicPr preferRelativeResize="0"/>
           <p:nvPr/>
         </p:nvPicPr>
@@ -14066,7 +12816,7 @@
       </p:pic>
       <p:sp>
         <p:nvSpPr>
-          <p:cNvPr id="340" name="Google Shape;340;p27"/>
+          <p:cNvPr id="339" name="Google Shape;339;p27"/>
           <p:cNvSpPr txBox="1"/>
           <p:nvPr/>
         </p:nvSpPr>
@@ -14124,7 +12874,7 @@
       </p:sp>
       <p:sp>
         <p:nvSpPr>
-          <p:cNvPr id="341" name="Google Shape;341;p27"/>
+          <p:cNvPr id="340" name="Google Shape;340;p27"/>
           <p:cNvSpPr txBox="1"/>
           <p:nvPr/>
         </p:nvSpPr>
@@ -17095,36 +15845,9 @@
           <a:chExt cx="0" cy="0"/>
         </a:xfrm>
       </p:grpSpPr>
-      <p:pic>
-        <p:nvPicPr>
-          <p:cNvPr id="132" name="Google Shape;132;p17"/>
-          <p:cNvPicPr preferRelativeResize="0"/>
-          <p:nvPr/>
-        </p:nvPicPr>
-        <p:blipFill rotWithShape="1">
-          <a:blip r:embed="rId3">
-            <a:alphaModFix/>
-          </a:blip>
-          <a:srcRect b="6083" l="50549" r="0" t="10242"/>
-          <a:stretch/>
-        </p:blipFill>
-        <p:spPr>
-          <a:xfrm>
-            <a:off x="5409850" y="2771630"/>
-            <a:ext cx="3106673" cy="2176481"/>
-          </a:xfrm>
-          <a:prstGeom prst="rect">
-            <a:avLst/>
-          </a:prstGeom>
-          <a:noFill/>
-          <a:ln>
-            <a:noFill/>
-          </a:ln>
-        </p:spPr>
-      </p:pic>
       <p:sp>
         <p:nvSpPr>
-          <p:cNvPr id="133" name="Google Shape;133;p17"/>
+          <p:cNvPr id="132" name="Google Shape;132;p17"/>
           <p:cNvSpPr txBox="1"/>
           <p:nvPr>
             <p:ph type="title"/>
@@ -17165,7 +15888,7 @@
       </p:sp>
       <p:grpSp>
         <p:nvGrpSpPr>
-          <p:cNvPr id="134" name="Google Shape;134;p17"/>
+          <p:cNvPr id="133" name="Google Shape;133;p17"/>
           <p:cNvGrpSpPr/>
           <p:nvPr/>
         </p:nvGrpSpPr>
@@ -17179,7 +15902,7 @@
         </p:grpSpPr>
         <p:sp>
           <p:nvSpPr>
-            <p:cNvPr id="135" name="Google Shape;135;p17"/>
+            <p:cNvPr id="134" name="Google Shape;134;p17"/>
             <p:cNvSpPr/>
             <p:nvPr/>
           </p:nvSpPr>
@@ -17248,7 +15971,7 @@
         </p:sp>
         <p:sp>
           <p:nvSpPr>
-            <p:cNvPr id="136" name="Google Shape;136;p17"/>
+            <p:cNvPr id="135" name="Google Shape;135;p17"/>
             <p:cNvSpPr/>
             <p:nvPr/>
           </p:nvSpPr>
@@ -17317,7 +16040,7 @@
         </p:sp>
         <p:sp>
           <p:nvSpPr>
-            <p:cNvPr id="137" name="Google Shape;137;p17"/>
+            <p:cNvPr id="136" name="Google Shape;136;p17"/>
             <p:cNvSpPr/>
             <p:nvPr/>
           </p:nvSpPr>
@@ -17386,7 +16109,7 @@
         </p:sp>
         <p:sp>
           <p:nvSpPr>
-            <p:cNvPr id="138" name="Google Shape;138;p17"/>
+            <p:cNvPr id="137" name="Google Shape;137;p17"/>
             <p:cNvSpPr/>
             <p:nvPr/>
           </p:nvSpPr>
@@ -17456,7 +16179,7 @@
       </p:grpSp>
       <p:grpSp>
         <p:nvGrpSpPr>
-          <p:cNvPr id="139" name="Google Shape;139;p17"/>
+          <p:cNvPr id="138" name="Google Shape;138;p17"/>
           <p:cNvGrpSpPr/>
           <p:nvPr/>
         </p:nvGrpSpPr>
@@ -17470,7 +16193,7 @@
         </p:grpSpPr>
         <p:sp>
           <p:nvSpPr>
-            <p:cNvPr id="140" name="Google Shape;140;p17"/>
+            <p:cNvPr id="139" name="Google Shape;139;p17"/>
             <p:cNvSpPr/>
             <p:nvPr/>
           </p:nvSpPr>
@@ -17539,7 +16262,7 @@
         </p:sp>
         <p:sp>
           <p:nvSpPr>
-            <p:cNvPr id="141" name="Google Shape;141;p17"/>
+            <p:cNvPr id="140" name="Google Shape;140;p17"/>
             <p:cNvSpPr/>
             <p:nvPr/>
           </p:nvSpPr>
@@ -17608,7 +16331,7 @@
         </p:sp>
         <p:sp>
           <p:nvSpPr>
-            <p:cNvPr id="142" name="Google Shape;142;p17"/>
+            <p:cNvPr id="141" name="Google Shape;141;p17"/>
             <p:cNvSpPr/>
             <p:nvPr/>
           </p:nvSpPr>
@@ -17677,7 +16400,7 @@
         </p:sp>
         <p:sp>
           <p:nvSpPr>
-            <p:cNvPr id="143" name="Google Shape;143;p17"/>
+            <p:cNvPr id="142" name="Google Shape;142;p17"/>
             <p:cNvSpPr/>
             <p:nvPr/>
           </p:nvSpPr>
@@ -17745,6 +16468,34 @@
           </p:txBody>
         </p:sp>
       </p:grpSp>
+      <p:pic>
+        <p:nvPicPr>
+          <p:cNvPr id="143" name="Google Shape;143;p17"/>
+          <p:cNvPicPr preferRelativeResize="0"/>
+          <p:nvPr/>
+        </p:nvPicPr>
+        <p:blipFill>
+          <a:blip r:embed="rId3">
+            <a:alphaModFix/>
+          </a:blip>
+          <a:stretch>
+            <a:fillRect/>
+          </a:stretch>
+        </p:blipFill>
+        <p:spPr>
+          <a:xfrm>
+            <a:off x="5156075" y="2924987"/>
+            <a:ext cx="3287301" cy="2054563"/>
+          </a:xfrm>
+          <a:prstGeom prst="rect">
+            <a:avLst/>
+          </a:prstGeom>
+          <a:noFill/>
+          <a:ln>
+            <a:noFill/>
+          </a:ln>
+        </p:spPr>
+      </p:pic>
       <p:pic>
         <p:nvPicPr>
           <p:cNvPr id="144" name="Google Shape;144;p17"/>
@@ -17926,63 +16677,9 @@
           </a:p>
         </p:txBody>
       </p:sp>
-      <p:pic>
-        <p:nvPicPr>
-          <p:cNvPr id="146" name="Google Shape;146;p17"/>
-          <p:cNvPicPr preferRelativeResize="0"/>
-          <p:nvPr/>
-        </p:nvPicPr>
-        <p:blipFill rotWithShape="1">
-          <a:blip r:embed="rId3">
-            <a:alphaModFix/>
-          </a:blip>
-          <a:srcRect b="6076" l="0" r="49091" t="8461"/>
-          <a:stretch/>
-        </p:blipFill>
-        <p:spPr>
-          <a:xfrm>
-            <a:off x="5255290" y="612338"/>
-            <a:ext cx="3106683" cy="2159301"/>
-          </a:xfrm>
-          <a:prstGeom prst="rect">
-            <a:avLst/>
-          </a:prstGeom>
-          <a:noFill/>
-          <a:ln>
-            <a:noFill/>
-          </a:ln>
-        </p:spPr>
-      </p:pic>
-      <p:pic>
-        <p:nvPicPr>
-          <p:cNvPr id="147" name="Google Shape;147;p17"/>
-          <p:cNvPicPr preferRelativeResize="0"/>
-          <p:nvPr/>
-        </p:nvPicPr>
-        <p:blipFill rotWithShape="1">
-          <a:blip r:embed="rId3">
-            <a:alphaModFix/>
-          </a:blip>
-          <a:srcRect b="91171" l="32818" r="32687" t="2425"/>
-          <a:stretch/>
-        </p:blipFill>
-        <p:spPr>
-          <a:xfrm rot="5400000">
-            <a:off x="7007289" y="2661107"/>
-            <a:ext cx="2934999" cy="225625"/>
-          </a:xfrm>
-          <a:prstGeom prst="rect">
-            <a:avLst/>
-          </a:prstGeom>
-          <a:noFill/>
-          <a:ln>
-            <a:noFill/>
-          </a:ln>
-        </p:spPr>
-      </p:pic>
       <p:sp>
         <p:nvSpPr>
-          <p:cNvPr id="148" name="Google Shape;148;p17"/>
+          <p:cNvPr id="146" name="Google Shape;146;p17"/>
           <p:cNvSpPr txBox="1"/>
           <p:nvPr>
             <p:ph idx="1" type="body"/>
@@ -18023,6 +16720,34 @@
           </a:p>
         </p:txBody>
       </p:sp>
+      <p:pic>
+        <p:nvPicPr>
+          <p:cNvPr id="147" name="Google Shape;147;p17" title="Screenshot 2026-09-18 at 9.03.54 AM.png"/>
+          <p:cNvPicPr preferRelativeResize="0"/>
+          <p:nvPr/>
+        </p:nvPicPr>
+        <p:blipFill>
+          <a:blip r:embed="rId5">
+            <a:alphaModFix/>
+          </a:blip>
+          <a:stretch>
+            <a:fillRect/>
+          </a:stretch>
+        </p:blipFill>
+        <p:spPr>
+          <a:xfrm>
+            <a:off x="5388800" y="489437"/>
+            <a:ext cx="3054576" cy="2251750"/>
+          </a:xfrm>
+          <a:prstGeom prst="rect">
+            <a:avLst/>
+          </a:prstGeom>
+          <a:noFill/>
+          <a:ln>
+            <a:noFill/>
+          </a:ln>
+        </p:spPr>
+      </p:pic>
     </p:spTree>
   </p:cSld>
   <p:clrMapOvr>
@@ -18036,7 +16761,7 @@
   <p:cSld>
     <p:spTree>
       <p:nvGrpSpPr>
-        <p:cNvPr id="152" name="Shape 152"/>
+        <p:cNvPr id="151" name="Shape 151"/>
         <p:cNvGrpSpPr/>
         <p:nvPr/>
       </p:nvGrpSpPr>
@@ -18050,7 +16775,7 @@
       </p:grpSpPr>
       <p:sp>
         <p:nvSpPr>
-          <p:cNvPr id="153" name="Google Shape;153;p18"/>
+          <p:cNvPr id="152" name="Google Shape;152;p18"/>
           <p:cNvSpPr txBox="1"/>
           <p:nvPr>
             <p:ph type="title"/>
@@ -18083,7 +16808,7 @@
             </a:pPr>
             <a:r>
               <a:rPr lang="en" sz="2220"/>
-              <a:t>Our Research: Question and Motivation</a:t>
+              <a:t>Attack Domains and Training Conditions</a:t>
             </a:r>
             <a:endParaRPr sz="2220"/>
           </a:p>
@@ -18091,7 +16816,7 @@
       </p:sp>
       <p:grpSp>
         <p:nvGrpSpPr>
-          <p:cNvPr id="154" name="Google Shape;154;p18"/>
+          <p:cNvPr id="153" name="Google Shape;153;p18"/>
           <p:cNvGrpSpPr/>
           <p:nvPr/>
         </p:nvGrpSpPr>
@@ -18105,7 +16830,7 @@
         </p:grpSpPr>
         <p:sp>
           <p:nvSpPr>
-            <p:cNvPr id="155" name="Google Shape;155;p18"/>
+            <p:cNvPr id="154" name="Google Shape;154;p18"/>
             <p:cNvSpPr/>
             <p:nvPr/>
           </p:nvSpPr>
@@ -18174,7 +16899,7 @@
         </p:sp>
         <p:sp>
           <p:nvSpPr>
-            <p:cNvPr id="156" name="Google Shape;156;p18"/>
+            <p:cNvPr id="155" name="Google Shape;155;p18"/>
             <p:cNvSpPr/>
             <p:nvPr/>
           </p:nvSpPr>
@@ -18243,7 +16968,7 @@
         </p:sp>
         <p:sp>
           <p:nvSpPr>
-            <p:cNvPr id="157" name="Google Shape;157;p18"/>
+            <p:cNvPr id="156" name="Google Shape;156;p18"/>
             <p:cNvSpPr/>
             <p:nvPr/>
           </p:nvSpPr>
@@ -18312,7 +17037,7 @@
         </p:sp>
         <p:sp>
           <p:nvSpPr>
-            <p:cNvPr id="158" name="Google Shape;158;p18"/>
+            <p:cNvPr id="157" name="Google Shape;157;p18"/>
             <p:cNvSpPr/>
             <p:nvPr/>
           </p:nvSpPr>
@@ -18382,7 +17107,7 @@
       </p:grpSp>
       <p:grpSp>
         <p:nvGrpSpPr>
-          <p:cNvPr id="159" name="Google Shape;159;p18"/>
+          <p:cNvPr id="158" name="Google Shape;158;p18"/>
           <p:cNvGrpSpPr/>
           <p:nvPr/>
         </p:nvGrpSpPr>
@@ -18396,7 +17121,7 @@
         </p:grpSpPr>
         <p:sp>
           <p:nvSpPr>
-            <p:cNvPr id="160" name="Google Shape;160;p18"/>
+            <p:cNvPr id="159" name="Google Shape;159;p18"/>
             <p:cNvSpPr/>
             <p:nvPr/>
           </p:nvSpPr>
@@ -18465,7 +17190,7 @@
         </p:sp>
         <p:sp>
           <p:nvSpPr>
-            <p:cNvPr id="161" name="Google Shape;161;p18"/>
+            <p:cNvPr id="160" name="Google Shape;160;p18"/>
             <p:cNvSpPr/>
             <p:nvPr/>
           </p:nvSpPr>
@@ -18534,7 +17259,7 @@
         </p:sp>
         <p:sp>
           <p:nvSpPr>
-            <p:cNvPr id="162" name="Google Shape;162;p18"/>
+            <p:cNvPr id="161" name="Google Shape;161;p18"/>
             <p:cNvSpPr/>
             <p:nvPr/>
           </p:nvSpPr>
@@ -18603,7 +17328,7 @@
         </p:sp>
         <p:sp>
           <p:nvSpPr>
-            <p:cNvPr id="163" name="Google Shape;163;p18"/>
+            <p:cNvPr id="162" name="Google Shape;162;p18"/>
             <p:cNvSpPr/>
             <p:nvPr/>
           </p:nvSpPr>
@@ -18673,938 +17398,7 @@
       </p:grpSp>
       <p:sp>
         <p:nvSpPr>
-          <p:cNvPr id="164" name="Google Shape;164;p18"/>
-          <p:cNvSpPr txBox="1"/>
-          <p:nvPr>
-            <p:ph idx="1" type="body"/>
-          </p:nvPr>
-        </p:nvSpPr>
-        <p:spPr>
-          <a:xfrm>
-            <a:off x="311700" y="1017725"/>
-            <a:ext cx="3974700" cy="3329400"/>
-          </a:xfrm>
-          <a:prstGeom prst="rect">
-            <a:avLst/>
-          </a:prstGeom>
-        </p:spPr>
-        <p:txBody>
-          <a:bodyPr anchorCtr="0" anchor="t" bIns="91425" lIns="91425" spcFirstLastPara="1" rIns="91425" wrap="square" tIns="91425">
-            <a:noAutofit/>
-          </a:bodyPr>
-          <a:lstStyle/>
-          <a:p>
-            <a:pPr indent="0" lvl="0" marL="0" rtl="0" algn="l">
-              <a:spcBef>
-                <a:spcPts val="0"/>
-              </a:spcBef>
-              <a:spcAft>
-                <a:spcPts val="0"/>
-              </a:spcAft>
-              <a:buClr>
-                <a:schemeClr val="dk1"/>
-              </a:buClr>
-              <a:buSzPts val="1100"/>
-              <a:buFont typeface="Arial"/>
-              <a:buNone/>
-            </a:pPr>
-            <a:r>
-              <a:rPr b="1" lang="en" sz="1500"/>
-              <a:t>Question:</a:t>
-            </a:r>
-            <a:endParaRPr b="1" sz="1500"/>
-          </a:p>
-          <a:p>
-            <a:pPr indent="0" lvl="0" marL="0" rtl="0" algn="l">
-              <a:spcBef>
-                <a:spcPts val="1200"/>
-              </a:spcBef>
-              <a:spcAft>
-                <a:spcPts val="0"/>
-              </a:spcAft>
-              <a:buClr>
-                <a:schemeClr val="dk1"/>
-              </a:buClr>
-              <a:buSzPts val="1100"/>
-              <a:buFont typeface="Arial"/>
-              <a:buNone/>
-            </a:pPr>
-            <a:r>
-              <a:rPr lang="en" sz="1300"/>
-              <a:t>How does randomly choosing pixel-space or low-frequency PGD each epoch affect when robust accuracy peaks and how far it declines, compared with training on either attack alone?</a:t>
-            </a:r>
-            <a:endParaRPr sz="1300"/>
-          </a:p>
-          <a:p>
-            <a:pPr indent="0" lvl="0" marL="0" rtl="0" algn="l">
-              <a:spcBef>
-                <a:spcPts val="1200"/>
-              </a:spcBef>
-              <a:spcAft>
-                <a:spcPts val="0"/>
-              </a:spcAft>
-              <a:buClr>
-                <a:schemeClr val="dk1"/>
-              </a:buClr>
-              <a:buSzPts val="1100"/>
-              <a:buFont typeface="Arial"/>
-              <a:buNone/>
-            </a:pPr>
-            <a:r>
-              <a:t/>
-            </a:r>
-            <a:endParaRPr sz="1300"/>
-          </a:p>
-          <a:p>
-            <a:pPr indent="0" lvl="0" marL="0" rtl="0" algn="l">
-              <a:spcBef>
-                <a:spcPts val="1200"/>
-              </a:spcBef>
-              <a:spcAft>
-                <a:spcPts val="0"/>
-              </a:spcAft>
-              <a:buClr>
-                <a:schemeClr val="dk1"/>
-              </a:buClr>
-              <a:buSzPts val="1100"/>
-              <a:buFont typeface="Arial"/>
-              <a:buNone/>
-            </a:pPr>
-            <a:r>
-              <a:rPr b="1" lang="en" sz="1500"/>
-              <a:t>Hypothesis:</a:t>
-            </a:r>
-            <a:endParaRPr b="1" sz="1500"/>
-          </a:p>
-          <a:p>
-            <a:pPr indent="0" lvl="0" marL="0" rtl="0" algn="l">
-              <a:spcBef>
-                <a:spcPts val="1200"/>
-              </a:spcBef>
-              <a:spcAft>
-                <a:spcPts val="1200"/>
-              </a:spcAft>
-              <a:buClr>
-                <a:schemeClr val="dk1"/>
-              </a:buClr>
-              <a:buSzPts val="1100"/>
-              <a:buFont typeface="Arial"/>
-              <a:buNone/>
-            </a:pPr>
-            <a:r>
-              <a:rPr lang="en" sz="1300"/>
-              <a:t>With other settings held fixed, mixed-domain training will change the peak timing, peak shape, or post-peak decline of robust accuracy under one or both evaluation attacks.</a:t>
-            </a:r>
-            <a:endParaRPr sz="1300"/>
-          </a:p>
-        </p:txBody>
-      </p:sp>
-      <p:pic>
-        <p:nvPicPr>
-          <p:cNvPr id="165" name="Google Shape;165;p18"/>
-          <p:cNvPicPr preferRelativeResize="0"/>
-          <p:nvPr/>
-        </p:nvPicPr>
-        <p:blipFill rotWithShape="1">
-          <a:blip r:embed="rId3">
-            <a:alphaModFix/>
-          </a:blip>
-          <a:srcRect b="10657" l="15714" r="18039" t="7930"/>
-          <a:stretch/>
-        </p:blipFill>
-        <p:spPr>
-          <a:xfrm>
-            <a:off x="8414900" y="4347050"/>
-            <a:ext cx="573050" cy="704250"/>
-          </a:xfrm>
-          <a:prstGeom prst="rect">
-            <a:avLst/>
-          </a:prstGeom>
-          <a:noFill/>
-          <a:ln>
-            <a:noFill/>
-          </a:ln>
-        </p:spPr>
-      </p:pic>
-      <p:sp>
-        <p:nvSpPr>
-          <p:cNvPr id="166" name="Google Shape;166;p18"/>
-          <p:cNvSpPr txBox="1"/>
-          <p:nvPr/>
-        </p:nvSpPr>
-        <p:spPr>
-          <a:xfrm>
-            <a:off x="4763425" y="2123500"/>
-            <a:ext cx="3880200" cy="1264500"/>
-          </a:xfrm>
-          <a:prstGeom prst="rect">
-            <a:avLst/>
-          </a:prstGeom>
-          <a:noFill/>
-          <a:ln>
-            <a:noFill/>
-          </a:ln>
-        </p:spPr>
-        <p:txBody>
-          <a:bodyPr anchorCtr="0" anchor="t" bIns="91425" lIns="91425" spcFirstLastPara="1" rIns="91425" wrap="square" tIns="91425">
-            <a:spAutoFit/>
-          </a:bodyPr>
-          <a:lstStyle/>
-          <a:p>
-            <a:pPr indent="0" lvl="0" marL="0" rtl="0" algn="l">
-              <a:lnSpc>
-                <a:spcPct val="115000"/>
-              </a:lnSpc>
-              <a:spcBef>
-                <a:spcPts val="0"/>
-              </a:spcBef>
-              <a:spcAft>
-                <a:spcPts val="0"/>
-              </a:spcAft>
-              <a:buNone/>
-            </a:pPr>
-            <a:r>
-              <a:rPr b="1" lang="en" sz="1500">
-                <a:solidFill>
-                  <a:schemeClr val="dk2"/>
-                </a:solidFill>
-              </a:rPr>
-              <a:t>Why This Matters:</a:t>
-            </a:r>
-            <a:endParaRPr b="1" sz="1500">
-              <a:solidFill>
-                <a:schemeClr val="dk2"/>
-              </a:solidFill>
-            </a:endParaRPr>
-          </a:p>
-          <a:p>
-            <a:pPr indent="0" lvl="0" marL="0" rtl="0" algn="l">
-              <a:lnSpc>
-                <a:spcPct val="115000"/>
-              </a:lnSpc>
-              <a:spcBef>
-                <a:spcPts val="1200"/>
-              </a:spcBef>
-              <a:spcAft>
-                <a:spcPts val="1200"/>
-              </a:spcAft>
-              <a:buNone/>
-            </a:pPr>
-            <a:r>
-              <a:rPr lang="en" sz="1300">
-                <a:solidFill>
-                  <a:schemeClr val="dk2"/>
-                </a:solidFill>
-              </a:rPr>
-              <a:t>Understanding how the training attack affects robust overfitting can guide training methods that preserve robustness over time.</a:t>
-            </a:r>
-            <a:endParaRPr/>
-          </a:p>
-        </p:txBody>
-      </p:sp>
-      <p:cxnSp>
-        <p:nvCxnSpPr>
-          <p:cNvPr id="167" name="Google Shape;167;p18"/>
-          <p:cNvCxnSpPr/>
-          <p:nvPr/>
-        </p:nvCxnSpPr>
-        <p:spPr>
-          <a:xfrm>
-            <a:off x="387475" y="2682425"/>
-            <a:ext cx="705600" cy="0"/>
-          </a:xfrm>
-          <a:prstGeom prst="straightConnector1">
-            <a:avLst/>
-          </a:prstGeom>
-          <a:noFill/>
-          <a:ln cap="flat" cmpd="sng" w="38100">
-            <a:solidFill>
-              <a:schemeClr val="dk2"/>
-            </a:solidFill>
-            <a:prstDash val="solid"/>
-            <a:round/>
-            <a:headEnd len="med" w="med" type="none"/>
-            <a:tailEnd len="med" w="med" type="none"/>
-          </a:ln>
-        </p:spPr>
-      </p:cxnSp>
-      <p:cxnSp>
-        <p:nvCxnSpPr>
-          <p:cNvPr id="168" name="Google Shape;168;p18"/>
-          <p:cNvCxnSpPr/>
-          <p:nvPr/>
-        </p:nvCxnSpPr>
-        <p:spPr>
-          <a:xfrm>
-            <a:off x="4535200" y="1298875"/>
-            <a:ext cx="0" cy="2944200"/>
-          </a:xfrm>
-          <a:prstGeom prst="straightConnector1">
-            <a:avLst/>
-          </a:prstGeom>
-          <a:noFill/>
-          <a:ln cap="flat" cmpd="sng" w="38100">
-            <a:solidFill>
-              <a:schemeClr val="dk2"/>
-            </a:solidFill>
-            <a:prstDash val="solid"/>
-            <a:round/>
-            <a:headEnd len="med" w="med" type="none"/>
-            <a:tailEnd len="med" w="med" type="none"/>
-          </a:ln>
-        </p:spPr>
-      </p:cxnSp>
-    </p:spTree>
-  </p:cSld>
-  <p:clrMapOvr>
-    <a:masterClrMapping/>
-  </p:clrMapOvr>
-</p:sld>
-</file>
-
-<file path=ppt/slides/slide7.xml><?xml version="1.0" encoding="utf-8"?>
-<p:sld xmlns:a="http://schemas.openxmlformats.org/drawingml/2006/main" xmlns:r="http://schemas.openxmlformats.org/officeDocument/2006/relationships" xmlns:mc="http://schemas.openxmlformats.org/markup-compatibility/2006" xmlns:mv="urn:schemas-microsoft-com:mac:vml" xmlns:p="http://schemas.openxmlformats.org/presentationml/2006/main" xmlns:c="http://schemas.openxmlformats.org/drawingml/2006/chart" xmlns:dgm="http://schemas.openxmlformats.org/drawingml/2006/diagram" xmlns:o="urn:schemas-microsoft-com:office:office" xmlns:v="urn:schemas-microsoft-com:vml" xmlns:pvml="urn:schemas-microsoft-com:office:powerpoint" xmlns:com="http://schemas.openxmlformats.org/drawingml/2006/compatibility" xmlns:p14="http://schemas.microsoft.com/office/powerpoint/2010/main" xmlns:p15="http://schemas.microsoft.com/office/powerpoint/2012/main" xmlns:ahyp="http://schemas.microsoft.com/office/drawing/2018/hyperlinkcolor">
-  <p:cSld>
-    <p:spTree>
-      <p:nvGrpSpPr>
-        <p:cNvPr id="172" name="Shape 172"/>
-        <p:cNvGrpSpPr/>
-        <p:nvPr/>
-      </p:nvGrpSpPr>
-      <p:grpSpPr>
-        <a:xfrm>
-          <a:off x="0" y="0"/>
-          <a:ext cx="0" cy="0"/>
-          <a:chOff x="0" y="0"/>
-          <a:chExt cx="0" cy="0"/>
-        </a:xfrm>
-      </p:grpSpPr>
-      <p:sp>
-        <p:nvSpPr>
-          <p:cNvPr id="173" name="Google Shape;173;p19"/>
-          <p:cNvSpPr txBox="1"/>
-          <p:nvPr>
-            <p:ph type="title"/>
-          </p:nvPr>
-        </p:nvSpPr>
-        <p:spPr>
-          <a:xfrm>
-            <a:off x="311700" y="445025"/>
-            <a:ext cx="8520600" cy="572700"/>
-          </a:xfrm>
-          <a:prstGeom prst="rect">
-            <a:avLst/>
-          </a:prstGeom>
-        </p:spPr>
-        <p:txBody>
-          <a:bodyPr anchorCtr="0" anchor="t" bIns="91425" lIns="91425" spcFirstLastPara="1" rIns="91425" wrap="square" tIns="91425">
-            <a:normAutofit/>
-          </a:bodyPr>
-          <a:lstStyle/>
-          <a:p>
-            <a:pPr indent="0" lvl="0" marL="0" rtl="0" algn="l">
-              <a:spcBef>
-                <a:spcPts val="0"/>
-              </a:spcBef>
-              <a:spcAft>
-                <a:spcPts val="0"/>
-              </a:spcAft>
-              <a:buSzPts val="990"/>
-              <a:buNone/>
-            </a:pPr>
-            <a:r>
-              <a:rPr lang="en" sz="2220"/>
-              <a:t>Attack Domains and Training Conditions</a:t>
-            </a:r>
-            <a:endParaRPr sz="2220"/>
-          </a:p>
-        </p:txBody>
-      </p:sp>
-      <p:grpSp>
-        <p:nvGrpSpPr>
-          <p:cNvPr id="174" name="Google Shape;174;p19"/>
-          <p:cNvGrpSpPr/>
-          <p:nvPr/>
-        </p:nvGrpSpPr>
-        <p:grpSpPr>
-          <a:xfrm rot="10800000">
-            <a:off x="205788" y="4842962"/>
-            <a:ext cx="537556" cy="136576"/>
-            <a:chOff x="2641350" y="846250"/>
-            <a:chExt cx="413600" cy="105075"/>
-          </a:xfrm>
-        </p:grpSpPr>
-        <p:sp>
-          <p:nvSpPr>
-            <p:cNvPr id="175" name="Google Shape;175;p19"/>
-            <p:cNvSpPr/>
-            <p:nvPr/>
-          </p:nvSpPr>
-          <p:spPr>
-            <a:xfrm>
-              <a:off x="2991475" y="846250"/>
-              <a:ext cx="63475" cy="105075"/>
-            </a:xfrm>
-            <a:custGeom>
-              <a:rect b="b" l="l" r="r" t="t"/>
-              <a:pathLst>
-                <a:path extrusionOk="0" h="4203" w="2539">
-                  <a:moveTo>
-                    <a:pt x="2092" y="1"/>
-                  </a:moveTo>
-                  <a:lnTo>
-                    <a:pt x="1" y="2111"/>
-                  </a:lnTo>
-                  <a:lnTo>
-                    <a:pt x="2092" y="4202"/>
-                  </a:lnTo>
-                  <a:lnTo>
-                    <a:pt x="2538" y="3756"/>
-                  </a:lnTo>
-                  <a:lnTo>
-                    <a:pt x="874" y="2111"/>
-                  </a:lnTo>
-                  <a:lnTo>
-                    <a:pt x="2538" y="447"/>
-                  </a:lnTo>
-                  <a:lnTo>
-                    <a:pt x="2092" y="1"/>
-                  </a:lnTo>
-                  <a:close/>
-                </a:path>
-              </a:pathLst>
-            </a:custGeom>
-            <a:solidFill>
-              <a:srgbClr val="191919"/>
-            </a:solidFill>
-            <a:ln>
-              <a:noFill/>
-            </a:ln>
-          </p:spPr>
-          <p:txBody>
-            <a:bodyPr anchorCtr="0" anchor="ctr" bIns="91425" lIns="91425" spcFirstLastPara="1" rIns="91425" wrap="square" tIns="91425">
-              <a:noAutofit/>
-            </a:bodyPr>
-            <a:lstStyle/>
-            <a:p>
-              <a:pPr indent="0" lvl="0" marL="0" rtl="0" algn="l">
-                <a:spcBef>
-                  <a:spcPts val="0"/>
-                </a:spcBef>
-                <a:spcAft>
-                  <a:spcPts val="0"/>
-                </a:spcAft>
-                <a:buNone/>
-              </a:pPr>
-              <a:r>
-                <a:t/>
-              </a:r>
-              <a:endParaRPr/>
-            </a:p>
-          </p:txBody>
-        </p:sp>
-        <p:sp>
-          <p:nvSpPr>
-            <p:cNvPr id="176" name="Google Shape;176;p19"/>
-            <p:cNvSpPr/>
-            <p:nvPr/>
-          </p:nvSpPr>
-          <p:spPr>
-            <a:xfrm>
-              <a:off x="2874775" y="846250"/>
-              <a:ext cx="63450" cy="105075"/>
-            </a:xfrm>
-            <a:custGeom>
-              <a:rect b="b" l="l" r="r" t="t"/>
-              <a:pathLst>
-                <a:path extrusionOk="0" h="4203" w="2538">
-                  <a:moveTo>
-                    <a:pt x="2091" y="1"/>
-                  </a:moveTo>
-                  <a:lnTo>
-                    <a:pt x="0" y="2111"/>
-                  </a:lnTo>
-                  <a:lnTo>
-                    <a:pt x="2091" y="4202"/>
-                  </a:lnTo>
-                  <a:lnTo>
-                    <a:pt x="2538" y="3756"/>
-                  </a:lnTo>
-                  <a:lnTo>
-                    <a:pt x="894" y="2111"/>
-                  </a:lnTo>
-                  <a:lnTo>
-                    <a:pt x="2538" y="447"/>
-                  </a:lnTo>
-                  <a:lnTo>
-                    <a:pt x="2091" y="1"/>
-                  </a:lnTo>
-                  <a:close/>
-                </a:path>
-              </a:pathLst>
-            </a:custGeom>
-            <a:solidFill>
-              <a:srgbClr val="191919"/>
-            </a:solidFill>
-            <a:ln>
-              <a:noFill/>
-            </a:ln>
-          </p:spPr>
-          <p:txBody>
-            <a:bodyPr anchorCtr="0" anchor="ctr" bIns="91425" lIns="91425" spcFirstLastPara="1" rIns="91425" wrap="square" tIns="91425">
-              <a:noAutofit/>
-            </a:bodyPr>
-            <a:lstStyle/>
-            <a:p>
-              <a:pPr indent="0" lvl="0" marL="0" rtl="0" algn="l">
-                <a:spcBef>
-                  <a:spcPts val="0"/>
-                </a:spcBef>
-                <a:spcAft>
-                  <a:spcPts val="0"/>
-                </a:spcAft>
-                <a:buNone/>
-              </a:pPr>
-              <a:r>
-                <a:t/>
-              </a:r>
-              <a:endParaRPr/>
-            </a:p>
-          </p:txBody>
-        </p:sp>
-        <p:sp>
-          <p:nvSpPr>
-            <p:cNvPr id="177" name="Google Shape;177;p19"/>
-            <p:cNvSpPr/>
-            <p:nvPr/>
-          </p:nvSpPr>
-          <p:spPr>
-            <a:xfrm>
-              <a:off x="2758075" y="846250"/>
-              <a:ext cx="63450" cy="105075"/>
-            </a:xfrm>
-            <a:custGeom>
-              <a:rect b="b" l="l" r="r" t="t"/>
-              <a:pathLst>
-                <a:path extrusionOk="0" h="4203" w="2538">
-                  <a:moveTo>
-                    <a:pt x="2111" y="1"/>
-                  </a:moveTo>
-                  <a:lnTo>
-                    <a:pt x="0" y="2111"/>
-                  </a:lnTo>
-                  <a:lnTo>
-                    <a:pt x="2111" y="4202"/>
-                  </a:lnTo>
-                  <a:lnTo>
-                    <a:pt x="2537" y="3756"/>
-                  </a:lnTo>
-                  <a:lnTo>
-                    <a:pt x="893" y="2111"/>
-                  </a:lnTo>
-                  <a:lnTo>
-                    <a:pt x="2537" y="447"/>
-                  </a:lnTo>
-                  <a:lnTo>
-                    <a:pt x="2111" y="1"/>
-                  </a:lnTo>
-                  <a:close/>
-                </a:path>
-              </a:pathLst>
-            </a:custGeom>
-            <a:solidFill>
-              <a:srgbClr val="191919"/>
-            </a:solidFill>
-            <a:ln>
-              <a:noFill/>
-            </a:ln>
-          </p:spPr>
-          <p:txBody>
-            <a:bodyPr anchorCtr="0" anchor="ctr" bIns="91425" lIns="91425" spcFirstLastPara="1" rIns="91425" wrap="square" tIns="91425">
-              <a:noAutofit/>
-            </a:bodyPr>
-            <a:lstStyle/>
-            <a:p>
-              <a:pPr indent="0" lvl="0" marL="0" rtl="0" algn="l">
-                <a:spcBef>
-                  <a:spcPts val="0"/>
-                </a:spcBef>
-                <a:spcAft>
-                  <a:spcPts val="0"/>
-                </a:spcAft>
-                <a:buNone/>
-              </a:pPr>
-              <a:r>
-                <a:t/>
-              </a:r>
-              <a:endParaRPr/>
-            </a:p>
-          </p:txBody>
-        </p:sp>
-        <p:sp>
-          <p:nvSpPr>
-            <p:cNvPr id="178" name="Google Shape;178;p19"/>
-            <p:cNvSpPr/>
-            <p:nvPr/>
-          </p:nvSpPr>
-          <p:spPr>
-            <a:xfrm>
-              <a:off x="2641350" y="846250"/>
-              <a:ext cx="63975" cy="105075"/>
-            </a:xfrm>
-            <a:custGeom>
-              <a:rect b="b" l="l" r="r" t="t"/>
-              <a:pathLst>
-                <a:path extrusionOk="0" h="4203" w="2559">
-                  <a:moveTo>
-                    <a:pt x="2112" y="1"/>
-                  </a:moveTo>
-                  <a:lnTo>
-                    <a:pt x="1" y="2111"/>
-                  </a:lnTo>
-                  <a:lnTo>
-                    <a:pt x="2112" y="4202"/>
-                  </a:lnTo>
-                  <a:lnTo>
-                    <a:pt x="2558" y="3756"/>
-                  </a:lnTo>
-                  <a:lnTo>
-                    <a:pt x="894" y="2111"/>
-                  </a:lnTo>
-                  <a:lnTo>
-                    <a:pt x="2558" y="447"/>
-                  </a:lnTo>
-                  <a:lnTo>
-                    <a:pt x="2112" y="1"/>
-                  </a:lnTo>
-                  <a:close/>
-                </a:path>
-              </a:pathLst>
-            </a:custGeom>
-            <a:solidFill>
-              <a:srgbClr val="191919"/>
-            </a:solidFill>
-            <a:ln>
-              <a:noFill/>
-            </a:ln>
-          </p:spPr>
-          <p:txBody>
-            <a:bodyPr anchorCtr="0" anchor="ctr" bIns="91425" lIns="91425" spcFirstLastPara="1" rIns="91425" wrap="square" tIns="91425">
-              <a:noAutofit/>
-            </a:bodyPr>
-            <a:lstStyle/>
-            <a:p>
-              <a:pPr indent="0" lvl="0" marL="0" rtl="0" algn="l">
-                <a:spcBef>
-                  <a:spcPts val="0"/>
-                </a:spcBef>
-                <a:spcAft>
-                  <a:spcPts val="0"/>
-                </a:spcAft>
-                <a:buNone/>
-              </a:pPr>
-              <a:r>
-                <a:t/>
-              </a:r>
-              <a:endParaRPr/>
-            </a:p>
-          </p:txBody>
-        </p:sp>
-      </p:grpSp>
-      <p:grpSp>
-        <p:nvGrpSpPr>
-          <p:cNvPr id="179" name="Google Shape;179;p19"/>
-          <p:cNvGrpSpPr/>
-          <p:nvPr/>
-        </p:nvGrpSpPr>
-        <p:grpSpPr>
-          <a:xfrm>
-            <a:off x="8414888" y="169062"/>
-            <a:ext cx="537556" cy="136576"/>
-            <a:chOff x="2641350" y="846250"/>
-            <a:chExt cx="413600" cy="105075"/>
-          </a:xfrm>
-        </p:grpSpPr>
-        <p:sp>
-          <p:nvSpPr>
-            <p:cNvPr id="180" name="Google Shape;180;p19"/>
-            <p:cNvSpPr/>
-            <p:nvPr/>
-          </p:nvSpPr>
-          <p:spPr>
-            <a:xfrm>
-              <a:off x="2991475" y="846250"/>
-              <a:ext cx="63475" cy="105075"/>
-            </a:xfrm>
-            <a:custGeom>
-              <a:rect b="b" l="l" r="r" t="t"/>
-              <a:pathLst>
-                <a:path extrusionOk="0" h="4203" w="2539">
-                  <a:moveTo>
-                    <a:pt x="2092" y="1"/>
-                  </a:moveTo>
-                  <a:lnTo>
-                    <a:pt x="1" y="2111"/>
-                  </a:lnTo>
-                  <a:lnTo>
-                    <a:pt x="2092" y="4202"/>
-                  </a:lnTo>
-                  <a:lnTo>
-                    <a:pt x="2538" y="3756"/>
-                  </a:lnTo>
-                  <a:lnTo>
-                    <a:pt x="874" y="2111"/>
-                  </a:lnTo>
-                  <a:lnTo>
-                    <a:pt x="2538" y="447"/>
-                  </a:lnTo>
-                  <a:lnTo>
-                    <a:pt x="2092" y="1"/>
-                  </a:lnTo>
-                  <a:close/>
-                </a:path>
-              </a:pathLst>
-            </a:custGeom>
-            <a:solidFill>
-              <a:srgbClr val="191919"/>
-            </a:solidFill>
-            <a:ln>
-              <a:noFill/>
-            </a:ln>
-          </p:spPr>
-          <p:txBody>
-            <a:bodyPr anchorCtr="0" anchor="ctr" bIns="91425" lIns="91425" spcFirstLastPara="1" rIns="91425" wrap="square" tIns="91425">
-              <a:noAutofit/>
-            </a:bodyPr>
-            <a:lstStyle/>
-            <a:p>
-              <a:pPr indent="0" lvl="0" marL="0" rtl="0" algn="l">
-                <a:spcBef>
-                  <a:spcPts val="0"/>
-                </a:spcBef>
-                <a:spcAft>
-                  <a:spcPts val="0"/>
-                </a:spcAft>
-                <a:buNone/>
-              </a:pPr>
-              <a:r>
-                <a:t/>
-              </a:r>
-              <a:endParaRPr/>
-            </a:p>
-          </p:txBody>
-        </p:sp>
-        <p:sp>
-          <p:nvSpPr>
-            <p:cNvPr id="181" name="Google Shape;181;p19"/>
-            <p:cNvSpPr/>
-            <p:nvPr/>
-          </p:nvSpPr>
-          <p:spPr>
-            <a:xfrm>
-              <a:off x="2874775" y="846250"/>
-              <a:ext cx="63450" cy="105075"/>
-            </a:xfrm>
-            <a:custGeom>
-              <a:rect b="b" l="l" r="r" t="t"/>
-              <a:pathLst>
-                <a:path extrusionOk="0" h="4203" w="2538">
-                  <a:moveTo>
-                    <a:pt x="2091" y="1"/>
-                  </a:moveTo>
-                  <a:lnTo>
-                    <a:pt x="0" y="2111"/>
-                  </a:lnTo>
-                  <a:lnTo>
-                    <a:pt x="2091" y="4202"/>
-                  </a:lnTo>
-                  <a:lnTo>
-                    <a:pt x="2538" y="3756"/>
-                  </a:lnTo>
-                  <a:lnTo>
-                    <a:pt x="894" y="2111"/>
-                  </a:lnTo>
-                  <a:lnTo>
-                    <a:pt x="2538" y="447"/>
-                  </a:lnTo>
-                  <a:lnTo>
-                    <a:pt x="2091" y="1"/>
-                  </a:lnTo>
-                  <a:close/>
-                </a:path>
-              </a:pathLst>
-            </a:custGeom>
-            <a:solidFill>
-              <a:srgbClr val="191919"/>
-            </a:solidFill>
-            <a:ln>
-              <a:noFill/>
-            </a:ln>
-          </p:spPr>
-          <p:txBody>
-            <a:bodyPr anchorCtr="0" anchor="ctr" bIns="91425" lIns="91425" spcFirstLastPara="1" rIns="91425" wrap="square" tIns="91425">
-              <a:noAutofit/>
-            </a:bodyPr>
-            <a:lstStyle/>
-            <a:p>
-              <a:pPr indent="0" lvl="0" marL="0" rtl="0" algn="l">
-                <a:spcBef>
-                  <a:spcPts val="0"/>
-                </a:spcBef>
-                <a:spcAft>
-                  <a:spcPts val="0"/>
-                </a:spcAft>
-                <a:buNone/>
-              </a:pPr>
-              <a:r>
-                <a:t/>
-              </a:r>
-              <a:endParaRPr/>
-            </a:p>
-          </p:txBody>
-        </p:sp>
-        <p:sp>
-          <p:nvSpPr>
-            <p:cNvPr id="182" name="Google Shape;182;p19"/>
-            <p:cNvSpPr/>
-            <p:nvPr/>
-          </p:nvSpPr>
-          <p:spPr>
-            <a:xfrm>
-              <a:off x="2758075" y="846250"/>
-              <a:ext cx="63450" cy="105075"/>
-            </a:xfrm>
-            <a:custGeom>
-              <a:rect b="b" l="l" r="r" t="t"/>
-              <a:pathLst>
-                <a:path extrusionOk="0" h="4203" w="2538">
-                  <a:moveTo>
-                    <a:pt x="2111" y="1"/>
-                  </a:moveTo>
-                  <a:lnTo>
-                    <a:pt x="0" y="2111"/>
-                  </a:lnTo>
-                  <a:lnTo>
-                    <a:pt x="2111" y="4202"/>
-                  </a:lnTo>
-                  <a:lnTo>
-                    <a:pt x="2537" y="3756"/>
-                  </a:lnTo>
-                  <a:lnTo>
-                    <a:pt x="893" y="2111"/>
-                  </a:lnTo>
-                  <a:lnTo>
-                    <a:pt x="2537" y="447"/>
-                  </a:lnTo>
-                  <a:lnTo>
-                    <a:pt x="2111" y="1"/>
-                  </a:lnTo>
-                  <a:close/>
-                </a:path>
-              </a:pathLst>
-            </a:custGeom>
-            <a:solidFill>
-              <a:srgbClr val="191919"/>
-            </a:solidFill>
-            <a:ln>
-              <a:noFill/>
-            </a:ln>
-          </p:spPr>
-          <p:txBody>
-            <a:bodyPr anchorCtr="0" anchor="ctr" bIns="91425" lIns="91425" spcFirstLastPara="1" rIns="91425" wrap="square" tIns="91425">
-              <a:noAutofit/>
-            </a:bodyPr>
-            <a:lstStyle/>
-            <a:p>
-              <a:pPr indent="0" lvl="0" marL="0" rtl="0" algn="l">
-                <a:spcBef>
-                  <a:spcPts val="0"/>
-                </a:spcBef>
-                <a:spcAft>
-                  <a:spcPts val="0"/>
-                </a:spcAft>
-                <a:buNone/>
-              </a:pPr>
-              <a:r>
-                <a:t/>
-              </a:r>
-              <a:endParaRPr/>
-            </a:p>
-          </p:txBody>
-        </p:sp>
-        <p:sp>
-          <p:nvSpPr>
-            <p:cNvPr id="183" name="Google Shape;183;p19"/>
-            <p:cNvSpPr/>
-            <p:nvPr/>
-          </p:nvSpPr>
-          <p:spPr>
-            <a:xfrm>
-              <a:off x="2641350" y="846250"/>
-              <a:ext cx="63975" cy="105075"/>
-            </a:xfrm>
-            <a:custGeom>
-              <a:rect b="b" l="l" r="r" t="t"/>
-              <a:pathLst>
-                <a:path extrusionOk="0" h="4203" w="2559">
-                  <a:moveTo>
-                    <a:pt x="2112" y="1"/>
-                  </a:moveTo>
-                  <a:lnTo>
-                    <a:pt x="1" y="2111"/>
-                  </a:lnTo>
-                  <a:lnTo>
-                    <a:pt x="2112" y="4202"/>
-                  </a:lnTo>
-                  <a:lnTo>
-                    <a:pt x="2558" y="3756"/>
-                  </a:lnTo>
-                  <a:lnTo>
-                    <a:pt x="894" y="2111"/>
-                  </a:lnTo>
-                  <a:lnTo>
-                    <a:pt x="2558" y="447"/>
-                  </a:lnTo>
-                  <a:lnTo>
-                    <a:pt x="2112" y="1"/>
-                  </a:lnTo>
-                  <a:close/>
-                </a:path>
-              </a:pathLst>
-            </a:custGeom>
-            <a:solidFill>
-              <a:srgbClr val="191919"/>
-            </a:solidFill>
-            <a:ln>
-              <a:noFill/>
-            </a:ln>
-          </p:spPr>
-          <p:txBody>
-            <a:bodyPr anchorCtr="0" anchor="ctr" bIns="91425" lIns="91425" spcFirstLastPara="1" rIns="91425" wrap="square" tIns="91425">
-              <a:noAutofit/>
-            </a:bodyPr>
-            <a:lstStyle/>
-            <a:p>
-              <a:pPr indent="0" lvl="0" marL="0" rtl="0" algn="l">
-                <a:spcBef>
-                  <a:spcPts val="0"/>
-                </a:spcBef>
-                <a:spcAft>
-                  <a:spcPts val="0"/>
-                </a:spcAft>
-                <a:buNone/>
-              </a:pPr>
-              <a:r>
-                <a:t/>
-              </a:r>
-              <a:endParaRPr/>
-            </a:p>
-          </p:txBody>
-        </p:sp>
-      </p:grpSp>
-      <p:sp>
-        <p:nvSpPr>
-          <p:cNvPr id="184" name="Google Shape;184;p19"/>
+          <p:cNvPr id="163" name="Google Shape;163;p18"/>
           <p:cNvSpPr txBox="1"/>
           <p:nvPr>
             <p:ph idx="1" type="body"/>
@@ -19724,22 +17518,7 @@
             </a:pPr>
             <a:r>
               <a:rPr lang="en" sz="1300"/>
-              <a:t>Uses the discrete cosine transform to retain an 8 × 8 block of low-frequency coefficients per color channel.</a:t>
-            </a:r>
-            <a:endParaRPr sz="1300"/>
-          </a:p>
-          <a:p>
-            <a:pPr indent="0" lvl="0" marL="0" rtl="0" algn="l">
-              <a:spcBef>
-                <a:spcPts val="1200"/>
-              </a:spcBef>
-              <a:spcAft>
-                <a:spcPts val="0"/>
-              </a:spcAft>
-              <a:buNone/>
-            </a:pPr>
-            <a:r>
-              <a:t/>
+              <a:t>Builds perturbations from smooth patterns that change gradually across the image. We use DCT, which represents an image using patterns at different spatial frequencies, and retain only an 8 × 8 block of low-frequency coefficients per color channel.</a:t>
             </a:r>
             <a:endParaRPr sz="1300"/>
           </a:p>
@@ -19763,7 +17542,7 @@
       </p:sp>
       <p:pic>
         <p:nvPicPr>
-          <p:cNvPr id="185" name="Google Shape;185;p19"/>
+          <p:cNvPr id="164" name="Google Shape;164;p18"/>
           <p:cNvPicPr preferRelativeResize="0"/>
           <p:nvPr/>
         </p:nvPicPr>
@@ -19790,7 +17569,7 @@
       </p:pic>
       <p:graphicFrame>
         <p:nvGraphicFramePr>
-          <p:cNvPr id="186" name="Google Shape;186;p19"/>
+          <p:cNvPr id="165" name="Google Shape;165;p18"/>
           <p:cNvGraphicFramePr/>
           <p:nvPr/>
         </p:nvGraphicFramePr>
@@ -19803,7 +17582,7 @@
             <a:tbl>
               <a:tblPr>
                 <a:noFill/>
-                <a:tableStyleId>{A8ACAB11-ADF1-4D30-A053-DA9569484F10}</a:tableStyleId>
+                <a:tableStyleId>{D3EC85C8-AC7A-468B-9DC8-D27FF14A4FE0}</a:tableStyleId>
               </a:tblPr>
               <a:tblGrid>
                 <a:gridCol w="1380025"/>
@@ -20303,7 +18082,7 @@
       </p:graphicFrame>
       <p:cxnSp>
         <p:nvCxnSpPr>
-          <p:cNvPr id="187" name="Google Shape;187;p19"/>
+          <p:cNvPr id="166" name="Google Shape;166;p18"/>
           <p:cNvCxnSpPr/>
           <p:nvPr/>
         </p:nvCxnSpPr>
@@ -20329,7 +18108,7 @@
       </p:cxnSp>
       <p:sp>
         <p:nvSpPr>
-          <p:cNvPr id="188" name="Google Shape;188;p19"/>
+          <p:cNvPr id="167" name="Google Shape;167;p18"/>
           <p:cNvSpPr txBox="1"/>
           <p:nvPr>
             <p:ph idx="1" type="body"/>
@@ -20378,12 +18157,12 @@
 </p:sld>
 </file>
 
-<file path=ppt/slides/slide8.xml><?xml version="1.0" encoding="utf-8"?>
+<file path=ppt/slides/slide7.xml><?xml version="1.0" encoding="utf-8"?>
 <p:sld xmlns:a="http://schemas.openxmlformats.org/drawingml/2006/main" xmlns:r="http://schemas.openxmlformats.org/officeDocument/2006/relationships" xmlns:mc="http://schemas.openxmlformats.org/markup-compatibility/2006" xmlns:mv="urn:schemas-microsoft-com:mac:vml" xmlns:p="http://schemas.openxmlformats.org/presentationml/2006/main" xmlns:c="http://schemas.openxmlformats.org/drawingml/2006/chart" xmlns:dgm="http://schemas.openxmlformats.org/drawingml/2006/diagram" xmlns:o="urn:schemas-microsoft-com:office:office" xmlns:v="urn:schemas-microsoft-com:vml" xmlns:pvml="urn:schemas-microsoft-com:office:powerpoint" xmlns:com="http://schemas.openxmlformats.org/drawingml/2006/compatibility" xmlns:p14="http://schemas.microsoft.com/office/powerpoint/2010/main" xmlns:p15="http://schemas.microsoft.com/office/powerpoint/2012/main" xmlns:ahyp="http://schemas.microsoft.com/office/drawing/2018/hyperlinkcolor">
   <p:cSld>
     <p:spTree>
       <p:nvGrpSpPr>
-        <p:cNvPr id="192" name="Shape 192"/>
+        <p:cNvPr id="171" name="Shape 171"/>
         <p:cNvGrpSpPr/>
         <p:nvPr/>
       </p:nvGrpSpPr>
@@ -20397,7 +18176,7 @@
       </p:grpSpPr>
       <p:sp>
         <p:nvSpPr>
-          <p:cNvPr id="193" name="Google Shape;193;p20"/>
+          <p:cNvPr id="172" name="Google Shape;172;p19"/>
           <p:cNvSpPr txBox="1"/>
           <p:nvPr>
             <p:ph type="title"/>
@@ -20430,7 +18209,7 @@
             </a:pPr>
             <a:r>
               <a:rPr lang="en" sz="2220"/>
-              <a:t>Experimental Setup and Evaluation</a:t>
+              <a:t>Our Research: Question and Motivation</a:t>
             </a:r>
             <a:endParaRPr sz="2220"/>
           </a:p>
@@ -20438,7 +18217,7 @@
       </p:sp>
       <p:grpSp>
         <p:nvGrpSpPr>
-          <p:cNvPr id="194" name="Google Shape;194;p20"/>
+          <p:cNvPr id="173" name="Google Shape;173;p19"/>
           <p:cNvGrpSpPr/>
           <p:nvPr/>
         </p:nvGrpSpPr>
@@ -20452,7 +18231,7 @@
         </p:grpSpPr>
         <p:sp>
           <p:nvSpPr>
-            <p:cNvPr id="195" name="Google Shape;195;p20"/>
+            <p:cNvPr id="174" name="Google Shape;174;p19"/>
             <p:cNvSpPr/>
             <p:nvPr/>
           </p:nvSpPr>
@@ -20521,7 +18300,7 @@
         </p:sp>
         <p:sp>
           <p:nvSpPr>
-            <p:cNvPr id="196" name="Google Shape;196;p20"/>
+            <p:cNvPr id="175" name="Google Shape;175;p19"/>
             <p:cNvSpPr/>
             <p:nvPr/>
           </p:nvSpPr>
@@ -20590,7 +18369,7 @@
         </p:sp>
         <p:sp>
           <p:nvSpPr>
-            <p:cNvPr id="197" name="Google Shape;197;p20"/>
+            <p:cNvPr id="176" name="Google Shape;176;p19"/>
             <p:cNvSpPr/>
             <p:nvPr/>
           </p:nvSpPr>
@@ -20659,7 +18438,7 @@
         </p:sp>
         <p:sp>
           <p:nvSpPr>
-            <p:cNvPr id="198" name="Google Shape;198;p20"/>
+            <p:cNvPr id="177" name="Google Shape;177;p19"/>
             <p:cNvSpPr/>
             <p:nvPr/>
           </p:nvSpPr>
@@ -20729,7 +18508,7 @@
       </p:grpSp>
       <p:grpSp>
         <p:nvGrpSpPr>
-          <p:cNvPr id="199" name="Google Shape;199;p20"/>
+          <p:cNvPr id="178" name="Google Shape;178;p19"/>
           <p:cNvGrpSpPr/>
           <p:nvPr/>
         </p:nvGrpSpPr>
@@ -20743,7 +18522,7 @@
         </p:grpSpPr>
         <p:sp>
           <p:nvSpPr>
-            <p:cNvPr id="200" name="Google Shape;200;p20"/>
+            <p:cNvPr id="179" name="Google Shape;179;p19"/>
             <p:cNvSpPr/>
             <p:nvPr/>
           </p:nvSpPr>
@@ -20812,7 +18591,7 @@
         </p:sp>
         <p:sp>
           <p:nvSpPr>
-            <p:cNvPr id="201" name="Google Shape;201;p20"/>
+            <p:cNvPr id="180" name="Google Shape;180;p19"/>
             <p:cNvSpPr/>
             <p:nvPr/>
           </p:nvSpPr>
@@ -20881,7 +18660,7 @@
         </p:sp>
         <p:sp>
           <p:nvSpPr>
-            <p:cNvPr id="202" name="Google Shape;202;p20"/>
+            <p:cNvPr id="181" name="Google Shape;181;p19"/>
             <p:cNvSpPr/>
             <p:nvPr/>
           </p:nvSpPr>
@@ -20950,7 +18729,7 @@
         </p:sp>
         <p:sp>
           <p:nvSpPr>
-            <p:cNvPr id="203" name="Google Shape;203;p20"/>
+            <p:cNvPr id="182" name="Google Shape;182;p19"/>
             <p:cNvSpPr/>
             <p:nvPr/>
           </p:nvSpPr>
@@ -21018,9 +18797,940 @@
           </p:txBody>
         </p:sp>
       </p:grpSp>
+      <p:sp>
+        <p:nvSpPr>
+          <p:cNvPr id="183" name="Google Shape;183;p19"/>
+          <p:cNvSpPr txBox="1"/>
+          <p:nvPr>
+            <p:ph idx="1" type="body"/>
+          </p:nvPr>
+        </p:nvSpPr>
+        <p:spPr>
+          <a:xfrm>
+            <a:off x="311700" y="1017725"/>
+            <a:ext cx="3974700" cy="3329400"/>
+          </a:xfrm>
+          <a:prstGeom prst="rect">
+            <a:avLst/>
+          </a:prstGeom>
+        </p:spPr>
+        <p:txBody>
+          <a:bodyPr anchorCtr="0" anchor="t" bIns="91425" lIns="91425" spcFirstLastPara="1" rIns="91425" wrap="square" tIns="91425">
+            <a:noAutofit/>
+          </a:bodyPr>
+          <a:lstStyle/>
+          <a:p>
+            <a:pPr indent="0" lvl="0" marL="0" rtl="0" algn="l">
+              <a:spcBef>
+                <a:spcPts val="0"/>
+              </a:spcBef>
+              <a:spcAft>
+                <a:spcPts val="0"/>
+              </a:spcAft>
+              <a:buClr>
+                <a:schemeClr val="dk1"/>
+              </a:buClr>
+              <a:buSzPts val="1100"/>
+              <a:buFont typeface="Arial"/>
+              <a:buNone/>
+            </a:pPr>
+            <a:r>
+              <a:rPr b="1" lang="en" sz="1500"/>
+              <a:t>Question:</a:t>
+            </a:r>
+            <a:endParaRPr b="1" sz="1500"/>
+          </a:p>
+          <a:p>
+            <a:pPr indent="0" lvl="0" marL="0" rtl="0" algn="l">
+              <a:spcBef>
+                <a:spcPts val="1200"/>
+              </a:spcBef>
+              <a:spcAft>
+                <a:spcPts val="0"/>
+              </a:spcAft>
+              <a:buClr>
+                <a:schemeClr val="dk1"/>
+              </a:buClr>
+              <a:buSzPts val="1100"/>
+              <a:buFont typeface="Arial"/>
+              <a:buNone/>
+            </a:pPr>
+            <a:r>
+              <a:rPr lang="en" sz="1300"/>
+              <a:t>How does randomly choosing pixel-space or low-frequency PGD each epoch affect when robust accuracy peaks and how far it declines, compared with training on either attack alone?</a:t>
+            </a:r>
+            <a:endParaRPr sz="1300"/>
+          </a:p>
+          <a:p>
+            <a:pPr indent="0" lvl="0" marL="0" rtl="0" algn="l">
+              <a:spcBef>
+                <a:spcPts val="1200"/>
+              </a:spcBef>
+              <a:spcAft>
+                <a:spcPts val="0"/>
+              </a:spcAft>
+              <a:buClr>
+                <a:schemeClr val="dk1"/>
+              </a:buClr>
+              <a:buSzPts val="1100"/>
+              <a:buFont typeface="Arial"/>
+              <a:buNone/>
+            </a:pPr>
+            <a:r>
+              <a:t/>
+            </a:r>
+            <a:endParaRPr sz="1300"/>
+          </a:p>
+          <a:p>
+            <a:pPr indent="0" lvl="0" marL="0" rtl="0" algn="l">
+              <a:spcBef>
+                <a:spcPts val="1200"/>
+              </a:spcBef>
+              <a:spcAft>
+                <a:spcPts val="0"/>
+              </a:spcAft>
+              <a:buClr>
+                <a:schemeClr val="dk1"/>
+              </a:buClr>
+              <a:buSzPts val="1100"/>
+              <a:buFont typeface="Arial"/>
+              <a:buNone/>
+            </a:pPr>
+            <a:r>
+              <a:rPr b="1" lang="en" sz="1500"/>
+              <a:t>Hypothesis:</a:t>
+            </a:r>
+            <a:endParaRPr b="1" sz="1500"/>
+          </a:p>
+          <a:p>
+            <a:pPr indent="0" lvl="0" marL="0" rtl="0" algn="l">
+              <a:spcBef>
+                <a:spcPts val="1200"/>
+              </a:spcBef>
+              <a:spcAft>
+                <a:spcPts val="1200"/>
+              </a:spcAft>
+              <a:buClr>
+                <a:schemeClr val="dk1"/>
+              </a:buClr>
+              <a:buSzPts val="1100"/>
+              <a:buFont typeface="Arial"/>
+              <a:buNone/>
+            </a:pPr>
+            <a:r>
+              <a:rPr lang="en" sz="1300"/>
+              <a:t>With other settings held fixed, mixed-domain training will change the peak timing, peak shape, or post-peak decline of robust accuracy under one or both evaluation attacks.</a:t>
+            </a:r>
+            <a:endParaRPr sz="1300"/>
+          </a:p>
+        </p:txBody>
+      </p:sp>
       <p:pic>
         <p:nvPicPr>
-          <p:cNvPr id="204" name="Google Shape;204;p20"/>
+          <p:cNvPr id="184" name="Google Shape;184;p19"/>
+          <p:cNvPicPr preferRelativeResize="0"/>
+          <p:nvPr/>
+        </p:nvPicPr>
+        <p:blipFill rotWithShape="1">
+          <a:blip r:embed="rId3">
+            <a:alphaModFix/>
+          </a:blip>
+          <a:srcRect b="10657" l="15714" r="18039" t="7930"/>
+          <a:stretch/>
+        </p:blipFill>
+        <p:spPr>
+          <a:xfrm>
+            <a:off x="8414900" y="4347050"/>
+            <a:ext cx="573050" cy="704250"/>
+          </a:xfrm>
+          <a:prstGeom prst="rect">
+            <a:avLst/>
+          </a:prstGeom>
+          <a:noFill/>
+          <a:ln>
+            <a:noFill/>
+          </a:ln>
+        </p:spPr>
+      </p:pic>
+      <p:sp>
+        <p:nvSpPr>
+          <p:cNvPr id="185" name="Google Shape;185;p19"/>
+          <p:cNvSpPr txBox="1"/>
+          <p:nvPr/>
+        </p:nvSpPr>
+        <p:spPr>
+          <a:xfrm>
+            <a:off x="4763425" y="2123500"/>
+            <a:ext cx="3880200" cy="1264500"/>
+          </a:xfrm>
+          <a:prstGeom prst="rect">
+            <a:avLst/>
+          </a:prstGeom>
+          <a:noFill/>
+          <a:ln>
+            <a:noFill/>
+          </a:ln>
+        </p:spPr>
+        <p:txBody>
+          <a:bodyPr anchorCtr="0" anchor="t" bIns="91425" lIns="91425" spcFirstLastPara="1" rIns="91425" wrap="square" tIns="91425">
+            <a:spAutoFit/>
+          </a:bodyPr>
+          <a:lstStyle/>
+          <a:p>
+            <a:pPr indent="0" lvl="0" marL="0" rtl="0" algn="l">
+              <a:lnSpc>
+                <a:spcPct val="115000"/>
+              </a:lnSpc>
+              <a:spcBef>
+                <a:spcPts val="0"/>
+              </a:spcBef>
+              <a:spcAft>
+                <a:spcPts val="0"/>
+              </a:spcAft>
+              <a:buNone/>
+            </a:pPr>
+            <a:r>
+              <a:rPr b="1" lang="en" sz="1500">
+                <a:solidFill>
+                  <a:schemeClr val="dk2"/>
+                </a:solidFill>
+              </a:rPr>
+              <a:t>Why This Matters:</a:t>
+            </a:r>
+            <a:endParaRPr b="1" sz="1500">
+              <a:solidFill>
+                <a:schemeClr val="dk2"/>
+              </a:solidFill>
+            </a:endParaRPr>
+          </a:p>
+          <a:p>
+            <a:pPr indent="0" lvl="0" marL="0" rtl="0" algn="l">
+              <a:lnSpc>
+                <a:spcPct val="115000"/>
+              </a:lnSpc>
+              <a:spcBef>
+                <a:spcPts val="1200"/>
+              </a:spcBef>
+              <a:spcAft>
+                <a:spcPts val="1200"/>
+              </a:spcAft>
+              <a:buNone/>
+            </a:pPr>
+            <a:r>
+              <a:rPr lang="en" sz="1300">
+                <a:solidFill>
+                  <a:schemeClr val="dk2"/>
+                </a:solidFill>
+              </a:rPr>
+              <a:t>Understanding how the training attack affects robust overfitting can guide training methods that preserve robustness over time.</a:t>
+            </a:r>
+            <a:endParaRPr/>
+          </a:p>
+        </p:txBody>
+      </p:sp>
+      <p:cxnSp>
+        <p:nvCxnSpPr>
+          <p:cNvPr id="186" name="Google Shape;186;p19"/>
+          <p:cNvCxnSpPr/>
+          <p:nvPr/>
+        </p:nvCxnSpPr>
+        <p:spPr>
+          <a:xfrm>
+            <a:off x="387475" y="2682425"/>
+            <a:ext cx="705600" cy="0"/>
+          </a:xfrm>
+          <a:prstGeom prst="straightConnector1">
+            <a:avLst/>
+          </a:prstGeom>
+          <a:noFill/>
+          <a:ln cap="flat" cmpd="sng" w="38100">
+            <a:solidFill>
+              <a:schemeClr val="dk2"/>
+            </a:solidFill>
+            <a:prstDash val="solid"/>
+            <a:round/>
+            <a:headEnd len="med" w="med" type="none"/>
+            <a:tailEnd len="med" w="med" type="none"/>
+          </a:ln>
+        </p:spPr>
+      </p:cxnSp>
+      <p:cxnSp>
+        <p:nvCxnSpPr>
+          <p:cNvPr id="187" name="Google Shape;187;p19"/>
+          <p:cNvCxnSpPr/>
+          <p:nvPr/>
+        </p:nvCxnSpPr>
+        <p:spPr>
+          <a:xfrm>
+            <a:off x="4535200" y="1298875"/>
+            <a:ext cx="0" cy="2944200"/>
+          </a:xfrm>
+          <a:prstGeom prst="straightConnector1">
+            <a:avLst/>
+          </a:prstGeom>
+          <a:noFill/>
+          <a:ln cap="flat" cmpd="sng" w="38100">
+            <a:solidFill>
+              <a:schemeClr val="dk2"/>
+            </a:solidFill>
+            <a:prstDash val="solid"/>
+            <a:round/>
+            <a:headEnd len="med" w="med" type="none"/>
+            <a:tailEnd len="med" w="med" type="none"/>
+          </a:ln>
+        </p:spPr>
+      </p:cxnSp>
+    </p:spTree>
+  </p:cSld>
+  <p:clrMapOvr>
+    <a:masterClrMapping/>
+  </p:clrMapOvr>
+</p:sld>
+</file>
+
+<file path=ppt/slides/slide8.xml><?xml version="1.0" encoding="utf-8"?>
+<p:sld xmlns:a="http://schemas.openxmlformats.org/drawingml/2006/main" xmlns:r="http://schemas.openxmlformats.org/officeDocument/2006/relationships" xmlns:mc="http://schemas.openxmlformats.org/markup-compatibility/2006" xmlns:mv="urn:schemas-microsoft-com:mac:vml" xmlns:p="http://schemas.openxmlformats.org/presentationml/2006/main" xmlns:c="http://schemas.openxmlformats.org/drawingml/2006/chart" xmlns:dgm="http://schemas.openxmlformats.org/drawingml/2006/diagram" xmlns:o="urn:schemas-microsoft-com:office:office" xmlns:v="urn:schemas-microsoft-com:vml" xmlns:pvml="urn:schemas-microsoft-com:office:powerpoint" xmlns:com="http://schemas.openxmlformats.org/drawingml/2006/compatibility" xmlns:p14="http://schemas.microsoft.com/office/powerpoint/2010/main" xmlns:p15="http://schemas.microsoft.com/office/powerpoint/2012/main" xmlns:ahyp="http://schemas.microsoft.com/office/drawing/2018/hyperlinkcolor">
+  <p:cSld>
+    <p:spTree>
+      <p:nvGrpSpPr>
+        <p:cNvPr id="191" name="Shape 191"/>
+        <p:cNvGrpSpPr/>
+        <p:nvPr/>
+      </p:nvGrpSpPr>
+      <p:grpSpPr>
+        <a:xfrm>
+          <a:off x="0" y="0"/>
+          <a:ext cx="0" cy="0"/>
+          <a:chOff x="0" y="0"/>
+          <a:chExt cx="0" cy="0"/>
+        </a:xfrm>
+      </p:grpSpPr>
+      <p:sp>
+        <p:nvSpPr>
+          <p:cNvPr id="192" name="Google Shape;192;p20"/>
+          <p:cNvSpPr txBox="1"/>
+          <p:nvPr>
+            <p:ph type="title"/>
+          </p:nvPr>
+        </p:nvSpPr>
+        <p:spPr>
+          <a:xfrm>
+            <a:off x="311700" y="445025"/>
+            <a:ext cx="8520600" cy="572700"/>
+          </a:xfrm>
+          <a:prstGeom prst="rect">
+            <a:avLst/>
+          </a:prstGeom>
+        </p:spPr>
+        <p:txBody>
+          <a:bodyPr anchorCtr="0" anchor="t" bIns="91425" lIns="91425" spcFirstLastPara="1" rIns="91425" wrap="square" tIns="91425">
+            <a:normAutofit/>
+          </a:bodyPr>
+          <a:lstStyle/>
+          <a:p>
+            <a:pPr indent="0" lvl="0" marL="0" rtl="0" algn="l">
+              <a:spcBef>
+                <a:spcPts val="0"/>
+              </a:spcBef>
+              <a:spcAft>
+                <a:spcPts val="0"/>
+              </a:spcAft>
+              <a:buSzPts val="990"/>
+              <a:buNone/>
+            </a:pPr>
+            <a:r>
+              <a:rPr lang="en" sz="2220"/>
+              <a:t>Experimental Setup and Evaluation</a:t>
+            </a:r>
+            <a:endParaRPr sz="2220"/>
+          </a:p>
+        </p:txBody>
+      </p:sp>
+      <p:grpSp>
+        <p:nvGrpSpPr>
+          <p:cNvPr id="193" name="Google Shape;193;p20"/>
+          <p:cNvGrpSpPr/>
+          <p:nvPr/>
+        </p:nvGrpSpPr>
+        <p:grpSpPr>
+          <a:xfrm rot="10800000">
+            <a:off x="205788" y="4842962"/>
+            <a:ext cx="537556" cy="136576"/>
+            <a:chOff x="2641350" y="846250"/>
+            <a:chExt cx="413600" cy="105075"/>
+          </a:xfrm>
+        </p:grpSpPr>
+        <p:sp>
+          <p:nvSpPr>
+            <p:cNvPr id="194" name="Google Shape;194;p20"/>
+            <p:cNvSpPr/>
+            <p:nvPr/>
+          </p:nvSpPr>
+          <p:spPr>
+            <a:xfrm>
+              <a:off x="2991475" y="846250"/>
+              <a:ext cx="63475" cy="105075"/>
+            </a:xfrm>
+            <a:custGeom>
+              <a:rect b="b" l="l" r="r" t="t"/>
+              <a:pathLst>
+                <a:path extrusionOk="0" h="4203" w="2539">
+                  <a:moveTo>
+                    <a:pt x="2092" y="1"/>
+                  </a:moveTo>
+                  <a:lnTo>
+                    <a:pt x="1" y="2111"/>
+                  </a:lnTo>
+                  <a:lnTo>
+                    <a:pt x="2092" y="4202"/>
+                  </a:lnTo>
+                  <a:lnTo>
+                    <a:pt x="2538" y="3756"/>
+                  </a:lnTo>
+                  <a:lnTo>
+                    <a:pt x="874" y="2111"/>
+                  </a:lnTo>
+                  <a:lnTo>
+                    <a:pt x="2538" y="447"/>
+                  </a:lnTo>
+                  <a:lnTo>
+                    <a:pt x="2092" y="1"/>
+                  </a:lnTo>
+                  <a:close/>
+                </a:path>
+              </a:pathLst>
+            </a:custGeom>
+            <a:solidFill>
+              <a:srgbClr val="191919"/>
+            </a:solidFill>
+            <a:ln>
+              <a:noFill/>
+            </a:ln>
+          </p:spPr>
+          <p:txBody>
+            <a:bodyPr anchorCtr="0" anchor="ctr" bIns="91425" lIns="91425" spcFirstLastPara="1" rIns="91425" wrap="square" tIns="91425">
+              <a:noAutofit/>
+            </a:bodyPr>
+            <a:lstStyle/>
+            <a:p>
+              <a:pPr indent="0" lvl="0" marL="0" rtl="0" algn="l">
+                <a:spcBef>
+                  <a:spcPts val="0"/>
+                </a:spcBef>
+                <a:spcAft>
+                  <a:spcPts val="0"/>
+                </a:spcAft>
+                <a:buNone/>
+              </a:pPr>
+              <a:r>
+                <a:t/>
+              </a:r>
+              <a:endParaRPr/>
+            </a:p>
+          </p:txBody>
+        </p:sp>
+        <p:sp>
+          <p:nvSpPr>
+            <p:cNvPr id="195" name="Google Shape;195;p20"/>
+            <p:cNvSpPr/>
+            <p:nvPr/>
+          </p:nvSpPr>
+          <p:spPr>
+            <a:xfrm>
+              <a:off x="2874775" y="846250"/>
+              <a:ext cx="63450" cy="105075"/>
+            </a:xfrm>
+            <a:custGeom>
+              <a:rect b="b" l="l" r="r" t="t"/>
+              <a:pathLst>
+                <a:path extrusionOk="0" h="4203" w="2538">
+                  <a:moveTo>
+                    <a:pt x="2091" y="1"/>
+                  </a:moveTo>
+                  <a:lnTo>
+                    <a:pt x="0" y="2111"/>
+                  </a:lnTo>
+                  <a:lnTo>
+                    <a:pt x="2091" y="4202"/>
+                  </a:lnTo>
+                  <a:lnTo>
+                    <a:pt x="2538" y="3756"/>
+                  </a:lnTo>
+                  <a:lnTo>
+                    <a:pt x="894" y="2111"/>
+                  </a:lnTo>
+                  <a:lnTo>
+                    <a:pt x="2538" y="447"/>
+                  </a:lnTo>
+                  <a:lnTo>
+                    <a:pt x="2091" y="1"/>
+                  </a:lnTo>
+                  <a:close/>
+                </a:path>
+              </a:pathLst>
+            </a:custGeom>
+            <a:solidFill>
+              <a:srgbClr val="191919"/>
+            </a:solidFill>
+            <a:ln>
+              <a:noFill/>
+            </a:ln>
+          </p:spPr>
+          <p:txBody>
+            <a:bodyPr anchorCtr="0" anchor="ctr" bIns="91425" lIns="91425" spcFirstLastPara="1" rIns="91425" wrap="square" tIns="91425">
+              <a:noAutofit/>
+            </a:bodyPr>
+            <a:lstStyle/>
+            <a:p>
+              <a:pPr indent="0" lvl="0" marL="0" rtl="0" algn="l">
+                <a:spcBef>
+                  <a:spcPts val="0"/>
+                </a:spcBef>
+                <a:spcAft>
+                  <a:spcPts val="0"/>
+                </a:spcAft>
+                <a:buNone/>
+              </a:pPr>
+              <a:r>
+                <a:t/>
+              </a:r>
+              <a:endParaRPr/>
+            </a:p>
+          </p:txBody>
+        </p:sp>
+        <p:sp>
+          <p:nvSpPr>
+            <p:cNvPr id="196" name="Google Shape;196;p20"/>
+            <p:cNvSpPr/>
+            <p:nvPr/>
+          </p:nvSpPr>
+          <p:spPr>
+            <a:xfrm>
+              <a:off x="2758075" y="846250"/>
+              <a:ext cx="63450" cy="105075"/>
+            </a:xfrm>
+            <a:custGeom>
+              <a:rect b="b" l="l" r="r" t="t"/>
+              <a:pathLst>
+                <a:path extrusionOk="0" h="4203" w="2538">
+                  <a:moveTo>
+                    <a:pt x="2111" y="1"/>
+                  </a:moveTo>
+                  <a:lnTo>
+                    <a:pt x="0" y="2111"/>
+                  </a:lnTo>
+                  <a:lnTo>
+                    <a:pt x="2111" y="4202"/>
+                  </a:lnTo>
+                  <a:lnTo>
+                    <a:pt x="2537" y="3756"/>
+                  </a:lnTo>
+                  <a:lnTo>
+                    <a:pt x="893" y="2111"/>
+                  </a:lnTo>
+                  <a:lnTo>
+                    <a:pt x="2537" y="447"/>
+                  </a:lnTo>
+                  <a:lnTo>
+                    <a:pt x="2111" y="1"/>
+                  </a:lnTo>
+                  <a:close/>
+                </a:path>
+              </a:pathLst>
+            </a:custGeom>
+            <a:solidFill>
+              <a:srgbClr val="191919"/>
+            </a:solidFill>
+            <a:ln>
+              <a:noFill/>
+            </a:ln>
+          </p:spPr>
+          <p:txBody>
+            <a:bodyPr anchorCtr="0" anchor="ctr" bIns="91425" lIns="91425" spcFirstLastPara="1" rIns="91425" wrap="square" tIns="91425">
+              <a:noAutofit/>
+            </a:bodyPr>
+            <a:lstStyle/>
+            <a:p>
+              <a:pPr indent="0" lvl="0" marL="0" rtl="0" algn="l">
+                <a:spcBef>
+                  <a:spcPts val="0"/>
+                </a:spcBef>
+                <a:spcAft>
+                  <a:spcPts val="0"/>
+                </a:spcAft>
+                <a:buNone/>
+              </a:pPr>
+              <a:r>
+                <a:t/>
+              </a:r>
+              <a:endParaRPr/>
+            </a:p>
+          </p:txBody>
+        </p:sp>
+        <p:sp>
+          <p:nvSpPr>
+            <p:cNvPr id="197" name="Google Shape;197;p20"/>
+            <p:cNvSpPr/>
+            <p:nvPr/>
+          </p:nvSpPr>
+          <p:spPr>
+            <a:xfrm>
+              <a:off x="2641350" y="846250"/>
+              <a:ext cx="63975" cy="105075"/>
+            </a:xfrm>
+            <a:custGeom>
+              <a:rect b="b" l="l" r="r" t="t"/>
+              <a:pathLst>
+                <a:path extrusionOk="0" h="4203" w="2559">
+                  <a:moveTo>
+                    <a:pt x="2112" y="1"/>
+                  </a:moveTo>
+                  <a:lnTo>
+                    <a:pt x="1" y="2111"/>
+                  </a:lnTo>
+                  <a:lnTo>
+                    <a:pt x="2112" y="4202"/>
+                  </a:lnTo>
+                  <a:lnTo>
+                    <a:pt x="2558" y="3756"/>
+                  </a:lnTo>
+                  <a:lnTo>
+                    <a:pt x="894" y="2111"/>
+                  </a:lnTo>
+                  <a:lnTo>
+                    <a:pt x="2558" y="447"/>
+                  </a:lnTo>
+                  <a:lnTo>
+                    <a:pt x="2112" y="1"/>
+                  </a:lnTo>
+                  <a:close/>
+                </a:path>
+              </a:pathLst>
+            </a:custGeom>
+            <a:solidFill>
+              <a:srgbClr val="191919"/>
+            </a:solidFill>
+            <a:ln>
+              <a:noFill/>
+            </a:ln>
+          </p:spPr>
+          <p:txBody>
+            <a:bodyPr anchorCtr="0" anchor="ctr" bIns="91425" lIns="91425" spcFirstLastPara="1" rIns="91425" wrap="square" tIns="91425">
+              <a:noAutofit/>
+            </a:bodyPr>
+            <a:lstStyle/>
+            <a:p>
+              <a:pPr indent="0" lvl="0" marL="0" rtl="0" algn="l">
+                <a:spcBef>
+                  <a:spcPts val="0"/>
+                </a:spcBef>
+                <a:spcAft>
+                  <a:spcPts val="0"/>
+                </a:spcAft>
+                <a:buNone/>
+              </a:pPr>
+              <a:r>
+                <a:t/>
+              </a:r>
+              <a:endParaRPr/>
+            </a:p>
+          </p:txBody>
+        </p:sp>
+      </p:grpSp>
+      <p:grpSp>
+        <p:nvGrpSpPr>
+          <p:cNvPr id="198" name="Google Shape;198;p20"/>
+          <p:cNvGrpSpPr/>
+          <p:nvPr/>
+        </p:nvGrpSpPr>
+        <p:grpSpPr>
+          <a:xfrm>
+            <a:off x="8414888" y="169062"/>
+            <a:ext cx="537556" cy="136576"/>
+            <a:chOff x="2641350" y="846250"/>
+            <a:chExt cx="413600" cy="105075"/>
+          </a:xfrm>
+        </p:grpSpPr>
+        <p:sp>
+          <p:nvSpPr>
+            <p:cNvPr id="199" name="Google Shape;199;p20"/>
+            <p:cNvSpPr/>
+            <p:nvPr/>
+          </p:nvSpPr>
+          <p:spPr>
+            <a:xfrm>
+              <a:off x="2991475" y="846250"/>
+              <a:ext cx="63475" cy="105075"/>
+            </a:xfrm>
+            <a:custGeom>
+              <a:rect b="b" l="l" r="r" t="t"/>
+              <a:pathLst>
+                <a:path extrusionOk="0" h="4203" w="2539">
+                  <a:moveTo>
+                    <a:pt x="2092" y="1"/>
+                  </a:moveTo>
+                  <a:lnTo>
+                    <a:pt x="1" y="2111"/>
+                  </a:lnTo>
+                  <a:lnTo>
+                    <a:pt x="2092" y="4202"/>
+                  </a:lnTo>
+                  <a:lnTo>
+                    <a:pt x="2538" y="3756"/>
+                  </a:lnTo>
+                  <a:lnTo>
+                    <a:pt x="874" y="2111"/>
+                  </a:lnTo>
+                  <a:lnTo>
+                    <a:pt x="2538" y="447"/>
+                  </a:lnTo>
+                  <a:lnTo>
+                    <a:pt x="2092" y="1"/>
+                  </a:lnTo>
+                  <a:close/>
+                </a:path>
+              </a:pathLst>
+            </a:custGeom>
+            <a:solidFill>
+              <a:srgbClr val="191919"/>
+            </a:solidFill>
+            <a:ln>
+              <a:noFill/>
+            </a:ln>
+          </p:spPr>
+          <p:txBody>
+            <a:bodyPr anchorCtr="0" anchor="ctr" bIns="91425" lIns="91425" spcFirstLastPara="1" rIns="91425" wrap="square" tIns="91425">
+              <a:noAutofit/>
+            </a:bodyPr>
+            <a:lstStyle/>
+            <a:p>
+              <a:pPr indent="0" lvl="0" marL="0" rtl="0" algn="l">
+                <a:spcBef>
+                  <a:spcPts val="0"/>
+                </a:spcBef>
+                <a:spcAft>
+                  <a:spcPts val="0"/>
+                </a:spcAft>
+                <a:buNone/>
+              </a:pPr>
+              <a:r>
+                <a:t/>
+              </a:r>
+              <a:endParaRPr/>
+            </a:p>
+          </p:txBody>
+        </p:sp>
+        <p:sp>
+          <p:nvSpPr>
+            <p:cNvPr id="200" name="Google Shape;200;p20"/>
+            <p:cNvSpPr/>
+            <p:nvPr/>
+          </p:nvSpPr>
+          <p:spPr>
+            <a:xfrm>
+              <a:off x="2874775" y="846250"/>
+              <a:ext cx="63450" cy="105075"/>
+            </a:xfrm>
+            <a:custGeom>
+              <a:rect b="b" l="l" r="r" t="t"/>
+              <a:pathLst>
+                <a:path extrusionOk="0" h="4203" w="2538">
+                  <a:moveTo>
+                    <a:pt x="2091" y="1"/>
+                  </a:moveTo>
+                  <a:lnTo>
+                    <a:pt x="0" y="2111"/>
+                  </a:lnTo>
+                  <a:lnTo>
+                    <a:pt x="2091" y="4202"/>
+                  </a:lnTo>
+                  <a:lnTo>
+                    <a:pt x="2538" y="3756"/>
+                  </a:lnTo>
+                  <a:lnTo>
+                    <a:pt x="894" y="2111"/>
+                  </a:lnTo>
+                  <a:lnTo>
+                    <a:pt x="2538" y="447"/>
+                  </a:lnTo>
+                  <a:lnTo>
+                    <a:pt x="2091" y="1"/>
+                  </a:lnTo>
+                  <a:close/>
+                </a:path>
+              </a:pathLst>
+            </a:custGeom>
+            <a:solidFill>
+              <a:srgbClr val="191919"/>
+            </a:solidFill>
+            <a:ln>
+              <a:noFill/>
+            </a:ln>
+          </p:spPr>
+          <p:txBody>
+            <a:bodyPr anchorCtr="0" anchor="ctr" bIns="91425" lIns="91425" spcFirstLastPara="1" rIns="91425" wrap="square" tIns="91425">
+              <a:noAutofit/>
+            </a:bodyPr>
+            <a:lstStyle/>
+            <a:p>
+              <a:pPr indent="0" lvl="0" marL="0" rtl="0" algn="l">
+                <a:spcBef>
+                  <a:spcPts val="0"/>
+                </a:spcBef>
+                <a:spcAft>
+                  <a:spcPts val="0"/>
+                </a:spcAft>
+                <a:buNone/>
+              </a:pPr>
+              <a:r>
+                <a:t/>
+              </a:r>
+              <a:endParaRPr/>
+            </a:p>
+          </p:txBody>
+        </p:sp>
+        <p:sp>
+          <p:nvSpPr>
+            <p:cNvPr id="201" name="Google Shape;201;p20"/>
+            <p:cNvSpPr/>
+            <p:nvPr/>
+          </p:nvSpPr>
+          <p:spPr>
+            <a:xfrm>
+              <a:off x="2758075" y="846250"/>
+              <a:ext cx="63450" cy="105075"/>
+            </a:xfrm>
+            <a:custGeom>
+              <a:rect b="b" l="l" r="r" t="t"/>
+              <a:pathLst>
+                <a:path extrusionOk="0" h="4203" w="2538">
+                  <a:moveTo>
+                    <a:pt x="2111" y="1"/>
+                  </a:moveTo>
+                  <a:lnTo>
+                    <a:pt x="0" y="2111"/>
+                  </a:lnTo>
+                  <a:lnTo>
+                    <a:pt x="2111" y="4202"/>
+                  </a:lnTo>
+                  <a:lnTo>
+                    <a:pt x="2537" y="3756"/>
+                  </a:lnTo>
+                  <a:lnTo>
+                    <a:pt x="893" y="2111"/>
+                  </a:lnTo>
+                  <a:lnTo>
+                    <a:pt x="2537" y="447"/>
+                  </a:lnTo>
+                  <a:lnTo>
+                    <a:pt x="2111" y="1"/>
+                  </a:lnTo>
+                  <a:close/>
+                </a:path>
+              </a:pathLst>
+            </a:custGeom>
+            <a:solidFill>
+              <a:srgbClr val="191919"/>
+            </a:solidFill>
+            <a:ln>
+              <a:noFill/>
+            </a:ln>
+          </p:spPr>
+          <p:txBody>
+            <a:bodyPr anchorCtr="0" anchor="ctr" bIns="91425" lIns="91425" spcFirstLastPara="1" rIns="91425" wrap="square" tIns="91425">
+              <a:noAutofit/>
+            </a:bodyPr>
+            <a:lstStyle/>
+            <a:p>
+              <a:pPr indent="0" lvl="0" marL="0" rtl="0" algn="l">
+                <a:spcBef>
+                  <a:spcPts val="0"/>
+                </a:spcBef>
+                <a:spcAft>
+                  <a:spcPts val="0"/>
+                </a:spcAft>
+                <a:buNone/>
+              </a:pPr>
+              <a:r>
+                <a:t/>
+              </a:r>
+              <a:endParaRPr/>
+            </a:p>
+          </p:txBody>
+        </p:sp>
+        <p:sp>
+          <p:nvSpPr>
+            <p:cNvPr id="202" name="Google Shape;202;p20"/>
+            <p:cNvSpPr/>
+            <p:nvPr/>
+          </p:nvSpPr>
+          <p:spPr>
+            <a:xfrm>
+              <a:off x="2641350" y="846250"/>
+              <a:ext cx="63975" cy="105075"/>
+            </a:xfrm>
+            <a:custGeom>
+              <a:rect b="b" l="l" r="r" t="t"/>
+              <a:pathLst>
+                <a:path extrusionOk="0" h="4203" w="2559">
+                  <a:moveTo>
+                    <a:pt x="2112" y="1"/>
+                  </a:moveTo>
+                  <a:lnTo>
+                    <a:pt x="1" y="2111"/>
+                  </a:lnTo>
+                  <a:lnTo>
+                    <a:pt x="2112" y="4202"/>
+                  </a:lnTo>
+                  <a:lnTo>
+                    <a:pt x="2558" y="3756"/>
+                  </a:lnTo>
+                  <a:lnTo>
+                    <a:pt x="894" y="2111"/>
+                  </a:lnTo>
+                  <a:lnTo>
+                    <a:pt x="2558" y="447"/>
+                  </a:lnTo>
+                  <a:lnTo>
+                    <a:pt x="2112" y="1"/>
+                  </a:lnTo>
+                  <a:close/>
+                </a:path>
+              </a:pathLst>
+            </a:custGeom>
+            <a:solidFill>
+              <a:srgbClr val="191919"/>
+            </a:solidFill>
+            <a:ln>
+              <a:noFill/>
+            </a:ln>
+          </p:spPr>
+          <p:txBody>
+            <a:bodyPr anchorCtr="0" anchor="ctr" bIns="91425" lIns="91425" spcFirstLastPara="1" rIns="91425" wrap="square" tIns="91425">
+              <a:noAutofit/>
+            </a:bodyPr>
+            <a:lstStyle/>
+            <a:p>
+              <a:pPr indent="0" lvl="0" marL="0" rtl="0" algn="l">
+                <a:spcBef>
+                  <a:spcPts val="0"/>
+                </a:spcBef>
+                <a:spcAft>
+                  <a:spcPts val="0"/>
+                </a:spcAft>
+                <a:buNone/>
+              </a:pPr>
+              <a:r>
+                <a:t/>
+              </a:r>
+              <a:endParaRPr/>
+            </a:p>
+          </p:txBody>
+        </p:sp>
+      </p:grpSp>
+      <p:pic>
+        <p:nvPicPr>
+          <p:cNvPr id="203" name="Google Shape;203;p20"/>
           <p:cNvPicPr preferRelativeResize="0"/>
           <p:nvPr/>
         </p:nvPicPr>
@@ -21047,7 +19757,7 @@
       </p:pic>
       <p:graphicFrame>
         <p:nvGraphicFramePr>
-          <p:cNvPr id="205" name="Google Shape;205;p20"/>
+          <p:cNvPr id="204" name="Google Shape;204;p20"/>
           <p:cNvGraphicFramePr/>
           <p:nvPr/>
         </p:nvGraphicFramePr>
@@ -21060,7 +19770,7 @@
             <a:tbl>
               <a:tblPr>
                 <a:noFill/>
-                <a:tableStyleId>{A8ACAB11-ADF1-4D30-A053-DA9569484F10}</a:tableStyleId>
+                <a:tableStyleId>{D3EC85C8-AC7A-468B-9DC8-D27FF14A4FE0}</a:tableStyleId>
               </a:tblPr>
               <a:tblGrid>
                 <a:gridCol w="4115850"/>
@@ -21471,7 +20181,7 @@
       </p:graphicFrame>
       <p:sp>
         <p:nvSpPr>
-          <p:cNvPr id="206" name="Google Shape;206;p20"/>
+          <p:cNvPr id="205" name="Google Shape;205;p20"/>
           <p:cNvSpPr txBox="1"/>
           <p:nvPr>
             <p:ph idx="1" type="body"/>
@@ -21531,7 +20241,7 @@
       </p:sp>
       <p:sp>
         <p:nvSpPr>
-          <p:cNvPr id="207" name="Google Shape;207;p20"/>
+          <p:cNvPr id="206" name="Google Shape;206;p20"/>
           <p:cNvSpPr txBox="1"/>
           <p:nvPr>
             <p:ph idx="1" type="body"/>
@@ -21585,7 +20295,7 @@
   <p:cSld>
     <p:spTree>
       <p:nvGrpSpPr>
-        <p:cNvPr id="211" name="Shape 211"/>
+        <p:cNvPr id="210" name="Shape 210"/>
         <p:cNvGrpSpPr/>
         <p:nvPr/>
       </p:nvGrpSpPr>
@@ -21599,7 +20309,7 @@
       </p:grpSpPr>
       <p:grpSp>
         <p:nvGrpSpPr>
-          <p:cNvPr id="212" name="Google Shape;212;p21"/>
+          <p:cNvPr id="211" name="Google Shape;211;p21"/>
           <p:cNvGrpSpPr/>
           <p:nvPr/>
         </p:nvGrpSpPr>
@@ -21613,7 +20323,7 @@
         </p:grpSpPr>
         <p:sp>
           <p:nvSpPr>
-            <p:cNvPr id="213" name="Google Shape;213;p21"/>
+            <p:cNvPr id="212" name="Google Shape;212;p21"/>
             <p:cNvSpPr/>
             <p:nvPr/>
           </p:nvSpPr>
@@ -21682,7 +20392,7 @@
         </p:sp>
         <p:sp>
           <p:nvSpPr>
-            <p:cNvPr id="214" name="Google Shape;214;p21"/>
+            <p:cNvPr id="213" name="Google Shape;213;p21"/>
             <p:cNvSpPr/>
             <p:nvPr/>
           </p:nvSpPr>
@@ -21751,7 +20461,7 @@
         </p:sp>
         <p:sp>
           <p:nvSpPr>
-            <p:cNvPr id="215" name="Google Shape;215;p21"/>
+            <p:cNvPr id="214" name="Google Shape;214;p21"/>
             <p:cNvSpPr/>
             <p:nvPr/>
           </p:nvSpPr>
@@ -21820,7 +20530,7 @@
         </p:sp>
         <p:sp>
           <p:nvSpPr>
-            <p:cNvPr id="216" name="Google Shape;216;p21"/>
+            <p:cNvPr id="215" name="Google Shape;215;p21"/>
             <p:cNvSpPr/>
             <p:nvPr/>
           </p:nvSpPr>
@@ -21890,7 +20600,7 @@
       </p:grpSp>
       <p:grpSp>
         <p:nvGrpSpPr>
-          <p:cNvPr id="217" name="Google Shape;217;p21"/>
+          <p:cNvPr id="216" name="Google Shape;216;p21"/>
           <p:cNvGrpSpPr/>
           <p:nvPr/>
         </p:nvGrpSpPr>
@@ -21904,7 +20614,7 @@
         </p:grpSpPr>
         <p:sp>
           <p:nvSpPr>
-            <p:cNvPr id="218" name="Google Shape;218;p21"/>
+            <p:cNvPr id="217" name="Google Shape;217;p21"/>
             <p:cNvSpPr/>
             <p:nvPr/>
           </p:nvSpPr>
@@ -21973,7 +20683,7 @@
         </p:sp>
         <p:sp>
           <p:nvSpPr>
-            <p:cNvPr id="219" name="Google Shape;219;p21"/>
+            <p:cNvPr id="218" name="Google Shape;218;p21"/>
             <p:cNvSpPr/>
             <p:nvPr/>
           </p:nvSpPr>
@@ -22042,7 +20752,7 @@
         </p:sp>
         <p:sp>
           <p:nvSpPr>
-            <p:cNvPr id="220" name="Google Shape;220;p21"/>
+            <p:cNvPr id="219" name="Google Shape;219;p21"/>
             <p:cNvSpPr/>
             <p:nvPr/>
           </p:nvSpPr>
@@ -22111,7 +20821,7 @@
         </p:sp>
         <p:sp>
           <p:nvSpPr>
-            <p:cNvPr id="221" name="Google Shape;221;p21"/>
+            <p:cNvPr id="220" name="Google Shape;220;p21"/>
             <p:cNvSpPr/>
             <p:nvPr/>
           </p:nvSpPr>
@@ -22181,7 +20891,7 @@
       </p:grpSp>
       <p:pic>
         <p:nvPicPr>
-          <p:cNvPr id="222" name="Google Shape;222;p21" title="Screenshot 2026-09-14 at 11.29.33 PM.png"/>
+          <p:cNvPr id="221" name="Google Shape;221;p21" title="Screenshot 2026-09-14 at 11.29.33 PM.png"/>
           <p:cNvPicPr preferRelativeResize="0"/>
           <p:nvPr/>
         </p:nvPicPr>
@@ -22208,7 +20918,7 @@
       </p:pic>
       <p:sp>
         <p:nvSpPr>
-          <p:cNvPr id="223" name="Google Shape;223;p21"/>
+          <p:cNvPr id="222" name="Google Shape;222;p21"/>
           <p:cNvSpPr txBox="1"/>
           <p:nvPr>
             <p:ph type="title"/>
@@ -22249,7 +20959,7 @@
       </p:sp>
       <p:pic>
         <p:nvPicPr>
-          <p:cNvPr id="224" name="Google Shape;224;p21"/>
+          <p:cNvPr id="223" name="Google Shape;223;p21"/>
           <p:cNvPicPr preferRelativeResize="0"/>
           <p:nvPr/>
         </p:nvPicPr>
@@ -22276,7 +20986,7 @@
       </p:pic>
       <p:sp>
         <p:nvSpPr>
-          <p:cNvPr id="225" name="Google Shape;225;p21"/>
+          <p:cNvPr id="224" name="Google Shape;224;p21"/>
           <p:cNvSpPr txBox="1"/>
           <p:nvPr/>
         </p:nvSpPr>
@@ -22333,7 +21043,7 @@
       </p:sp>
       <p:cxnSp>
         <p:nvCxnSpPr>
-          <p:cNvPr id="226" name="Google Shape;226;p21"/>
+          <p:cNvPr id="225" name="Google Shape;225;p21"/>
           <p:cNvCxnSpPr/>
           <p:nvPr/>
         </p:nvCxnSpPr>
@@ -22366,6 +21076,285 @@
 </file>
 
 <file path=ppt/theme/theme1.xml><?xml version="1.0" encoding="utf-8"?>
+<a:theme xmlns:a="http://schemas.openxmlformats.org/drawingml/2006/main" xmlns:r="http://schemas.openxmlformats.org/officeDocument/2006/relationships">
+  <a:themeElements>
+    <a:clrScheme name="Default">
+      <a:dk1>
+        <a:srgbClr val="000000"/>
+      </a:dk1>
+      <a:lt1>
+        <a:srgbClr val="FFFFFF"/>
+      </a:lt1>
+      <a:dk2>
+        <a:srgbClr val="158158"/>
+      </a:dk2>
+      <a:lt2>
+        <a:srgbClr val="F3F3F3"/>
+      </a:lt2>
+      <a:accent1>
+        <a:srgbClr val="058DC7"/>
+      </a:accent1>
+      <a:accent2>
+        <a:srgbClr val="50B432"/>
+      </a:accent2>
+      <a:accent3>
+        <a:srgbClr val="ED561B"/>
+      </a:accent3>
+      <a:accent4>
+        <a:srgbClr val="EDEF00"/>
+      </a:accent4>
+      <a:accent5>
+        <a:srgbClr val="24CBE5"/>
+      </a:accent5>
+      <a:accent6>
+        <a:srgbClr val="64E572"/>
+      </a:accent6>
+      <a:hlink>
+        <a:srgbClr val="2200CC"/>
+      </a:hlink>
+      <a:folHlink>
+        <a:srgbClr val="551A8B"/>
+      </a:folHlink>
+    </a:clrScheme>
+    <a:fontScheme name="Office">
+      <a:majorFont>
+        <a:latin typeface="Arial"/>
+        <a:ea typeface=""/>
+        <a:cs typeface=""/>
+        <a:font script="Jpan" typeface="ＭＳ Ｐゴシック"/>
+        <a:font script="Hang" typeface="맑은 고딕"/>
+        <a:font script="Hans" typeface="宋体"/>
+        <a:font script="Hant" typeface="新細明體"/>
+        <a:font script="Arab" typeface="Times New Roman"/>
+        <a:font script="Hebr" typeface="Times New Roman"/>
+        <a:font script="Thai" typeface="Angsana New"/>
+        <a:font script="Ethi" typeface="Nyala"/>
+        <a:font script="Beng" typeface="Vrinda"/>
+        <a:font script="Gujr" typeface="Shruti"/>
+        <a:font script="Khmr" typeface="MoolBoran"/>
+        <a:font script="Knda" typeface="Tunga"/>
+        <a:font script="Guru" typeface="Raavi"/>
+        <a:font script="Cans" typeface="Euphemia"/>
+        <a:font script="Cher" typeface="Plantagenet Cherokee"/>
+        <a:font script="Yiii" typeface="Microsoft Yi Baiti"/>
+        <a:font script="Tibt" typeface="Microsoft Himalaya"/>
+        <a:font script="Thaa" typeface="MV Boli"/>
+        <a:font script="Deva" typeface="Mangal"/>
+        <a:font script="Telu" typeface="Gautami"/>
+        <a:font script="Taml" typeface="Latha"/>
+        <a:font script="Syrc" typeface="Estrangelo Edessa"/>
+        <a:font script="Orya" typeface="Kalinga"/>
+        <a:font script="Mlym" typeface="Kartika"/>
+        <a:font script="Laoo" typeface="DokChampa"/>
+        <a:font script="Sinh" typeface="Iskoola Pota"/>
+        <a:font script="Mong" typeface="Mongolian Baiti"/>
+        <a:font script="Viet" typeface="Times New Roman"/>
+        <a:font script="Uigh" typeface="Microsoft Uighur"/>
+        <a:font script="Geor" typeface="Sylfaen"/>
+      </a:majorFont>
+      <a:minorFont>
+        <a:latin typeface="Arial"/>
+        <a:ea typeface=""/>
+        <a:cs typeface=""/>
+        <a:font script="Jpan" typeface="ＭＳ Ｐゴシック"/>
+        <a:font script="Hang" typeface="맑은 고딕"/>
+        <a:font script="Hans" typeface="宋体"/>
+        <a:font script="Hant" typeface="新細明體"/>
+        <a:font script="Arab" typeface="Arial"/>
+        <a:font script="Hebr" typeface="Arial"/>
+        <a:font script="Thai" typeface="Cordia New"/>
+        <a:font script="Ethi" typeface="Nyala"/>
+        <a:font script="Beng" typeface="Vrinda"/>
+        <a:font script="Gujr" typeface="Shruti"/>
+        <a:font script="Khmr" typeface="DaunPenh"/>
+        <a:font script="Knda" typeface="Tunga"/>
+        <a:font script="Guru" typeface="Raavi"/>
+        <a:font script="Cans" typeface="Euphemia"/>
+        <a:font script="Cher" typeface="Plantagenet Cherokee"/>
+        <a:font script="Yiii" typeface="Microsoft Yi Baiti"/>
+        <a:font script="Tibt" typeface="Microsoft Himalaya"/>
+        <a:font script="Thaa" typeface="MV Boli"/>
+        <a:font script="Deva" typeface="Mangal"/>
+        <a:font script="Telu" typeface="Gautami"/>
+        <a:font script="Taml" typeface="Latha"/>
+        <a:font script="Syrc" typeface="Estrangelo Edessa"/>
+        <a:font script="Orya" typeface="Kalinga"/>
+        <a:font script="Mlym" typeface="Kartika"/>
+        <a:font script="Laoo" typeface="DokChampa"/>
+        <a:font script="Sinh" typeface="Iskoola Pota"/>
+        <a:font script="Mong" typeface="Mongolian Baiti"/>
+        <a:font script="Viet" typeface="Arial"/>
+        <a:font script="Uigh" typeface="Microsoft Uighur"/>
+        <a:font script="Geor" typeface="Sylfaen"/>
+      </a:minorFont>
+    </a:fontScheme>
+    <a:fmtScheme name="Office">
+      <a:fillStyleLst>
+        <a:solidFill>
+          <a:schemeClr val="phClr"/>
+        </a:solidFill>
+        <a:gradFill rotWithShape="1">
+          <a:gsLst>
+            <a:gs pos="0">
+              <a:schemeClr val="phClr">
+                <a:tint val="50000"/>
+                <a:satMod val="300000"/>
+              </a:schemeClr>
+            </a:gs>
+            <a:gs pos="35000">
+              <a:schemeClr val="phClr">
+                <a:tint val="37000"/>
+                <a:satMod val="300000"/>
+              </a:schemeClr>
+            </a:gs>
+            <a:gs pos="100000">
+              <a:schemeClr val="phClr">
+                <a:tint val="15000"/>
+                <a:satMod val="350000"/>
+              </a:schemeClr>
+            </a:gs>
+          </a:gsLst>
+          <a:lin ang="16200000" scaled="1"/>
+        </a:gradFill>
+        <a:gradFill rotWithShape="1">
+          <a:gsLst>
+            <a:gs pos="0">
+              <a:schemeClr val="phClr">
+                <a:tint val="100000"/>
+                <a:shade val="100000"/>
+                <a:satMod val="130000"/>
+              </a:schemeClr>
+            </a:gs>
+            <a:gs pos="100000">
+              <a:schemeClr val="phClr">
+                <a:tint val="50000"/>
+                <a:shade val="100000"/>
+                <a:satMod val="350000"/>
+              </a:schemeClr>
+            </a:gs>
+          </a:gsLst>
+          <a:lin ang="16200000" scaled="0"/>
+        </a:gradFill>
+      </a:fillStyleLst>
+      <a:lnStyleLst>
+        <a:ln w="9525" cap="flat" cmpd="sng" algn="ctr">
+          <a:solidFill>
+            <a:schemeClr val="phClr">
+              <a:shade val="95000"/>
+              <a:satMod val="105000"/>
+            </a:schemeClr>
+          </a:solidFill>
+          <a:prstDash val="solid"/>
+        </a:ln>
+        <a:ln w="25400" cap="flat" cmpd="sng" algn="ctr">
+          <a:solidFill>
+            <a:schemeClr val="phClr"/>
+          </a:solidFill>
+          <a:prstDash val="solid"/>
+        </a:ln>
+        <a:ln w="38100" cap="flat" cmpd="sng" algn="ctr">
+          <a:solidFill>
+            <a:schemeClr val="phClr"/>
+          </a:solidFill>
+          <a:prstDash val="solid"/>
+        </a:ln>
+      </a:lnStyleLst>
+      <a:effectStyleLst>
+        <a:effectStyle>
+          <a:effectLst>
+            <a:outerShdw blurRad="40000" dist="20000" dir="5400000" rotWithShape="0">
+              <a:srgbClr val="000000">
+                <a:alpha val="38000"/>
+              </a:srgbClr>
+            </a:outerShdw>
+          </a:effectLst>
+        </a:effectStyle>
+        <a:effectStyle>
+          <a:effectLst>
+            <a:outerShdw blurRad="40000" dist="23000" dir="5400000" rotWithShape="0">
+              <a:srgbClr val="000000">
+                <a:alpha val="35000"/>
+              </a:srgbClr>
+            </a:outerShdw>
+          </a:effectLst>
+        </a:effectStyle>
+        <a:effectStyle>
+          <a:effectLst>
+            <a:outerShdw blurRad="40000" dist="23000" dir="5400000" rotWithShape="0">
+              <a:srgbClr val="000000">
+                <a:alpha val="35000"/>
+              </a:srgbClr>
+            </a:outerShdw>
+          </a:effectLst>
+          <a:scene3d>
+            <a:camera prst="orthographicFront">
+              <a:rot lat="0" lon="0" rev="0"/>
+            </a:camera>
+            <a:lightRig rig="threePt" dir="t">
+              <a:rot lat="0" lon="0" rev="1200000"/>
+            </a:lightRig>
+          </a:scene3d>
+          <a:sp3d>
+            <a:bevelT w="63500" h="25400"/>
+          </a:sp3d>
+        </a:effectStyle>
+      </a:effectStyleLst>
+      <a:bgFillStyleLst>
+        <a:solidFill>
+          <a:schemeClr val="phClr"/>
+        </a:solidFill>
+        <a:gradFill rotWithShape="1">
+          <a:gsLst>
+            <a:gs pos="0">
+              <a:schemeClr val="phClr">
+                <a:tint val="40000"/>
+                <a:satMod val="350000"/>
+              </a:schemeClr>
+            </a:gs>
+            <a:gs pos="40000">
+              <a:schemeClr val="phClr">
+                <a:tint val="45000"/>
+                <a:shade val="99000"/>
+                <a:satMod val="350000"/>
+              </a:schemeClr>
+            </a:gs>
+            <a:gs pos="100000">
+              <a:schemeClr val="phClr">
+                <a:shade val="20000"/>
+                <a:satMod val="255000"/>
+              </a:schemeClr>
+            </a:gs>
+          </a:gsLst>
+          <a:path path="circle">
+            <a:fillToRect l="50000" t="-80000" r="50000" b="180000"/>
+          </a:path>
+        </a:gradFill>
+        <a:gradFill rotWithShape="1">
+          <a:gsLst>
+            <a:gs pos="0">
+              <a:schemeClr val="phClr">
+                <a:tint val="80000"/>
+                <a:satMod val="300000"/>
+              </a:schemeClr>
+            </a:gs>
+            <a:gs pos="100000">
+              <a:schemeClr val="phClr">
+                <a:shade val="30000"/>
+                <a:satMod val="200000"/>
+              </a:schemeClr>
+            </a:gs>
+          </a:gsLst>
+          <a:path path="circle">
+            <a:fillToRect l="50000" t="50000" r="50000" b="50000"/>
+          </a:path>
+        </a:gradFill>
+      </a:bgFillStyleLst>
+    </a:fmtScheme>
+  </a:themeElements>
+</a:theme>
+</file>
+
+<file path=ppt/theme/theme2.xml><?xml version="1.0" encoding="utf-8"?>
 <a:theme xmlns:a="http://schemas.openxmlformats.org/drawingml/2006/main" xmlns:r="http://schemas.openxmlformats.org/officeDocument/2006/relationships" name="Simple Light">
   <a:themeElements>
     <a:clrScheme name="Simple Light">
@@ -22642,283 +21631,4 @@
     </a:fmtScheme>
   </a:themeElements>
 </a:theme>
-</file>
-
-<file path=ppt/theme/theme2.xml><?xml version="1.0" encoding="utf-8"?>
-<a:theme xmlns:a="http://schemas.openxmlformats.org/drawingml/2006/main" xmlns:r="http://schemas.openxmlformats.org/officeDocument/2006/relationships">
-  <a:themeElements>
-    <a:clrScheme name="Default">
-      <a:dk1>
-        <a:srgbClr val="000000"/>
-      </a:dk1>
-      <a:lt1>
-        <a:srgbClr val="FFFFFF"/>
-      </a:lt1>
-      <a:dk2>
-        <a:srgbClr val="158158"/>
-      </a:dk2>
-      <a:lt2>
-        <a:srgbClr val="F3F3F3"/>
-      </a:lt2>
-      <a:accent1>
-        <a:srgbClr val="058DC7"/>
-      </a:accent1>
-      <a:accent2>
-        <a:srgbClr val="50B432"/>
-      </a:accent2>
-      <a:accent3>
-        <a:srgbClr val="ED561B"/>
-      </a:accent3>
-      <a:accent4>
-        <a:srgbClr val="EDEF00"/>
-      </a:accent4>
-      <a:accent5>
-        <a:srgbClr val="24CBE5"/>
-      </a:accent5>
-      <a:accent6>
-        <a:srgbClr val="64E572"/>
-      </a:accent6>
-      <a:hlink>
-        <a:srgbClr val="2200CC"/>
-      </a:hlink>
-      <a:folHlink>
-        <a:srgbClr val="551A8B"/>
-      </a:folHlink>
-    </a:clrScheme>
-    <a:fontScheme name="Office">
-      <a:majorFont>
-        <a:latin typeface="Arial"/>
-        <a:ea typeface=""/>
-        <a:cs typeface=""/>
-        <a:font script="Jpan" typeface="ＭＳ Ｐゴシック"/>
-        <a:font script="Hang" typeface="맑은 고딕"/>
-        <a:font script="Hans" typeface="宋体"/>
-        <a:font script="Hant" typeface="新細明體"/>
-        <a:font script="Arab" typeface="Times New Roman"/>
-        <a:font script="Hebr" typeface="Times New Roman"/>
-        <a:font script="Thai" typeface="Angsana New"/>
-        <a:font script="Ethi" typeface="Nyala"/>
-        <a:font script="Beng" typeface="Vrinda"/>
-        <a:font script="Gujr" typeface="Shruti"/>
-        <a:font script="Khmr" typeface="MoolBoran"/>
-        <a:font script="Knda" typeface="Tunga"/>
-        <a:font script="Guru" typeface="Raavi"/>
-        <a:font script="Cans" typeface="Euphemia"/>
-        <a:font script="Cher" typeface="Plantagenet Cherokee"/>
-        <a:font script="Yiii" typeface="Microsoft Yi Baiti"/>
-        <a:font script="Tibt" typeface="Microsoft Himalaya"/>
-        <a:font script="Thaa" typeface="MV Boli"/>
-        <a:font script="Deva" typeface="Mangal"/>
-        <a:font script="Telu" typeface="Gautami"/>
-        <a:font script="Taml" typeface="Latha"/>
-        <a:font script="Syrc" typeface="Estrangelo Edessa"/>
-        <a:font script="Orya" typeface="Kalinga"/>
-        <a:font script="Mlym" typeface="Kartika"/>
-        <a:font script="Laoo" typeface="DokChampa"/>
-        <a:font script="Sinh" typeface="Iskoola Pota"/>
-        <a:font script="Mong" typeface="Mongolian Baiti"/>
-        <a:font script="Viet" typeface="Times New Roman"/>
-        <a:font script="Uigh" typeface="Microsoft Uighur"/>
-        <a:font script="Geor" typeface="Sylfaen"/>
-      </a:majorFont>
-      <a:minorFont>
-        <a:latin typeface="Arial"/>
-        <a:ea typeface=""/>
-        <a:cs typeface=""/>
-        <a:font script="Jpan" typeface="ＭＳ Ｐゴシック"/>
-        <a:font script="Hang" typeface="맑은 고딕"/>
-        <a:font script="Hans" typeface="宋体"/>
-        <a:font script="Hant" typeface="新細明體"/>
-        <a:font script="Arab" typeface="Arial"/>
-        <a:font script="Hebr" typeface="Arial"/>
-        <a:font script="Thai" typeface="Cordia New"/>
-        <a:font script="Ethi" typeface="Nyala"/>
-        <a:font script="Beng" typeface="Vrinda"/>
-        <a:font script="Gujr" typeface="Shruti"/>
-        <a:font script="Khmr" typeface="DaunPenh"/>
-        <a:font script="Knda" typeface="Tunga"/>
-        <a:font script="Guru" typeface="Raavi"/>
-        <a:font script="Cans" typeface="Euphemia"/>
-        <a:font script="Cher" typeface="Plantagenet Cherokee"/>
-        <a:font script="Yiii" typeface="Microsoft Yi Baiti"/>
-        <a:font script="Tibt" typeface="Microsoft Himalaya"/>
-        <a:font script="Thaa" typeface="MV Boli"/>
-        <a:font script="Deva" typeface="Mangal"/>
-        <a:font script="Telu" typeface="Gautami"/>
-        <a:font script="Taml" typeface="Latha"/>
-        <a:font script="Syrc" typeface="Estrangelo Edessa"/>
-        <a:font script="Orya" typeface="Kalinga"/>
-        <a:font script="Mlym" typeface="Kartika"/>
-        <a:font script="Laoo" typeface="DokChampa"/>
-        <a:font script="Sinh" typeface="Iskoola Pota"/>
-        <a:font script="Mong" typeface="Mongolian Baiti"/>
-        <a:font script="Viet" typeface="Arial"/>
-        <a:font script="Uigh" typeface="Microsoft Uighur"/>
-        <a:font script="Geor" typeface="Sylfaen"/>
-      </a:minorFont>
-    </a:fontScheme>
-    <a:fmtScheme name="Office">
-      <a:fillStyleLst>
-        <a:solidFill>
-          <a:schemeClr val="phClr"/>
-        </a:solidFill>
-        <a:gradFill rotWithShape="1">
-          <a:gsLst>
-            <a:gs pos="0">
-              <a:schemeClr val="phClr">
-                <a:tint val="50000"/>
-                <a:satMod val="300000"/>
-              </a:schemeClr>
-            </a:gs>
-            <a:gs pos="35000">
-              <a:schemeClr val="phClr">
-                <a:tint val="37000"/>
-                <a:satMod val="300000"/>
-              </a:schemeClr>
-            </a:gs>
-            <a:gs pos="100000">
-              <a:schemeClr val="phClr">
-                <a:tint val="15000"/>
-                <a:satMod val="350000"/>
-              </a:schemeClr>
-            </a:gs>
-          </a:gsLst>
-          <a:lin ang="16200000" scaled="1"/>
-        </a:gradFill>
-        <a:gradFill rotWithShape="1">
-          <a:gsLst>
-            <a:gs pos="0">
-              <a:schemeClr val="phClr">
-                <a:tint val="100000"/>
-                <a:shade val="100000"/>
-                <a:satMod val="130000"/>
-              </a:schemeClr>
-            </a:gs>
-            <a:gs pos="100000">
-              <a:schemeClr val="phClr">
-                <a:tint val="50000"/>
-                <a:shade val="100000"/>
-                <a:satMod val="350000"/>
-              </a:schemeClr>
-            </a:gs>
-          </a:gsLst>
-          <a:lin ang="16200000" scaled="0"/>
-        </a:gradFill>
-      </a:fillStyleLst>
-      <a:lnStyleLst>
-        <a:ln w="9525" cap="flat" cmpd="sng" algn="ctr">
-          <a:solidFill>
-            <a:schemeClr val="phClr">
-              <a:shade val="95000"/>
-              <a:satMod val="105000"/>
-            </a:schemeClr>
-          </a:solidFill>
-          <a:prstDash val="solid"/>
-        </a:ln>
-        <a:ln w="25400" cap="flat" cmpd="sng" algn="ctr">
-          <a:solidFill>
-            <a:schemeClr val="phClr"/>
-          </a:solidFill>
-          <a:prstDash val="solid"/>
-        </a:ln>
-        <a:ln w="38100" cap="flat" cmpd="sng" algn="ctr">
-          <a:solidFill>
-            <a:schemeClr val="phClr"/>
-          </a:solidFill>
-          <a:prstDash val="solid"/>
-        </a:ln>
-      </a:lnStyleLst>
-      <a:effectStyleLst>
-        <a:effectStyle>
-          <a:effectLst>
-            <a:outerShdw blurRad="40000" dist="20000" dir="5400000" rotWithShape="0">
-              <a:srgbClr val="000000">
-                <a:alpha val="38000"/>
-              </a:srgbClr>
-            </a:outerShdw>
-          </a:effectLst>
-        </a:effectStyle>
-        <a:effectStyle>
-          <a:effectLst>
-            <a:outerShdw blurRad="40000" dist="23000" dir="5400000" rotWithShape="0">
-              <a:srgbClr val="000000">
-                <a:alpha val="35000"/>
-              </a:srgbClr>
-            </a:outerShdw>
-          </a:effectLst>
-        </a:effectStyle>
-        <a:effectStyle>
-          <a:effectLst>
-            <a:outerShdw blurRad="40000" dist="23000" dir="5400000" rotWithShape="0">
-              <a:srgbClr val="000000">
-                <a:alpha val="35000"/>
-              </a:srgbClr>
-            </a:outerShdw>
-          </a:effectLst>
-          <a:scene3d>
-            <a:camera prst="orthographicFront">
-              <a:rot lat="0" lon="0" rev="0"/>
-            </a:camera>
-            <a:lightRig rig="threePt" dir="t">
-              <a:rot lat="0" lon="0" rev="1200000"/>
-            </a:lightRig>
-          </a:scene3d>
-          <a:sp3d>
-            <a:bevelT w="63500" h="25400"/>
-          </a:sp3d>
-        </a:effectStyle>
-      </a:effectStyleLst>
-      <a:bgFillStyleLst>
-        <a:solidFill>
-          <a:schemeClr val="phClr"/>
-        </a:solidFill>
-        <a:gradFill rotWithShape="1">
-          <a:gsLst>
-            <a:gs pos="0">
-              <a:schemeClr val="phClr">
-                <a:tint val="40000"/>
-                <a:satMod val="350000"/>
-              </a:schemeClr>
-            </a:gs>
-            <a:gs pos="40000">
-              <a:schemeClr val="phClr">
-                <a:tint val="45000"/>
-                <a:shade val="99000"/>
-                <a:satMod val="350000"/>
-              </a:schemeClr>
-            </a:gs>
-            <a:gs pos="100000">
-              <a:schemeClr val="phClr">
-                <a:shade val="20000"/>
-                <a:satMod val="255000"/>
-              </a:schemeClr>
-            </a:gs>
-          </a:gsLst>
-          <a:path path="circle">
-            <a:fillToRect l="50000" t="-80000" r="50000" b="180000"/>
-          </a:path>
-        </a:gradFill>
-        <a:gradFill rotWithShape="1">
-          <a:gsLst>
-            <a:gs pos="0">
-              <a:schemeClr val="phClr">
-                <a:tint val="80000"/>
-                <a:satMod val="300000"/>
-              </a:schemeClr>
-            </a:gs>
-            <a:gs pos="100000">
-              <a:schemeClr val="phClr">
-                <a:shade val="30000"/>
-                <a:satMod val="200000"/>
-              </a:schemeClr>
-            </a:gs>
-          </a:gsLst>
-          <a:path path="circle">
-            <a:fillToRect l="50000" t="50000" r="50000" b="50000"/>
-          </a:path>
-        </a:gradFill>
-      </a:bgFillStyleLst>
-    </a:fmtScheme>
-  </a:themeElements>
-</a:theme>
 </file>